--- a/04_Comax/04_Comax_Corrige.pptx
+++ b/04_Comax/04_Comax_Corrige.pptx
@@ -384,7 +384,7 @@
           <a:p>
             <a:fld id="{D7F135F6-2A09-4FDD-9ECA-096E230CA0FA}" type="datetimeFigureOut">
               <a:rPr lang="fr-FR" smtClean="0"/>
-              <a:t>12/01/2026</a:t>
+              <a:t>05/04/2026</a:t>
             </a:fld>
             <a:endParaRPr lang="fr-FR"/>
           </a:p>
@@ -589,7 +589,7 @@
           <a:p>
             <a:fld id="{D7F135F6-2A09-4FDD-9ECA-096E230CA0FA}" type="datetimeFigureOut">
               <a:rPr lang="fr-FR" smtClean="0"/>
-              <a:t>12/01/2026</a:t>
+              <a:t>05/04/2026</a:t>
             </a:fld>
             <a:endParaRPr lang="fr-FR"/>
           </a:p>
@@ -845,7 +845,7 @@
           <a:p>
             <a:fld id="{D7F135F6-2A09-4FDD-9ECA-096E230CA0FA}" type="datetimeFigureOut">
               <a:rPr lang="fr-FR" smtClean="0"/>
-              <a:t>12/01/2026</a:t>
+              <a:t>05/04/2026</a:t>
             </a:fld>
             <a:endParaRPr lang="fr-FR"/>
           </a:p>
@@ -1051,7 +1051,7 @@
           <a:p>
             <a:fld id="{D7F135F6-2A09-4FDD-9ECA-096E230CA0FA}" type="datetimeFigureOut">
               <a:rPr lang="fr-FR" smtClean="0"/>
-              <a:t>12/01/2026</a:t>
+              <a:t>05/04/2026</a:t>
             </a:fld>
             <a:endParaRPr lang="fr-FR"/>
           </a:p>
@@ -1413,7 +1413,7 @@
           <a:p>
             <a:fld id="{D7F135F6-2A09-4FDD-9ECA-096E230CA0FA}" type="datetimeFigureOut">
               <a:rPr lang="fr-FR" smtClean="0"/>
-              <a:t>12/01/2026</a:t>
+              <a:t>05/04/2026</a:t>
             </a:fld>
             <a:endParaRPr lang="fr-FR"/>
           </a:p>
@@ -1688,7 +1688,7 @@
           <a:p>
             <a:fld id="{D7F135F6-2A09-4FDD-9ECA-096E230CA0FA}" type="datetimeFigureOut">
               <a:rPr lang="fr-FR" smtClean="0"/>
-              <a:t>12/01/2026</a:t>
+              <a:t>05/04/2026</a:t>
             </a:fld>
             <a:endParaRPr lang="fr-FR"/>
           </a:p>
@@ -2067,7 +2067,7 @@
           <a:p>
             <a:fld id="{D7F135F6-2A09-4FDD-9ECA-096E230CA0FA}" type="datetimeFigureOut">
               <a:rPr lang="fr-FR" smtClean="0"/>
-              <a:t>12/01/2026</a:t>
+              <a:t>05/04/2026</a:t>
             </a:fld>
             <a:endParaRPr lang="fr-FR"/>
           </a:p>
@@ -2185,7 +2185,7 @@
           <a:p>
             <a:fld id="{D7F135F6-2A09-4FDD-9ECA-096E230CA0FA}" type="datetimeFigureOut">
               <a:rPr lang="fr-FR" smtClean="0"/>
-              <a:t>12/01/2026</a:t>
+              <a:t>05/04/2026</a:t>
             </a:fld>
             <a:endParaRPr lang="fr-FR"/>
           </a:p>
@@ -2359,7 +2359,7 @@
           <a:p>
             <a:fld id="{D7F135F6-2A09-4FDD-9ECA-096E230CA0FA}" type="datetimeFigureOut">
               <a:rPr lang="fr-FR" smtClean="0"/>
-              <a:t>12/01/2026</a:t>
+              <a:t>05/04/2026</a:t>
             </a:fld>
             <a:endParaRPr lang="fr-FR"/>
           </a:p>
@@ -2716,7 +2716,7 @@
           <a:p>
             <a:fld id="{D7F135F6-2A09-4FDD-9ECA-096E230CA0FA}" type="datetimeFigureOut">
               <a:rPr lang="fr-FR" smtClean="0"/>
-              <a:t>12/01/2026</a:t>
+              <a:t>05/04/2026</a:t>
             </a:fld>
             <a:endParaRPr lang="fr-FR"/>
           </a:p>
@@ -3101,7 +3101,7 @@
           <a:p>
             <a:fld id="{D7F135F6-2A09-4FDD-9ECA-096E230CA0FA}" type="datetimeFigureOut">
               <a:rPr lang="fr-FR" smtClean="0"/>
-              <a:t>12/01/2026</a:t>
+              <a:t>05/04/2026</a:t>
             </a:fld>
             <a:endParaRPr lang="fr-FR"/>
           </a:p>
@@ -3405,7 +3405,7 @@
           <a:p>
             <a:fld id="{D7F135F6-2A09-4FDD-9ECA-096E230CA0FA}" type="datetimeFigureOut">
               <a:rPr lang="fr-FR" smtClean="0"/>
-              <a:t>12/01/2026</a:t>
+              <a:t>05/04/2026</a:t>
             </a:fld>
             <a:endParaRPr lang="fr-FR" dirty="0"/>
           </a:p>
@@ -4375,14 +4375,7 @@
                         <a:latin typeface="Cambria Math" panose="02040503050406030204" pitchFamily="18" charset="0"/>
                         <a:ea typeface="Cambria Math" panose="02040503050406030204" pitchFamily="18" charset="0"/>
                       </a:rPr>
-                      <m:t>=</m:t>
-                    </m:r>
-                    <m:r>
-                      <a:rPr lang="fr-FR" b="0" i="1" smtClean="0">
-                        <a:latin typeface="Cambria Math" panose="02040503050406030204" pitchFamily="18" charset="0"/>
-                        <a:ea typeface="Cambria Math" panose="02040503050406030204" pitchFamily="18" charset="0"/>
-                      </a:rPr>
-                      <m:t>0</m:t>
+                      <m:t>=0</m:t>
                     </m:r>
                   </m:oMath>
                 </a14:m>
@@ -4473,14 +4466,7 @@
                             <a:latin typeface="Cambria Math" panose="02040503050406030204" pitchFamily="18" charset="0"/>
                             <a:ea typeface="Cambria Math" panose="02040503050406030204" pitchFamily="18" charset="0"/>
                           </a:rPr>
-                          <m:t>0</m:t>
-                        </m:r>
-                        <m:r>
-                          <a:rPr lang="fr-FR" b="0" i="1" smtClean="0">
-                            <a:latin typeface="Cambria Math" panose="02040503050406030204" pitchFamily="18" charset="0"/>
-                            <a:ea typeface="Cambria Math" panose="02040503050406030204" pitchFamily="18" charset="0"/>
-                          </a:rPr>
-                          <m:t> </m:t>
+                          <m:t>0 </m:t>
                         </m:r>
                       </m:e>
                     </m:d>
@@ -4631,14 +4617,7 @@
                             <a:latin typeface="Cambria Math" panose="02040503050406030204" pitchFamily="18" charset="0"/>
                             <a:ea typeface="Cambria Math" panose="02040503050406030204" pitchFamily="18" charset="0"/>
                           </a:rPr>
-                          <m:t>0</m:t>
-                        </m:r>
-                        <m:r>
-                          <a:rPr lang="fr-FR" b="0" i="1" smtClean="0">
-                            <a:latin typeface="Cambria Math" panose="02040503050406030204" pitchFamily="18" charset="0"/>
-                            <a:ea typeface="Cambria Math" panose="02040503050406030204" pitchFamily="18" charset="0"/>
-                          </a:rPr>
-                          <m:t> </m:t>
+                          <m:t>0 </m:t>
                         </m:r>
                       </m:e>
                     </m:d>
@@ -6120,14 +6099,7 @@
                           <a:latin typeface="Cambria Math" panose="02040503050406030204" pitchFamily="18" charset="0"/>
                           <a:ea typeface="Cambria Math" panose="02040503050406030204" pitchFamily="18" charset="0"/>
                         </a:rPr>
-                        <m:t>=</m:t>
-                      </m:r>
-                      <m:r>
-                        <a:rPr lang="fr-FR" b="0" i="1" smtClean="0">
-                          <a:latin typeface="Cambria Math" panose="02040503050406030204" pitchFamily="18" charset="0"/>
-                          <a:ea typeface="Cambria Math" panose="02040503050406030204" pitchFamily="18" charset="0"/>
-                        </a:rPr>
-                        <m:t>0</m:t>
+                        <m:t>=0</m:t>
                       </m:r>
                     </m:oMath>
                   </m:oMathPara>
@@ -21080,8 +21052,8 @@
           </p:sp>
         </mc:Fallback>
       </mc:AlternateContent>
-      <mc:AlternateContent xmlns:mc="http://schemas.openxmlformats.org/markup-compatibility/2006">
-        <mc:Choice xmlns:a14="http://schemas.microsoft.com/office/drawing/2010/main" Requires="a14">
+      <mc:AlternateContent xmlns:mc="http://schemas.openxmlformats.org/markup-compatibility/2006" xmlns:a14="http://schemas.microsoft.com/office/drawing/2010/main">
+        <mc:Choice Requires="a14">
           <p:sp>
             <p:nvSpPr>
               <p:cNvPr id="65" name="ZoneTexte 64">
@@ -21192,7 +21164,7 @@
             </p:txBody>
           </p:sp>
         </mc:Choice>
-        <mc:Fallback>
+        <mc:Fallback xmlns="">
           <p:sp>
             <p:nvSpPr>
               <p:cNvPr id="65" name="ZoneTexte 64">
@@ -21532,8 +21504,8 @@
           </p:spPr>
         </p:pic>
       </p:grpSp>
-      <mc:AlternateContent xmlns:mc="http://schemas.openxmlformats.org/markup-compatibility/2006">
-        <mc:Choice xmlns:a14="http://schemas.microsoft.com/office/drawing/2010/main" Requires="a14">
+      <mc:AlternateContent xmlns:mc="http://schemas.openxmlformats.org/markup-compatibility/2006" xmlns:a14="http://schemas.microsoft.com/office/drawing/2010/main">
+        <mc:Choice Requires="a14">
           <p:sp>
             <p:nvSpPr>
               <p:cNvPr id="2" name="ZoneTexte 1">
@@ -21624,7 +21596,7 @@
             </p:txBody>
           </p:sp>
         </mc:Choice>
-        <mc:Fallback>
+        <mc:Fallback xmlns="">
           <p:sp>
             <p:nvSpPr>
               <p:cNvPr id="2" name="ZoneTexte 1">
@@ -23484,10 +23456,10 @@
       </p:sp>
       <p:pic>
         <p:nvPicPr>
-          <p:cNvPr id="3" name="Image 2">
+          <p:cNvPr id="5" name="Image 4">
             <a:extLst>
               <a:ext uri="{FF2B5EF4-FFF2-40B4-BE49-F238E27FC236}">
-                <a16:creationId xmlns:a16="http://schemas.microsoft.com/office/drawing/2014/main" id="{27640AFE-9DB9-BB25-832F-0C7F578A3CC9}"/>
+                <a16:creationId xmlns:a16="http://schemas.microsoft.com/office/drawing/2014/main" id="{96F88BB6-FC05-3F07-5A2E-885EF677E6A1}"/>
               </a:ext>
             </a:extLst>
           </p:cNvPr>
@@ -23504,8 +23476,8 @@
         </p:blipFill>
         <p:spPr>
           <a:xfrm>
-            <a:off x="143209" y="1232193"/>
-            <a:ext cx="11905582" cy="4466639"/>
+            <a:off x="337920" y="1268731"/>
+            <a:ext cx="11516160" cy="4320538"/>
           </a:xfrm>
           <a:prstGeom prst="rect">
             <a:avLst/>
@@ -24009,7 +23981,19 @@
                           <a:rPr lang="fr-FR" b="0" i="1" smtClean="0">
                             <a:latin typeface="Cambria Math" panose="02040503050406030204" pitchFamily="18" charset="0"/>
                           </a:rPr>
-                          <m:t>15,88</m:t>
+                          <m:t>15</m:t>
+                        </m:r>
+                        <m:r>
+                          <a:rPr lang="fr-FR" b="0" i="1" smtClean="0">
+                            <a:latin typeface="Cambria Math" panose="02040503050406030204" pitchFamily="18" charset="0"/>
+                          </a:rPr>
+                          <m:t>,</m:t>
+                        </m:r>
+                        <m:r>
+                          <a:rPr lang="fr-FR" b="0" i="1" smtClean="0">
+                            <a:latin typeface="Cambria Math" panose="02040503050406030204" pitchFamily="18" charset="0"/>
+                          </a:rPr>
+                          <m:t>88</m:t>
                         </m:r>
                       </m:den>
                     </m:f>
@@ -24017,7 +24001,31 @@
                       <a:rPr lang="fr-FR" b="0" i="1" smtClean="0">
                         <a:latin typeface="Cambria Math" panose="02040503050406030204" pitchFamily="18" charset="0"/>
                       </a:rPr>
-                      <m:t>×17,2 </m:t>
+                      <m:t>×</m:t>
+                    </m:r>
+                    <m:r>
+                      <a:rPr lang="fr-FR" b="0" i="1" smtClean="0">
+                        <a:latin typeface="Cambria Math" panose="02040503050406030204" pitchFamily="18" charset="0"/>
+                      </a:rPr>
+                      <m:t>17</m:t>
+                    </m:r>
+                    <m:r>
+                      <a:rPr lang="fr-FR" b="0" i="1" smtClean="0">
+                        <a:latin typeface="Cambria Math" panose="02040503050406030204" pitchFamily="18" charset="0"/>
+                      </a:rPr>
+                      <m:t>,</m:t>
+                    </m:r>
+                    <m:r>
+                      <a:rPr lang="fr-FR" b="0" i="1" smtClean="0">
+                        <a:latin typeface="Cambria Math" panose="02040503050406030204" pitchFamily="18" charset="0"/>
+                      </a:rPr>
+                      <m:t>2</m:t>
+                    </m:r>
+                    <m:r>
+                      <a:rPr lang="fr-FR" b="0" i="1" smtClean="0">
+                        <a:latin typeface="Cambria Math" panose="02040503050406030204" pitchFamily="18" charset="0"/>
+                      </a:rPr>
+                      <m:t> </m:t>
                     </m:r>
                   </m:oMath>
                 </a14:m>
@@ -24308,7 +24316,19 @@
                           <a:rPr lang="fr-FR" b="0" i="1" smtClean="0">
                             <a:latin typeface="Cambria Math" panose="02040503050406030204" pitchFamily="18" charset="0"/>
                           </a:rPr>
-                          <m:t>15,88</m:t>
+                          <m:t>15</m:t>
+                        </m:r>
+                        <m:r>
+                          <a:rPr lang="fr-FR" b="0" i="1" smtClean="0">
+                            <a:latin typeface="Cambria Math" panose="02040503050406030204" pitchFamily="18" charset="0"/>
+                          </a:rPr>
+                          <m:t>,</m:t>
+                        </m:r>
+                        <m:r>
+                          <a:rPr lang="fr-FR" b="0" i="1" smtClean="0">
+                            <a:latin typeface="Cambria Math" panose="02040503050406030204" pitchFamily="18" charset="0"/>
+                          </a:rPr>
+                          <m:t>88</m:t>
                         </m:r>
                       </m:num>
                       <m:den>
@@ -24316,7 +24336,25 @@
                           <a:rPr lang="fr-FR" b="0" i="1" smtClean="0">
                             <a:latin typeface="Cambria Math" panose="02040503050406030204" pitchFamily="18" charset="0"/>
                           </a:rPr>
-                          <m:t>17,2×</m:t>
+                          <m:t>17</m:t>
+                        </m:r>
+                        <m:r>
+                          <a:rPr lang="fr-FR" b="0" i="1" smtClean="0">
+                            <a:latin typeface="Cambria Math" panose="02040503050406030204" pitchFamily="18" charset="0"/>
+                          </a:rPr>
+                          <m:t>,</m:t>
+                        </m:r>
+                        <m:r>
+                          <a:rPr lang="fr-FR" b="0" i="1" smtClean="0">
+                            <a:latin typeface="Cambria Math" panose="02040503050406030204" pitchFamily="18" charset="0"/>
+                          </a:rPr>
+                          <m:t>2</m:t>
+                        </m:r>
+                        <m:r>
+                          <a:rPr lang="fr-FR" b="0" i="1" smtClean="0">
+                            <a:latin typeface="Cambria Math" panose="02040503050406030204" pitchFamily="18" charset="0"/>
+                          </a:rPr>
+                          <m:t>×</m:t>
                         </m:r>
                         <m:sSup>
                           <m:sSupPr>
@@ -24339,7 +24377,13 @@
                               <a:rPr lang="fr-FR" b="0" i="1" smtClean="0">
                                 <a:latin typeface="Cambria Math" panose="02040503050406030204" pitchFamily="18" charset="0"/>
                               </a:rPr>
-                              <m:t>−3</m:t>
+                              <m:t>−</m:t>
+                            </m:r>
+                            <m:r>
+                              <a:rPr lang="fr-FR" b="0" i="1" smtClean="0">
+                                <a:latin typeface="Cambria Math" panose="02040503050406030204" pitchFamily="18" charset="0"/>
+                              </a:rPr>
+                              <m:t>3</m:t>
                             </m:r>
                           </m:sup>
                         </m:sSup>

--- a/04_Comax/04_Comax_Corrige.pptx
+++ b/04_Comax/04_Comax_Corrige.pptx
@@ -9,21 +9,23 @@
     <p:sldId id="265" r:id="rId3"/>
     <p:sldId id="266" r:id="rId4"/>
     <p:sldId id="267" r:id="rId5"/>
-    <p:sldId id="279" r:id="rId6"/>
-    <p:sldId id="269" r:id="rId7"/>
-    <p:sldId id="282" r:id="rId8"/>
-    <p:sldId id="283" r:id="rId9"/>
-    <p:sldId id="281" r:id="rId10"/>
-    <p:sldId id="268" r:id="rId11"/>
-    <p:sldId id="270" r:id="rId12"/>
-    <p:sldId id="272" r:id="rId13"/>
-    <p:sldId id="271" r:id="rId14"/>
-    <p:sldId id="278" r:id="rId15"/>
-    <p:sldId id="274" r:id="rId16"/>
-    <p:sldId id="275" r:id="rId17"/>
-    <p:sldId id="276" r:id="rId18"/>
-    <p:sldId id="277" r:id="rId19"/>
-    <p:sldId id="280" r:id="rId20"/>
+    <p:sldId id="285" r:id="rId6"/>
+    <p:sldId id="284" r:id="rId7"/>
+    <p:sldId id="279" r:id="rId8"/>
+    <p:sldId id="269" r:id="rId9"/>
+    <p:sldId id="282" r:id="rId10"/>
+    <p:sldId id="283" r:id="rId11"/>
+    <p:sldId id="281" r:id="rId12"/>
+    <p:sldId id="268" r:id="rId13"/>
+    <p:sldId id="270" r:id="rId14"/>
+    <p:sldId id="272" r:id="rId15"/>
+    <p:sldId id="271" r:id="rId16"/>
+    <p:sldId id="278" r:id="rId17"/>
+    <p:sldId id="274" r:id="rId18"/>
+    <p:sldId id="275" r:id="rId19"/>
+    <p:sldId id="276" r:id="rId20"/>
+    <p:sldId id="277" r:id="rId21"/>
+    <p:sldId id="280" r:id="rId22"/>
   </p:sldIdLst>
   <p:sldSz cx="12192000" cy="6858000"/>
   <p:notesSz cx="6858000" cy="9144000"/>
@@ -384,7 +386,7 @@
           <a:p>
             <a:fld id="{D7F135F6-2A09-4FDD-9ECA-096E230CA0FA}" type="datetimeFigureOut">
               <a:rPr lang="fr-FR" smtClean="0"/>
-              <a:t>05/04/2026</a:t>
+              <a:t>28/05/2026</a:t>
             </a:fld>
             <a:endParaRPr lang="fr-FR"/>
           </a:p>
@@ -589,7 +591,7 @@
           <a:p>
             <a:fld id="{D7F135F6-2A09-4FDD-9ECA-096E230CA0FA}" type="datetimeFigureOut">
               <a:rPr lang="fr-FR" smtClean="0"/>
-              <a:t>05/04/2026</a:t>
+              <a:t>28/05/2026</a:t>
             </a:fld>
             <a:endParaRPr lang="fr-FR"/>
           </a:p>
@@ -845,7 +847,7 @@
           <a:p>
             <a:fld id="{D7F135F6-2A09-4FDD-9ECA-096E230CA0FA}" type="datetimeFigureOut">
               <a:rPr lang="fr-FR" smtClean="0"/>
-              <a:t>05/04/2026</a:t>
+              <a:t>28/05/2026</a:t>
             </a:fld>
             <a:endParaRPr lang="fr-FR"/>
           </a:p>
@@ -1051,7 +1053,7 @@
           <a:p>
             <a:fld id="{D7F135F6-2A09-4FDD-9ECA-096E230CA0FA}" type="datetimeFigureOut">
               <a:rPr lang="fr-FR" smtClean="0"/>
-              <a:t>05/04/2026</a:t>
+              <a:t>28/05/2026</a:t>
             </a:fld>
             <a:endParaRPr lang="fr-FR"/>
           </a:p>
@@ -1193,6 +1195,13 @@
             <a:schemeClr val="lt1"/>
           </a:fontRef>
         </p:style>
+        <p:txBody>
+          <a:bodyPr/>
+          <a:lstStyle/>
+          <a:p>
+            <a:endParaRPr lang="fr-FR"/>
+          </a:p>
+        </p:txBody>
       </p:sp>
       <p:sp>
         <p:nvSpPr>
@@ -1231,6 +1240,13 @@
             <a:schemeClr val="lt1"/>
           </a:fontRef>
         </p:style>
+        <p:txBody>
+          <a:bodyPr/>
+          <a:lstStyle/>
+          <a:p>
+            <a:endParaRPr lang="fr-FR"/>
+          </a:p>
+        </p:txBody>
       </p:sp>
       <p:sp>
         <p:nvSpPr>
@@ -1413,7 +1429,7 @@
           <a:p>
             <a:fld id="{D7F135F6-2A09-4FDD-9ECA-096E230CA0FA}" type="datetimeFigureOut">
               <a:rPr lang="fr-FR" smtClean="0"/>
-              <a:t>05/04/2026</a:t>
+              <a:t>28/05/2026</a:t>
             </a:fld>
             <a:endParaRPr lang="fr-FR"/>
           </a:p>
@@ -1688,7 +1704,7 @@
           <a:p>
             <a:fld id="{D7F135F6-2A09-4FDD-9ECA-096E230CA0FA}" type="datetimeFigureOut">
               <a:rPr lang="fr-FR" smtClean="0"/>
-              <a:t>05/04/2026</a:t>
+              <a:t>28/05/2026</a:t>
             </a:fld>
             <a:endParaRPr lang="fr-FR"/>
           </a:p>
@@ -2067,7 +2083,7 @@
           <a:p>
             <a:fld id="{D7F135F6-2A09-4FDD-9ECA-096E230CA0FA}" type="datetimeFigureOut">
               <a:rPr lang="fr-FR" smtClean="0"/>
-              <a:t>05/04/2026</a:t>
+              <a:t>28/05/2026</a:t>
             </a:fld>
             <a:endParaRPr lang="fr-FR"/>
           </a:p>
@@ -2185,7 +2201,7 @@
           <a:p>
             <a:fld id="{D7F135F6-2A09-4FDD-9ECA-096E230CA0FA}" type="datetimeFigureOut">
               <a:rPr lang="fr-FR" smtClean="0"/>
-              <a:t>05/04/2026</a:t>
+              <a:t>28/05/2026</a:t>
             </a:fld>
             <a:endParaRPr lang="fr-FR"/>
           </a:p>
@@ -2359,7 +2375,7 @@
           <a:p>
             <a:fld id="{D7F135F6-2A09-4FDD-9ECA-096E230CA0FA}" type="datetimeFigureOut">
               <a:rPr lang="fr-FR" smtClean="0"/>
-              <a:t>05/04/2026</a:t>
+              <a:t>28/05/2026</a:t>
             </a:fld>
             <a:endParaRPr lang="fr-FR"/>
           </a:p>
@@ -2716,7 +2732,7 @@
           <a:p>
             <a:fld id="{D7F135F6-2A09-4FDD-9ECA-096E230CA0FA}" type="datetimeFigureOut">
               <a:rPr lang="fr-FR" smtClean="0"/>
-              <a:t>05/04/2026</a:t>
+              <a:t>28/05/2026</a:t>
             </a:fld>
             <a:endParaRPr lang="fr-FR"/>
           </a:p>
@@ -3101,7 +3117,7 @@
           <a:p>
             <a:fld id="{D7F135F6-2A09-4FDD-9ECA-096E230CA0FA}" type="datetimeFigureOut">
               <a:rPr lang="fr-FR" smtClean="0"/>
-              <a:t>05/04/2026</a:t>
+              <a:t>28/05/2026</a:t>
             </a:fld>
             <a:endParaRPr lang="fr-FR"/>
           </a:p>
@@ -3405,7 +3421,7 @@
           <a:p>
             <a:fld id="{D7F135F6-2A09-4FDD-9ECA-096E230CA0FA}" type="datetimeFigureOut">
               <a:rPr lang="fr-FR" smtClean="0"/>
-              <a:t>05/04/2026</a:t>
+              <a:t>28/05/2026</a:t>
             </a:fld>
             <a:endParaRPr lang="fr-FR" dirty="0"/>
           </a:p>
@@ -4027,6 +4043,737 @@
   <p:cSld>
     <p:spTree>
       <p:nvGrpSpPr>
+        <p:cNvPr id="1" name="">
+          <a:extLst>
+            <a:ext uri="{FF2B5EF4-FFF2-40B4-BE49-F238E27FC236}">
+              <a16:creationId xmlns:a16="http://schemas.microsoft.com/office/drawing/2014/main" id="{7495F8D0-37ED-5538-AD49-135051531F6B}"/>
+            </a:ext>
+          </a:extLst>
+        </p:cNvPr>
+        <p:cNvGrpSpPr/>
+        <p:nvPr/>
+      </p:nvGrpSpPr>
+      <p:grpSpPr>
+        <a:xfrm>
+          <a:off x="0" y="0"/>
+          <a:ext cx="0" cy="0"/>
+          <a:chOff x="0" y="0"/>
+          <a:chExt cx="0" cy="0"/>
+        </a:xfrm>
+      </p:grpSpPr>
+      <p:sp>
+        <p:nvSpPr>
+          <p:cNvPr id="2" name="Titre 1">
+            <a:extLst>
+              <a:ext uri="{FF2B5EF4-FFF2-40B4-BE49-F238E27FC236}">
+                <a16:creationId xmlns:a16="http://schemas.microsoft.com/office/drawing/2014/main" id="{0526232B-877C-6F62-135A-9F5B3A4D1056}"/>
+              </a:ext>
+            </a:extLst>
+          </p:cNvPr>
+          <p:cNvSpPr>
+            <a:spLocks noGrp="1"/>
+          </p:cNvSpPr>
+          <p:nvPr>
+            <p:ph type="title"/>
+          </p:nvPr>
+        </p:nvSpPr>
+        <p:spPr/>
+        <p:txBody>
+          <a:bodyPr/>
+          <a:lstStyle/>
+          <a:p>
+            <a:r>
+              <a:rPr lang="fr-FR" dirty="0"/>
+              <a:t>Loi entrée sortie en effort</a:t>
+            </a:r>
+          </a:p>
+        </p:txBody>
+      </p:sp>
+      <mc:AlternateContent xmlns:mc="http://schemas.openxmlformats.org/markup-compatibility/2006" xmlns:a14="http://schemas.microsoft.com/office/drawing/2010/main">
+        <mc:Choice Requires="a14">
+          <p:sp>
+            <p:nvSpPr>
+              <p:cNvPr id="3" name="Espace réservé du contenu 2">
+                <a:extLst>
+                  <a:ext uri="{FF2B5EF4-FFF2-40B4-BE49-F238E27FC236}">
+                    <a16:creationId xmlns:a16="http://schemas.microsoft.com/office/drawing/2014/main" id="{1D19B2D4-77DE-6731-B46A-F7DF203E51CF}"/>
+                  </a:ext>
+                </a:extLst>
+              </p:cNvPr>
+              <p:cNvSpPr>
+                <a:spLocks noGrp="1"/>
+              </p:cNvSpPr>
+              <p:nvPr>
+                <p:ph idx="1"/>
+              </p:nvPr>
+            </p:nvSpPr>
+            <p:spPr/>
+            <p:txBody>
+              <a:bodyPr/>
+              <a:lstStyle/>
+              <a:p>
+                <a:r>
+                  <a:rPr lang="fr-FR" dirty="0"/>
+                  <a:t> Rapport de réduction du réducteur : 15,88</a:t>
+                </a:r>
+              </a:p>
+              <a:p>
+                <a:r>
+                  <a:rPr lang="fr-FR" dirty="0"/>
+                  <a:t> Transmetteur : 108,2 mm/tr soit 17,22 mm/rad</a:t>
+                </a:r>
+              </a:p>
+              <a:p>
+                <a:r>
+                  <a:rPr lang="fr-FR" dirty="0"/>
+                  <a:t>On a donc </a:t>
+                </a:r>
+                <a14:m>
+                  <m:oMath xmlns:m="http://schemas.openxmlformats.org/officeDocument/2006/math">
+                    <m:r>
+                      <a:rPr lang="fr-FR" b="0" i="1" smtClean="0">
+                        <a:latin typeface="Cambria Math" panose="02040503050406030204" pitchFamily="18" charset="0"/>
+                      </a:rPr>
+                      <m:t>𝑋</m:t>
+                    </m:r>
+                    <m:r>
+                      <a:rPr lang="fr-FR" b="0" i="1" smtClean="0">
+                        <a:latin typeface="Cambria Math" panose="02040503050406030204" pitchFamily="18" charset="0"/>
+                      </a:rPr>
+                      <m:t>=</m:t>
+                    </m:r>
+                    <m:sSub>
+                      <m:sSubPr>
+                        <m:ctrlPr>
+                          <a:rPr lang="fr-FR" b="0" i="1" smtClean="0">
+                            <a:latin typeface="Cambria Math" panose="02040503050406030204" pitchFamily="18" charset="0"/>
+                          </a:rPr>
+                        </m:ctrlPr>
+                      </m:sSubPr>
+                      <m:e>
+                        <m:r>
+                          <a:rPr lang="fr-FR" b="0" i="1" smtClean="0">
+                            <a:latin typeface="Cambria Math" panose="02040503050406030204" pitchFamily="18" charset="0"/>
+                          </a:rPr>
+                          <m:t>𝜃</m:t>
+                        </m:r>
+                      </m:e>
+                      <m:sub>
+                        <m:r>
+                          <a:rPr lang="fr-FR" b="0" i="1" smtClean="0">
+                            <a:latin typeface="Cambria Math" panose="02040503050406030204" pitchFamily="18" charset="0"/>
+                          </a:rPr>
+                          <m:t>𝑚</m:t>
+                        </m:r>
+                      </m:sub>
+                    </m:sSub>
+                    <m:r>
+                      <a:rPr lang="fr-FR" b="0" i="1" smtClean="0">
+                        <a:latin typeface="Cambria Math" panose="02040503050406030204" pitchFamily="18" charset="0"/>
+                      </a:rPr>
+                      <m:t>×</m:t>
+                    </m:r>
+                    <m:f>
+                      <m:fPr>
+                        <m:ctrlPr>
+                          <a:rPr lang="fr-FR" b="0" i="1" smtClean="0">
+                            <a:latin typeface="Cambria Math" panose="02040503050406030204" pitchFamily="18" charset="0"/>
+                          </a:rPr>
+                        </m:ctrlPr>
+                      </m:fPr>
+                      <m:num>
+                        <m:r>
+                          <a:rPr lang="fr-FR" b="0" i="1" smtClean="0">
+                            <a:latin typeface="Cambria Math" panose="02040503050406030204" pitchFamily="18" charset="0"/>
+                          </a:rPr>
+                          <m:t>1</m:t>
+                        </m:r>
+                      </m:num>
+                      <m:den>
+                        <m:r>
+                          <a:rPr lang="fr-FR" b="0" i="1" smtClean="0">
+                            <a:latin typeface="Cambria Math" panose="02040503050406030204" pitchFamily="18" charset="0"/>
+                          </a:rPr>
+                          <m:t>15</m:t>
+                        </m:r>
+                        <m:r>
+                          <a:rPr lang="fr-FR" b="0" i="1" smtClean="0">
+                            <a:latin typeface="Cambria Math" panose="02040503050406030204" pitchFamily="18" charset="0"/>
+                          </a:rPr>
+                          <m:t>,</m:t>
+                        </m:r>
+                        <m:r>
+                          <a:rPr lang="fr-FR" b="0" i="1" smtClean="0">
+                            <a:latin typeface="Cambria Math" panose="02040503050406030204" pitchFamily="18" charset="0"/>
+                          </a:rPr>
+                          <m:t>88</m:t>
+                        </m:r>
+                      </m:den>
+                    </m:f>
+                    <m:r>
+                      <a:rPr lang="fr-FR" b="0" i="1" smtClean="0">
+                        <a:latin typeface="Cambria Math" panose="02040503050406030204" pitchFamily="18" charset="0"/>
+                      </a:rPr>
+                      <m:t>×</m:t>
+                    </m:r>
+                    <m:r>
+                      <a:rPr lang="fr-FR" b="0" i="1" smtClean="0">
+                        <a:latin typeface="Cambria Math" panose="02040503050406030204" pitchFamily="18" charset="0"/>
+                      </a:rPr>
+                      <m:t>17</m:t>
+                    </m:r>
+                    <m:r>
+                      <a:rPr lang="fr-FR" b="0" i="1" smtClean="0">
+                        <a:latin typeface="Cambria Math" panose="02040503050406030204" pitchFamily="18" charset="0"/>
+                      </a:rPr>
+                      <m:t>,</m:t>
+                    </m:r>
+                    <m:r>
+                      <a:rPr lang="fr-FR" b="0" i="1" smtClean="0">
+                        <a:latin typeface="Cambria Math" panose="02040503050406030204" pitchFamily="18" charset="0"/>
+                      </a:rPr>
+                      <m:t>2</m:t>
+                    </m:r>
+                    <m:r>
+                      <a:rPr lang="fr-FR" b="0" i="1" smtClean="0">
+                        <a:latin typeface="Cambria Math" panose="02040503050406030204" pitchFamily="18" charset="0"/>
+                      </a:rPr>
+                      <m:t> </m:t>
+                    </m:r>
+                  </m:oMath>
+                </a14:m>
+                <a:endParaRPr lang="fr-FR" dirty="0"/>
+              </a:p>
+              <a:p>
+                <a:endParaRPr lang="fr-FR" dirty="0"/>
+              </a:p>
+              <a:p>
+                <a:r>
+                  <a:rPr lang="fr-FR" dirty="0"/>
+                  <a:t>Sous l’hypothèse que le rendement est unitaire : </a:t>
+                </a:r>
+              </a:p>
+              <a:p>
+                <a14:m>
+                  <m:oMath xmlns:m="http://schemas.openxmlformats.org/officeDocument/2006/math">
+                    <m:sSub>
+                      <m:sSubPr>
+                        <m:ctrlPr>
+                          <a:rPr lang="fr-FR" b="0" i="1" smtClean="0">
+                            <a:latin typeface="Cambria Math" panose="02040503050406030204" pitchFamily="18" charset="0"/>
+                          </a:rPr>
+                        </m:ctrlPr>
+                      </m:sSubPr>
+                      <m:e>
+                        <m:r>
+                          <a:rPr lang="fr-FR" b="0" i="1" smtClean="0">
+                            <a:latin typeface="Cambria Math" panose="02040503050406030204" pitchFamily="18" charset="0"/>
+                          </a:rPr>
+                          <m:t>𝐶</m:t>
+                        </m:r>
+                      </m:e>
+                      <m:sub>
+                        <m:r>
+                          <a:rPr lang="fr-FR" b="0" i="1" smtClean="0">
+                            <a:latin typeface="Cambria Math" panose="02040503050406030204" pitchFamily="18" charset="0"/>
+                          </a:rPr>
+                          <m:t>𝑚</m:t>
+                        </m:r>
+                      </m:sub>
+                    </m:sSub>
+                    <m:sSub>
+                      <m:sSubPr>
+                        <m:ctrlPr>
+                          <a:rPr lang="fr-FR" b="0" i="1" smtClean="0">
+                            <a:latin typeface="Cambria Math" panose="02040503050406030204" pitchFamily="18" charset="0"/>
+                          </a:rPr>
+                        </m:ctrlPr>
+                      </m:sSubPr>
+                      <m:e>
+                        <m:r>
+                          <a:rPr lang="fr-FR" b="0" i="1" smtClean="0">
+                            <a:latin typeface="Cambria Math" panose="02040503050406030204" pitchFamily="18" charset="0"/>
+                          </a:rPr>
+                          <m:t>𝜔</m:t>
+                        </m:r>
+                      </m:e>
+                      <m:sub>
+                        <m:r>
+                          <a:rPr lang="fr-FR" b="0" i="1" smtClean="0">
+                            <a:latin typeface="Cambria Math" panose="02040503050406030204" pitchFamily="18" charset="0"/>
+                          </a:rPr>
+                          <m:t>𝑚</m:t>
+                        </m:r>
+                      </m:sub>
+                    </m:sSub>
+                    <m:r>
+                      <a:rPr lang="fr-FR" b="0" i="1" smtClean="0">
+                        <a:latin typeface="Cambria Math" panose="02040503050406030204" pitchFamily="18" charset="0"/>
+                      </a:rPr>
+                      <m:t>=</m:t>
+                    </m:r>
+                    <m:sSub>
+                      <m:sSubPr>
+                        <m:ctrlPr>
+                          <a:rPr lang="fr-FR" b="0" i="1" smtClean="0">
+                            <a:latin typeface="Cambria Math" panose="02040503050406030204" pitchFamily="18" charset="0"/>
+                          </a:rPr>
+                        </m:ctrlPr>
+                      </m:sSubPr>
+                      <m:e>
+                        <m:r>
+                          <a:rPr lang="fr-FR" b="0" i="1" smtClean="0">
+                            <a:latin typeface="Cambria Math" panose="02040503050406030204" pitchFamily="18" charset="0"/>
+                          </a:rPr>
+                          <m:t>𝐹</m:t>
+                        </m:r>
+                      </m:e>
+                      <m:sub>
+                        <m:r>
+                          <a:rPr lang="fr-FR" b="0" i="1" smtClean="0">
+                            <a:latin typeface="Cambria Math" panose="02040503050406030204" pitchFamily="18" charset="0"/>
+                          </a:rPr>
+                          <m:t>𝑚</m:t>
+                        </m:r>
+                      </m:sub>
+                    </m:sSub>
+                    <m:acc>
+                      <m:accPr>
+                        <m:chr m:val="̇"/>
+                        <m:ctrlPr>
+                          <a:rPr lang="fr-FR" b="0" i="1" smtClean="0">
+                            <a:latin typeface="Cambria Math" panose="02040503050406030204" pitchFamily="18" charset="0"/>
+                          </a:rPr>
+                        </m:ctrlPr>
+                      </m:accPr>
+                      <m:e>
+                        <m:r>
+                          <a:rPr lang="fr-FR" i="1">
+                            <a:latin typeface="Cambria Math" panose="02040503050406030204" pitchFamily="18" charset="0"/>
+                          </a:rPr>
+                          <m:t>𝑋</m:t>
+                        </m:r>
+                      </m:e>
+                    </m:acc>
+                    <m:r>
+                      <a:rPr lang="fr-FR" b="0" i="1" smtClean="0">
+                        <a:latin typeface="Cambria Math" panose="02040503050406030204" pitchFamily="18" charset="0"/>
+                      </a:rPr>
+                      <m:t>⇒</m:t>
+                    </m:r>
+                    <m:sSub>
+                      <m:sSubPr>
+                        <m:ctrlPr>
+                          <a:rPr lang="fr-FR" i="1">
+                            <a:latin typeface="Cambria Math" panose="02040503050406030204" pitchFamily="18" charset="0"/>
+                          </a:rPr>
+                        </m:ctrlPr>
+                      </m:sSubPr>
+                      <m:e>
+                        <m:r>
+                          <a:rPr lang="fr-FR" i="1">
+                            <a:latin typeface="Cambria Math" panose="02040503050406030204" pitchFamily="18" charset="0"/>
+                          </a:rPr>
+                          <m:t>𝐹</m:t>
+                        </m:r>
+                      </m:e>
+                      <m:sub>
+                        <m:r>
+                          <a:rPr lang="fr-FR" i="1">
+                            <a:latin typeface="Cambria Math" panose="02040503050406030204" pitchFamily="18" charset="0"/>
+                          </a:rPr>
+                          <m:t>𝑚</m:t>
+                        </m:r>
+                      </m:sub>
+                    </m:sSub>
+                    <m:r>
+                      <a:rPr lang="fr-FR" b="0" i="1" smtClean="0">
+                        <a:latin typeface="Cambria Math" panose="02040503050406030204" pitchFamily="18" charset="0"/>
+                      </a:rPr>
+                      <m:t>=</m:t>
+                    </m:r>
+                    <m:f>
+                      <m:fPr>
+                        <m:ctrlPr>
+                          <a:rPr lang="fr-FR" b="0" i="1" smtClean="0">
+                            <a:latin typeface="Cambria Math" panose="02040503050406030204" pitchFamily="18" charset="0"/>
+                          </a:rPr>
+                        </m:ctrlPr>
+                      </m:fPr>
+                      <m:num>
+                        <m:sSub>
+                          <m:sSubPr>
+                            <m:ctrlPr>
+                              <a:rPr lang="fr-FR" i="1">
+                                <a:latin typeface="Cambria Math" panose="02040503050406030204" pitchFamily="18" charset="0"/>
+                              </a:rPr>
+                            </m:ctrlPr>
+                          </m:sSubPr>
+                          <m:e>
+                            <m:r>
+                              <a:rPr lang="fr-FR" i="1">
+                                <a:latin typeface="Cambria Math" panose="02040503050406030204" pitchFamily="18" charset="0"/>
+                              </a:rPr>
+                              <m:t>𝐶</m:t>
+                            </m:r>
+                          </m:e>
+                          <m:sub>
+                            <m:r>
+                              <a:rPr lang="fr-FR" i="1">
+                                <a:latin typeface="Cambria Math" panose="02040503050406030204" pitchFamily="18" charset="0"/>
+                              </a:rPr>
+                              <m:t>𝑚</m:t>
+                            </m:r>
+                          </m:sub>
+                        </m:sSub>
+                        <m:sSub>
+                          <m:sSubPr>
+                            <m:ctrlPr>
+                              <a:rPr lang="fr-FR" i="1">
+                                <a:latin typeface="Cambria Math" panose="02040503050406030204" pitchFamily="18" charset="0"/>
+                              </a:rPr>
+                            </m:ctrlPr>
+                          </m:sSubPr>
+                          <m:e>
+                            <m:r>
+                              <a:rPr lang="fr-FR" i="1">
+                                <a:latin typeface="Cambria Math" panose="02040503050406030204" pitchFamily="18" charset="0"/>
+                              </a:rPr>
+                              <m:t>𝜔</m:t>
+                            </m:r>
+                          </m:e>
+                          <m:sub>
+                            <m:r>
+                              <a:rPr lang="fr-FR" i="1">
+                                <a:latin typeface="Cambria Math" panose="02040503050406030204" pitchFamily="18" charset="0"/>
+                              </a:rPr>
+                              <m:t>𝑚</m:t>
+                            </m:r>
+                          </m:sub>
+                        </m:sSub>
+                      </m:num>
+                      <m:den>
+                        <m:acc>
+                          <m:accPr>
+                            <m:chr m:val="̇"/>
+                            <m:ctrlPr>
+                              <a:rPr lang="fr-FR" i="1">
+                                <a:latin typeface="Cambria Math" panose="02040503050406030204" pitchFamily="18" charset="0"/>
+                              </a:rPr>
+                            </m:ctrlPr>
+                          </m:accPr>
+                          <m:e>
+                            <m:r>
+                              <a:rPr lang="fr-FR" i="1">
+                                <a:latin typeface="Cambria Math" panose="02040503050406030204" pitchFamily="18" charset="0"/>
+                              </a:rPr>
+                              <m:t>𝑋</m:t>
+                            </m:r>
+                          </m:e>
+                        </m:acc>
+                      </m:den>
+                    </m:f>
+                    <m:r>
+                      <a:rPr lang="fr-FR" b="0" i="0" smtClean="0">
+                        <a:latin typeface="Cambria Math" panose="02040503050406030204" pitchFamily="18" charset="0"/>
+                      </a:rPr>
+                      <m:t>=</m:t>
+                    </m:r>
+                    <m:sSub>
+                      <m:sSubPr>
+                        <m:ctrlPr>
+                          <a:rPr lang="fr-FR" b="0" i="1" smtClean="0">
+                            <a:latin typeface="Cambria Math" panose="02040503050406030204" pitchFamily="18" charset="0"/>
+                          </a:rPr>
+                        </m:ctrlPr>
+                      </m:sSubPr>
+                      <m:e>
+                        <m:r>
+                          <m:rPr>
+                            <m:sty m:val="p"/>
+                          </m:rPr>
+                          <a:rPr lang="fr-FR" b="0" i="0" smtClean="0">
+                            <a:latin typeface="Cambria Math" panose="02040503050406030204" pitchFamily="18" charset="0"/>
+                          </a:rPr>
+                          <m:t>C</m:t>
+                        </m:r>
+                      </m:e>
+                      <m:sub>
+                        <m:r>
+                          <m:rPr>
+                            <m:sty m:val="p"/>
+                          </m:rPr>
+                          <a:rPr lang="fr-FR" b="0" i="0" smtClean="0">
+                            <a:latin typeface="Cambria Math" panose="02040503050406030204" pitchFamily="18" charset="0"/>
+                          </a:rPr>
+                          <m:t>m</m:t>
+                        </m:r>
+                      </m:sub>
+                    </m:sSub>
+                    <m:r>
+                      <a:rPr lang="fr-FR" b="0" i="1" smtClean="0">
+                        <a:latin typeface="Cambria Math" panose="02040503050406030204" pitchFamily="18" charset="0"/>
+                      </a:rPr>
+                      <m:t>×</m:t>
+                    </m:r>
+                    <m:f>
+                      <m:fPr>
+                        <m:ctrlPr>
+                          <a:rPr lang="fr-FR" b="0" i="1" smtClean="0">
+                            <a:latin typeface="Cambria Math" panose="02040503050406030204" pitchFamily="18" charset="0"/>
+                          </a:rPr>
+                        </m:ctrlPr>
+                      </m:fPr>
+                      <m:num>
+                        <m:r>
+                          <a:rPr lang="fr-FR" b="0" i="1" smtClean="0">
+                            <a:latin typeface="Cambria Math" panose="02040503050406030204" pitchFamily="18" charset="0"/>
+                          </a:rPr>
+                          <m:t>15</m:t>
+                        </m:r>
+                        <m:r>
+                          <a:rPr lang="fr-FR" b="0" i="1" smtClean="0">
+                            <a:latin typeface="Cambria Math" panose="02040503050406030204" pitchFamily="18" charset="0"/>
+                          </a:rPr>
+                          <m:t>,</m:t>
+                        </m:r>
+                        <m:r>
+                          <a:rPr lang="fr-FR" b="0" i="1" smtClean="0">
+                            <a:latin typeface="Cambria Math" panose="02040503050406030204" pitchFamily="18" charset="0"/>
+                          </a:rPr>
+                          <m:t>88</m:t>
+                        </m:r>
+                      </m:num>
+                      <m:den>
+                        <m:r>
+                          <a:rPr lang="fr-FR" b="0" i="1" smtClean="0">
+                            <a:latin typeface="Cambria Math" panose="02040503050406030204" pitchFamily="18" charset="0"/>
+                          </a:rPr>
+                          <m:t>17</m:t>
+                        </m:r>
+                        <m:r>
+                          <a:rPr lang="fr-FR" b="0" i="1" smtClean="0">
+                            <a:latin typeface="Cambria Math" panose="02040503050406030204" pitchFamily="18" charset="0"/>
+                          </a:rPr>
+                          <m:t>,</m:t>
+                        </m:r>
+                        <m:r>
+                          <a:rPr lang="fr-FR" b="0" i="1" smtClean="0">
+                            <a:latin typeface="Cambria Math" panose="02040503050406030204" pitchFamily="18" charset="0"/>
+                          </a:rPr>
+                          <m:t>2</m:t>
+                        </m:r>
+                        <m:r>
+                          <a:rPr lang="fr-FR" b="0" i="1" smtClean="0">
+                            <a:latin typeface="Cambria Math" panose="02040503050406030204" pitchFamily="18" charset="0"/>
+                          </a:rPr>
+                          <m:t>×</m:t>
+                        </m:r>
+                        <m:sSup>
+                          <m:sSupPr>
+                            <m:ctrlPr>
+                              <a:rPr lang="fr-FR" b="0" i="1" smtClean="0">
+                                <a:latin typeface="Cambria Math" panose="02040503050406030204" pitchFamily="18" charset="0"/>
+                              </a:rPr>
+                            </m:ctrlPr>
+                          </m:sSupPr>
+                          <m:e>
+                            <m:r>
+                              <a:rPr lang="fr-FR" b="0" i="1" smtClean="0">
+                                <a:latin typeface="Cambria Math" panose="02040503050406030204" pitchFamily="18" charset="0"/>
+                              </a:rPr>
+                              <m:t>10</m:t>
+                            </m:r>
+                          </m:e>
+                          <m:sup>
+                            <m:r>
+                              <a:rPr lang="fr-FR" b="0" i="1" smtClean="0">
+                                <a:latin typeface="Cambria Math" panose="02040503050406030204" pitchFamily="18" charset="0"/>
+                              </a:rPr>
+                              <m:t>−</m:t>
+                            </m:r>
+                            <m:r>
+                              <a:rPr lang="fr-FR" b="0" i="1" smtClean="0">
+                                <a:latin typeface="Cambria Math" panose="02040503050406030204" pitchFamily="18" charset="0"/>
+                              </a:rPr>
+                              <m:t>3</m:t>
+                            </m:r>
+                          </m:sup>
+                        </m:sSup>
+                      </m:den>
+                    </m:f>
+                  </m:oMath>
+                </a14:m>
+                <a:endParaRPr lang="fr-FR" dirty="0"/>
+              </a:p>
+              <a:p>
+                <a:pPr marL="1588" indent="0">
+                  <a:buNone/>
+                </a:pPr>
+                <a:endParaRPr lang="fr-FR" dirty="0"/>
+              </a:p>
+              <a:p>
+                <a:endParaRPr lang="fr-FR" dirty="0"/>
+              </a:p>
+            </p:txBody>
+          </p:sp>
+        </mc:Choice>
+        <mc:Fallback xmlns="">
+          <p:sp>
+            <p:nvSpPr>
+              <p:cNvPr id="3" name="Espace réservé du contenu 2">
+                <a:extLst>
+                  <a:ext uri="{FF2B5EF4-FFF2-40B4-BE49-F238E27FC236}">
+                    <a16:creationId xmlns:a16="http://schemas.microsoft.com/office/drawing/2014/main" id="{1D19B2D4-77DE-6731-B46A-F7DF203E51CF}"/>
+                  </a:ext>
+                </a:extLst>
+              </p:cNvPr>
+              <p:cNvSpPr>
+                <a:spLocks noGrp="1" noRot="1" noChangeAspect="1" noMove="1" noResize="1" noEditPoints="1" noAdjustHandles="1" noChangeArrowheads="1" noChangeShapeType="1" noTextEdit="1"/>
+              </p:cNvSpPr>
+              <p:nvPr>
+                <p:ph idx="1"/>
+              </p:nvPr>
+            </p:nvSpPr>
+            <p:spPr>
+              <a:blipFill>
+                <a:blip r:embed="rId2"/>
+                <a:stretch>
+                  <a:fillRect l="-1325" t="-1856"/>
+                </a:stretch>
+              </a:blipFill>
+            </p:spPr>
+            <p:txBody>
+              <a:bodyPr/>
+              <a:lstStyle/>
+              <a:p>
+                <a:r>
+                  <a:rPr lang="fr-FR">
+                    <a:noFill/>
+                  </a:rPr>
+                  <a:t> </a:t>
+                </a:r>
+              </a:p>
+            </p:txBody>
+          </p:sp>
+        </mc:Fallback>
+      </mc:AlternateContent>
+    </p:spTree>
+    <p:extLst>
+      <p:ext uri="{BB962C8B-B14F-4D97-AF65-F5344CB8AC3E}">
+        <p14:creationId xmlns:p14="http://schemas.microsoft.com/office/powerpoint/2010/main" val="311243995"/>
+      </p:ext>
+    </p:extLst>
+  </p:cSld>
+  <p:clrMapOvr>
+    <a:masterClrMapping/>
+  </p:clrMapOvr>
+</p:sld>
+</file>
+
+<file path=ppt/slides/slide11.xml><?xml version="1.0" encoding="utf-8"?>
+<p:sld xmlns:a="http://schemas.openxmlformats.org/drawingml/2006/main" xmlns:r="http://schemas.openxmlformats.org/officeDocument/2006/relationships" xmlns:p="http://schemas.openxmlformats.org/presentationml/2006/main">
+  <p:cSld>
+    <p:spTree>
+      <p:nvGrpSpPr>
+        <p:cNvPr id="1" name="">
+          <a:extLst>
+            <a:ext uri="{FF2B5EF4-FFF2-40B4-BE49-F238E27FC236}">
+              <a16:creationId xmlns:a16="http://schemas.microsoft.com/office/drawing/2014/main" id="{C40DD68A-E16C-6412-0693-26A3D0F08689}"/>
+            </a:ext>
+          </a:extLst>
+        </p:cNvPr>
+        <p:cNvGrpSpPr/>
+        <p:nvPr/>
+      </p:nvGrpSpPr>
+      <p:grpSpPr>
+        <a:xfrm>
+          <a:off x="0" y="0"/>
+          <a:ext cx="0" cy="0"/>
+          <a:chOff x="0" y="0"/>
+          <a:chExt cx="0" cy="0"/>
+        </a:xfrm>
+      </p:grpSpPr>
+      <p:sp>
+        <p:nvSpPr>
+          <p:cNvPr id="4" name="Titre 3">
+            <a:extLst>
+              <a:ext uri="{FF2B5EF4-FFF2-40B4-BE49-F238E27FC236}">
+                <a16:creationId xmlns:a16="http://schemas.microsoft.com/office/drawing/2014/main" id="{98820592-B42F-86C6-2B84-6D0830A7F392}"/>
+              </a:ext>
+            </a:extLst>
+          </p:cNvPr>
+          <p:cNvSpPr>
+            <a:spLocks noGrp="1"/>
+          </p:cNvSpPr>
+          <p:nvPr>
+            <p:ph type="title"/>
+          </p:nvPr>
+        </p:nvSpPr>
+        <p:spPr/>
+        <p:txBody>
+          <a:bodyPr>
+            <a:normAutofit fontScale="90000"/>
+          </a:bodyPr>
+          <a:lstStyle/>
+          <a:p>
+            <a:r>
+              <a:rPr lang="fr-FR" dirty="0"/>
+              <a:t>07</a:t>
+            </a:r>
+            <a:br>
+              <a:rPr lang="fr-FR" dirty="0"/>
+            </a:br>
+            <a:r>
+              <a:rPr lang="fr-FR" dirty="0"/>
+              <a:t>Modélisation composants ou phénomènes</a:t>
+            </a:r>
+          </a:p>
+        </p:txBody>
+      </p:sp>
+      <p:sp>
+        <p:nvSpPr>
+          <p:cNvPr id="5" name="Espace réservé du texte 4">
+            <a:extLst>
+              <a:ext uri="{FF2B5EF4-FFF2-40B4-BE49-F238E27FC236}">
+                <a16:creationId xmlns:a16="http://schemas.microsoft.com/office/drawing/2014/main" id="{98F96706-D0AC-35B1-9E61-ADB22B4A76AA}"/>
+              </a:ext>
+            </a:extLst>
+          </p:cNvPr>
+          <p:cNvSpPr>
+            <a:spLocks noGrp="1"/>
+          </p:cNvSpPr>
+          <p:nvPr>
+            <p:ph type="body" idx="1"/>
+          </p:nvPr>
+        </p:nvSpPr>
+        <p:spPr/>
+        <p:txBody>
+          <a:bodyPr/>
+          <a:lstStyle/>
+          <a:p>
+            <a:endParaRPr lang="fr-FR"/>
+          </a:p>
+        </p:txBody>
+      </p:sp>
+    </p:spTree>
+    <p:extLst>
+      <p:ext uri="{BB962C8B-B14F-4D97-AF65-F5344CB8AC3E}">
+        <p14:creationId xmlns:p14="http://schemas.microsoft.com/office/powerpoint/2010/main" val="3211213506"/>
+      </p:ext>
+    </p:extLst>
+  </p:cSld>
+  <p:clrMapOvr>
+    <a:masterClrMapping/>
+  </p:clrMapOvr>
+</p:sld>
+</file>
+
+<file path=ppt/slides/slide12.xml><?xml version="1.0" encoding="utf-8"?>
+<p:sld xmlns:a="http://schemas.openxmlformats.org/drawingml/2006/main" xmlns:r="http://schemas.openxmlformats.org/officeDocument/2006/relationships" xmlns:p="http://schemas.openxmlformats.org/presentationml/2006/main">
+  <p:cSld>
+    <p:spTree>
+      <p:nvGrpSpPr>
         <p:cNvPr id="1" name=""/>
         <p:cNvGrpSpPr/>
         <p:nvPr/>
@@ -6256,7 +7003,7 @@
 </p:sld>
 </file>
 
-<file path=ppt/slides/slide11.xml><?xml version="1.0" encoding="utf-8"?>
+<file path=ppt/slides/slide13.xml><?xml version="1.0" encoding="utf-8"?>
 <p:sld xmlns:a="http://schemas.openxmlformats.org/drawingml/2006/main" xmlns:r="http://schemas.openxmlformats.org/officeDocument/2006/relationships" xmlns:p="http://schemas.openxmlformats.org/presentationml/2006/main">
   <p:cSld>
     <p:spTree>
@@ -7805,7 +8552,7 @@
 </p:sld>
 </file>
 
-<file path=ppt/slides/slide12.xml><?xml version="1.0" encoding="utf-8"?>
+<file path=ppt/slides/slide14.xml><?xml version="1.0" encoding="utf-8"?>
 <p:sld xmlns:a="http://schemas.openxmlformats.org/drawingml/2006/main" xmlns:r="http://schemas.openxmlformats.org/officeDocument/2006/relationships" xmlns:p="http://schemas.openxmlformats.org/presentationml/2006/main">
   <p:cSld>
     <p:spTree>
@@ -7897,7 +8644,7 @@
 </p:sld>
 </file>
 
-<file path=ppt/slides/slide13.xml><?xml version="1.0" encoding="utf-8"?>
+<file path=ppt/slides/slide15.xml><?xml version="1.0" encoding="utf-8"?>
 <p:sld xmlns:a="http://schemas.openxmlformats.org/drawingml/2006/main" xmlns:r="http://schemas.openxmlformats.org/officeDocument/2006/relationships" xmlns:p="http://schemas.openxmlformats.org/presentationml/2006/main">
   <p:cSld>
     <p:spTree>
@@ -9735,7 +10482,7 @@
 </p:sld>
 </file>
 
-<file path=ppt/slides/slide14.xml><?xml version="1.0" encoding="utf-8"?>
+<file path=ppt/slides/slide16.xml><?xml version="1.0" encoding="utf-8"?>
 <p:sld xmlns:a="http://schemas.openxmlformats.org/drawingml/2006/main" xmlns:r="http://schemas.openxmlformats.org/officeDocument/2006/relationships" xmlns:p="http://schemas.openxmlformats.org/presentationml/2006/main">
   <p:cSld>
     <p:spTree>
@@ -12127,7 +12874,7 @@
 </p:sld>
 </file>
 
-<file path=ppt/slides/slide15.xml><?xml version="1.0" encoding="utf-8"?>
+<file path=ppt/slides/slide17.xml><?xml version="1.0" encoding="utf-8"?>
 <p:sld xmlns:a="http://schemas.openxmlformats.org/drawingml/2006/main" xmlns:r="http://schemas.openxmlformats.org/officeDocument/2006/relationships" xmlns:p="http://schemas.openxmlformats.org/presentationml/2006/main">
   <p:cSld>
     <p:spTree>
@@ -12626,7 +13373,7 @@
 </p:sld>
 </file>
 
-<file path=ppt/slides/slide16.xml><?xml version="1.0" encoding="utf-8"?>
+<file path=ppt/slides/slide18.xml><?xml version="1.0" encoding="utf-8"?>
 <p:sld xmlns:a="http://schemas.openxmlformats.org/drawingml/2006/main" xmlns:r="http://schemas.openxmlformats.org/officeDocument/2006/relationships" xmlns:p="http://schemas.openxmlformats.org/presentationml/2006/main">
   <p:cSld>
     <p:spTree>
@@ -13690,7 +14437,7 @@
 </p:sld>
 </file>
 
-<file path=ppt/slides/slide17.xml><?xml version="1.0" encoding="utf-8"?>
+<file path=ppt/slides/slide19.xml><?xml version="1.0" encoding="utf-8"?>
 <p:sld xmlns:a="http://schemas.openxmlformats.org/drawingml/2006/main" xmlns:r="http://schemas.openxmlformats.org/officeDocument/2006/relationships" xmlns:p="http://schemas.openxmlformats.org/presentationml/2006/main">
   <p:cSld>
     <p:spTree>
@@ -14097,7 +14844,87 @@
 </p:sld>
 </file>
 
-<file path=ppt/slides/slide18.xml><?xml version="1.0" encoding="utf-8"?>
+<file path=ppt/slides/slide2.xml><?xml version="1.0" encoding="utf-8"?>
+<p:sld xmlns:a="http://schemas.openxmlformats.org/drawingml/2006/main" xmlns:r="http://schemas.openxmlformats.org/officeDocument/2006/relationships" xmlns:p="http://schemas.openxmlformats.org/presentationml/2006/main">
+  <p:cSld>
+    <p:spTree>
+      <p:nvGrpSpPr>
+        <p:cNvPr id="1" name=""/>
+        <p:cNvGrpSpPr/>
+        <p:nvPr/>
+      </p:nvGrpSpPr>
+      <p:grpSpPr>
+        <a:xfrm>
+          <a:off x="0" y="0"/>
+          <a:ext cx="0" cy="0"/>
+          <a:chOff x="0" y="0"/>
+          <a:chExt cx="0" cy="0"/>
+        </a:xfrm>
+      </p:grpSpPr>
+      <p:sp>
+        <p:nvSpPr>
+          <p:cNvPr id="2" name="Titre 1">
+            <a:extLst>
+              <a:ext uri="{FF2B5EF4-FFF2-40B4-BE49-F238E27FC236}">
+                <a16:creationId xmlns:a16="http://schemas.microsoft.com/office/drawing/2014/main" id="{2B23CFB6-C96F-2738-656C-799A569A57DB}"/>
+              </a:ext>
+            </a:extLst>
+          </p:cNvPr>
+          <p:cNvSpPr>
+            <a:spLocks noGrp="1"/>
+          </p:cNvSpPr>
+          <p:nvPr>
+            <p:ph type="title"/>
+          </p:nvPr>
+        </p:nvSpPr>
+        <p:spPr/>
+        <p:txBody>
+          <a:bodyPr/>
+          <a:lstStyle/>
+          <a:p>
+            <a:endParaRPr lang="fr-FR"/>
+          </a:p>
+        </p:txBody>
+      </p:sp>
+      <p:sp>
+        <p:nvSpPr>
+          <p:cNvPr id="3" name="Espace réservé du contenu 2">
+            <a:extLst>
+              <a:ext uri="{FF2B5EF4-FFF2-40B4-BE49-F238E27FC236}">
+                <a16:creationId xmlns:a16="http://schemas.microsoft.com/office/drawing/2014/main" id="{63A0F49C-2000-CFFA-4CC2-9D86BC1329D8}"/>
+              </a:ext>
+            </a:extLst>
+          </p:cNvPr>
+          <p:cNvSpPr>
+            <a:spLocks noGrp="1"/>
+          </p:cNvSpPr>
+          <p:nvPr>
+            <p:ph idx="1"/>
+          </p:nvPr>
+        </p:nvSpPr>
+        <p:spPr/>
+        <p:txBody>
+          <a:bodyPr/>
+          <a:lstStyle/>
+          <a:p>
+            <a:endParaRPr lang="fr-FR" dirty="0"/>
+          </a:p>
+        </p:txBody>
+      </p:sp>
+    </p:spTree>
+    <p:extLst>
+      <p:ext uri="{BB962C8B-B14F-4D97-AF65-F5344CB8AC3E}">
+        <p14:creationId xmlns:p14="http://schemas.microsoft.com/office/powerpoint/2010/main" val="696684578"/>
+      </p:ext>
+    </p:extLst>
+  </p:cSld>
+  <p:clrMapOvr>
+    <a:masterClrMapping/>
+  </p:clrMapOvr>
+</p:sld>
+</file>
+
+<file path=ppt/slides/slide20.xml><?xml version="1.0" encoding="utf-8"?>
 <p:sld xmlns:a="http://schemas.openxmlformats.org/drawingml/2006/main" xmlns:r="http://schemas.openxmlformats.org/officeDocument/2006/relationships" xmlns:p="http://schemas.openxmlformats.org/presentationml/2006/main">
   <p:cSld>
     <p:spTree>
@@ -14443,7 +15270,7 @@
 </p:sld>
 </file>
 
-<file path=ppt/slides/slide19.xml><?xml version="1.0" encoding="utf-8"?>
+<file path=ppt/slides/slide21.xml><?xml version="1.0" encoding="utf-8"?>
 <p:sld xmlns:a="http://schemas.openxmlformats.org/drawingml/2006/main" xmlns:r="http://schemas.openxmlformats.org/officeDocument/2006/relationships" xmlns:p="http://schemas.openxmlformats.org/presentationml/2006/main">
   <p:cSld>
     <p:spTree>
@@ -18506,86 +19333,6 @@
 </p:sld>
 </file>
 
-<file path=ppt/slides/slide2.xml><?xml version="1.0" encoding="utf-8"?>
-<p:sld xmlns:a="http://schemas.openxmlformats.org/drawingml/2006/main" xmlns:r="http://schemas.openxmlformats.org/officeDocument/2006/relationships" xmlns:p="http://schemas.openxmlformats.org/presentationml/2006/main">
-  <p:cSld>
-    <p:spTree>
-      <p:nvGrpSpPr>
-        <p:cNvPr id="1" name=""/>
-        <p:cNvGrpSpPr/>
-        <p:nvPr/>
-      </p:nvGrpSpPr>
-      <p:grpSpPr>
-        <a:xfrm>
-          <a:off x="0" y="0"/>
-          <a:ext cx="0" cy="0"/>
-          <a:chOff x="0" y="0"/>
-          <a:chExt cx="0" cy="0"/>
-        </a:xfrm>
-      </p:grpSpPr>
-      <p:sp>
-        <p:nvSpPr>
-          <p:cNvPr id="2" name="Titre 1">
-            <a:extLst>
-              <a:ext uri="{FF2B5EF4-FFF2-40B4-BE49-F238E27FC236}">
-                <a16:creationId xmlns:a16="http://schemas.microsoft.com/office/drawing/2014/main" id="{2B23CFB6-C96F-2738-656C-799A569A57DB}"/>
-              </a:ext>
-            </a:extLst>
-          </p:cNvPr>
-          <p:cNvSpPr>
-            <a:spLocks noGrp="1"/>
-          </p:cNvSpPr>
-          <p:nvPr>
-            <p:ph type="title"/>
-          </p:nvPr>
-        </p:nvSpPr>
-        <p:spPr/>
-        <p:txBody>
-          <a:bodyPr/>
-          <a:lstStyle/>
-          <a:p>
-            <a:endParaRPr lang="fr-FR"/>
-          </a:p>
-        </p:txBody>
-      </p:sp>
-      <p:sp>
-        <p:nvSpPr>
-          <p:cNvPr id="3" name="Espace réservé du contenu 2">
-            <a:extLst>
-              <a:ext uri="{FF2B5EF4-FFF2-40B4-BE49-F238E27FC236}">
-                <a16:creationId xmlns:a16="http://schemas.microsoft.com/office/drawing/2014/main" id="{63A0F49C-2000-CFFA-4CC2-9D86BC1329D8}"/>
-              </a:ext>
-            </a:extLst>
-          </p:cNvPr>
-          <p:cNvSpPr>
-            <a:spLocks noGrp="1"/>
-          </p:cNvSpPr>
-          <p:nvPr>
-            <p:ph idx="1"/>
-          </p:nvPr>
-        </p:nvSpPr>
-        <p:spPr/>
-        <p:txBody>
-          <a:bodyPr/>
-          <a:lstStyle/>
-          <a:p>
-            <a:endParaRPr lang="fr-FR" dirty="0"/>
-          </a:p>
-        </p:txBody>
-      </p:sp>
-    </p:spTree>
-    <p:extLst>
-      <p:ext uri="{BB962C8B-B14F-4D97-AF65-F5344CB8AC3E}">
-        <p14:creationId xmlns:p14="http://schemas.microsoft.com/office/powerpoint/2010/main" val="696684578"/>
-      </p:ext>
-    </p:extLst>
-  </p:cSld>
-  <p:clrMapOvr>
-    <a:masterClrMapping/>
-  </p:clrMapOvr>
-</p:sld>
-</file>
-
 <file path=ppt/slides/slide3.xml><?xml version="1.0" encoding="utf-8"?>
 <p:sld xmlns:a="http://schemas.openxmlformats.org/drawingml/2006/main" xmlns:r="http://schemas.openxmlformats.org/officeDocument/2006/relationships" xmlns:p="http://schemas.openxmlformats.org/presentationml/2006/main">
   <p:cSld>
@@ -18695,10 +19442,10 @@
       </p:grpSpPr>
       <p:sp>
         <p:nvSpPr>
-          <p:cNvPr id="91" name="Rectangle : coins arrondis 90">
+          <p:cNvPr id="127" name="Rectangle : coins arrondis 126">
             <a:extLst>
               <a:ext uri="{FF2B5EF4-FFF2-40B4-BE49-F238E27FC236}">
-                <a16:creationId xmlns:a16="http://schemas.microsoft.com/office/drawing/2014/main" id="{6015CC9C-F06A-6145-07AB-90D570197E3C}"/>
+                <a16:creationId xmlns:a16="http://schemas.microsoft.com/office/drawing/2014/main" id="{0425F4B7-34E3-E45F-A5D6-5C8536D84414}"/>
               </a:ext>
             </a:extLst>
           </p:cNvPr>
@@ -18707,20 +19454,20 @@
         </p:nvSpPr>
         <p:spPr>
           <a:xfrm>
-            <a:off x="9648386" y="4190096"/>
-            <a:ext cx="1365662" cy="652851"/>
+            <a:off x="599208" y="4239788"/>
+            <a:ext cx="6562868" cy="1968508"/>
           </a:xfrm>
           <a:prstGeom prst="roundRect">
             <a:avLst>
-              <a:gd name="adj" fmla="val 11914"/>
+              <a:gd name="adj" fmla="val 1416"/>
             </a:avLst>
           </a:prstGeom>
           <a:solidFill>
-            <a:srgbClr val="F7B8B3"/>
+            <a:srgbClr val="FFF0C1"/>
           </a:solidFill>
           <a:ln w="19050">
             <a:solidFill>
-              <a:srgbClr val="F7B8B3"/>
+              <a:srgbClr val="FFC000"/>
             </a:solidFill>
           </a:ln>
         </p:spPr>
@@ -18745,15 +19492,73 @@
           <a:lstStyle/>
           <a:p>
             <a:pPr algn="ctr"/>
-            <a:r>
-              <a:rPr lang="fr-FR" sz="900" dirty="0">
-                <a:solidFill>
-                  <a:srgbClr val="EE685D"/>
-                </a:solidFill>
-                <a:latin typeface="Arial Nova" panose="020B0504020202020204" pitchFamily="34" charset="0"/>
-              </a:rPr>
-              <a:t>Axe linéaire « Poulie courroie »</a:t>
-            </a:r>
+            <a:endParaRPr lang="fr-FR" sz="1200" b="1" dirty="0">
+              <a:solidFill>
+                <a:srgbClr val="004F77"/>
+              </a:solidFill>
+              <a:latin typeface="Arial Nova" panose="020B0504020202020204" pitchFamily="34" charset="0"/>
+            </a:endParaRPr>
+          </a:p>
+        </p:txBody>
+      </p:sp>
+      <p:sp>
+        <p:nvSpPr>
+          <p:cNvPr id="126" name="Rectangle : coins arrondis 125">
+            <a:extLst>
+              <a:ext uri="{FF2B5EF4-FFF2-40B4-BE49-F238E27FC236}">
+                <a16:creationId xmlns:a16="http://schemas.microsoft.com/office/drawing/2014/main" id="{508D90AC-099E-5006-A331-CE6F411DF5B4}"/>
+              </a:ext>
+            </a:extLst>
+          </p:cNvPr>
+          <p:cNvSpPr/>
+          <p:nvPr/>
+        </p:nvSpPr>
+        <p:spPr>
+          <a:xfrm>
+            <a:off x="599208" y="1424044"/>
+            <a:ext cx="6562868" cy="2580753"/>
+          </a:xfrm>
+          <a:prstGeom prst="roundRect">
+            <a:avLst>
+              <a:gd name="adj" fmla="val 1416"/>
+            </a:avLst>
+          </a:prstGeom>
+          <a:solidFill>
+            <a:srgbClr val="E4F2F8"/>
+          </a:solidFill>
+          <a:ln w="19050">
+            <a:solidFill>
+              <a:srgbClr val="004F77"/>
+            </a:solidFill>
+          </a:ln>
+        </p:spPr>
+        <p:style>
+          <a:lnRef idx="2">
+            <a:schemeClr val="accent1">
+              <a:shade val="50000"/>
+            </a:schemeClr>
+          </a:lnRef>
+          <a:fillRef idx="1">
+            <a:schemeClr val="accent1"/>
+          </a:fillRef>
+          <a:effectRef idx="0">
+            <a:schemeClr val="accent1"/>
+          </a:effectRef>
+          <a:fontRef idx="minor">
+            <a:schemeClr val="lt1"/>
+          </a:fontRef>
+        </p:style>
+        <p:txBody>
+          <a:bodyPr rtlCol="0" anchor="ctr"/>
+          <a:lstStyle/>
+          <a:p>
+            <a:pPr algn="ctr"/>
+            <a:endParaRPr lang="fr-FR" sz="1200" b="1" dirty="0">
+              <a:solidFill>
+                <a:srgbClr val="004F77"/>
+              </a:solidFill>
+              <a:latin typeface="Arial Nova" panose="020B0504020202020204" pitchFamily="34" charset="0"/>
+            </a:endParaRPr>
           </a:p>
         </p:txBody>
       </p:sp>
@@ -18780,7 +19585,15 @@
           <a:p>
             <a:r>
               <a:rPr lang="fr-FR" dirty="0"/>
-              <a:t>Chaine fonctionnelle du Comax</a:t>
+              <a:t>Chaine fonctionnelle du </a:t>
+            </a:r>
+            <a:r>
+              <a:rPr lang="fr-FR" dirty="0" err="1"/>
+              <a:t>Comax</a:t>
+            </a:r>
+            <a:r>
+              <a:rPr lang="fr-FR" dirty="0"/>
+              <a:t> Incomplète</a:t>
             </a:r>
           </a:p>
         </p:txBody>
@@ -18799,8 +19612,8 @@
         </p:nvSpPr>
         <p:spPr>
           <a:xfrm>
-            <a:off x="1056905" y="1549834"/>
-            <a:ext cx="1440000" cy="540000"/>
+            <a:off x="1055643" y="1549834"/>
+            <a:ext cx="1440000" cy="332929"/>
           </a:xfrm>
           <a:prstGeom prst="roundRect">
             <a:avLst>
@@ -18836,7 +19649,7 @@
           <a:p>
             <a:pPr algn="ctr"/>
             <a:r>
-              <a:rPr lang="fr-FR" sz="1400" dirty="0">
+              <a:rPr lang="fr-FR" sz="1200" b="1" dirty="0">
                 <a:solidFill>
                   <a:srgbClr val="004F77"/>
                 </a:solidFill>
@@ -18861,8 +19674,8 @@
         </p:nvSpPr>
         <p:spPr>
           <a:xfrm>
-            <a:off x="1056905" y="2324979"/>
-            <a:ext cx="1440000" cy="946211"/>
+            <a:off x="1055643" y="1957642"/>
+            <a:ext cx="1440000" cy="234212"/>
           </a:xfrm>
           <a:prstGeom prst="roundRect">
             <a:avLst>
@@ -18900,49 +19713,13 @@
           <a:p>
             <a:pPr algn="ctr"/>
             <a:r>
-              <a:rPr lang="fr-FR" sz="800" dirty="0">
+              <a:rPr lang="fr-FR" sz="1000" dirty="0">
                 <a:solidFill>
                   <a:srgbClr val="004F77"/>
                 </a:solidFill>
                 <a:latin typeface="Arial Nova" panose="020B0504020202020204" pitchFamily="34" charset="0"/>
               </a:rPr>
-              <a:t>Codeur incrémental</a:t>
-            </a:r>
-          </a:p>
-          <a:p>
-            <a:pPr algn="ctr"/>
-            <a:r>
-              <a:rPr lang="fr-FR" sz="800" dirty="0">
-                <a:solidFill>
-                  <a:srgbClr val="004F77"/>
-                </a:solidFill>
-                <a:latin typeface="Arial Nova" panose="020B0504020202020204" pitchFamily="34" charset="0"/>
-              </a:rPr>
-              <a:t>Capteur de courant</a:t>
-            </a:r>
-          </a:p>
-          <a:p>
-            <a:pPr algn="ctr"/>
-            <a:r>
-              <a:rPr lang="fr-FR" sz="800" dirty="0">
-                <a:solidFill>
-                  <a:srgbClr val="004F77"/>
-                </a:solidFill>
-                <a:latin typeface="Arial Nova" panose="020B0504020202020204" pitchFamily="34" charset="0"/>
-              </a:rPr>
-              <a:t>Génératrice tachymétrique</a:t>
-            </a:r>
-          </a:p>
-          <a:p>
-            <a:pPr algn="ctr"/>
-            <a:r>
-              <a:rPr lang="fr-FR" sz="800" dirty="0">
-                <a:solidFill>
-                  <a:srgbClr val="004F77"/>
-                </a:solidFill>
-                <a:latin typeface="Arial Nova" panose="020B0504020202020204" pitchFamily="34" charset="0"/>
-              </a:rPr>
-              <a:t>Capteur d’effort</a:t>
+              <a:t>Capteur de force</a:t>
             </a:r>
           </a:p>
         </p:txBody>
@@ -18961,7 +19738,7 @@
         </p:nvSpPr>
         <p:spPr>
           <a:xfrm>
-            <a:off x="3229319" y="1548298"/>
+            <a:off x="3578509" y="2249123"/>
             <a:ext cx="1440000" cy="540000"/>
           </a:xfrm>
           <a:prstGeom prst="roundRect">
@@ -18972,7 +19749,7 @@
           <a:noFill/>
           <a:ln w="19050">
             <a:solidFill>
-              <a:srgbClr val="004F77"/>
+              <a:srgbClr val="002060"/>
             </a:solidFill>
           </a:ln>
         </p:spPr>
@@ -19000,75 +19777,11 @@
             <a:r>
               <a:rPr lang="fr-FR" sz="1400" dirty="0">
                 <a:solidFill>
-                  <a:srgbClr val="0C7391"/>
+                  <a:srgbClr val="002060"/>
                 </a:solidFill>
                 <a:latin typeface="Arial Nova" panose="020B0504020202020204" pitchFamily="34" charset="0"/>
               </a:rPr>
               <a:t>Traiter</a:t>
-            </a:r>
-          </a:p>
-        </p:txBody>
-      </p:sp>
-      <p:sp>
-        <p:nvSpPr>
-          <p:cNvPr id="9" name="Rectangle : coins arrondis 8">
-            <a:extLst>
-              <a:ext uri="{FF2B5EF4-FFF2-40B4-BE49-F238E27FC236}">
-                <a16:creationId xmlns:a16="http://schemas.microsoft.com/office/drawing/2014/main" id="{5E73C37F-4A2D-AB41-B3A3-7332F9A357A2}"/>
-              </a:ext>
-            </a:extLst>
-          </p:cNvPr>
-          <p:cNvSpPr/>
-          <p:nvPr/>
-        </p:nvSpPr>
-        <p:spPr>
-          <a:xfrm>
-            <a:off x="3218894" y="2341159"/>
-            <a:ext cx="1440000" cy="540000"/>
-          </a:xfrm>
-          <a:prstGeom prst="roundRect">
-            <a:avLst>
-              <a:gd name="adj" fmla="val 11914"/>
-            </a:avLst>
-          </a:prstGeom>
-          <a:solidFill>
-            <a:srgbClr val="E4EBF0"/>
-          </a:solidFill>
-          <a:ln w="19050">
-            <a:solidFill>
-              <a:srgbClr val="E4EBF0"/>
-            </a:solidFill>
-          </a:ln>
-        </p:spPr>
-        <p:style>
-          <a:lnRef idx="2">
-            <a:schemeClr val="accent1">
-              <a:shade val="50000"/>
-            </a:schemeClr>
-          </a:lnRef>
-          <a:fillRef idx="1">
-            <a:schemeClr val="accent1"/>
-          </a:fillRef>
-          <a:effectRef idx="0">
-            <a:schemeClr val="accent1"/>
-          </a:effectRef>
-          <a:fontRef idx="minor">
-            <a:schemeClr val="lt1"/>
-          </a:fontRef>
-        </p:style>
-        <p:txBody>
-          <a:bodyPr rtlCol="0" anchor="ctr"/>
-          <a:lstStyle/>
-          <a:p>
-            <a:pPr algn="ctr"/>
-            <a:r>
-              <a:rPr lang="fr-FR" sz="1000" dirty="0">
-                <a:solidFill>
-                  <a:srgbClr val="0C7391"/>
-                </a:solidFill>
-                <a:latin typeface="Arial Nova" panose="020B0504020202020204" pitchFamily="34" charset="0"/>
-              </a:rPr>
-              <a:t>Carte EPOS</a:t>
             </a:r>
           </a:p>
         </p:txBody>
@@ -19087,7 +19800,7 @@
         </p:nvSpPr>
         <p:spPr>
           <a:xfrm>
-            <a:off x="5389319" y="1525957"/>
+            <a:off x="5518287" y="2229245"/>
             <a:ext cx="1440000" cy="576000"/>
           </a:xfrm>
           <a:prstGeom prst="roundRect">
@@ -19098,7 +19811,7 @@
           <a:noFill/>
           <a:ln w="19050">
             <a:solidFill>
-              <a:srgbClr val="08A559"/>
+              <a:srgbClr val="002060"/>
             </a:solidFill>
           </a:ln>
         </p:spPr>
@@ -19126,7 +19839,7 @@
             <a:r>
               <a:rPr lang="fr-FR" sz="1400" dirty="0">
                 <a:solidFill>
-                  <a:srgbClr val="08A559"/>
+                  <a:srgbClr val="002060"/>
                 </a:solidFill>
                 <a:latin typeface="Arial Nova" panose="020B0504020202020204" pitchFamily="34" charset="0"/>
               </a:rPr>
@@ -19149,8 +19862,8 @@
         </p:nvSpPr>
         <p:spPr>
           <a:xfrm>
-            <a:off x="5389319" y="2319926"/>
-            <a:ext cx="1406281" cy="534390"/>
+            <a:off x="3605539" y="2844896"/>
+            <a:ext cx="1423066" cy="408941"/>
           </a:xfrm>
           <a:prstGeom prst="roundRect">
             <a:avLst>
@@ -19158,11 +19871,11 @@
             </a:avLst>
           </a:prstGeom>
           <a:solidFill>
-            <a:srgbClr val="E8F3E8"/>
+            <a:srgbClr val="DFE3EB"/>
           </a:solidFill>
           <a:ln w="19050">
             <a:solidFill>
-              <a:srgbClr val="E8F3E8"/>
+              <a:srgbClr val="DFE3EB"/>
             </a:solidFill>
           </a:ln>
         </p:spPr>
@@ -19183,591 +19896,37 @@
           </a:fontRef>
         </p:style>
         <p:txBody>
-          <a:bodyPr rtlCol="0" anchor="ctr"/>
+          <a:bodyPr lIns="0" tIns="0" rIns="0" bIns="0" rtlCol="0" anchor="ctr"/>
           <a:lstStyle/>
           <a:p>
             <a:pPr algn="ctr"/>
             <a:r>
-              <a:rPr lang="fr-FR" sz="1200" dirty="0">
+              <a:rPr lang="fr-FR" sz="1000" dirty="0">
                 <a:solidFill>
-                  <a:srgbClr val="08A559"/>
+                  <a:srgbClr val="004F77"/>
                 </a:solidFill>
                 <a:latin typeface="Arial Nova" panose="020B0504020202020204" pitchFamily="34" charset="0"/>
               </a:rPr>
-              <a:t>Carte EPOS</a:t>
-            </a:r>
-          </a:p>
-          <a:p>
-            <a:pPr algn="ctr"/>
-            <a:r>
-              <a:rPr lang="fr-FR" sz="1200" dirty="0">
-                <a:solidFill>
-                  <a:srgbClr val="08A559"/>
-                </a:solidFill>
-                <a:latin typeface="Arial Nova" panose="020B0504020202020204" pitchFamily="34" charset="0"/>
-              </a:rPr>
-              <a:t>PC</a:t>
+              <a:t>Carte de commande EPOS 2</a:t>
             </a:r>
           </a:p>
         </p:txBody>
       </p:sp>
-      <p:sp>
-        <p:nvSpPr>
-          <p:cNvPr id="12" name="Rectangle : coins arrondis 11">
+      <p:cxnSp>
+        <p:nvCxnSpPr>
+          <p:cNvPr id="22" name="Connecteur droit avec flèche 21">
             <a:extLst>
               <a:ext uri="{FF2B5EF4-FFF2-40B4-BE49-F238E27FC236}">
-                <a16:creationId xmlns:a16="http://schemas.microsoft.com/office/drawing/2014/main" id="{8CFBB7BE-C306-859A-CF41-F04DD9BC455C}"/>
+                <a16:creationId xmlns:a16="http://schemas.microsoft.com/office/drawing/2014/main" id="{25CB3708-D27C-9C0F-920D-E2174EF1D3C1}"/>
               </a:ext>
             </a:extLst>
           </p:cNvPr>
-          <p:cNvSpPr/>
-          <p:nvPr/>
-        </p:nvSpPr>
-        <p:spPr>
-          <a:xfrm>
-            <a:off x="1056905" y="3542688"/>
-            <a:ext cx="1440000" cy="540000"/>
-          </a:xfrm>
-          <a:prstGeom prst="roundRect">
-            <a:avLst>
-              <a:gd name="adj" fmla="val 11914"/>
-            </a:avLst>
-          </a:prstGeom>
-          <a:noFill/>
-          <a:ln w="19050">
-            <a:solidFill>
-              <a:srgbClr val="FDAD57"/>
-            </a:solidFill>
-          </a:ln>
-        </p:spPr>
-        <p:style>
-          <a:lnRef idx="2">
-            <a:schemeClr val="accent1">
-              <a:shade val="50000"/>
-            </a:schemeClr>
-          </a:lnRef>
-          <a:fillRef idx="1">
-            <a:schemeClr val="accent1"/>
-          </a:fillRef>
-          <a:effectRef idx="0">
-            <a:schemeClr val="accent1"/>
-          </a:effectRef>
-          <a:fontRef idx="minor">
-            <a:schemeClr val="lt1"/>
-          </a:fontRef>
-        </p:style>
-        <p:txBody>
-          <a:bodyPr rtlCol="0" anchor="ctr"/>
-          <a:lstStyle/>
-          <a:p>
-            <a:pPr algn="ctr"/>
-            <a:r>
-              <a:rPr lang="fr-FR" sz="1400" dirty="0">
-                <a:solidFill>
-                  <a:srgbClr val="FDAD57"/>
-                </a:solidFill>
-                <a:latin typeface="Arial Nova" panose="020B0504020202020204" pitchFamily="34" charset="0"/>
-              </a:rPr>
-              <a:t>Alimenter</a:t>
-            </a:r>
-          </a:p>
-        </p:txBody>
-      </p:sp>
-      <p:sp>
-        <p:nvSpPr>
-          <p:cNvPr id="13" name="Rectangle : coins arrondis 12">
-            <a:extLst>
-              <a:ext uri="{FF2B5EF4-FFF2-40B4-BE49-F238E27FC236}">
-                <a16:creationId xmlns:a16="http://schemas.microsoft.com/office/drawing/2014/main" id="{D364B3FD-91A8-1B5F-5FD3-55E164E3B9AE}"/>
-              </a:ext>
-            </a:extLst>
-          </p:cNvPr>
-          <p:cNvSpPr/>
-          <p:nvPr/>
-        </p:nvSpPr>
-        <p:spPr>
-          <a:xfrm>
-            <a:off x="1056905" y="4237443"/>
-            <a:ext cx="1440000" cy="540000"/>
-          </a:xfrm>
-          <a:prstGeom prst="roundRect">
-            <a:avLst>
-              <a:gd name="adj" fmla="val 11914"/>
-            </a:avLst>
-          </a:prstGeom>
-          <a:solidFill>
-            <a:srgbClr val="FEE6CC"/>
-          </a:solidFill>
-          <a:ln w="19050">
-            <a:solidFill>
-              <a:srgbClr val="FEE6CC"/>
-            </a:solidFill>
-          </a:ln>
-        </p:spPr>
-        <p:style>
-          <a:lnRef idx="2">
-            <a:schemeClr val="accent1">
-              <a:shade val="50000"/>
-            </a:schemeClr>
-          </a:lnRef>
-          <a:fillRef idx="1">
-            <a:schemeClr val="accent1"/>
-          </a:fillRef>
-          <a:effectRef idx="0">
-            <a:schemeClr val="accent1"/>
-          </a:effectRef>
-          <a:fontRef idx="minor">
-            <a:schemeClr val="lt1"/>
-          </a:fontRef>
-        </p:style>
-        <p:txBody>
-          <a:bodyPr rtlCol="0" anchor="ctr"/>
-          <a:lstStyle/>
-          <a:p>
-            <a:pPr algn="ctr"/>
-            <a:r>
-              <a:rPr lang="fr-FR" sz="1200" dirty="0">
-                <a:solidFill>
-                  <a:srgbClr val="FDAD57"/>
-                </a:solidFill>
-                <a:latin typeface="Arial Nova" panose="020B0504020202020204" pitchFamily="34" charset="0"/>
-              </a:rPr>
-              <a:t>Alimentation</a:t>
-            </a:r>
-          </a:p>
-        </p:txBody>
-      </p:sp>
-      <p:sp>
-        <p:nvSpPr>
-          <p:cNvPr id="14" name="Rectangle : coins arrondis 13">
-            <a:extLst>
-              <a:ext uri="{FF2B5EF4-FFF2-40B4-BE49-F238E27FC236}">
-                <a16:creationId xmlns:a16="http://schemas.microsoft.com/office/drawing/2014/main" id="{96A2B729-7EE6-8CA6-72B2-5A16AA5A785A}"/>
-              </a:ext>
-            </a:extLst>
-          </p:cNvPr>
-          <p:cNvSpPr/>
-          <p:nvPr/>
-        </p:nvSpPr>
-        <p:spPr>
-          <a:xfrm>
-            <a:off x="3218894" y="3537925"/>
-            <a:ext cx="1440000" cy="540000"/>
-          </a:xfrm>
-          <a:prstGeom prst="roundRect">
-            <a:avLst>
-              <a:gd name="adj" fmla="val 11914"/>
-            </a:avLst>
-          </a:prstGeom>
-          <a:noFill/>
-          <a:ln w="19050">
-            <a:solidFill>
-              <a:srgbClr val="0C7391"/>
-            </a:solidFill>
-          </a:ln>
-        </p:spPr>
-        <p:style>
-          <a:lnRef idx="2">
-            <a:schemeClr val="accent1">
-              <a:shade val="50000"/>
-            </a:schemeClr>
-          </a:lnRef>
-          <a:fillRef idx="1">
-            <a:schemeClr val="accent1"/>
-          </a:fillRef>
-          <a:effectRef idx="0">
-            <a:schemeClr val="accent1"/>
-          </a:effectRef>
-          <a:fontRef idx="minor">
-            <a:schemeClr val="lt1"/>
-          </a:fontRef>
-        </p:style>
-        <p:txBody>
-          <a:bodyPr rtlCol="0" anchor="ctr"/>
-          <a:lstStyle/>
-          <a:p>
-            <a:pPr algn="ctr"/>
-            <a:r>
-              <a:rPr lang="fr-FR" sz="1400" dirty="0">
-                <a:solidFill>
-                  <a:srgbClr val="0C7391"/>
-                </a:solidFill>
-                <a:latin typeface="Arial Nova" panose="020B0504020202020204" pitchFamily="34" charset="0"/>
-              </a:rPr>
-              <a:t>Distribuer</a:t>
-            </a:r>
-          </a:p>
-        </p:txBody>
-      </p:sp>
-      <p:sp>
-        <p:nvSpPr>
-          <p:cNvPr id="15" name="Rectangle : coins arrondis 14">
-            <a:extLst>
-              <a:ext uri="{FF2B5EF4-FFF2-40B4-BE49-F238E27FC236}">
-                <a16:creationId xmlns:a16="http://schemas.microsoft.com/office/drawing/2014/main" id="{3841B1B6-C546-170C-78BF-906D65F5DAA8}"/>
-              </a:ext>
-            </a:extLst>
-          </p:cNvPr>
-          <p:cNvSpPr/>
-          <p:nvPr/>
-        </p:nvSpPr>
-        <p:spPr>
-          <a:xfrm>
-            <a:off x="3199256" y="4222480"/>
-            <a:ext cx="1440000" cy="572255"/>
-          </a:xfrm>
-          <a:prstGeom prst="roundRect">
-            <a:avLst>
-              <a:gd name="adj" fmla="val 11914"/>
-            </a:avLst>
-          </a:prstGeom>
-          <a:solidFill>
-            <a:srgbClr val="9EC7D3"/>
-          </a:solidFill>
-          <a:ln w="19050">
-            <a:solidFill>
-              <a:srgbClr val="9EC7D3"/>
-            </a:solidFill>
-          </a:ln>
-        </p:spPr>
-        <p:style>
-          <a:lnRef idx="2">
-            <a:schemeClr val="accent1">
-              <a:shade val="50000"/>
-            </a:schemeClr>
-          </a:lnRef>
-          <a:fillRef idx="1">
-            <a:schemeClr val="accent1"/>
-          </a:fillRef>
-          <a:effectRef idx="0">
-            <a:schemeClr val="accent1"/>
-          </a:effectRef>
-          <a:fontRef idx="minor">
-            <a:schemeClr val="lt1"/>
-          </a:fontRef>
-        </p:style>
-        <p:txBody>
-          <a:bodyPr rtlCol="0" anchor="ctr"/>
-          <a:lstStyle/>
-          <a:p>
-            <a:pPr algn="ctr"/>
-            <a:r>
-              <a:rPr lang="fr-FR" sz="1100" dirty="0">
-                <a:solidFill>
-                  <a:srgbClr val="0C7391"/>
-                </a:solidFill>
-                <a:latin typeface="Arial Nova" panose="020B0504020202020204" pitchFamily="34" charset="0"/>
-              </a:rPr>
-              <a:t>Hacheur</a:t>
-            </a:r>
-            <a:endParaRPr lang="fr-FR" dirty="0">
-              <a:solidFill>
-                <a:srgbClr val="0C7391"/>
-              </a:solidFill>
-              <a:latin typeface="Arial Nova" panose="020B0504020202020204" pitchFamily="34" charset="0"/>
-            </a:endParaRPr>
-          </a:p>
-        </p:txBody>
-      </p:sp>
-      <p:sp>
-        <p:nvSpPr>
-          <p:cNvPr id="16" name="Rectangle : coins arrondis 15">
-            <a:extLst>
-              <a:ext uri="{FF2B5EF4-FFF2-40B4-BE49-F238E27FC236}">
-                <a16:creationId xmlns:a16="http://schemas.microsoft.com/office/drawing/2014/main" id="{B8181AD4-9AB8-CA7B-EFBF-8B9CD4369264}"/>
-              </a:ext>
-            </a:extLst>
-          </p:cNvPr>
-          <p:cNvSpPr/>
-          <p:nvPr/>
-        </p:nvSpPr>
-        <p:spPr>
-          <a:xfrm>
-            <a:off x="5380883" y="3542688"/>
-            <a:ext cx="1440000" cy="540000"/>
-          </a:xfrm>
-          <a:prstGeom prst="roundRect">
-            <a:avLst>
-              <a:gd name="adj" fmla="val 11914"/>
-            </a:avLst>
-          </a:prstGeom>
-          <a:noFill/>
-          <a:ln w="19050">
-            <a:solidFill>
-              <a:srgbClr val="68348B"/>
-            </a:solidFill>
-          </a:ln>
-        </p:spPr>
-        <p:style>
-          <a:lnRef idx="2">
-            <a:schemeClr val="accent1">
-              <a:shade val="50000"/>
-            </a:schemeClr>
-          </a:lnRef>
-          <a:fillRef idx="1">
-            <a:schemeClr val="accent1"/>
-          </a:fillRef>
-          <a:effectRef idx="0">
-            <a:schemeClr val="accent1"/>
-          </a:effectRef>
-          <a:fontRef idx="minor">
-            <a:schemeClr val="lt1"/>
-          </a:fontRef>
-        </p:style>
-        <p:txBody>
-          <a:bodyPr rtlCol="0" anchor="ctr"/>
-          <a:lstStyle/>
-          <a:p>
-            <a:pPr algn="ctr"/>
-            <a:r>
-              <a:rPr lang="fr-FR" sz="1400" dirty="0">
-                <a:solidFill>
-                  <a:srgbClr val="68348B"/>
-                </a:solidFill>
-                <a:latin typeface="Arial Nova" panose="020B0504020202020204" pitchFamily="34" charset="0"/>
-              </a:rPr>
-              <a:t>Convertir</a:t>
-            </a:r>
-          </a:p>
-        </p:txBody>
-      </p:sp>
-      <p:sp>
-        <p:nvSpPr>
-          <p:cNvPr id="17" name="Rectangle : coins arrondis 16">
-            <a:extLst>
-              <a:ext uri="{FF2B5EF4-FFF2-40B4-BE49-F238E27FC236}">
-                <a16:creationId xmlns:a16="http://schemas.microsoft.com/office/drawing/2014/main" id="{7E462E27-42D7-734B-5E6F-B78EF40987B6}"/>
-              </a:ext>
-            </a:extLst>
-          </p:cNvPr>
-          <p:cNvSpPr/>
-          <p:nvPr/>
-        </p:nvSpPr>
-        <p:spPr>
-          <a:xfrm>
-            <a:off x="5389319" y="4223146"/>
-            <a:ext cx="1440000" cy="540000"/>
-          </a:xfrm>
-          <a:prstGeom prst="roundRect">
-            <a:avLst>
-              <a:gd name="adj" fmla="val 11914"/>
-            </a:avLst>
-          </a:prstGeom>
-          <a:solidFill>
-            <a:srgbClr val="C3AED1"/>
-          </a:solidFill>
-          <a:ln w="19050">
-            <a:solidFill>
-              <a:srgbClr val="C3AED1"/>
-            </a:solidFill>
-          </a:ln>
-        </p:spPr>
-        <p:style>
-          <a:lnRef idx="2">
-            <a:schemeClr val="accent1">
-              <a:shade val="50000"/>
-            </a:schemeClr>
-          </a:lnRef>
-          <a:fillRef idx="1">
-            <a:schemeClr val="accent1"/>
-          </a:fillRef>
-          <a:effectRef idx="0">
-            <a:schemeClr val="accent1"/>
-          </a:effectRef>
-          <a:fontRef idx="minor">
-            <a:schemeClr val="lt1"/>
-          </a:fontRef>
-        </p:style>
-        <p:txBody>
-          <a:bodyPr rtlCol="0" anchor="ctr"/>
-          <a:lstStyle/>
-          <a:p>
-            <a:pPr algn="ctr"/>
-            <a:r>
-              <a:rPr lang="fr-FR" sz="1200" dirty="0">
-                <a:solidFill>
-                  <a:srgbClr val="68348B"/>
-                </a:solidFill>
-                <a:latin typeface="Arial Nova" panose="020B0504020202020204" pitchFamily="34" charset="0"/>
-              </a:rPr>
-              <a:t>Moteur à courant continu</a:t>
-            </a:r>
-          </a:p>
-        </p:txBody>
-      </p:sp>
-      <p:sp>
-        <p:nvSpPr>
-          <p:cNvPr id="18" name="Rectangle : coins arrondis 17">
-            <a:extLst>
-              <a:ext uri="{FF2B5EF4-FFF2-40B4-BE49-F238E27FC236}">
-                <a16:creationId xmlns:a16="http://schemas.microsoft.com/office/drawing/2014/main" id="{AA76E29F-1BCE-DD76-499C-CE8F3E850A8E}"/>
-              </a:ext>
-            </a:extLst>
-          </p:cNvPr>
-          <p:cNvSpPr/>
-          <p:nvPr/>
-        </p:nvSpPr>
-        <p:spPr>
-          <a:xfrm>
-            <a:off x="7542872" y="3545795"/>
-            <a:ext cx="1365662" cy="534390"/>
-          </a:xfrm>
-          <a:prstGeom prst="roundRect">
-            <a:avLst>
-              <a:gd name="adj" fmla="val 11914"/>
-            </a:avLst>
-          </a:prstGeom>
-          <a:noFill/>
-          <a:ln w="19050">
-            <a:solidFill>
-              <a:srgbClr val="EE685D"/>
-            </a:solidFill>
-          </a:ln>
-        </p:spPr>
-        <p:style>
-          <a:lnRef idx="2">
-            <a:schemeClr val="accent1">
-              <a:shade val="50000"/>
-            </a:schemeClr>
-          </a:lnRef>
-          <a:fillRef idx="1">
-            <a:schemeClr val="accent1"/>
-          </a:fillRef>
-          <a:effectRef idx="0">
-            <a:schemeClr val="accent1"/>
-          </a:effectRef>
-          <a:fontRef idx="minor">
-            <a:schemeClr val="lt1"/>
-          </a:fontRef>
-        </p:style>
-        <p:txBody>
-          <a:bodyPr rtlCol="0" anchor="ctr"/>
-          <a:lstStyle/>
-          <a:p>
-            <a:pPr algn="ctr"/>
-            <a:r>
-              <a:rPr lang="fr-FR" sz="1400" dirty="0">
-                <a:solidFill>
-                  <a:srgbClr val="EE685D"/>
-                </a:solidFill>
-                <a:latin typeface="Arial Nova" panose="020B0504020202020204" pitchFamily="34" charset="0"/>
-              </a:rPr>
-              <a:t>Transmettre</a:t>
-            </a:r>
-          </a:p>
-        </p:txBody>
-      </p:sp>
-      <p:sp>
-        <p:nvSpPr>
-          <p:cNvPr id="19" name="Rectangle : coins arrondis 18">
-            <a:extLst>
-              <a:ext uri="{FF2B5EF4-FFF2-40B4-BE49-F238E27FC236}">
-                <a16:creationId xmlns:a16="http://schemas.microsoft.com/office/drawing/2014/main" id="{A66FC087-C9BC-9FD1-6C13-AD7571852AD4}"/>
-              </a:ext>
-            </a:extLst>
-          </p:cNvPr>
-          <p:cNvSpPr/>
-          <p:nvPr/>
-        </p:nvSpPr>
-        <p:spPr>
-          <a:xfrm>
-            <a:off x="7549319" y="4202642"/>
-            <a:ext cx="1365662" cy="652851"/>
-          </a:xfrm>
-          <a:prstGeom prst="roundRect">
-            <a:avLst>
-              <a:gd name="adj" fmla="val 11914"/>
-            </a:avLst>
-          </a:prstGeom>
-          <a:solidFill>
-            <a:srgbClr val="F7B8B3"/>
-          </a:solidFill>
-          <a:ln w="19050">
-            <a:solidFill>
-              <a:srgbClr val="F7B8B3"/>
-            </a:solidFill>
-          </a:ln>
-        </p:spPr>
-        <p:style>
-          <a:lnRef idx="2">
-            <a:schemeClr val="accent1">
-              <a:shade val="50000"/>
-            </a:schemeClr>
-          </a:lnRef>
-          <a:fillRef idx="1">
-            <a:schemeClr val="accent1"/>
-          </a:fillRef>
-          <a:effectRef idx="0">
-            <a:schemeClr val="accent1"/>
-          </a:effectRef>
-          <a:fontRef idx="minor">
-            <a:schemeClr val="lt1"/>
-          </a:fontRef>
-        </p:style>
-        <p:txBody>
-          <a:bodyPr rtlCol="0" anchor="ctr"/>
-          <a:lstStyle/>
-          <a:p>
-            <a:pPr algn="ctr"/>
-            <a:r>
-              <a:rPr lang="fr-FR" sz="900" dirty="0">
-                <a:solidFill>
-                  <a:srgbClr val="EE685D"/>
-                </a:solidFill>
-                <a:latin typeface="Arial Nova" panose="020B0504020202020204" pitchFamily="34" charset="0"/>
-              </a:rPr>
-              <a:t>Train épicycloïdal</a:t>
-            </a:r>
-          </a:p>
-        </p:txBody>
-      </p:sp>
-      <p:pic>
-        <p:nvPicPr>
-          <p:cNvPr id="20" name="Image 19">
-            <a:extLst>
-              <a:ext uri="{FF2B5EF4-FFF2-40B4-BE49-F238E27FC236}">
-                <a16:creationId xmlns:a16="http://schemas.microsoft.com/office/drawing/2014/main" id="{7282EFC0-8E54-A4E0-6953-44E98A7B8B60}"/>
-              </a:ext>
-            </a:extLst>
-          </p:cNvPr>
-          <p:cNvPicPr>
-            <a:picLocks noChangeAspect="1"/>
-          </p:cNvPicPr>
-          <p:nvPr/>
-        </p:nvPicPr>
-        <p:blipFill>
-          <a:blip r:embed="rId2"/>
-          <a:stretch>
-            <a:fillRect/>
-          </a:stretch>
-        </p:blipFill>
-        <p:spPr>
-          <a:xfrm>
-            <a:off x="2624826" y="1603805"/>
-            <a:ext cx="434918" cy="152010"/>
-          </a:xfrm>
-          <a:prstGeom prst="rect">
-            <a:avLst/>
-          </a:prstGeom>
-        </p:spPr>
-      </p:pic>
-      <p:cxnSp>
-        <p:nvCxnSpPr>
-          <p:cNvPr id="21" name="Connecteur droit avec flèche 20">
-            <a:extLst>
-              <a:ext uri="{FF2B5EF4-FFF2-40B4-BE49-F238E27FC236}">
-                <a16:creationId xmlns:a16="http://schemas.microsoft.com/office/drawing/2014/main" id="{BE599621-6A35-D218-9184-0073520A41FC}"/>
-              </a:ext>
-            </a:extLst>
-          </p:cNvPr>
-          <p:cNvCxnSpPr>
-            <a:cxnSpLocks/>
-          </p:cNvCxnSpPr>
+          <p:cNvCxnSpPr/>
           <p:nvPr/>
         </p:nvCxnSpPr>
         <p:spPr>
           <a:xfrm flipV="1">
-            <a:off x="2496905" y="1827907"/>
+            <a:off x="349319" y="1706258"/>
             <a:ext cx="720000" cy="1536"/>
           </a:xfrm>
           <a:prstGeom prst="straightConnector1">
@@ -19797,82 +19956,10 @@
       </p:cxnSp>
       <p:cxnSp>
         <p:nvCxnSpPr>
-          <p:cNvPr id="22" name="Connecteur droit avec flèche 21">
+          <p:cNvPr id="46" name="Connecteur : en angle 45">
             <a:extLst>
               <a:ext uri="{FF2B5EF4-FFF2-40B4-BE49-F238E27FC236}">
-                <a16:creationId xmlns:a16="http://schemas.microsoft.com/office/drawing/2014/main" id="{25CB3708-D27C-9C0F-920D-E2174EF1D3C1}"/>
-              </a:ext>
-            </a:extLst>
-          </p:cNvPr>
-          <p:cNvCxnSpPr/>
-          <p:nvPr/>
-        </p:nvCxnSpPr>
-        <p:spPr>
-          <a:xfrm flipV="1">
-            <a:off x="4669319" y="1813957"/>
-            <a:ext cx="720000" cy="1536"/>
-          </a:xfrm>
-          <a:prstGeom prst="straightConnector1">
-            <a:avLst/>
-          </a:prstGeom>
-          <a:ln w="25400" cap="rnd">
-            <a:solidFill>
-              <a:srgbClr val="004F77"/>
-            </a:solidFill>
-            <a:tailEnd type="triangle" w="med" len="lg"/>
-          </a:ln>
-        </p:spPr>
-        <p:style>
-          <a:lnRef idx="1">
-            <a:schemeClr val="accent1"/>
-          </a:lnRef>
-          <a:fillRef idx="0">
-            <a:schemeClr val="accent1"/>
-          </a:fillRef>
-          <a:effectRef idx="0">
-            <a:schemeClr val="accent1"/>
-          </a:effectRef>
-          <a:fontRef idx="minor">
-            <a:schemeClr val="tx1"/>
-          </a:fontRef>
-        </p:style>
-      </p:cxnSp>
-      <p:pic>
-        <p:nvPicPr>
-          <p:cNvPr id="23" name="Image 22">
-            <a:extLst>
-              <a:ext uri="{FF2B5EF4-FFF2-40B4-BE49-F238E27FC236}">
-                <a16:creationId xmlns:a16="http://schemas.microsoft.com/office/drawing/2014/main" id="{6B85577F-75F2-AC91-9B29-7674830D4F93}"/>
-              </a:ext>
-            </a:extLst>
-          </p:cNvPr>
-          <p:cNvPicPr>
-            <a:picLocks noChangeAspect="1"/>
-          </p:cNvPicPr>
-          <p:nvPr/>
-        </p:nvPicPr>
-        <p:blipFill>
-          <a:blip r:embed="rId3"/>
-          <a:stretch>
-            <a:fillRect/>
-          </a:stretch>
-        </p:blipFill>
-        <p:spPr>
-          <a:xfrm>
-            <a:off x="4838894" y="1418598"/>
-            <a:ext cx="360000" cy="360000"/>
-          </a:xfrm>
-          <a:prstGeom prst="rect">
-            <a:avLst/>
-          </a:prstGeom>
-        </p:spPr>
-      </p:pic>
-      <p:cxnSp>
-        <p:nvCxnSpPr>
-          <p:cNvPr id="24" name="Connecteur droit avec flèche 23">
-            <a:extLst>
-              <a:ext uri="{FF2B5EF4-FFF2-40B4-BE49-F238E27FC236}">
-                <a16:creationId xmlns:a16="http://schemas.microsoft.com/office/drawing/2014/main" id="{4D3E9C84-1558-D9D2-B9AE-51FFDFD2ACAC}"/>
+                <a16:creationId xmlns:a16="http://schemas.microsoft.com/office/drawing/2014/main" id="{C9DF5005-6531-4D0B-0B32-A0A73479B4F0}"/>
               </a:ext>
             </a:extLst>
           </p:cNvPr>
@@ -19882,373 +19969,19 @@
           <p:nvPr/>
         </p:nvCxnSpPr>
         <p:spPr>
-          <a:xfrm flipV="1">
-            <a:off x="2509319" y="3811152"/>
-            <a:ext cx="720000" cy="1536"/>
+          <a:xfrm flipH="1">
+            <a:off x="4298510" y="2646123"/>
+            <a:ext cx="719999" cy="1731991"/>
           </a:xfrm>
-          <a:prstGeom prst="straightConnector1">
-            <a:avLst/>
-          </a:prstGeom>
-          <a:ln w="25400" cap="rnd">
-            <a:solidFill>
-              <a:srgbClr val="FDAD57"/>
-            </a:solidFill>
-            <a:tailEnd type="triangle" w="med" len="lg"/>
-          </a:ln>
-        </p:spPr>
-        <p:style>
-          <a:lnRef idx="1">
-            <a:schemeClr val="accent1"/>
-          </a:lnRef>
-          <a:fillRef idx="0">
-            <a:schemeClr val="accent1"/>
-          </a:fillRef>
-          <a:effectRef idx="0">
-            <a:schemeClr val="accent1"/>
-          </a:effectRef>
-          <a:fontRef idx="minor">
-            <a:schemeClr val="tx1"/>
-          </a:fontRef>
-        </p:style>
-      </p:cxnSp>
-      <p:grpSp>
-        <p:nvGrpSpPr>
-          <p:cNvPr id="25" name="Groupe 24">
-            <a:extLst>
-              <a:ext uri="{FF2B5EF4-FFF2-40B4-BE49-F238E27FC236}">
-                <a16:creationId xmlns:a16="http://schemas.microsoft.com/office/drawing/2014/main" id="{F7A18018-C728-6B01-3037-0421AF781FBB}"/>
-              </a:ext>
-            </a:extLst>
-          </p:cNvPr>
-          <p:cNvGrpSpPr/>
-          <p:nvPr/>
-        </p:nvGrpSpPr>
-        <p:grpSpPr>
-          <a:xfrm>
-            <a:off x="1596905" y="3980066"/>
-            <a:ext cx="360000" cy="360000"/>
-            <a:chOff x="4197400" y="3547713"/>
-            <a:chExt cx="1800000" cy="1800000"/>
-          </a:xfrm>
-        </p:grpSpPr>
-        <p:sp>
-          <p:nvSpPr>
-            <p:cNvPr id="26" name="Ellipse 25">
-              <a:extLst>
-                <a:ext uri="{FF2B5EF4-FFF2-40B4-BE49-F238E27FC236}">
-                  <a16:creationId xmlns:a16="http://schemas.microsoft.com/office/drawing/2014/main" id="{AF615AC5-8CF6-FF34-1EF7-5C5D2FE5B9E8}"/>
-                </a:ext>
-              </a:extLst>
-            </p:cNvPr>
-            <p:cNvSpPr/>
-            <p:nvPr/>
-          </p:nvSpPr>
-          <p:spPr>
-            <a:xfrm>
-              <a:off x="4197400" y="3547713"/>
-              <a:ext cx="1800000" cy="1800000"/>
-            </a:xfrm>
-            <a:prstGeom prst="ellipse">
-              <a:avLst/>
-            </a:prstGeom>
-            <a:solidFill>
-              <a:srgbClr val="FFB25A"/>
-            </a:solidFill>
-            <a:ln>
-              <a:noFill/>
-            </a:ln>
-          </p:spPr>
-          <p:style>
-            <a:lnRef idx="2">
-              <a:schemeClr val="accent1">
-                <a:shade val="50000"/>
-              </a:schemeClr>
-            </a:lnRef>
-            <a:fillRef idx="1">
-              <a:schemeClr val="accent1"/>
-            </a:fillRef>
-            <a:effectRef idx="0">
-              <a:schemeClr val="accent1"/>
-            </a:effectRef>
-            <a:fontRef idx="minor">
-              <a:schemeClr val="lt1"/>
-            </a:fontRef>
-          </p:style>
-          <p:txBody>
-            <a:bodyPr rtlCol="0" anchor="ctr"/>
-            <a:lstStyle/>
-            <a:p>
-              <a:pPr algn="ctr"/>
-              <a:endParaRPr lang="fr-FR"/>
-            </a:p>
-          </p:txBody>
-        </p:sp>
-        <p:pic>
-          <p:nvPicPr>
-            <p:cNvPr id="27" name="Image 26">
-              <a:extLst>
-                <a:ext uri="{FF2B5EF4-FFF2-40B4-BE49-F238E27FC236}">
-                  <a16:creationId xmlns:a16="http://schemas.microsoft.com/office/drawing/2014/main" id="{D99F6707-A222-D5E1-C4A9-E878E9F04E6C}"/>
-                </a:ext>
-              </a:extLst>
-            </p:cNvPr>
-            <p:cNvPicPr>
-              <a:picLocks noChangeAspect="1"/>
-            </p:cNvPicPr>
-            <p:nvPr/>
-          </p:nvPicPr>
-          <p:blipFill>
-            <a:blip r:embed="rId4"/>
-            <a:stretch>
-              <a:fillRect/>
-            </a:stretch>
-          </p:blipFill>
-          <p:spPr>
-            <a:xfrm>
-              <a:off x="4526157" y="3876470"/>
-              <a:ext cx="1142486" cy="1142486"/>
-            </a:xfrm>
-            <a:prstGeom prst="rect">
-              <a:avLst/>
-            </a:prstGeom>
-          </p:spPr>
-        </p:pic>
-      </p:grpSp>
-      <p:pic>
-        <p:nvPicPr>
-          <p:cNvPr id="28" name="Image 27">
-            <a:extLst>
-              <a:ext uri="{FF2B5EF4-FFF2-40B4-BE49-F238E27FC236}">
-                <a16:creationId xmlns:a16="http://schemas.microsoft.com/office/drawing/2014/main" id="{35145E60-25D8-7A86-65AE-7F3729EC7848}"/>
-              </a:ext>
-            </a:extLst>
-          </p:cNvPr>
-          <p:cNvPicPr>
-            <a:picLocks noChangeAspect="1"/>
-          </p:cNvPicPr>
-          <p:nvPr/>
-        </p:nvPicPr>
-        <p:blipFill>
-          <a:blip r:embed="rId5"/>
-          <a:stretch>
-            <a:fillRect/>
-          </a:stretch>
-        </p:blipFill>
-        <p:spPr>
-          <a:xfrm>
-            <a:off x="498044" y="3666221"/>
-            <a:ext cx="360000" cy="360000"/>
-          </a:xfrm>
-          <a:prstGeom prst="rect">
-            <a:avLst/>
-          </a:prstGeom>
-        </p:spPr>
-      </p:pic>
-      <p:pic>
-        <p:nvPicPr>
-          <p:cNvPr id="29" name="Image 28">
-            <a:extLst>
-              <a:ext uri="{FF2B5EF4-FFF2-40B4-BE49-F238E27FC236}">
-                <a16:creationId xmlns:a16="http://schemas.microsoft.com/office/drawing/2014/main" id="{3C7DD139-EB5F-1D13-171E-251FB77C6B32}"/>
-              </a:ext>
-            </a:extLst>
-          </p:cNvPr>
-          <p:cNvPicPr>
-            <a:picLocks noChangeAspect="1"/>
-          </p:cNvPicPr>
-          <p:nvPr/>
-        </p:nvPicPr>
-        <p:blipFill>
-          <a:blip r:embed="rId5"/>
-          <a:stretch>
-            <a:fillRect/>
-          </a:stretch>
-        </p:blipFill>
-        <p:spPr>
-          <a:xfrm>
-            <a:off x="2676905" y="3393409"/>
-            <a:ext cx="360000" cy="360000"/>
-          </a:xfrm>
-          <a:prstGeom prst="rect">
-            <a:avLst/>
-          </a:prstGeom>
-        </p:spPr>
-      </p:pic>
-      <p:cxnSp>
-        <p:nvCxnSpPr>
-          <p:cNvPr id="34" name="Connecteur droit avec flèche 33">
-            <a:extLst>
-              <a:ext uri="{FF2B5EF4-FFF2-40B4-BE49-F238E27FC236}">
-                <a16:creationId xmlns:a16="http://schemas.microsoft.com/office/drawing/2014/main" id="{6E52C4D0-B55B-30AA-F92B-6E09F0A4D9C9}"/>
-              </a:ext>
-            </a:extLst>
-          </p:cNvPr>
-          <p:cNvCxnSpPr>
-            <a:cxnSpLocks/>
-          </p:cNvCxnSpPr>
-          <p:nvPr/>
-        </p:nvCxnSpPr>
-        <p:spPr>
-          <a:xfrm flipV="1">
-            <a:off x="4669319" y="3798320"/>
-            <a:ext cx="720000" cy="1536"/>
-          </a:xfrm>
-          <a:prstGeom prst="straightConnector1">
-            <a:avLst/>
-          </a:prstGeom>
-          <a:ln w="25400" cap="rnd">
-            <a:solidFill>
-              <a:srgbClr val="0C7391"/>
-            </a:solidFill>
-            <a:tailEnd type="triangle" w="med" len="lg"/>
-          </a:ln>
-        </p:spPr>
-        <p:style>
-          <a:lnRef idx="1">
-            <a:schemeClr val="accent1"/>
-          </a:lnRef>
-          <a:fillRef idx="0">
-            <a:schemeClr val="accent1"/>
-          </a:fillRef>
-          <a:effectRef idx="0">
-            <a:schemeClr val="accent1"/>
-          </a:effectRef>
-          <a:fontRef idx="minor">
-            <a:schemeClr val="tx1"/>
-          </a:fontRef>
-        </p:style>
-      </p:cxnSp>
-      <p:pic>
-        <p:nvPicPr>
-          <p:cNvPr id="35" name="Image 34">
-            <a:extLst>
-              <a:ext uri="{FF2B5EF4-FFF2-40B4-BE49-F238E27FC236}">
-                <a16:creationId xmlns:a16="http://schemas.microsoft.com/office/drawing/2014/main" id="{F31071D2-3D9A-9512-E018-EA9EA1D5A07B}"/>
-              </a:ext>
-            </a:extLst>
-          </p:cNvPr>
-          <p:cNvPicPr>
-            <a:picLocks noChangeAspect="1"/>
-          </p:cNvPicPr>
-          <p:nvPr/>
-        </p:nvPicPr>
-        <p:blipFill>
-          <a:blip r:embed="rId5"/>
-          <a:stretch>
-            <a:fillRect/>
-          </a:stretch>
-        </p:blipFill>
-        <p:spPr>
-          <a:xfrm>
-            <a:off x="4838894" y="3393409"/>
-            <a:ext cx="360000" cy="360000"/>
-          </a:xfrm>
-          <a:prstGeom prst="rect">
-            <a:avLst/>
-          </a:prstGeom>
-        </p:spPr>
-      </p:pic>
-      <p:cxnSp>
-        <p:nvCxnSpPr>
-          <p:cNvPr id="39" name="Connecteur droit avec flèche 38">
-            <a:extLst>
-              <a:ext uri="{FF2B5EF4-FFF2-40B4-BE49-F238E27FC236}">
-                <a16:creationId xmlns:a16="http://schemas.microsoft.com/office/drawing/2014/main" id="{75B4C387-2DFC-8DD6-0817-E4B93F7F3F85}"/>
-              </a:ext>
-            </a:extLst>
-          </p:cNvPr>
-          <p:cNvCxnSpPr>
-            <a:cxnSpLocks/>
-          </p:cNvCxnSpPr>
-          <p:nvPr/>
-        </p:nvCxnSpPr>
-        <p:spPr>
-          <a:xfrm flipV="1">
-            <a:off x="6829319" y="3807925"/>
-            <a:ext cx="720000" cy="1536"/>
-          </a:xfrm>
-          <a:prstGeom prst="straightConnector1">
-            <a:avLst/>
-          </a:prstGeom>
-          <a:ln w="25400" cap="rnd">
-            <a:solidFill>
-              <a:srgbClr val="68348B"/>
-            </a:solidFill>
-            <a:tailEnd type="triangle" w="med" len="lg"/>
-          </a:ln>
-        </p:spPr>
-        <p:style>
-          <a:lnRef idx="1">
-            <a:schemeClr val="accent1"/>
-          </a:lnRef>
-          <a:fillRef idx="0">
-            <a:schemeClr val="accent1"/>
-          </a:fillRef>
-          <a:effectRef idx="0">
-            <a:schemeClr val="accent1"/>
-          </a:effectRef>
-          <a:fontRef idx="minor">
-            <a:schemeClr val="tx1"/>
-          </a:fontRef>
-        </p:style>
-      </p:cxnSp>
-      <p:pic>
-        <p:nvPicPr>
-          <p:cNvPr id="43" name="Image 42">
-            <a:extLst>
-              <a:ext uri="{FF2B5EF4-FFF2-40B4-BE49-F238E27FC236}">
-                <a16:creationId xmlns:a16="http://schemas.microsoft.com/office/drawing/2014/main" id="{F1B5964F-3473-92A5-6A3A-F03DA766A90A}"/>
-              </a:ext>
-            </a:extLst>
-          </p:cNvPr>
-          <p:cNvPicPr>
-            <a:picLocks noChangeAspect="1"/>
-          </p:cNvPicPr>
-          <p:nvPr/>
-        </p:nvPicPr>
-        <p:blipFill>
-          <a:blip r:embed="rId6"/>
-          <a:stretch>
-            <a:fillRect/>
-          </a:stretch>
-        </p:blipFill>
-        <p:spPr>
-          <a:xfrm>
-            <a:off x="6993108" y="3418676"/>
-            <a:ext cx="360000" cy="360000"/>
-          </a:xfrm>
-          <a:prstGeom prst="rect">
-            <a:avLst/>
-          </a:prstGeom>
-        </p:spPr>
-      </p:pic>
-      <p:cxnSp>
-        <p:nvCxnSpPr>
-          <p:cNvPr id="44" name="Connecteur : en angle 43">
-            <a:extLst>
-              <a:ext uri="{FF2B5EF4-FFF2-40B4-BE49-F238E27FC236}">
-                <a16:creationId xmlns:a16="http://schemas.microsoft.com/office/drawing/2014/main" id="{2C5943AA-979A-103D-FC4E-264A925A4FF0}"/>
-              </a:ext>
-            </a:extLst>
-          </p:cNvPr>
-          <p:cNvCxnSpPr>
-            <a:cxnSpLocks/>
-            <a:stCxn id="8" idx="3"/>
-            <a:endCxn id="45" idx="0"/>
-          </p:cNvCxnSpPr>
-          <p:nvPr/>
-        </p:nvCxnSpPr>
-        <p:spPr>
-          <a:xfrm>
-            <a:off x="4669319" y="1818298"/>
-            <a:ext cx="131551" cy="1176476"/>
-          </a:xfrm>
-          <a:prstGeom prst="bentConnector2">
-            <a:avLst/>
+          <a:prstGeom prst="bentConnector4">
+            <a:avLst>
+              <a:gd name="adj1" fmla="val -31750"/>
+              <a:gd name="adj2" fmla="val 57794"/>
+            </a:avLst>
           </a:prstGeom>
           <a:ln w="25400">
             <a:solidFill>
-              <a:srgbClr val="08A559"/>
+              <a:srgbClr val="002060"/>
             </a:solidFill>
             <a:headEnd type="none"/>
             <a:tailEnd type="triangle"/>
@@ -20269,175 +20002,6 @@
           </a:fontRef>
         </p:style>
       </p:cxnSp>
-      <p:sp>
-        <p:nvSpPr>
-          <p:cNvPr id="45" name="Rectangle : coins arrondis 44">
-            <a:extLst>
-              <a:ext uri="{FF2B5EF4-FFF2-40B4-BE49-F238E27FC236}">
-                <a16:creationId xmlns:a16="http://schemas.microsoft.com/office/drawing/2014/main" id="{4EDA86AC-B60C-0765-FBC6-4E7119B8D620}"/>
-              </a:ext>
-            </a:extLst>
-          </p:cNvPr>
-          <p:cNvSpPr/>
-          <p:nvPr/>
-        </p:nvSpPr>
-        <p:spPr>
-          <a:xfrm>
-            <a:off x="4097729" y="2994774"/>
-            <a:ext cx="1406281" cy="331358"/>
-          </a:xfrm>
-          <a:prstGeom prst="roundRect">
-            <a:avLst>
-              <a:gd name="adj" fmla="val 11914"/>
-            </a:avLst>
-          </a:prstGeom>
-          <a:solidFill>
-            <a:srgbClr val="08A559"/>
-          </a:solidFill>
-          <a:ln w="19050">
-            <a:noFill/>
-          </a:ln>
-        </p:spPr>
-        <p:style>
-          <a:lnRef idx="2">
-            <a:schemeClr val="accent1">
-              <a:shade val="50000"/>
-            </a:schemeClr>
-          </a:lnRef>
-          <a:fillRef idx="1">
-            <a:schemeClr val="accent1"/>
-          </a:fillRef>
-          <a:effectRef idx="0">
-            <a:schemeClr val="accent1"/>
-          </a:effectRef>
-          <a:fontRef idx="minor">
-            <a:schemeClr val="lt1"/>
-          </a:fontRef>
-        </p:style>
-        <p:txBody>
-          <a:bodyPr rtlCol="0" anchor="ctr"/>
-          <a:lstStyle/>
-          <a:p>
-            <a:pPr algn="ctr"/>
-            <a:r>
-              <a:rPr lang="fr-FR" sz="1200" dirty="0">
-                <a:solidFill>
-                  <a:schemeClr val="bg1"/>
-                </a:solidFill>
-                <a:latin typeface="Arial Nova" panose="020B0504020202020204" pitchFamily="34" charset="0"/>
-              </a:rPr>
-              <a:t>Ordres (PWM)</a:t>
-            </a:r>
-          </a:p>
-        </p:txBody>
-      </p:sp>
-      <p:cxnSp>
-        <p:nvCxnSpPr>
-          <p:cNvPr id="46" name="Connecteur : en angle 45">
-            <a:extLst>
-              <a:ext uri="{FF2B5EF4-FFF2-40B4-BE49-F238E27FC236}">
-                <a16:creationId xmlns:a16="http://schemas.microsoft.com/office/drawing/2014/main" id="{C9DF5005-6531-4D0B-0B32-A0A73479B4F0}"/>
-              </a:ext>
-            </a:extLst>
-          </p:cNvPr>
-          <p:cNvCxnSpPr>
-            <a:cxnSpLocks/>
-            <a:stCxn id="45" idx="1"/>
-            <a:endCxn id="14" idx="0"/>
-          </p:cNvCxnSpPr>
-          <p:nvPr/>
-        </p:nvCxnSpPr>
-        <p:spPr>
-          <a:xfrm rot="10800000" flipV="1">
-            <a:off x="3938895" y="3160453"/>
-            <a:ext cx="158835" cy="377472"/>
-          </a:xfrm>
-          <a:prstGeom prst="bentConnector2">
-            <a:avLst/>
-          </a:prstGeom>
-          <a:ln w="25400">
-            <a:solidFill>
-              <a:srgbClr val="08A559"/>
-            </a:solidFill>
-            <a:headEnd type="none"/>
-            <a:tailEnd type="triangle"/>
-          </a:ln>
-        </p:spPr>
-        <p:style>
-          <a:lnRef idx="1">
-            <a:schemeClr val="accent1"/>
-          </a:lnRef>
-          <a:fillRef idx="0">
-            <a:schemeClr val="accent1"/>
-          </a:fillRef>
-          <a:effectRef idx="0">
-            <a:schemeClr val="accent1"/>
-          </a:effectRef>
-          <a:fontRef idx="minor">
-            <a:schemeClr val="tx1"/>
-          </a:fontRef>
-        </p:style>
-      </p:cxnSp>
-      <p:pic>
-        <p:nvPicPr>
-          <p:cNvPr id="47" name="Image 46">
-            <a:extLst>
-              <a:ext uri="{FF2B5EF4-FFF2-40B4-BE49-F238E27FC236}">
-                <a16:creationId xmlns:a16="http://schemas.microsoft.com/office/drawing/2014/main" id="{5684C887-250C-3EE4-51A9-97E49BAEEC44}"/>
-              </a:ext>
-            </a:extLst>
-          </p:cNvPr>
-          <p:cNvPicPr>
-            <a:picLocks noChangeAspect="1"/>
-          </p:cNvPicPr>
-          <p:nvPr/>
-        </p:nvPicPr>
-        <p:blipFill>
-          <a:blip r:embed="rId3"/>
-          <a:stretch>
-            <a:fillRect/>
-          </a:stretch>
-        </p:blipFill>
-        <p:spPr>
-          <a:xfrm>
-            <a:off x="6903108" y="2942920"/>
-            <a:ext cx="180000" cy="180000"/>
-          </a:xfrm>
-          <a:prstGeom prst="rect">
-            <a:avLst/>
-          </a:prstGeom>
-        </p:spPr>
-      </p:pic>
-      <p:pic>
-        <p:nvPicPr>
-          <p:cNvPr id="48" name="Image 47">
-            <a:extLst>
-              <a:ext uri="{FF2B5EF4-FFF2-40B4-BE49-F238E27FC236}">
-                <a16:creationId xmlns:a16="http://schemas.microsoft.com/office/drawing/2014/main" id="{A2DBB512-E0D6-1DCF-AD42-945E61453018}"/>
-              </a:ext>
-            </a:extLst>
-          </p:cNvPr>
-          <p:cNvPicPr>
-            <a:picLocks noChangeAspect="1"/>
-          </p:cNvPicPr>
-          <p:nvPr/>
-        </p:nvPicPr>
-        <p:blipFill>
-          <a:blip r:embed="rId3"/>
-          <a:stretch>
-            <a:fillRect/>
-          </a:stretch>
-        </p:blipFill>
-        <p:spPr>
-          <a:xfrm>
-            <a:off x="3705152" y="3218549"/>
-            <a:ext cx="180000" cy="180000"/>
-          </a:xfrm>
-          <a:prstGeom prst="rect">
-            <a:avLst/>
-          </a:prstGeom>
-        </p:spPr>
-      </p:pic>
       <p:sp>
         <p:nvSpPr>
           <p:cNvPr id="49" name="Rectangle : coins arrondis 48">
@@ -20452,7 +20016,7 @@
         </p:nvSpPr>
         <p:spPr>
           <a:xfrm>
-            <a:off x="11719813" y="3534156"/>
+            <a:off x="7881435" y="4571740"/>
             <a:ext cx="1365662" cy="1194790"/>
           </a:xfrm>
           <a:prstGeom prst="roundRect">
@@ -20497,201 +20061,11 @@
                 </a:solidFill>
                 <a:latin typeface="Arial Nova" panose="020B0504020202020204" pitchFamily="34" charset="0"/>
               </a:rPr>
-              <a:t>Apporte une aide au déplacement de le charge</a:t>
+              <a:t>AGIR</a:t>
             </a:r>
           </a:p>
         </p:txBody>
       </p:sp>
-      <p:cxnSp>
-        <p:nvCxnSpPr>
-          <p:cNvPr id="50" name="Connecteur droit avec flèche 49">
-            <a:extLst>
-              <a:ext uri="{FF2B5EF4-FFF2-40B4-BE49-F238E27FC236}">
-                <a16:creationId xmlns:a16="http://schemas.microsoft.com/office/drawing/2014/main" id="{505D6021-1B16-1674-733B-C648AC112904}"/>
-              </a:ext>
-            </a:extLst>
-          </p:cNvPr>
-          <p:cNvCxnSpPr>
-            <a:cxnSpLocks/>
-          </p:cNvCxnSpPr>
-          <p:nvPr/>
-        </p:nvCxnSpPr>
-        <p:spPr>
-          <a:xfrm flipV="1">
-            <a:off x="10996452" y="3807925"/>
-            <a:ext cx="720000" cy="1536"/>
-          </a:xfrm>
-          <a:prstGeom prst="straightConnector1">
-            <a:avLst/>
-          </a:prstGeom>
-          <a:ln w="25400" cap="rnd">
-            <a:solidFill>
-              <a:srgbClr val="68348B"/>
-            </a:solidFill>
-            <a:tailEnd type="triangle" w="med" len="lg"/>
-          </a:ln>
-        </p:spPr>
-        <p:style>
-          <a:lnRef idx="1">
-            <a:schemeClr val="accent1"/>
-          </a:lnRef>
-          <a:fillRef idx="0">
-            <a:schemeClr val="accent1"/>
-          </a:fillRef>
-          <a:effectRef idx="0">
-            <a:schemeClr val="accent1"/>
-          </a:effectRef>
-          <a:fontRef idx="minor">
-            <a:schemeClr val="tx1"/>
-          </a:fontRef>
-        </p:style>
-      </p:cxnSp>
-      <p:grpSp>
-        <p:nvGrpSpPr>
-          <p:cNvPr id="52" name="Groupe 51">
-            <a:extLst>
-              <a:ext uri="{FF2B5EF4-FFF2-40B4-BE49-F238E27FC236}">
-                <a16:creationId xmlns:a16="http://schemas.microsoft.com/office/drawing/2014/main" id="{C3681FD9-BFE4-7350-1964-9C093DDF1B5E}"/>
-              </a:ext>
-            </a:extLst>
-          </p:cNvPr>
-          <p:cNvGrpSpPr/>
-          <p:nvPr/>
-        </p:nvGrpSpPr>
-        <p:grpSpPr>
-          <a:xfrm>
-            <a:off x="3770117" y="2030387"/>
-            <a:ext cx="360000" cy="360000"/>
-            <a:chOff x="6138169" y="4069439"/>
-            <a:chExt cx="1800000" cy="1800000"/>
-          </a:xfrm>
-        </p:grpSpPr>
-        <p:sp>
-          <p:nvSpPr>
-            <p:cNvPr id="53" name="Ellipse 52">
-              <a:extLst>
-                <a:ext uri="{FF2B5EF4-FFF2-40B4-BE49-F238E27FC236}">
-                  <a16:creationId xmlns:a16="http://schemas.microsoft.com/office/drawing/2014/main" id="{599396A5-DEE6-FF8C-4576-A72DC9E6130D}"/>
-                </a:ext>
-              </a:extLst>
-            </p:cNvPr>
-            <p:cNvSpPr/>
-            <p:nvPr/>
-          </p:nvSpPr>
-          <p:spPr>
-            <a:xfrm>
-              <a:off x="6138169" y="4069439"/>
-              <a:ext cx="1800000" cy="1800000"/>
-            </a:xfrm>
-            <a:prstGeom prst="ellipse">
-              <a:avLst/>
-            </a:prstGeom>
-            <a:solidFill>
-              <a:srgbClr val="00547F"/>
-            </a:solidFill>
-            <a:ln>
-              <a:noFill/>
-            </a:ln>
-          </p:spPr>
-          <p:style>
-            <a:lnRef idx="2">
-              <a:schemeClr val="accent1">
-                <a:shade val="50000"/>
-              </a:schemeClr>
-            </a:lnRef>
-            <a:fillRef idx="1">
-              <a:schemeClr val="accent1"/>
-            </a:fillRef>
-            <a:effectRef idx="0">
-              <a:schemeClr val="accent1"/>
-            </a:effectRef>
-            <a:fontRef idx="minor">
-              <a:schemeClr val="lt1"/>
-            </a:fontRef>
-          </p:style>
-          <p:txBody>
-            <a:bodyPr rtlCol="0" anchor="ctr"/>
-            <a:lstStyle/>
-            <a:p>
-              <a:pPr algn="ctr"/>
-              <a:endParaRPr lang="fr-FR"/>
-            </a:p>
-          </p:txBody>
-        </p:sp>
-        <p:pic>
-          <p:nvPicPr>
-            <p:cNvPr id="54" name="Image 53">
-              <a:extLst>
-                <a:ext uri="{FF2B5EF4-FFF2-40B4-BE49-F238E27FC236}">
-                  <a16:creationId xmlns:a16="http://schemas.microsoft.com/office/drawing/2014/main" id="{F05DEF27-F929-BD20-2E07-1628A11DB346}"/>
-                </a:ext>
-              </a:extLst>
-            </p:cNvPr>
-            <p:cNvPicPr>
-              <a:picLocks noChangeAspect="1"/>
-            </p:cNvPicPr>
-            <p:nvPr/>
-          </p:nvPicPr>
-          <p:blipFill>
-            <a:blip r:embed="rId7"/>
-            <a:stretch>
-              <a:fillRect/>
-            </a:stretch>
-          </p:blipFill>
-          <p:spPr>
-            <a:xfrm>
-              <a:off x="6243433" y="4174703"/>
-              <a:ext cx="1589472" cy="1589472"/>
-            </a:xfrm>
-            <a:prstGeom prst="rect">
-              <a:avLst/>
-            </a:prstGeom>
-          </p:spPr>
-        </p:pic>
-      </p:grpSp>
-      <p:cxnSp>
-        <p:nvCxnSpPr>
-          <p:cNvPr id="55" name="Connecteur droit avec flèche 54">
-            <a:extLst>
-              <a:ext uri="{FF2B5EF4-FFF2-40B4-BE49-F238E27FC236}">
-                <a16:creationId xmlns:a16="http://schemas.microsoft.com/office/drawing/2014/main" id="{CEC25A5B-4B64-B67F-296D-04E6B189266D}"/>
-              </a:ext>
-            </a:extLst>
-          </p:cNvPr>
-          <p:cNvCxnSpPr/>
-          <p:nvPr/>
-        </p:nvCxnSpPr>
-        <p:spPr>
-          <a:xfrm flipV="1">
-            <a:off x="6829319" y="1735886"/>
-            <a:ext cx="720000" cy="1536"/>
-          </a:xfrm>
-          <a:prstGeom prst="straightConnector1">
-            <a:avLst/>
-          </a:prstGeom>
-          <a:ln w="25400">
-            <a:solidFill>
-              <a:srgbClr val="08A559"/>
-            </a:solidFill>
-            <a:headEnd type="stealth" w="med" len="lg"/>
-            <a:tailEnd type="stealth" w="med" len="lg"/>
-          </a:ln>
-        </p:spPr>
-        <p:style>
-          <a:lnRef idx="1">
-            <a:schemeClr val="accent1"/>
-          </a:lnRef>
-          <a:fillRef idx="0">
-            <a:schemeClr val="accent1"/>
-          </a:fillRef>
-          <a:effectRef idx="0">
-            <a:schemeClr val="accent1"/>
-          </a:effectRef>
-          <a:fontRef idx="minor">
-            <a:schemeClr val="tx1"/>
-          </a:fontRef>
-        </p:style>
-      </p:cxnSp>
       <p:grpSp>
         <p:nvGrpSpPr>
           <p:cNvPr id="57" name="Groupe 56">
@@ -20706,10 +20080,10 @@
         </p:nvGrpSpPr>
         <p:grpSpPr>
           <a:xfrm rot="5400000" flipV="1">
-            <a:off x="12248508" y="4154169"/>
-            <a:ext cx="835963" cy="1617775"/>
-            <a:chOff x="9150640" y="2423323"/>
-            <a:chExt cx="835963" cy="2135794"/>
+            <a:off x="9158263" y="5097336"/>
+            <a:ext cx="840537" cy="2178926"/>
+            <a:chOff x="9150639" y="2423323"/>
+            <a:chExt cx="840537" cy="2876629"/>
           </a:xfrm>
         </p:grpSpPr>
         <p:sp>
@@ -20726,8 +20100,8 @@
           </p:nvSpPr>
           <p:spPr>
             <a:xfrm rot="5400000">
-              <a:off x="8500725" y="3073238"/>
-              <a:ext cx="2135794" cy="835963"/>
+              <a:off x="8157634" y="3416328"/>
+              <a:ext cx="2826548" cy="840537"/>
             </a:xfrm>
             <a:prstGeom prst="bentArrow">
               <a:avLst>
@@ -20787,8 +20161,8 @@
           </p:nvSpPr>
           <p:spPr>
             <a:xfrm rot="16200000">
-              <a:off x="8815678" y="3317013"/>
-              <a:ext cx="1918043" cy="230832"/>
+              <a:off x="8361425" y="3755873"/>
+              <a:ext cx="2826549" cy="261610"/>
             </a:xfrm>
             <a:prstGeom prst="rect">
               <a:avLst/>
@@ -20805,13 +20179,10 @@
             <a:lstStyle/>
             <a:p>
               <a:r>
-                <a:rPr lang="fr-FR" sz="900" dirty="0">
-                  <a:solidFill>
-                    <a:schemeClr val="bg1"/>
-                  </a:solidFill>
+                <a:rPr lang="fr-FR" sz="1100" dirty="0">
                   <a:latin typeface="Arial Nova" panose="020B0504020202020204" pitchFamily="34" charset="0"/>
                 </a:rPr>
-                <a:t>charge en position finale</a:t>
+                <a:t>Axe COMAX en mouvement</a:t>
               </a:r>
             </a:p>
           </p:txBody>
@@ -20830,9 +20201,9 @@
           <p:nvPr/>
         </p:nvGrpSpPr>
         <p:grpSpPr>
-          <a:xfrm>
-            <a:off x="10661488" y="2941725"/>
-            <a:ext cx="1566153" cy="577809"/>
+          <a:xfrm flipH="1">
+            <a:off x="8385346" y="3993931"/>
+            <a:ext cx="1723502" cy="577809"/>
             <a:chOff x="9058474" y="2836569"/>
             <a:chExt cx="1566153" cy="577809"/>
           </a:xfrm>
@@ -20913,6 +20284,5208 @@
           <p:spPr>
             <a:xfrm>
               <a:off x="9058474" y="2836569"/>
+              <a:ext cx="1473718" cy="246221"/>
+            </a:xfrm>
+            <a:prstGeom prst="rect">
+              <a:avLst/>
+            </a:prstGeom>
+            <a:noFill/>
+            <a:ln>
+              <a:noFill/>
+            </a:ln>
+          </p:spPr>
+          <p:txBody>
+            <a:bodyPr wrap="square" rtlCol="0">
+              <a:spAutoFit/>
+            </a:bodyPr>
+            <a:lstStyle/>
+            <a:p>
+              <a:r>
+                <a:rPr lang="fr-FR" sz="1000" dirty="0">
+                  <a:latin typeface="Arial Nova" panose="020B0504020202020204" pitchFamily="34" charset="0"/>
+                </a:rPr>
+                <a:t>Axe COMAX à l’arrêt</a:t>
+              </a:r>
+            </a:p>
+          </p:txBody>
+        </p:sp>
+      </p:grpSp>
+      <p:grpSp>
+        <p:nvGrpSpPr>
+          <p:cNvPr id="93" name="Groupe 92">
+            <a:extLst>
+              <a:ext uri="{FF2B5EF4-FFF2-40B4-BE49-F238E27FC236}">
+                <a16:creationId xmlns:a16="http://schemas.microsoft.com/office/drawing/2014/main" id="{633A414C-079F-72BC-C836-01640E3DA896}"/>
+              </a:ext>
+            </a:extLst>
+          </p:cNvPr>
+          <p:cNvGrpSpPr/>
+          <p:nvPr/>
+        </p:nvGrpSpPr>
+        <p:grpSpPr>
+          <a:xfrm>
+            <a:off x="644763" y="2696925"/>
+            <a:ext cx="360000" cy="360000"/>
+            <a:chOff x="5404964" y="4396133"/>
+            <a:chExt cx="1800000" cy="1800000"/>
+          </a:xfrm>
+        </p:grpSpPr>
+        <p:sp>
+          <p:nvSpPr>
+            <p:cNvPr id="94" name="Ellipse 93">
+              <a:extLst>
+                <a:ext uri="{FF2B5EF4-FFF2-40B4-BE49-F238E27FC236}">
+                  <a16:creationId xmlns:a16="http://schemas.microsoft.com/office/drawing/2014/main" id="{7DA91EB8-E9B2-6DC6-B932-B3F8200FCB4C}"/>
+                </a:ext>
+              </a:extLst>
+            </p:cNvPr>
+            <p:cNvSpPr/>
+            <p:nvPr/>
+          </p:nvSpPr>
+          <p:spPr>
+            <a:xfrm>
+              <a:off x="5404964" y="4396133"/>
+              <a:ext cx="1800000" cy="1800000"/>
+            </a:xfrm>
+            <a:prstGeom prst="ellipse">
+              <a:avLst/>
+            </a:prstGeom>
+            <a:solidFill>
+              <a:srgbClr val="00517A"/>
+            </a:solidFill>
+            <a:ln>
+              <a:noFill/>
+            </a:ln>
+          </p:spPr>
+          <p:style>
+            <a:lnRef idx="2">
+              <a:schemeClr val="accent1">
+                <a:shade val="50000"/>
+              </a:schemeClr>
+            </a:lnRef>
+            <a:fillRef idx="1">
+              <a:schemeClr val="accent1"/>
+            </a:fillRef>
+            <a:effectRef idx="0">
+              <a:schemeClr val="accent1"/>
+            </a:effectRef>
+            <a:fontRef idx="minor">
+              <a:schemeClr val="lt1"/>
+            </a:fontRef>
+          </p:style>
+          <p:txBody>
+            <a:bodyPr rtlCol="0" anchor="ctr"/>
+            <a:lstStyle/>
+            <a:p>
+              <a:pPr algn="ctr"/>
+              <a:endParaRPr lang="fr-FR"/>
+            </a:p>
+          </p:txBody>
+        </p:sp>
+        <p:pic>
+          <p:nvPicPr>
+            <p:cNvPr id="95" name="Image 94">
+              <a:extLst>
+                <a:ext uri="{FF2B5EF4-FFF2-40B4-BE49-F238E27FC236}">
+                  <a16:creationId xmlns:a16="http://schemas.microsoft.com/office/drawing/2014/main" id="{C57FF404-E034-F790-1839-6255F70696F2}"/>
+                </a:ext>
+              </a:extLst>
+            </p:cNvPr>
+            <p:cNvPicPr>
+              <a:picLocks noChangeAspect="1"/>
+            </p:cNvPicPr>
+            <p:nvPr/>
+          </p:nvPicPr>
+          <p:blipFill>
+            <a:blip r:embed="rId2"/>
+            <a:stretch>
+              <a:fillRect/>
+            </a:stretch>
+          </p:blipFill>
+          <p:spPr>
+            <a:xfrm>
+              <a:off x="5543445" y="4536296"/>
+              <a:ext cx="1358232" cy="1440000"/>
+            </a:xfrm>
+            <a:prstGeom prst="rect">
+              <a:avLst/>
+            </a:prstGeom>
+          </p:spPr>
+        </p:pic>
+      </p:grpSp>
+      <p:grpSp>
+        <p:nvGrpSpPr>
+          <p:cNvPr id="31" name="Groupe 30">
+            <a:extLst>
+              <a:ext uri="{FF2B5EF4-FFF2-40B4-BE49-F238E27FC236}">
+                <a16:creationId xmlns:a16="http://schemas.microsoft.com/office/drawing/2014/main" id="{89225F91-8C4A-4D28-806F-C285AA8AEAEF}"/>
+              </a:ext>
+            </a:extLst>
+          </p:cNvPr>
+          <p:cNvGrpSpPr/>
+          <p:nvPr/>
+        </p:nvGrpSpPr>
+        <p:grpSpPr>
+          <a:xfrm>
+            <a:off x="644763" y="3469218"/>
+            <a:ext cx="360000" cy="360000"/>
+            <a:chOff x="6054233" y="4960569"/>
+            <a:chExt cx="1800000" cy="1800000"/>
+          </a:xfrm>
+        </p:grpSpPr>
+        <p:sp>
+          <p:nvSpPr>
+            <p:cNvPr id="32" name="Ellipse 31">
+              <a:extLst>
+                <a:ext uri="{FF2B5EF4-FFF2-40B4-BE49-F238E27FC236}">
+                  <a16:creationId xmlns:a16="http://schemas.microsoft.com/office/drawing/2014/main" id="{002BBCC8-7149-2E70-FA08-89D364A2E7EE}"/>
+                </a:ext>
+              </a:extLst>
+            </p:cNvPr>
+            <p:cNvSpPr/>
+            <p:nvPr/>
+          </p:nvSpPr>
+          <p:spPr>
+            <a:xfrm>
+              <a:off x="6054233" y="4960569"/>
+              <a:ext cx="1800000" cy="1800000"/>
+            </a:xfrm>
+            <a:prstGeom prst="ellipse">
+              <a:avLst/>
+            </a:prstGeom>
+            <a:solidFill>
+              <a:srgbClr val="00547F"/>
+            </a:solidFill>
+            <a:ln>
+              <a:noFill/>
+            </a:ln>
+          </p:spPr>
+          <p:style>
+            <a:lnRef idx="2">
+              <a:schemeClr val="accent1">
+                <a:shade val="50000"/>
+              </a:schemeClr>
+            </a:lnRef>
+            <a:fillRef idx="1">
+              <a:schemeClr val="accent1"/>
+            </a:fillRef>
+            <a:effectRef idx="0">
+              <a:schemeClr val="accent1"/>
+            </a:effectRef>
+            <a:fontRef idx="minor">
+              <a:schemeClr val="lt1"/>
+            </a:fontRef>
+          </p:style>
+          <p:txBody>
+            <a:bodyPr rtlCol="0" anchor="ctr"/>
+            <a:lstStyle/>
+            <a:p>
+              <a:pPr algn="ctr"/>
+              <a:endParaRPr lang="fr-FR" b="1"/>
+            </a:p>
+          </p:txBody>
+        </p:sp>
+        <p:pic>
+          <p:nvPicPr>
+            <p:cNvPr id="33" name="Image 32">
+              <a:extLst>
+                <a:ext uri="{FF2B5EF4-FFF2-40B4-BE49-F238E27FC236}">
+                  <a16:creationId xmlns:a16="http://schemas.microsoft.com/office/drawing/2014/main" id="{6C676998-302E-BC6E-6F7D-BB576DC31682}"/>
+                </a:ext>
+              </a:extLst>
+            </p:cNvPr>
+            <p:cNvPicPr>
+              <a:picLocks noChangeAspect="1"/>
+            </p:cNvPicPr>
+            <p:nvPr/>
+          </p:nvPicPr>
+          <p:blipFill>
+            <a:blip r:embed="rId3"/>
+            <a:stretch>
+              <a:fillRect/>
+            </a:stretch>
+          </p:blipFill>
+          <p:spPr>
+            <a:xfrm>
+              <a:off x="6298697" y="5322283"/>
+              <a:ext cx="1311072" cy="1076572"/>
+            </a:xfrm>
+            <a:prstGeom prst="rect">
+              <a:avLst/>
+            </a:prstGeom>
+          </p:spPr>
+        </p:pic>
+      </p:grpSp>
+      <p:grpSp>
+        <p:nvGrpSpPr>
+          <p:cNvPr id="92" name="Groupe 91">
+            <a:extLst>
+              <a:ext uri="{FF2B5EF4-FFF2-40B4-BE49-F238E27FC236}">
+                <a16:creationId xmlns:a16="http://schemas.microsoft.com/office/drawing/2014/main" id="{9F95A1EA-9092-5D0B-B7AC-F7CE46698DF0}"/>
+              </a:ext>
+            </a:extLst>
+          </p:cNvPr>
+          <p:cNvGrpSpPr/>
+          <p:nvPr/>
+        </p:nvGrpSpPr>
+        <p:grpSpPr>
+          <a:xfrm>
+            <a:off x="644763" y="1894748"/>
+            <a:ext cx="360000" cy="360000"/>
+            <a:chOff x="-2063262" y="2086237"/>
+            <a:chExt cx="1800000" cy="1800000"/>
+          </a:xfrm>
+        </p:grpSpPr>
+        <p:sp>
+          <p:nvSpPr>
+            <p:cNvPr id="96" name="Ellipse 95">
+              <a:extLst>
+                <a:ext uri="{FF2B5EF4-FFF2-40B4-BE49-F238E27FC236}">
+                  <a16:creationId xmlns:a16="http://schemas.microsoft.com/office/drawing/2014/main" id="{845FC769-0299-0B5A-BCD6-DE55695F83D2}"/>
+                </a:ext>
+              </a:extLst>
+            </p:cNvPr>
+            <p:cNvSpPr/>
+            <p:nvPr/>
+          </p:nvSpPr>
+          <p:spPr>
+            <a:xfrm>
+              <a:off x="-2063262" y="2086237"/>
+              <a:ext cx="1800000" cy="1800000"/>
+            </a:xfrm>
+            <a:prstGeom prst="ellipse">
+              <a:avLst/>
+            </a:prstGeom>
+            <a:solidFill>
+              <a:srgbClr val="00547F"/>
+            </a:solidFill>
+            <a:ln>
+              <a:noFill/>
+            </a:ln>
+          </p:spPr>
+          <p:style>
+            <a:lnRef idx="2">
+              <a:schemeClr val="accent1">
+                <a:shade val="50000"/>
+              </a:schemeClr>
+            </a:lnRef>
+            <a:fillRef idx="1">
+              <a:schemeClr val="accent1"/>
+            </a:fillRef>
+            <a:effectRef idx="0">
+              <a:schemeClr val="accent1"/>
+            </a:effectRef>
+            <a:fontRef idx="minor">
+              <a:schemeClr val="lt1"/>
+            </a:fontRef>
+          </p:style>
+          <p:txBody>
+            <a:bodyPr rtlCol="0" anchor="ctr"/>
+            <a:lstStyle/>
+            <a:p>
+              <a:pPr algn="ctr"/>
+              <a:endParaRPr lang="fr-FR"/>
+            </a:p>
+          </p:txBody>
+        </p:sp>
+        <p:pic>
+          <p:nvPicPr>
+            <p:cNvPr id="97" name="Image 96">
+              <a:extLst>
+                <a:ext uri="{FF2B5EF4-FFF2-40B4-BE49-F238E27FC236}">
+                  <a16:creationId xmlns:a16="http://schemas.microsoft.com/office/drawing/2014/main" id="{6A7943FD-8BE6-B490-32BF-D4F134197C5E}"/>
+                </a:ext>
+              </a:extLst>
+            </p:cNvPr>
+            <p:cNvPicPr>
+              <a:picLocks noChangeAspect="1"/>
+            </p:cNvPicPr>
+            <p:nvPr/>
+          </p:nvPicPr>
+          <p:blipFill>
+            <a:blip r:embed="rId4"/>
+            <a:stretch>
+              <a:fillRect/>
+            </a:stretch>
+          </p:blipFill>
+          <p:spPr>
+            <a:xfrm>
+              <a:off x="-1609131" y="2149544"/>
+              <a:ext cx="891738" cy="1673385"/>
+            </a:xfrm>
+            <a:prstGeom prst="rect">
+              <a:avLst/>
+            </a:prstGeom>
+          </p:spPr>
+        </p:pic>
+      </p:grpSp>
+      <p:cxnSp>
+        <p:nvCxnSpPr>
+          <p:cNvPr id="3" name="Connecteur droit avec flèche 2">
+            <a:extLst>
+              <a:ext uri="{FF2B5EF4-FFF2-40B4-BE49-F238E27FC236}">
+                <a16:creationId xmlns:a16="http://schemas.microsoft.com/office/drawing/2014/main" id="{C8C2DF96-358E-4EA4-303F-3EA6DBBDDA2C}"/>
+              </a:ext>
+            </a:extLst>
+          </p:cNvPr>
+          <p:cNvCxnSpPr>
+            <a:cxnSpLocks/>
+          </p:cNvCxnSpPr>
+          <p:nvPr/>
+        </p:nvCxnSpPr>
+        <p:spPr>
+          <a:xfrm>
+            <a:off x="2520129" y="2515479"/>
+            <a:ext cx="1058380" cy="0"/>
+          </a:xfrm>
+          <a:prstGeom prst="straightConnector1">
+            <a:avLst/>
+          </a:prstGeom>
+          <a:ln w="25400" cap="rnd">
+            <a:solidFill>
+              <a:srgbClr val="004F77"/>
+            </a:solidFill>
+            <a:tailEnd type="triangle" w="med" len="lg"/>
+          </a:ln>
+        </p:spPr>
+        <p:style>
+          <a:lnRef idx="1">
+            <a:schemeClr val="accent1"/>
+          </a:lnRef>
+          <a:fillRef idx="0">
+            <a:schemeClr val="accent1"/>
+          </a:fillRef>
+          <a:effectRef idx="0">
+            <a:schemeClr val="accent1"/>
+          </a:effectRef>
+          <a:fontRef idx="minor">
+            <a:schemeClr val="tx1"/>
+          </a:fontRef>
+        </p:style>
+      </p:cxnSp>
+      <p:sp>
+        <p:nvSpPr>
+          <p:cNvPr id="5" name="Rectangle : coins arrondis 4">
+            <a:extLst>
+              <a:ext uri="{FF2B5EF4-FFF2-40B4-BE49-F238E27FC236}">
+                <a16:creationId xmlns:a16="http://schemas.microsoft.com/office/drawing/2014/main" id="{BFC773C0-A109-53E8-9189-FF64C2C807BC}"/>
+              </a:ext>
+            </a:extLst>
+          </p:cNvPr>
+          <p:cNvSpPr/>
+          <p:nvPr/>
+        </p:nvSpPr>
+        <p:spPr>
+          <a:xfrm>
+            <a:off x="1069319" y="2349015"/>
+            <a:ext cx="1440000" cy="332929"/>
+          </a:xfrm>
+          <a:prstGeom prst="roundRect">
+            <a:avLst>
+              <a:gd name="adj" fmla="val 11914"/>
+            </a:avLst>
+          </a:prstGeom>
+          <a:noFill/>
+          <a:ln w="19050">
+            <a:solidFill>
+              <a:srgbClr val="004F77"/>
+            </a:solidFill>
+          </a:ln>
+        </p:spPr>
+        <p:style>
+          <a:lnRef idx="2">
+            <a:schemeClr val="accent1">
+              <a:shade val="50000"/>
+            </a:schemeClr>
+          </a:lnRef>
+          <a:fillRef idx="1">
+            <a:schemeClr val="accent1"/>
+          </a:fillRef>
+          <a:effectRef idx="0">
+            <a:schemeClr val="accent1"/>
+          </a:effectRef>
+          <a:fontRef idx="minor">
+            <a:schemeClr val="lt1"/>
+          </a:fontRef>
+        </p:style>
+        <p:txBody>
+          <a:bodyPr rtlCol="0" anchor="ctr"/>
+          <a:lstStyle/>
+          <a:p>
+            <a:pPr algn="ctr"/>
+            <a:r>
+              <a:rPr lang="fr-FR" sz="1200" b="1" dirty="0">
+                <a:solidFill>
+                  <a:srgbClr val="004F77"/>
+                </a:solidFill>
+                <a:latin typeface="Arial Nova" panose="020B0504020202020204" pitchFamily="34" charset="0"/>
+              </a:rPr>
+              <a:t>Acquérir</a:t>
+            </a:r>
+          </a:p>
+        </p:txBody>
+      </p:sp>
+      <p:sp>
+        <p:nvSpPr>
+          <p:cNvPr id="30" name="Rectangle : coins arrondis 29">
+            <a:extLst>
+              <a:ext uri="{FF2B5EF4-FFF2-40B4-BE49-F238E27FC236}">
+                <a16:creationId xmlns:a16="http://schemas.microsoft.com/office/drawing/2014/main" id="{1E8C0C1A-3AF2-9CC8-C8CB-8B63FC17DDDE}"/>
+              </a:ext>
+            </a:extLst>
+          </p:cNvPr>
+          <p:cNvSpPr/>
+          <p:nvPr/>
+        </p:nvSpPr>
+        <p:spPr>
+          <a:xfrm>
+            <a:off x="1069319" y="2756823"/>
+            <a:ext cx="1440000" cy="234212"/>
+          </a:xfrm>
+          <a:prstGeom prst="roundRect">
+            <a:avLst>
+              <a:gd name="adj" fmla="val 11914"/>
+            </a:avLst>
+          </a:prstGeom>
+          <a:solidFill>
+            <a:srgbClr val="DFE3EB"/>
+          </a:solidFill>
+          <a:ln w="19050">
+            <a:solidFill>
+              <a:srgbClr val="DFE3EB"/>
+            </a:solidFill>
+          </a:ln>
+        </p:spPr>
+        <p:style>
+          <a:lnRef idx="2">
+            <a:schemeClr val="accent1">
+              <a:shade val="50000"/>
+            </a:schemeClr>
+          </a:lnRef>
+          <a:fillRef idx="1">
+            <a:schemeClr val="accent1"/>
+          </a:fillRef>
+          <a:effectRef idx="0">
+            <a:schemeClr val="accent1"/>
+          </a:effectRef>
+          <a:fontRef idx="minor">
+            <a:schemeClr val="lt1"/>
+          </a:fontRef>
+        </p:style>
+        <p:txBody>
+          <a:bodyPr lIns="0" tIns="0" rIns="0" bIns="0" rtlCol="0" anchor="ctr"/>
+          <a:lstStyle/>
+          <a:p>
+            <a:pPr algn="ctr"/>
+            <a:r>
+              <a:rPr lang="fr-FR" sz="1000" dirty="0">
+                <a:solidFill>
+                  <a:srgbClr val="004F77"/>
+                </a:solidFill>
+                <a:latin typeface="Arial Nova" panose="020B0504020202020204" pitchFamily="34" charset="0"/>
+              </a:rPr>
+              <a:t>Codeur incrémental</a:t>
+            </a:r>
+          </a:p>
+        </p:txBody>
+      </p:sp>
+      <p:sp>
+        <p:nvSpPr>
+          <p:cNvPr id="41" name="Rectangle : coins arrondis 40">
+            <a:extLst>
+              <a:ext uri="{FF2B5EF4-FFF2-40B4-BE49-F238E27FC236}">
+                <a16:creationId xmlns:a16="http://schemas.microsoft.com/office/drawing/2014/main" id="{F7C3679A-EF77-DBCC-AAA6-238E5D667F4A}"/>
+              </a:ext>
+            </a:extLst>
+          </p:cNvPr>
+          <p:cNvSpPr/>
+          <p:nvPr/>
+        </p:nvSpPr>
+        <p:spPr>
+          <a:xfrm>
+            <a:off x="1069319" y="3143908"/>
+            <a:ext cx="1440000" cy="332929"/>
+          </a:xfrm>
+          <a:prstGeom prst="roundRect">
+            <a:avLst>
+              <a:gd name="adj" fmla="val 11914"/>
+            </a:avLst>
+          </a:prstGeom>
+          <a:noFill/>
+          <a:ln w="19050">
+            <a:solidFill>
+              <a:srgbClr val="004F77"/>
+            </a:solidFill>
+          </a:ln>
+        </p:spPr>
+        <p:style>
+          <a:lnRef idx="2">
+            <a:schemeClr val="accent1">
+              <a:shade val="50000"/>
+            </a:schemeClr>
+          </a:lnRef>
+          <a:fillRef idx="1">
+            <a:schemeClr val="accent1"/>
+          </a:fillRef>
+          <a:effectRef idx="0">
+            <a:schemeClr val="accent1"/>
+          </a:effectRef>
+          <a:fontRef idx="minor">
+            <a:schemeClr val="lt1"/>
+          </a:fontRef>
+        </p:style>
+        <p:txBody>
+          <a:bodyPr rtlCol="0" anchor="ctr"/>
+          <a:lstStyle/>
+          <a:p>
+            <a:pPr algn="ctr"/>
+            <a:r>
+              <a:rPr lang="fr-FR" sz="1200" b="1" dirty="0">
+                <a:solidFill>
+                  <a:srgbClr val="004F77"/>
+                </a:solidFill>
+                <a:latin typeface="Arial Nova" panose="020B0504020202020204" pitchFamily="34" charset="0"/>
+              </a:rPr>
+              <a:t>Acquérir</a:t>
+            </a:r>
+          </a:p>
+        </p:txBody>
+      </p:sp>
+      <p:sp>
+        <p:nvSpPr>
+          <p:cNvPr id="51" name="Rectangle : coins arrondis 50">
+            <a:extLst>
+              <a:ext uri="{FF2B5EF4-FFF2-40B4-BE49-F238E27FC236}">
+                <a16:creationId xmlns:a16="http://schemas.microsoft.com/office/drawing/2014/main" id="{FFF33EEE-CAD4-B33B-CD9F-C4E20ADBFF8B}"/>
+              </a:ext>
+            </a:extLst>
+          </p:cNvPr>
+          <p:cNvSpPr/>
+          <p:nvPr/>
+        </p:nvSpPr>
+        <p:spPr>
+          <a:xfrm>
+            <a:off x="1069319" y="3551716"/>
+            <a:ext cx="1440000" cy="234212"/>
+          </a:xfrm>
+          <a:prstGeom prst="roundRect">
+            <a:avLst>
+              <a:gd name="adj" fmla="val 11914"/>
+            </a:avLst>
+          </a:prstGeom>
+          <a:solidFill>
+            <a:srgbClr val="DFE3EB"/>
+          </a:solidFill>
+          <a:ln w="19050">
+            <a:solidFill>
+              <a:srgbClr val="DFE3EB"/>
+            </a:solidFill>
+          </a:ln>
+        </p:spPr>
+        <p:style>
+          <a:lnRef idx="2">
+            <a:schemeClr val="accent1">
+              <a:shade val="50000"/>
+            </a:schemeClr>
+          </a:lnRef>
+          <a:fillRef idx="1">
+            <a:schemeClr val="accent1"/>
+          </a:fillRef>
+          <a:effectRef idx="0">
+            <a:schemeClr val="accent1"/>
+          </a:effectRef>
+          <a:fontRef idx="minor">
+            <a:schemeClr val="lt1"/>
+          </a:fontRef>
+        </p:style>
+        <p:txBody>
+          <a:bodyPr lIns="0" tIns="0" rIns="0" bIns="0" rtlCol="0" anchor="ctr"/>
+          <a:lstStyle/>
+          <a:p>
+            <a:pPr algn="ctr"/>
+            <a:r>
+              <a:rPr lang="fr-FR" sz="1000" dirty="0">
+                <a:solidFill>
+                  <a:srgbClr val="004F77"/>
+                </a:solidFill>
+                <a:latin typeface="Arial Nova" panose="020B0504020202020204" pitchFamily="34" charset="0"/>
+              </a:rPr>
+              <a:t>Capteur de courant</a:t>
+            </a:r>
+          </a:p>
+        </p:txBody>
+      </p:sp>
+      <p:cxnSp>
+        <p:nvCxnSpPr>
+          <p:cNvPr id="73" name="Connecteur : en angle 72">
+            <a:extLst>
+              <a:ext uri="{FF2B5EF4-FFF2-40B4-BE49-F238E27FC236}">
+                <a16:creationId xmlns:a16="http://schemas.microsoft.com/office/drawing/2014/main" id="{D8C6BDD0-D8E1-6285-20CB-839F839C68B2}"/>
+              </a:ext>
+            </a:extLst>
+          </p:cNvPr>
+          <p:cNvCxnSpPr>
+            <a:cxnSpLocks/>
+            <a:stCxn id="6" idx="3"/>
+          </p:cNvCxnSpPr>
+          <p:nvPr/>
+        </p:nvCxnSpPr>
+        <p:spPr>
+          <a:xfrm>
+            <a:off x="2495643" y="1716299"/>
+            <a:ext cx="1082866" cy="675823"/>
+          </a:xfrm>
+          <a:prstGeom prst="bentConnector3">
+            <a:avLst>
+              <a:gd name="adj1" fmla="val 50000"/>
+            </a:avLst>
+          </a:prstGeom>
+          <a:ln w="25400" cap="rnd">
+            <a:solidFill>
+              <a:srgbClr val="004F77"/>
+            </a:solidFill>
+            <a:tailEnd type="triangle" w="med" len="lg"/>
+          </a:ln>
+        </p:spPr>
+        <p:style>
+          <a:lnRef idx="1">
+            <a:schemeClr val="accent1"/>
+          </a:lnRef>
+          <a:fillRef idx="0">
+            <a:schemeClr val="accent1"/>
+          </a:fillRef>
+          <a:effectRef idx="0">
+            <a:schemeClr val="accent1"/>
+          </a:effectRef>
+          <a:fontRef idx="minor">
+            <a:schemeClr val="tx1"/>
+          </a:fontRef>
+        </p:style>
+      </p:cxnSp>
+      <p:cxnSp>
+        <p:nvCxnSpPr>
+          <p:cNvPr id="82" name="Connecteur : en angle 81">
+            <a:extLst>
+              <a:ext uri="{FF2B5EF4-FFF2-40B4-BE49-F238E27FC236}">
+                <a16:creationId xmlns:a16="http://schemas.microsoft.com/office/drawing/2014/main" id="{76BC7C12-2962-A7F3-FE1A-F9DCCF6508B7}"/>
+              </a:ext>
+            </a:extLst>
+          </p:cNvPr>
+          <p:cNvCxnSpPr>
+            <a:cxnSpLocks/>
+            <a:stCxn id="41" idx="3"/>
+          </p:cNvCxnSpPr>
+          <p:nvPr/>
+        </p:nvCxnSpPr>
+        <p:spPr>
+          <a:xfrm flipV="1">
+            <a:off x="2509319" y="2627112"/>
+            <a:ext cx="1079286" cy="683261"/>
+          </a:xfrm>
+          <a:prstGeom prst="bentConnector3">
+            <a:avLst>
+              <a:gd name="adj1" fmla="val 50000"/>
+            </a:avLst>
+          </a:prstGeom>
+          <a:ln w="25400" cap="rnd">
+            <a:solidFill>
+              <a:srgbClr val="004F77"/>
+            </a:solidFill>
+            <a:tailEnd type="triangle" w="med" len="lg"/>
+          </a:ln>
+        </p:spPr>
+        <p:style>
+          <a:lnRef idx="1">
+            <a:schemeClr val="accent1"/>
+          </a:lnRef>
+          <a:fillRef idx="0">
+            <a:schemeClr val="accent1"/>
+          </a:fillRef>
+          <a:effectRef idx="0">
+            <a:schemeClr val="accent1"/>
+          </a:effectRef>
+          <a:fontRef idx="minor">
+            <a:schemeClr val="tx1"/>
+          </a:fontRef>
+        </p:style>
+      </p:cxnSp>
+      <p:cxnSp>
+        <p:nvCxnSpPr>
+          <p:cNvPr id="116" name="Connecteur droit avec flèche 115">
+            <a:extLst>
+              <a:ext uri="{FF2B5EF4-FFF2-40B4-BE49-F238E27FC236}">
+                <a16:creationId xmlns:a16="http://schemas.microsoft.com/office/drawing/2014/main" id="{B2741317-CDDC-36AC-420D-4BD5FC1CD774}"/>
+              </a:ext>
+            </a:extLst>
+          </p:cNvPr>
+          <p:cNvCxnSpPr>
+            <a:cxnSpLocks/>
+          </p:cNvCxnSpPr>
+          <p:nvPr/>
+        </p:nvCxnSpPr>
+        <p:spPr>
+          <a:xfrm flipV="1">
+            <a:off x="5018509" y="2525712"/>
+            <a:ext cx="499778" cy="0"/>
+          </a:xfrm>
+          <a:prstGeom prst="straightConnector1">
+            <a:avLst/>
+          </a:prstGeom>
+          <a:ln w="25400">
+            <a:solidFill>
+              <a:srgbClr val="002060"/>
+            </a:solidFill>
+            <a:headEnd type="none"/>
+            <a:tailEnd type="triangle"/>
+          </a:ln>
+        </p:spPr>
+        <p:style>
+          <a:lnRef idx="1">
+            <a:schemeClr val="accent1"/>
+          </a:lnRef>
+          <a:fillRef idx="0">
+            <a:schemeClr val="accent1"/>
+          </a:fillRef>
+          <a:effectRef idx="0">
+            <a:schemeClr val="accent1"/>
+          </a:effectRef>
+          <a:fontRef idx="minor">
+            <a:schemeClr val="tx1"/>
+          </a:fontRef>
+        </p:style>
+      </p:cxnSp>
+      <p:sp>
+        <p:nvSpPr>
+          <p:cNvPr id="120" name="ZoneTexte 119">
+            <a:extLst>
+              <a:ext uri="{FF2B5EF4-FFF2-40B4-BE49-F238E27FC236}">
+                <a16:creationId xmlns:a16="http://schemas.microsoft.com/office/drawing/2014/main" id="{7911E9B6-2773-90DF-FC68-B1915749CB58}"/>
+              </a:ext>
+            </a:extLst>
+          </p:cNvPr>
+          <p:cNvSpPr txBox="1"/>
+          <p:nvPr/>
+        </p:nvSpPr>
+        <p:spPr>
+          <a:xfrm>
+            <a:off x="3993350" y="3391823"/>
+            <a:ext cx="1219778" cy="276999"/>
+          </a:xfrm>
+          <a:prstGeom prst="rect">
+            <a:avLst/>
+          </a:prstGeom>
+          <a:noFill/>
+        </p:spPr>
+        <p:txBody>
+          <a:bodyPr wrap="square">
+            <a:spAutoFit/>
+          </a:bodyPr>
+          <a:lstStyle/>
+          <a:p>
+            <a:pPr algn="ctr"/>
+            <a:r>
+              <a:rPr lang="fr-FR" sz="1200" dirty="0">
+                <a:solidFill>
+                  <a:srgbClr val="002060"/>
+                </a:solidFill>
+                <a:latin typeface="Arial Nova" panose="020B0504020202020204" pitchFamily="34" charset="0"/>
+              </a:rPr>
+              <a:t>Ordres</a:t>
+            </a:r>
+          </a:p>
+        </p:txBody>
+      </p:sp>
+      <p:cxnSp>
+        <p:nvCxnSpPr>
+          <p:cNvPr id="121" name="Connecteur droit avec flèche 120">
+            <a:extLst>
+              <a:ext uri="{FF2B5EF4-FFF2-40B4-BE49-F238E27FC236}">
+                <a16:creationId xmlns:a16="http://schemas.microsoft.com/office/drawing/2014/main" id="{2D4187AA-E398-B08C-C9FA-24A8AB60360F}"/>
+              </a:ext>
+            </a:extLst>
+          </p:cNvPr>
+          <p:cNvCxnSpPr/>
+          <p:nvPr/>
+        </p:nvCxnSpPr>
+        <p:spPr>
+          <a:xfrm flipV="1">
+            <a:off x="343647" y="2510188"/>
+            <a:ext cx="720000" cy="1536"/>
+          </a:xfrm>
+          <a:prstGeom prst="straightConnector1">
+            <a:avLst/>
+          </a:prstGeom>
+          <a:ln w="25400" cap="rnd">
+            <a:solidFill>
+              <a:srgbClr val="004F77"/>
+            </a:solidFill>
+            <a:tailEnd type="triangle" w="med" len="lg"/>
+          </a:ln>
+        </p:spPr>
+        <p:style>
+          <a:lnRef idx="1">
+            <a:schemeClr val="accent1"/>
+          </a:lnRef>
+          <a:fillRef idx="0">
+            <a:schemeClr val="accent1"/>
+          </a:fillRef>
+          <a:effectRef idx="0">
+            <a:schemeClr val="accent1"/>
+          </a:effectRef>
+          <a:fontRef idx="minor">
+            <a:schemeClr val="tx1"/>
+          </a:fontRef>
+        </p:style>
+      </p:cxnSp>
+      <p:cxnSp>
+        <p:nvCxnSpPr>
+          <p:cNvPr id="122" name="Connecteur droit avec flèche 121">
+            <a:extLst>
+              <a:ext uri="{FF2B5EF4-FFF2-40B4-BE49-F238E27FC236}">
+                <a16:creationId xmlns:a16="http://schemas.microsoft.com/office/drawing/2014/main" id="{A2FBED1F-4333-2091-7A7C-67780B0F29F8}"/>
+              </a:ext>
+            </a:extLst>
+          </p:cNvPr>
+          <p:cNvCxnSpPr/>
+          <p:nvPr/>
+        </p:nvCxnSpPr>
+        <p:spPr>
+          <a:xfrm flipV="1">
+            <a:off x="337975" y="3314118"/>
+            <a:ext cx="720000" cy="1536"/>
+          </a:xfrm>
+          <a:prstGeom prst="straightConnector1">
+            <a:avLst/>
+          </a:prstGeom>
+          <a:ln w="25400" cap="rnd">
+            <a:solidFill>
+              <a:srgbClr val="004F77"/>
+            </a:solidFill>
+            <a:tailEnd type="triangle" w="med" len="lg"/>
+          </a:ln>
+        </p:spPr>
+        <p:style>
+          <a:lnRef idx="1">
+            <a:schemeClr val="accent1"/>
+          </a:lnRef>
+          <a:fillRef idx="0">
+            <a:schemeClr val="accent1"/>
+          </a:fillRef>
+          <a:effectRef idx="0">
+            <a:schemeClr val="accent1"/>
+          </a:effectRef>
+          <a:fontRef idx="minor">
+            <a:schemeClr val="tx1"/>
+          </a:fontRef>
+        </p:style>
+      </p:cxnSp>
+      <p:cxnSp>
+        <p:nvCxnSpPr>
+          <p:cNvPr id="123" name="Connecteur droit avec flèche 122">
+            <a:extLst>
+              <a:ext uri="{FF2B5EF4-FFF2-40B4-BE49-F238E27FC236}">
+                <a16:creationId xmlns:a16="http://schemas.microsoft.com/office/drawing/2014/main" id="{EDE89694-D2DA-9D7D-EA11-71E138F6507D}"/>
+              </a:ext>
+            </a:extLst>
+          </p:cNvPr>
+          <p:cNvCxnSpPr>
+            <a:cxnSpLocks/>
+          </p:cNvCxnSpPr>
+          <p:nvPr/>
+        </p:nvCxnSpPr>
+        <p:spPr>
+          <a:xfrm>
+            <a:off x="6958287" y="2517245"/>
+            <a:ext cx="1203580" cy="0"/>
+          </a:xfrm>
+          <a:prstGeom prst="straightConnector1">
+            <a:avLst/>
+          </a:prstGeom>
+          <a:ln w="25400">
+            <a:solidFill>
+              <a:srgbClr val="002060"/>
+            </a:solidFill>
+            <a:headEnd type="none"/>
+            <a:tailEnd type="triangle"/>
+          </a:ln>
+        </p:spPr>
+        <p:style>
+          <a:lnRef idx="1">
+            <a:schemeClr val="accent1"/>
+          </a:lnRef>
+          <a:fillRef idx="0">
+            <a:schemeClr val="accent1"/>
+          </a:fillRef>
+          <a:effectRef idx="0">
+            <a:schemeClr val="accent1"/>
+          </a:effectRef>
+          <a:fontRef idx="minor">
+            <a:schemeClr val="tx1"/>
+          </a:fontRef>
+        </p:style>
+      </p:cxnSp>
+      <p:sp>
+        <p:nvSpPr>
+          <p:cNvPr id="125" name="ZoneTexte 124">
+            <a:extLst>
+              <a:ext uri="{FF2B5EF4-FFF2-40B4-BE49-F238E27FC236}">
+                <a16:creationId xmlns:a16="http://schemas.microsoft.com/office/drawing/2014/main" id="{600C17EA-6B3A-B70D-AC3F-ECEFA23D108C}"/>
+              </a:ext>
+            </a:extLst>
+          </p:cNvPr>
+          <p:cNvSpPr txBox="1"/>
+          <p:nvPr/>
+        </p:nvSpPr>
+        <p:spPr>
+          <a:xfrm>
+            <a:off x="7161435" y="2074747"/>
+            <a:ext cx="1219778" cy="461665"/>
+          </a:xfrm>
+          <a:prstGeom prst="rect">
+            <a:avLst/>
+          </a:prstGeom>
+          <a:noFill/>
+        </p:spPr>
+        <p:txBody>
+          <a:bodyPr wrap="square">
+            <a:spAutoFit/>
+          </a:bodyPr>
+          <a:lstStyle/>
+          <a:p>
+            <a:pPr algn="ctr"/>
+            <a:r>
+              <a:rPr lang="fr-FR" sz="1200" dirty="0">
+                <a:solidFill>
+                  <a:srgbClr val="002060"/>
+                </a:solidFill>
+                <a:latin typeface="Arial Nova" panose="020B0504020202020204" pitchFamily="34" charset="0"/>
+              </a:rPr>
+              <a:t>Informations opérateur</a:t>
+            </a:r>
+          </a:p>
+        </p:txBody>
+      </p:sp>
+      <p:cxnSp>
+        <p:nvCxnSpPr>
+          <p:cNvPr id="128" name="Connecteur droit avec flèche 127">
+            <a:extLst>
+              <a:ext uri="{FF2B5EF4-FFF2-40B4-BE49-F238E27FC236}">
+                <a16:creationId xmlns:a16="http://schemas.microsoft.com/office/drawing/2014/main" id="{A22E7B56-F0A6-7759-8745-FA322665F2A1}"/>
+              </a:ext>
+            </a:extLst>
+          </p:cNvPr>
+          <p:cNvCxnSpPr>
+            <a:cxnSpLocks/>
+          </p:cNvCxnSpPr>
+          <p:nvPr/>
+        </p:nvCxnSpPr>
+        <p:spPr>
+          <a:xfrm flipV="1">
+            <a:off x="88282" y="5206455"/>
+            <a:ext cx="720000" cy="1536"/>
+          </a:xfrm>
+          <a:prstGeom prst="straightConnector1">
+            <a:avLst/>
+          </a:prstGeom>
+          <a:ln w="25400" cap="rnd">
+            <a:solidFill>
+              <a:srgbClr val="FDAD57"/>
+            </a:solidFill>
+            <a:tailEnd type="triangle" w="med" len="lg"/>
+          </a:ln>
+        </p:spPr>
+        <p:style>
+          <a:lnRef idx="1">
+            <a:schemeClr val="accent1"/>
+          </a:lnRef>
+          <a:fillRef idx="0">
+            <a:schemeClr val="accent1"/>
+          </a:fillRef>
+          <a:effectRef idx="0">
+            <a:schemeClr val="accent1"/>
+          </a:effectRef>
+          <a:fontRef idx="minor">
+            <a:schemeClr val="tx1"/>
+          </a:fontRef>
+        </p:style>
+      </p:cxnSp>
+      <p:sp>
+        <p:nvSpPr>
+          <p:cNvPr id="129" name="ZoneTexte 128">
+            <a:extLst>
+              <a:ext uri="{FF2B5EF4-FFF2-40B4-BE49-F238E27FC236}">
+                <a16:creationId xmlns:a16="http://schemas.microsoft.com/office/drawing/2014/main" id="{6A371C0B-C02F-FE9A-C023-F22C5EE2A1EF}"/>
+              </a:ext>
+            </a:extLst>
+          </p:cNvPr>
+          <p:cNvSpPr txBox="1"/>
+          <p:nvPr/>
+        </p:nvSpPr>
+        <p:spPr>
+          <a:xfrm>
+            <a:off x="-484189" y="4746488"/>
+            <a:ext cx="1219778" cy="461665"/>
+          </a:xfrm>
+          <a:prstGeom prst="rect">
+            <a:avLst/>
+          </a:prstGeom>
+          <a:noFill/>
+        </p:spPr>
+        <p:txBody>
+          <a:bodyPr wrap="square">
+            <a:spAutoFit/>
+          </a:bodyPr>
+          <a:lstStyle/>
+          <a:p>
+            <a:pPr algn="ctr"/>
+            <a:r>
+              <a:rPr lang="fr-FR" sz="1200" dirty="0">
+                <a:solidFill>
+                  <a:srgbClr val="002060"/>
+                </a:solidFill>
+                <a:latin typeface="Arial Nova" panose="020B0504020202020204" pitchFamily="34" charset="0"/>
+              </a:rPr>
+              <a:t>Puissance électrique</a:t>
+            </a:r>
+          </a:p>
+        </p:txBody>
+      </p:sp>
+      <p:cxnSp>
+        <p:nvCxnSpPr>
+          <p:cNvPr id="130" name="Connecteur droit avec flèche 129">
+            <a:extLst>
+              <a:ext uri="{FF2B5EF4-FFF2-40B4-BE49-F238E27FC236}">
+                <a16:creationId xmlns:a16="http://schemas.microsoft.com/office/drawing/2014/main" id="{84B0A02A-63E8-0814-9B5A-7DCEA03309BB}"/>
+              </a:ext>
+            </a:extLst>
+          </p:cNvPr>
+          <p:cNvCxnSpPr>
+            <a:cxnSpLocks/>
+          </p:cNvCxnSpPr>
+          <p:nvPr/>
+        </p:nvCxnSpPr>
+        <p:spPr>
+          <a:xfrm flipV="1">
+            <a:off x="7161435" y="5185757"/>
+            <a:ext cx="720000" cy="1536"/>
+          </a:xfrm>
+          <a:prstGeom prst="straightConnector1">
+            <a:avLst/>
+          </a:prstGeom>
+          <a:ln w="25400" cap="rnd">
+            <a:solidFill>
+              <a:srgbClr val="FDAD57"/>
+            </a:solidFill>
+            <a:tailEnd type="triangle" w="med" len="lg"/>
+          </a:ln>
+        </p:spPr>
+        <p:style>
+          <a:lnRef idx="1">
+            <a:schemeClr val="accent1"/>
+          </a:lnRef>
+          <a:fillRef idx="0">
+            <a:schemeClr val="accent1"/>
+          </a:fillRef>
+          <a:effectRef idx="0">
+            <a:schemeClr val="accent1"/>
+          </a:effectRef>
+          <a:fontRef idx="minor">
+            <a:schemeClr val="tx1"/>
+          </a:fontRef>
+        </p:style>
+      </p:cxnSp>
+      <p:sp>
+        <p:nvSpPr>
+          <p:cNvPr id="131" name="ZoneTexte 130">
+            <a:extLst>
+              <a:ext uri="{FF2B5EF4-FFF2-40B4-BE49-F238E27FC236}">
+                <a16:creationId xmlns:a16="http://schemas.microsoft.com/office/drawing/2014/main" id="{6445B850-13B4-C43E-6410-5BC30AFB763A}"/>
+              </a:ext>
+            </a:extLst>
+          </p:cNvPr>
+          <p:cNvSpPr txBox="1"/>
+          <p:nvPr/>
+        </p:nvSpPr>
+        <p:spPr>
+          <a:xfrm>
+            <a:off x="5213128" y="1470968"/>
+            <a:ext cx="1888898" cy="307777"/>
+          </a:xfrm>
+          <a:prstGeom prst="rect">
+            <a:avLst/>
+          </a:prstGeom>
+          <a:noFill/>
+        </p:spPr>
+        <p:txBody>
+          <a:bodyPr wrap="square">
+            <a:spAutoFit/>
+          </a:bodyPr>
+          <a:lstStyle/>
+          <a:p>
+            <a:pPr algn="ctr"/>
+            <a:r>
+              <a:rPr lang="fr-FR" sz="1400" dirty="0">
+                <a:solidFill>
+                  <a:srgbClr val="002060"/>
+                </a:solidFill>
+                <a:latin typeface="Arial Nova" panose="020B0504020202020204" pitchFamily="34" charset="0"/>
+              </a:rPr>
+              <a:t>Chaîne d’information</a:t>
+            </a:r>
+          </a:p>
+        </p:txBody>
+      </p:sp>
+      <p:sp>
+        <p:nvSpPr>
+          <p:cNvPr id="132" name="ZoneTexte 131">
+            <a:extLst>
+              <a:ext uri="{FF2B5EF4-FFF2-40B4-BE49-F238E27FC236}">
+                <a16:creationId xmlns:a16="http://schemas.microsoft.com/office/drawing/2014/main" id="{449EE4FF-AA12-4319-7BCB-CF1B72806B74}"/>
+              </a:ext>
+            </a:extLst>
+          </p:cNvPr>
+          <p:cNvSpPr txBox="1"/>
+          <p:nvPr/>
+        </p:nvSpPr>
+        <p:spPr>
+          <a:xfrm>
+            <a:off x="5253568" y="4275145"/>
+            <a:ext cx="1888898" cy="307777"/>
+          </a:xfrm>
+          <a:prstGeom prst="rect">
+            <a:avLst/>
+          </a:prstGeom>
+          <a:noFill/>
+        </p:spPr>
+        <p:txBody>
+          <a:bodyPr wrap="square">
+            <a:spAutoFit/>
+          </a:bodyPr>
+          <a:lstStyle/>
+          <a:p>
+            <a:pPr algn="ctr"/>
+            <a:r>
+              <a:rPr lang="fr-FR" sz="1400" dirty="0">
+                <a:solidFill>
+                  <a:srgbClr val="D2A000"/>
+                </a:solidFill>
+                <a:latin typeface="Arial Nova" panose="020B0504020202020204" pitchFamily="34" charset="0"/>
+              </a:rPr>
+              <a:t>Chaîne de puissance</a:t>
+            </a:r>
+          </a:p>
+        </p:txBody>
+      </p:sp>
+    </p:spTree>
+    <p:extLst>
+      <p:ext uri="{BB962C8B-B14F-4D97-AF65-F5344CB8AC3E}">
+        <p14:creationId xmlns:p14="http://schemas.microsoft.com/office/powerpoint/2010/main" val="284060875"/>
+      </p:ext>
+    </p:extLst>
+  </p:cSld>
+  <p:clrMapOvr>
+    <a:masterClrMapping/>
+  </p:clrMapOvr>
+</p:sld>
+</file>
+
+<file path=ppt/slides/slide5.xml><?xml version="1.0" encoding="utf-8"?>
+<p:sld xmlns:a="http://schemas.openxmlformats.org/drawingml/2006/main" xmlns:r="http://schemas.openxmlformats.org/officeDocument/2006/relationships" xmlns:p="http://schemas.openxmlformats.org/presentationml/2006/main">
+  <p:cSld>
+    <p:spTree>
+      <p:nvGrpSpPr>
+        <p:cNvPr id="1" name="">
+          <a:extLst>
+            <a:ext uri="{FF2B5EF4-FFF2-40B4-BE49-F238E27FC236}">
+              <a16:creationId xmlns:a16="http://schemas.microsoft.com/office/drawing/2014/main" id="{C12DDCEF-2AF2-FE67-C25A-8A9C8C3C178B}"/>
+            </a:ext>
+          </a:extLst>
+        </p:cNvPr>
+        <p:cNvGrpSpPr/>
+        <p:nvPr/>
+      </p:nvGrpSpPr>
+      <p:grpSpPr>
+        <a:xfrm>
+          <a:off x="0" y="0"/>
+          <a:ext cx="0" cy="0"/>
+          <a:chOff x="0" y="0"/>
+          <a:chExt cx="0" cy="0"/>
+        </a:xfrm>
+      </p:grpSpPr>
+      <p:sp>
+        <p:nvSpPr>
+          <p:cNvPr id="127" name="Rectangle : coins arrondis 126">
+            <a:extLst>
+              <a:ext uri="{FF2B5EF4-FFF2-40B4-BE49-F238E27FC236}">
+                <a16:creationId xmlns:a16="http://schemas.microsoft.com/office/drawing/2014/main" id="{A8BB23EA-A722-5F67-A24D-D141874E9924}"/>
+              </a:ext>
+            </a:extLst>
+          </p:cNvPr>
+          <p:cNvSpPr/>
+          <p:nvPr/>
+        </p:nvSpPr>
+        <p:spPr>
+          <a:xfrm>
+            <a:off x="599208" y="4239788"/>
+            <a:ext cx="6562868" cy="1968508"/>
+          </a:xfrm>
+          <a:prstGeom prst="roundRect">
+            <a:avLst>
+              <a:gd name="adj" fmla="val 1416"/>
+            </a:avLst>
+          </a:prstGeom>
+          <a:solidFill>
+            <a:srgbClr val="FFF0C1"/>
+          </a:solidFill>
+          <a:ln w="19050">
+            <a:solidFill>
+              <a:srgbClr val="FFC000"/>
+            </a:solidFill>
+          </a:ln>
+        </p:spPr>
+        <p:style>
+          <a:lnRef idx="2">
+            <a:schemeClr val="accent1">
+              <a:shade val="50000"/>
+            </a:schemeClr>
+          </a:lnRef>
+          <a:fillRef idx="1">
+            <a:schemeClr val="accent1"/>
+          </a:fillRef>
+          <a:effectRef idx="0">
+            <a:schemeClr val="accent1"/>
+          </a:effectRef>
+          <a:fontRef idx="minor">
+            <a:schemeClr val="lt1"/>
+          </a:fontRef>
+        </p:style>
+        <p:txBody>
+          <a:bodyPr rtlCol="0" anchor="ctr"/>
+          <a:lstStyle/>
+          <a:p>
+            <a:pPr algn="ctr"/>
+            <a:endParaRPr lang="fr-FR" sz="1200" b="1" dirty="0">
+              <a:solidFill>
+                <a:srgbClr val="004F77"/>
+              </a:solidFill>
+              <a:latin typeface="Arial Nova" panose="020B0504020202020204" pitchFamily="34" charset="0"/>
+            </a:endParaRPr>
+          </a:p>
+        </p:txBody>
+      </p:sp>
+      <p:sp>
+        <p:nvSpPr>
+          <p:cNvPr id="126" name="Rectangle : coins arrondis 125">
+            <a:extLst>
+              <a:ext uri="{FF2B5EF4-FFF2-40B4-BE49-F238E27FC236}">
+                <a16:creationId xmlns:a16="http://schemas.microsoft.com/office/drawing/2014/main" id="{890B75D0-C764-8BC5-D16D-7E1F3BF68117}"/>
+              </a:ext>
+            </a:extLst>
+          </p:cNvPr>
+          <p:cNvSpPr/>
+          <p:nvPr/>
+        </p:nvSpPr>
+        <p:spPr>
+          <a:xfrm>
+            <a:off x="599208" y="1868749"/>
+            <a:ext cx="6562868" cy="2136048"/>
+          </a:xfrm>
+          <a:prstGeom prst="roundRect">
+            <a:avLst>
+              <a:gd name="adj" fmla="val 1416"/>
+            </a:avLst>
+          </a:prstGeom>
+          <a:solidFill>
+            <a:srgbClr val="E4F2F8"/>
+          </a:solidFill>
+          <a:ln w="19050">
+            <a:solidFill>
+              <a:srgbClr val="004F77"/>
+            </a:solidFill>
+          </a:ln>
+        </p:spPr>
+        <p:style>
+          <a:lnRef idx="2">
+            <a:schemeClr val="accent1">
+              <a:shade val="50000"/>
+            </a:schemeClr>
+          </a:lnRef>
+          <a:fillRef idx="1">
+            <a:schemeClr val="accent1"/>
+          </a:fillRef>
+          <a:effectRef idx="0">
+            <a:schemeClr val="accent1"/>
+          </a:effectRef>
+          <a:fontRef idx="minor">
+            <a:schemeClr val="lt1"/>
+          </a:fontRef>
+        </p:style>
+        <p:txBody>
+          <a:bodyPr rtlCol="0" anchor="ctr"/>
+          <a:lstStyle/>
+          <a:p>
+            <a:pPr algn="ctr"/>
+            <a:endParaRPr lang="fr-FR" sz="1200" b="1" dirty="0">
+              <a:solidFill>
+                <a:srgbClr val="004F77"/>
+              </a:solidFill>
+              <a:latin typeface="Arial Nova" panose="020B0504020202020204" pitchFamily="34" charset="0"/>
+            </a:endParaRPr>
+          </a:p>
+        </p:txBody>
+      </p:sp>
+      <p:sp>
+        <p:nvSpPr>
+          <p:cNvPr id="4" name="Titre 3">
+            <a:extLst>
+              <a:ext uri="{FF2B5EF4-FFF2-40B4-BE49-F238E27FC236}">
+                <a16:creationId xmlns:a16="http://schemas.microsoft.com/office/drawing/2014/main" id="{CC6510EE-C22B-023C-C253-BD1279069377}"/>
+              </a:ext>
+            </a:extLst>
+          </p:cNvPr>
+          <p:cNvSpPr>
+            <a:spLocks noGrp="1"/>
+          </p:cNvSpPr>
+          <p:nvPr>
+            <p:ph type="title"/>
+          </p:nvPr>
+        </p:nvSpPr>
+        <p:spPr/>
+        <p:txBody>
+          <a:bodyPr/>
+          <a:lstStyle/>
+          <a:p>
+            <a:r>
+              <a:rPr lang="fr-FR" dirty="0"/>
+              <a:t>Chaine fonctionnelle du </a:t>
+            </a:r>
+            <a:r>
+              <a:rPr lang="fr-FR" dirty="0" err="1"/>
+              <a:t>Comax</a:t>
+            </a:r>
+            <a:r>
+              <a:rPr lang="fr-FR" dirty="0"/>
+              <a:t> Incomplète</a:t>
+            </a:r>
+          </a:p>
+        </p:txBody>
+      </p:sp>
+      <p:sp>
+        <p:nvSpPr>
+          <p:cNvPr id="8" name="Rectangle : coins arrondis 7">
+            <a:extLst>
+              <a:ext uri="{FF2B5EF4-FFF2-40B4-BE49-F238E27FC236}">
+                <a16:creationId xmlns:a16="http://schemas.microsoft.com/office/drawing/2014/main" id="{7991703A-CAA1-6968-A4C5-C033D6DA1FE2}"/>
+              </a:ext>
+            </a:extLst>
+          </p:cNvPr>
+          <p:cNvSpPr/>
+          <p:nvPr/>
+        </p:nvSpPr>
+        <p:spPr>
+          <a:xfrm>
+            <a:off x="3578509" y="2249123"/>
+            <a:ext cx="1440000" cy="540000"/>
+          </a:xfrm>
+          <a:prstGeom prst="roundRect">
+            <a:avLst>
+              <a:gd name="adj" fmla="val 11914"/>
+            </a:avLst>
+          </a:prstGeom>
+          <a:noFill/>
+          <a:ln w="19050">
+            <a:solidFill>
+              <a:srgbClr val="002060"/>
+            </a:solidFill>
+          </a:ln>
+        </p:spPr>
+        <p:style>
+          <a:lnRef idx="2">
+            <a:schemeClr val="accent1">
+              <a:shade val="50000"/>
+            </a:schemeClr>
+          </a:lnRef>
+          <a:fillRef idx="1">
+            <a:schemeClr val="accent1"/>
+          </a:fillRef>
+          <a:effectRef idx="0">
+            <a:schemeClr val="accent1"/>
+          </a:effectRef>
+          <a:fontRef idx="minor">
+            <a:schemeClr val="lt1"/>
+          </a:fontRef>
+        </p:style>
+        <p:txBody>
+          <a:bodyPr rtlCol="0" anchor="ctr"/>
+          <a:lstStyle/>
+          <a:p>
+            <a:pPr algn="ctr"/>
+            <a:r>
+              <a:rPr lang="fr-FR" sz="1400" dirty="0">
+                <a:solidFill>
+                  <a:srgbClr val="002060"/>
+                </a:solidFill>
+                <a:latin typeface="Arial Nova" panose="020B0504020202020204" pitchFamily="34" charset="0"/>
+              </a:rPr>
+              <a:t>Traiter</a:t>
+            </a:r>
+          </a:p>
+        </p:txBody>
+      </p:sp>
+      <p:sp>
+        <p:nvSpPr>
+          <p:cNvPr id="10" name="Rectangle : coins arrondis 9">
+            <a:extLst>
+              <a:ext uri="{FF2B5EF4-FFF2-40B4-BE49-F238E27FC236}">
+                <a16:creationId xmlns:a16="http://schemas.microsoft.com/office/drawing/2014/main" id="{8D125275-5E48-0E2E-486D-2E9AA4B262F8}"/>
+              </a:ext>
+            </a:extLst>
+          </p:cNvPr>
+          <p:cNvSpPr/>
+          <p:nvPr/>
+        </p:nvSpPr>
+        <p:spPr>
+          <a:xfrm>
+            <a:off x="5518287" y="2229245"/>
+            <a:ext cx="1440000" cy="576000"/>
+          </a:xfrm>
+          <a:prstGeom prst="roundRect">
+            <a:avLst>
+              <a:gd name="adj" fmla="val 11914"/>
+            </a:avLst>
+          </a:prstGeom>
+          <a:noFill/>
+          <a:ln w="19050">
+            <a:solidFill>
+              <a:srgbClr val="002060"/>
+            </a:solidFill>
+          </a:ln>
+        </p:spPr>
+        <p:style>
+          <a:lnRef idx="2">
+            <a:schemeClr val="accent1">
+              <a:shade val="50000"/>
+            </a:schemeClr>
+          </a:lnRef>
+          <a:fillRef idx="1">
+            <a:schemeClr val="accent1"/>
+          </a:fillRef>
+          <a:effectRef idx="0">
+            <a:schemeClr val="accent1"/>
+          </a:effectRef>
+          <a:fontRef idx="minor">
+            <a:schemeClr val="lt1"/>
+          </a:fontRef>
+        </p:style>
+        <p:txBody>
+          <a:bodyPr rtlCol="0" anchor="ctr"/>
+          <a:lstStyle/>
+          <a:p>
+            <a:pPr algn="ctr"/>
+            <a:r>
+              <a:rPr lang="fr-FR" sz="1400" dirty="0">
+                <a:solidFill>
+                  <a:srgbClr val="002060"/>
+                </a:solidFill>
+                <a:latin typeface="Arial Nova" panose="020B0504020202020204" pitchFamily="34" charset="0"/>
+              </a:rPr>
+              <a:t>Communiquer</a:t>
+            </a:r>
+          </a:p>
+        </p:txBody>
+      </p:sp>
+      <p:sp>
+        <p:nvSpPr>
+          <p:cNvPr id="11" name="Rectangle : coins arrondis 10">
+            <a:extLst>
+              <a:ext uri="{FF2B5EF4-FFF2-40B4-BE49-F238E27FC236}">
+                <a16:creationId xmlns:a16="http://schemas.microsoft.com/office/drawing/2014/main" id="{FBF96AAA-56FB-ECE3-F733-3EE1A029F600}"/>
+              </a:ext>
+            </a:extLst>
+          </p:cNvPr>
+          <p:cNvSpPr/>
+          <p:nvPr/>
+        </p:nvSpPr>
+        <p:spPr>
+          <a:xfrm>
+            <a:off x="3605539" y="2844896"/>
+            <a:ext cx="1423066" cy="408941"/>
+          </a:xfrm>
+          <a:prstGeom prst="roundRect">
+            <a:avLst>
+              <a:gd name="adj" fmla="val 11914"/>
+            </a:avLst>
+          </a:prstGeom>
+          <a:solidFill>
+            <a:srgbClr val="DFE3EB"/>
+          </a:solidFill>
+          <a:ln w="19050">
+            <a:solidFill>
+              <a:srgbClr val="DFE3EB"/>
+            </a:solidFill>
+          </a:ln>
+        </p:spPr>
+        <p:style>
+          <a:lnRef idx="2">
+            <a:schemeClr val="accent1">
+              <a:shade val="50000"/>
+            </a:schemeClr>
+          </a:lnRef>
+          <a:fillRef idx="1">
+            <a:schemeClr val="accent1"/>
+          </a:fillRef>
+          <a:effectRef idx="0">
+            <a:schemeClr val="accent1"/>
+          </a:effectRef>
+          <a:fontRef idx="minor">
+            <a:schemeClr val="lt1"/>
+          </a:fontRef>
+        </p:style>
+        <p:txBody>
+          <a:bodyPr lIns="0" tIns="0" rIns="0" bIns="0" rtlCol="0" anchor="ctr"/>
+          <a:lstStyle/>
+          <a:p>
+            <a:pPr algn="ctr"/>
+            <a:r>
+              <a:rPr lang="fr-FR" sz="1000" dirty="0">
+                <a:solidFill>
+                  <a:srgbClr val="004F77"/>
+                </a:solidFill>
+                <a:latin typeface="Arial Nova" panose="020B0504020202020204" pitchFamily="34" charset="0"/>
+              </a:rPr>
+              <a:t>Carte de commande EPOS 2</a:t>
+            </a:r>
+          </a:p>
+        </p:txBody>
+      </p:sp>
+      <p:cxnSp>
+        <p:nvCxnSpPr>
+          <p:cNvPr id="46" name="Connecteur : en angle 45">
+            <a:extLst>
+              <a:ext uri="{FF2B5EF4-FFF2-40B4-BE49-F238E27FC236}">
+                <a16:creationId xmlns:a16="http://schemas.microsoft.com/office/drawing/2014/main" id="{28C5115C-818A-3FEE-E49A-19835D65791D}"/>
+              </a:ext>
+            </a:extLst>
+          </p:cNvPr>
+          <p:cNvCxnSpPr>
+            <a:cxnSpLocks/>
+          </p:cNvCxnSpPr>
+          <p:nvPr/>
+        </p:nvCxnSpPr>
+        <p:spPr>
+          <a:xfrm flipH="1">
+            <a:off x="4298510" y="2646123"/>
+            <a:ext cx="719999" cy="1731991"/>
+          </a:xfrm>
+          <a:prstGeom prst="bentConnector4">
+            <a:avLst>
+              <a:gd name="adj1" fmla="val -31750"/>
+              <a:gd name="adj2" fmla="val 57794"/>
+            </a:avLst>
+          </a:prstGeom>
+          <a:ln w="25400">
+            <a:solidFill>
+              <a:srgbClr val="002060"/>
+            </a:solidFill>
+            <a:headEnd type="none"/>
+            <a:tailEnd type="triangle"/>
+          </a:ln>
+        </p:spPr>
+        <p:style>
+          <a:lnRef idx="1">
+            <a:schemeClr val="accent1"/>
+          </a:lnRef>
+          <a:fillRef idx="0">
+            <a:schemeClr val="accent1"/>
+          </a:fillRef>
+          <a:effectRef idx="0">
+            <a:schemeClr val="accent1"/>
+          </a:effectRef>
+          <a:fontRef idx="minor">
+            <a:schemeClr val="tx1"/>
+          </a:fontRef>
+        </p:style>
+      </p:cxnSp>
+      <p:sp>
+        <p:nvSpPr>
+          <p:cNvPr id="49" name="Rectangle : coins arrondis 48">
+            <a:extLst>
+              <a:ext uri="{FF2B5EF4-FFF2-40B4-BE49-F238E27FC236}">
+                <a16:creationId xmlns:a16="http://schemas.microsoft.com/office/drawing/2014/main" id="{7CBD92DC-4FEB-CC9A-EB5B-35A9FCC1A99D}"/>
+              </a:ext>
+            </a:extLst>
+          </p:cNvPr>
+          <p:cNvSpPr/>
+          <p:nvPr/>
+        </p:nvSpPr>
+        <p:spPr>
+          <a:xfrm>
+            <a:off x="7881435" y="4571740"/>
+            <a:ext cx="1365662" cy="1194790"/>
+          </a:xfrm>
+          <a:prstGeom prst="roundRect">
+            <a:avLst>
+              <a:gd name="adj" fmla="val 11914"/>
+            </a:avLst>
+          </a:prstGeom>
+          <a:solidFill>
+            <a:srgbClr val="B2CAD6"/>
+          </a:solidFill>
+          <a:ln w="19050">
+            <a:solidFill>
+              <a:srgbClr val="B2CAD6"/>
+            </a:solidFill>
+          </a:ln>
+        </p:spPr>
+        <p:style>
+          <a:lnRef idx="2">
+            <a:schemeClr val="accent1">
+              <a:shade val="50000"/>
+            </a:schemeClr>
+          </a:lnRef>
+          <a:fillRef idx="1">
+            <a:schemeClr val="accent1"/>
+          </a:fillRef>
+          <a:effectRef idx="0">
+            <a:schemeClr val="accent1"/>
+          </a:effectRef>
+          <a:fontRef idx="minor">
+            <a:schemeClr val="lt1"/>
+          </a:fontRef>
+        </p:style>
+        <p:txBody>
+          <a:bodyPr rtlCol="0" anchor="ctr"/>
+          <a:lstStyle/>
+          <a:p>
+            <a:pPr algn="ctr"/>
+            <a:r>
+              <a:rPr lang="fr-FR" sz="1200" dirty="0">
+                <a:solidFill>
+                  <a:srgbClr val="0D587E"/>
+                </a:solidFill>
+                <a:latin typeface="Arial Nova" panose="020B0504020202020204" pitchFamily="34" charset="0"/>
+              </a:rPr>
+              <a:t>AGIR</a:t>
+            </a:r>
+          </a:p>
+        </p:txBody>
+      </p:sp>
+      <p:grpSp>
+        <p:nvGrpSpPr>
+          <p:cNvPr id="57" name="Groupe 56">
+            <a:extLst>
+              <a:ext uri="{FF2B5EF4-FFF2-40B4-BE49-F238E27FC236}">
+                <a16:creationId xmlns:a16="http://schemas.microsoft.com/office/drawing/2014/main" id="{B9049F35-CF66-420C-3902-990825BD76DB}"/>
+              </a:ext>
+            </a:extLst>
+          </p:cNvPr>
+          <p:cNvGrpSpPr/>
+          <p:nvPr/>
+        </p:nvGrpSpPr>
+        <p:grpSpPr>
+          <a:xfrm rot="5400000" flipV="1">
+            <a:off x="9158263" y="5097336"/>
+            <a:ext cx="840537" cy="2178926"/>
+            <a:chOff x="9150639" y="2423323"/>
+            <a:chExt cx="840537" cy="2876629"/>
+          </a:xfrm>
+        </p:grpSpPr>
+        <p:sp>
+          <p:nvSpPr>
+            <p:cNvPr id="58" name="Flèche : virage 57">
+              <a:extLst>
+                <a:ext uri="{FF2B5EF4-FFF2-40B4-BE49-F238E27FC236}">
+                  <a16:creationId xmlns:a16="http://schemas.microsoft.com/office/drawing/2014/main" id="{10BE61E7-1AE9-3DC1-B105-B8C40D2C528D}"/>
+                </a:ext>
+              </a:extLst>
+            </p:cNvPr>
+            <p:cNvSpPr/>
+            <p:nvPr/>
+          </p:nvSpPr>
+          <p:spPr>
+            <a:xfrm rot="5400000">
+              <a:off x="8157634" y="3416328"/>
+              <a:ext cx="2826548" cy="840537"/>
+            </a:xfrm>
+            <a:prstGeom prst="bentArrow">
+              <a:avLst>
+                <a:gd name="adj1" fmla="val 31434"/>
+                <a:gd name="adj2" fmla="val 25000"/>
+                <a:gd name="adj3" fmla="val 17852"/>
+                <a:gd name="adj4" fmla="val 20160"/>
+              </a:avLst>
+            </a:prstGeom>
+            <a:solidFill>
+              <a:srgbClr val="B2CAD6"/>
+            </a:solidFill>
+            <a:ln>
+              <a:noFill/>
+            </a:ln>
+          </p:spPr>
+          <p:style>
+            <a:lnRef idx="2">
+              <a:schemeClr val="accent1">
+                <a:shade val="50000"/>
+              </a:schemeClr>
+            </a:lnRef>
+            <a:fillRef idx="1">
+              <a:schemeClr val="accent1"/>
+            </a:fillRef>
+            <a:effectRef idx="0">
+              <a:schemeClr val="accent1"/>
+            </a:effectRef>
+            <a:fontRef idx="minor">
+              <a:schemeClr val="lt1"/>
+            </a:fontRef>
+          </p:style>
+          <p:txBody>
+            <a:bodyPr rtlCol="0" anchor="ctr"/>
+            <a:lstStyle/>
+            <a:p>
+              <a:pPr algn="ctr"/>
+              <a:endParaRPr lang="fr-FR" dirty="0">
+                <a:solidFill>
+                  <a:schemeClr val="tx1"/>
+                </a:solidFill>
+              </a:endParaRPr>
+            </a:p>
+          </p:txBody>
+        </p:sp>
+        <p:sp>
+          <p:nvSpPr>
+            <p:cNvPr id="59" name="ZoneTexte 58">
+              <a:extLst>
+                <a:ext uri="{FF2B5EF4-FFF2-40B4-BE49-F238E27FC236}">
+                  <a16:creationId xmlns:a16="http://schemas.microsoft.com/office/drawing/2014/main" id="{7F7B25FA-4D7C-6ED5-8094-1919B3B01DA0}"/>
+                </a:ext>
+              </a:extLst>
+            </p:cNvPr>
+            <p:cNvSpPr txBox="1"/>
+            <p:nvPr/>
+          </p:nvSpPr>
+          <p:spPr>
+            <a:xfrm rot="16200000">
+              <a:off x="8361425" y="3755873"/>
+              <a:ext cx="2826549" cy="261610"/>
+            </a:xfrm>
+            <a:prstGeom prst="rect">
+              <a:avLst/>
+            </a:prstGeom>
+            <a:noFill/>
+            <a:ln>
+              <a:noFill/>
+            </a:ln>
+          </p:spPr>
+          <p:txBody>
+            <a:bodyPr wrap="square" rtlCol="0">
+              <a:spAutoFit/>
+            </a:bodyPr>
+            <a:lstStyle/>
+            <a:p>
+              <a:r>
+                <a:rPr lang="fr-FR" sz="1100" dirty="0">
+                  <a:latin typeface="Arial Nova" panose="020B0504020202020204" pitchFamily="34" charset="0"/>
+                </a:rPr>
+                <a:t>Axe COMAX en mouvement</a:t>
+              </a:r>
+            </a:p>
+          </p:txBody>
+        </p:sp>
+      </p:grpSp>
+      <p:grpSp>
+        <p:nvGrpSpPr>
+          <p:cNvPr id="60" name="Groupe 59">
+            <a:extLst>
+              <a:ext uri="{FF2B5EF4-FFF2-40B4-BE49-F238E27FC236}">
+                <a16:creationId xmlns:a16="http://schemas.microsoft.com/office/drawing/2014/main" id="{2E272C64-446C-2AE9-2CAF-39317A9461D4}"/>
+              </a:ext>
+            </a:extLst>
+          </p:cNvPr>
+          <p:cNvGrpSpPr/>
+          <p:nvPr/>
+        </p:nvGrpSpPr>
+        <p:grpSpPr>
+          <a:xfrm flipH="1">
+            <a:off x="8385346" y="3993931"/>
+            <a:ext cx="1723502" cy="577809"/>
+            <a:chOff x="9058474" y="2836569"/>
+            <a:chExt cx="1566153" cy="577809"/>
+          </a:xfrm>
+        </p:grpSpPr>
+        <p:sp>
+          <p:nvSpPr>
+            <p:cNvPr id="61" name="Flèche : virage 60">
+              <a:extLst>
+                <a:ext uri="{FF2B5EF4-FFF2-40B4-BE49-F238E27FC236}">
+                  <a16:creationId xmlns:a16="http://schemas.microsoft.com/office/drawing/2014/main" id="{2F626DC2-AB1E-0113-E77F-99BE457423E2}"/>
+                </a:ext>
+              </a:extLst>
+            </p:cNvPr>
+            <p:cNvSpPr/>
+            <p:nvPr/>
+          </p:nvSpPr>
+          <p:spPr>
+            <a:xfrm rot="5400000">
+              <a:off x="9563593" y="2353345"/>
+              <a:ext cx="572849" cy="1549218"/>
+            </a:xfrm>
+            <a:prstGeom prst="bentArrow">
+              <a:avLst>
+                <a:gd name="adj1" fmla="val 38639"/>
+                <a:gd name="adj2" fmla="val 38302"/>
+                <a:gd name="adj3" fmla="val 16744"/>
+                <a:gd name="adj4" fmla="val 20160"/>
+              </a:avLst>
+            </a:prstGeom>
+            <a:solidFill>
+              <a:srgbClr val="B2CAD6"/>
+            </a:solidFill>
+            <a:ln>
+              <a:noFill/>
+            </a:ln>
+          </p:spPr>
+          <p:style>
+            <a:lnRef idx="2">
+              <a:schemeClr val="accent1">
+                <a:shade val="50000"/>
+              </a:schemeClr>
+            </a:lnRef>
+            <a:fillRef idx="1">
+              <a:schemeClr val="accent1"/>
+            </a:fillRef>
+            <a:effectRef idx="0">
+              <a:schemeClr val="accent1"/>
+            </a:effectRef>
+            <a:fontRef idx="minor">
+              <a:schemeClr val="lt1"/>
+            </a:fontRef>
+          </p:style>
+          <p:txBody>
+            <a:bodyPr rtlCol="0" anchor="ctr"/>
+            <a:lstStyle/>
+            <a:p>
+              <a:pPr algn="ctr"/>
+              <a:endParaRPr lang="fr-FR" dirty="0">
+                <a:solidFill>
+                  <a:schemeClr val="tx1"/>
+                </a:solidFill>
+              </a:endParaRPr>
+            </a:p>
+          </p:txBody>
+        </p:sp>
+        <p:sp>
+          <p:nvSpPr>
+            <p:cNvPr id="62" name="ZoneTexte 61">
+              <a:extLst>
+                <a:ext uri="{FF2B5EF4-FFF2-40B4-BE49-F238E27FC236}">
+                  <a16:creationId xmlns:a16="http://schemas.microsoft.com/office/drawing/2014/main" id="{BABB0CA4-35CC-D4AE-F39B-983AC84B18DA}"/>
+                </a:ext>
+              </a:extLst>
+            </p:cNvPr>
+            <p:cNvSpPr txBox="1"/>
+            <p:nvPr/>
+          </p:nvSpPr>
+          <p:spPr>
+            <a:xfrm>
+              <a:off x="9058474" y="2836569"/>
+              <a:ext cx="1473718" cy="246221"/>
+            </a:xfrm>
+            <a:prstGeom prst="rect">
+              <a:avLst/>
+            </a:prstGeom>
+            <a:noFill/>
+            <a:ln>
+              <a:noFill/>
+            </a:ln>
+          </p:spPr>
+          <p:txBody>
+            <a:bodyPr wrap="square" rtlCol="0">
+              <a:spAutoFit/>
+            </a:bodyPr>
+            <a:lstStyle/>
+            <a:p>
+              <a:r>
+                <a:rPr lang="fr-FR" sz="1000" dirty="0">
+                  <a:latin typeface="Arial Nova" panose="020B0504020202020204" pitchFamily="34" charset="0"/>
+                </a:rPr>
+                <a:t>Axe COMAX à l’arrêt</a:t>
+              </a:r>
+            </a:p>
+          </p:txBody>
+        </p:sp>
+      </p:grpSp>
+      <p:grpSp>
+        <p:nvGrpSpPr>
+          <p:cNvPr id="93" name="Groupe 92">
+            <a:extLst>
+              <a:ext uri="{FF2B5EF4-FFF2-40B4-BE49-F238E27FC236}">
+                <a16:creationId xmlns:a16="http://schemas.microsoft.com/office/drawing/2014/main" id="{8279E3F7-31FA-8C6D-8951-572EDA323EE2}"/>
+              </a:ext>
+            </a:extLst>
+          </p:cNvPr>
+          <p:cNvGrpSpPr/>
+          <p:nvPr/>
+        </p:nvGrpSpPr>
+        <p:grpSpPr>
+          <a:xfrm>
+            <a:off x="644763" y="2696925"/>
+            <a:ext cx="360000" cy="360000"/>
+            <a:chOff x="5404964" y="4396133"/>
+            <a:chExt cx="1800000" cy="1800000"/>
+          </a:xfrm>
+        </p:grpSpPr>
+        <p:sp>
+          <p:nvSpPr>
+            <p:cNvPr id="94" name="Ellipse 93">
+              <a:extLst>
+                <a:ext uri="{FF2B5EF4-FFF2-40B4-BE49-F238E27FC236}">
+                  <a16:creationId xmlns:a16="http://schemas.microsoft.com/office/drawing/2014/main" id="{CA40C01A-65EA-602F-7735-BA746B5929AB}"/>
+                </a:ext>
+              </a:extLst>
+            </p:cNvPr>
+            <p:cNvSpPr/>
+            <p:nvPr/>
+          </p:nvSpPr>
+          <p:spPr>
+            <a:xfrm>
+              <a:off x="5404964" y="4396133"/>
+              <a:ext cx="1800000" cy="1800000"/>
+            </a:xfrm>
+            <a:prstGeom prst="ellipse">
+              <a:avLst/>
+            </a:prstGeom>
+            <a:solidFill>
+              <a:srgbClr val="00517A"/>
+            </a:solidFill>
+            <a:ln>
+              <a:noFill/>
+            </a:ln>
+          </p:spPr>
+          <p:style>
+            <a:lnRef idx="2">
+              <a:schemeClr val="accent1">
+                <a:shade val="50000"/>
+              </a:schemeClr>
+            </a:lnRef>
+            <a:fillRef idx="1">
+              <a:schemeClr val="accent1"/>
+            </a:fillRef>
+            <a:effectRef idx="0">
+              <a:schemeClr val="accent1"/>
+            </a:effectRef>
+            <a:fontRef idx="minor">
+              <a:schemeClr val="lt1"/>
+            </a:fontRef>
+          </p:style>
+          <p:txBody>
+            <a:bodyPr rtlCol="0" anchor="ctr"/>
+            <a:lstStyle/>
+            <a:p>
+              <a:pPr algn="ctr"/>
+              <a:endParaRPr lang="fr-FR"/>
+            </a:p>
+          </p:txBody>
+        </p:sp>
+        <p:pic>
+          <p:nvPicPr>
+            <p:cNvPr id="95" name="Image 94">
+              <a:extLst>
+                <a:ext uri="{FF2B5EF4-FFF2-40B4-BE49-F238E27FC236}">
+                  <a16:creationId xmlns:a16="http://schemas.microsoft.com/office/drawing/2014/main" id="{8FB1251E-E854-35C0-CF54-DFEE9713F703}"/>
+                </a:ext>
+              </a:extLst>
+            </p:cNvPr>
+            <p:cNvPicPr>
+              <a:picLocks noChangeAspect="1"/>
+            </p:cNvPicPr>
+            <p:nvPr/>
+          </p:nvPicPr>
+          <p:blipFill>
+            <a:blip r:embed="rId2"/>
+            <a:stretch>
+              <a:fillRect/>
+            </a:stretch>
+          </p:blipFill>
+          <p:spPr>
+            <a:xfrm>
+              <a:off x="5543445" y="4536296"/>
+              <a:ext cx="1358232" cy="1440000"/>
+            </a:xfrm>
+            <a:prstGeom prst="rect">
+              <a:avLst/>
+            </a:prstGeom>
+          </p:spPr>
+        </p:pic>
+      </p:grpSp>
+      <p:grpSp>
+        <p:nvGrpSpPr>
+          <p:cNvPr id="31" name="Groupe 30">
+            <a:extLst>
+              <a:ext uri="{FF2B5EF4-FFF2-40B4-BE49-F238E27FC236}">
+                <a16:creationId xmlns:a16="http://schemas.microsoft.com/office/drawing/2014/main" id="{796B0A52-3944-E776-6AA4-6D6F503A7A7C}"/>
+              </a:ext>
+            </a:extLst>
+          </p:cNvPr>
+          <p:cNvGrpSpPr/>
+          <p:nvPr/>
+        </p:nvGrpSpPr>
+        <p:grpSpPr>
+          <a:xfrm>
+            <a:off x="644763" y="3469218"/>
+            <a:ext cx="360000" cy="360000"/>
+            <a:chOff x="6054233" y="4960569"/>
+            <a:chExt cx="1800000" cy="1800000"/>
+          </a:xfrm>
+        </p:grpSpPr>
+        <p:sp>
+          <p:nvSpPr>
+            <p:cNvPr id="32" name="Ellipse 31">
+              <a:extLst>
+                <a:ext uri="{FF2B5EF4-FFF2-40B4-BE49-F238E27FC236}">
+                  <a16:creationId xmlns:a16="http://schemas.microsoft.com/office/drawing/2014/main" id="{988BFECB-7581-54AC-495A-2D08EACFE548}"/>
+                </a:ext>
+              </a:extLst>
+            </p:cNvPr>
+            <p:cNvSpPr/>
+            <p:nvPr/>
+          </p:nvSpPr>
+          <p:spPr>
+            <a:xfrm>
+              <a:off x="6054233" y="4960569"/>
+              <a:ext cx="1800000" cy="1800000"/>
+            </a:xfrm>
+            <a:prstGeom prst="ellipse">
+              <a:avLst/>
+            </a:prstGeom>
+            <a:solidFill>
+              <a:srgbClr val="00547F"/>
+            </a:solidFill>
+            <a:ln>
+              <a:noFill/>
+            </a:ln>
+          </p:spPr>
+          <p:style>
+            <a:lnRef idx="2">
+              <a:schemeClr val="accent1">
+                <a:shade val="50000"/>
+              </a:schemeClr>
+            </a:lnRef>
+            <a:fillRef idx="1">
+              <a:schemeClr val="accent1"/>
+            </a:fillRef>
+            <a:effectRef idx="0">
+              <a:schemeClr val="accent1"/>
+            </a:effectRef>
+            <a:fontRef idx="minor">
+              <a:schemeClr val="lt1"/>
+            </a:fontRef>
+          </p:style>
+          <p:txBody>
+            <a:bodyPr rtlCol="0" anchor="ctr"/>
+            <a:lstStyle/>
+            <a:p>
+              <a:pPr algn="ctr"/>
+              <a:endParaRPr lang="fr-FR" b="1"/>
+            </a:p>
+          </p:txBody>
+        </p:sp>
+        <p:pic>
+          <p:nvPicPr>
+            <p:cNvPr id="33" name="Image 32">
+              <a:extLst>
+                <a:ext uri="{FF2B5EF4-FFF2-40B4-BE49-F238E27FC236}">
+                  <a16:creationId xmlns:a16="http://schemas.microsoft.com/office/drawing/2014/main" id="{9E69D67E-0FC0-84F2-C02D-6FCB292A2AF6}"/>
+                </a:ext>
+              </a:extLst>
+            </p:cNvPr>
+            <p:cNvPicPr>
+              <a:picLocks noChangeAspect="1"/>
+            </p:cNvPicPr>
+            <p:nvPr/>
+          </p:nvPicPr>
+          <p:blipFill>
+            <a:blip r:embed="rId3"/>
+            <a:stretch>
+              <a:fillRect/>
+            </a:stretch>
+          </p:blipFill>
+          <p:spPr>
+            <a:xfrm>
+              <a:off x="6298697" y="5322283"/>
+              <a:ext cx="1311072" cy="1076572"/>
+            </a:xfrm>
+            <a:prstGeom prst="rect">
+              <a:avLst/>
+            </a:prstGeom>
+          </p:spPr>
+        </p:pic>
+      </p:grpSp>
+      <p:cxnSp>
+        <p:nvCxnSpPr>
+          <p:cNvPr id="3" name="Connecteur droit avec flèche 2">
+            <a:extLst>
+              <a:ext uri="{FF2B5EF4-FFF2-40B4-BE49-F238E27FC236}">
+                <a16:creationId xmlns:a16="http://schemas.microsoft.com/office/drawing/2014/main" id="{A4DA5924-B004-D0C7-2E4C-8DC4236288E3}"/>
+              </a:ext>
+            </a:extLst>
+          </p:cNvPr>
+          <p:cNvCxnSpPr>
+            <a:cxnSpLocks/>
+          </p:cNvCxnSpPr>
+          <p:nvPr/>
+        </p:nvCxnSpPr>
+        <p:spPr>
+          <a:xfrm>
+            <a:off x="2520129" y="2515479"/>
+            <a:ext cx="1058380" cy="0"/>
+          </a:xfrm>
+          <a:prstGeom prst="straightConnector1">
+            <a:avLst/>
+          </a:prstGeom>
+          <a:ln w="25400" cap="rnd">
+            <a:solidFill>
+              <a:srgbClr val="004F77"/>
+            </a:solidFill>
+            <a:tailEnd type="triangle" w="med" len="lg"/>
+          </a:ln>
+        </p:spPr>
+        <p:style>
+          <a:lnRef idx="1">
+            <a:schemeClr val="accent1"/>
+          </a:lnRef>
+          <a:fillRef idx="0">
+            <a:schemeClr val="accent1"/>
+          </a:fillRef>
+          <a:effectRef idx="0">
+            <a:schemeClr val="accent1"/>
+          </a:effectRef>
+          <a:fontRef idx="minor">
+            <a:schemeClr val="tx1"/>
+          </a:fontRef>
+        </p:style>
+      </p:cxnSp>
+      <p:sp>
+        <p:nvSpPr>
+          <p:cNvPr id="5" name="Rectangle : coins arrondis 4">
+            <a:extLst>
+              <a:ext uri="{FF2B5EF4-FFF2-40B4-BE49-F238E27FC236}">
+                <a16:creationId xmlns:a16="http://schemas.microsoft.com/office/drawing/2014/main" id="{53A43005-1C0D-31A8-71C7-428D0549AD0D}"/>
+              </a:ext>
+            </a:extLst>
+          </p:cNvPr>
+          <p:cNvSpPr/>
+          <p:nvPr/>
+        </p:nvSpPr>
+        <p:spPr>
+          <a:xfrm>
+            <a:off x="1069319" y="2349015"/>
+            <a:ext cx="1440000" cy="332929"/>
+          </a:xfrm>
+          <a:prstGeom prst="roundRect">
+            <a:avLst>
+              <a:gd name="adj" fmla="val 11914"/>
+            </a:avLst>
+          </a:prstGeom>
+          <a:noFill/>
+          <a:ln w="19050">
+            <a:solidFill>
+              <a:srgbClr val="004F77"/>
+            </a:solidFill>
+          </a:ln>
+        </p:spPr>
+        <p:style>
+          <a:lnRef idx="2">
+            <a:schemeClr val="accent1">
+              <a:shade val="50000"/>
+            </a:schemeClr>
+          </a:lnRef>
+          <a:fillRef idx="1">
+            <a:schemeClr val="accent1"/>
+          </a:fillRef>
+          <a:effectRef idx="0">
+            <a:schemeClr val="accent1"/>
+          </a:effectRef>
+          <a:fontRef idx="minor">
+            <a:schemeClr val="lt1"/>
+          </a:fontRef>
+        </p:style>
+        <p:txBody>
+          <a:bodyPr rtlCol="0" anchor="ctr"/>
+          <a:lstStyle/>
+          <a:p>
+            <a:pPr algn="ctr"/>
+            <a:r>
+              <a:rPr lang="fr-FR" sz="1200" b="1" dirty="0">
+                <a:solidFill>
+                  <a:srgbClr val="004F77"/>
+                </a:solidFill>
+                <a:latin typeface="Arial Nova" panose="020B0504020202020204" pitchFamily="34" charset="0"/>
+              </a:rPr>
+              <a:t>Acquérir</a:t>
+            </a:r>
+          </a:p>
+        </p:txBody>
+      </p:sp>
+      <p:sp>
+        <p:nvSpPr>
+          <p:cNvPr id="30" name="Rectangle : coins arrondis 29">
+            <a:extLst>
+              <a:ext uri="{FF2B5EF4-FFF2-40B4-BE49-F238E27FC236}">
+                <a16:creationId xmlns:a16="http://schemas.microsoft.com/office/drawing/2014/main" id="{C8CEFFB2-81F2-59F3-E4F9-98F62CE17438}"/>
+              </a:ext>
+            </a:extLst>
+          </p:cNvPr>
+          <p:cNvSpPr/>
+          <p:nvPr/>
+        </p:nvSpPr>
+        <p:spPr>
+          <a:xfrm>
+            <a:off x="1069319" y="2756823"/>
+            <a:ext cx="1440000" cy="234212"/>
+          </a:xfrm>
+          <a:prstGeom prst="roundRect">
+            <a:avLst>
+              <a:gd name="adj" fmla="val 11914"/>
+            </a:avLst>
+          </a:prstGeom>
+          <a:solidFill>
+            <a:srgbClr val="DFE3EB"/>
+          </a:solidFill>
+          <a:ln w="19050">
+            <a:solidFill>
+              <a:srgbClr val="DFE3EB"/>
+            </a:solidFill>
+          </a:ln>
+        </p:spPr>
+        <p:style>
+          <a:lnRef idx="2">
+            <a:schemeClr val="accent1">
+              <a:shade val="50000"/>
+            </a:schemeClr>
+          </a:lnRef>
+          <a:fillRef idx="1">
+            <a:schemeClr val="accent1"/>
+          </a:fillRef>
+          <a:effectRef idx="0">
+            <a:schemeClr val="accent1"/>
+          </a:effectRef>
+          <a:fontRef idx="minor">
+            <a:schemeClr val="lt1"/>
+          </a:fontRef>
+        </p:style>
+        <p:txBody>
+          <a:bodyPr lIns="0" tIns="0" rIns="0" bIns="0" rtlCol="0" anchor="ctr"/>
+          <a:lstStyle/>
+          <a:p>
+            <a:pPr algn="ctr"/>
+            <a:r>
+              <a:rPr lang="fr-FR" sz="1000" dirty="0">
+                <a:solidFill>
+                  <a:srgbClr val="004F77"/>
+                </a:solidFill>
+                <a:latin typeface="Arial Nova" panose="020B0504020202020204" pitchFamily="34" charset="0"/>
+              </a:rPr>
+              <a:t>Codeur incrémental</a:t>
+            </a:r>
+          </a:p>
+        </p:txBody>
+      </p:sp>
+      <p:sp>
+        <p:nvSpPr>
+          <p:cNvPr id="41" name="Rectangle : coins arrondis 40">
+            <a:extLst>
+              <a:ext uri="{FF2B5EF4-FFF2-40B4-BE49-F238E27FC236}">
+                <a16:creationId xmlns:a16="http://schemas.microsoft.com/office/drawing/2014/main" id="{937BD259-6A4E-D359-15D0-BA763E3E18ED}"/>
+              </a:ext>
+            </a:extLst>
+          </p:cNvPr>
+          <p:cNvSpPr/>
+          <p:nvPr/>
+        </p:nvSpPr>
+        <p:spPr>
+          <a:xfrm>
+            <a:off x="1069319" y="3143908"/>
+            <a:ext cx="1440000" cy="332929"/>
+          </a:xfrm>
+          <a:prstGeom prst="roundRect">
+            <a:avLst>
+              <a:gd name="adj" fmla="val 11914"/>
+            </a:avLst>
+          </a:prstGeom>
+          <a:noFill/>
+          <a:ln w="19050">
+            <a:solidFill>
+              <a:srgbClr val="004F77"/>
+            </a:solidFill>
+          </a:ln>
+        </p:spPr>
+        <p:style>
+          <a:lnRef idx="2">
+            <a:schemeClr val="accent1">
+              <a:shade val="50000"/>
+            </a:schemeClr>
+          </a:lnRef>
+          <a:fillRef idx="1">
+            <a:schemeClr val="accent1"/>
+          </a:fillRef>
+          <a:effectRef idx="0">
+            <a:schemeClr val="accent1"/>
+          </a:effectRef>
+          <a:fontRef idx="minor">
+            <a:schemeClr val="lt1"/>
+          </a:fontRef>
+        </p:style>
+        <p:txBody>
+          <a:bodyPr rtlCol="0" anchor="ctr"/>
+          <a:lstStyle/>
+          <a:p>
+            <a:pPr algn="ctr"/>
+            <a:r>
+              <a:rPr lang="fr-FR" sz="1200" b="1" dirty="0">
+                <a:solidFill>
+                  <a:srgbClr val="004F77"/>
+                </a:solidFill>
+                <a:latin typeface="Arial Nova" panose="020B0504020202020204" pitchFamily="34" charset="0"/>
+              </a:rPr>
+              <a:t>Acquérir</a:t>
+            </a:r>
+          </a:p>
+        </p:txBody>
+      </p:sp>
+      <p:sp>
+        <p:nvSpPr>
+          <p:cNvPr id="51" name="Rectangle : coins arrondis 50">
+            <a:extLst>
+              <a:ext uri="{FF2B5EF4-FFF2-40B4-BE49-F238E27FC236}">
+                <a16:creationId xmlns:a16="http://schemas.microsoft.com/office/drawing/2014/main" id="{FE9752E9-8CBD-17F6-EEC7-ADF8EC8667D8}"/>
+              </a:ext>
+            </a:extLst>
+          </p:cNvPr>
+          <p:cNvSpPr/>
+          <p:nvPr/>
+        </p:nvSpPr>
+        <p:spPr>
+          <a:xfrm>
+            <a:off x="1069319" y="3551716"/>
+            <a:ext cx="1440000" cy="234212"/>
+          </a:xfrm>
+          <a:prstGeom prst="roundRect">
+            <a:avLst>
+              <a:gd name="adj" fmla="val 11914"/>
+            </a:avLst>
+          </a:prstGeom>
+          <a:solidFill>
+            <a:srgbClr val="DFE3EB"/>
+          </a:solidFill>
+          <a:ln w="19050">
+            <a:solidFill>
+              <a:srgbClr val="DFE3EB"/>
+            </a:solidFill>
+          </a:ln>
+        </p:spPr>
+        <p:style>
+          <a:lnRef idx="2">
+            <a:schemeClr val="accent1">
+              <a:shade val="50000"/>
+            </a:schemeClr>
+          </a:lnRef>
+          <a:fillRef idx="1">
+            <a:schemeClr val="accent1"/>
+          </a:fillRef>
+          <a:effectRef idx="0">
+            <a:schemeClr val="accent1"/>
+          </a:effectRef>
+          <a:fontRef idx="minor">
+            <a:schemeClr val="lt1"/>
+          </a:fontRef>
+        </p:style>
+        <p:txBody>
+          <a:bodyPr lIns="0" tIns="0" rIns="0" bIns="0" rtlCol="0" anchor="ctr"/>
+          <a:lstStyle/>
+          <a:p>
+            <a:pPr algn="ctr"/>
+            <a:r>
+              <a:rPr lang="fr-FR" sz="1000" dirty="0">
+                <a:solidFill>
+                  <a:srgbClr val="004F77"/>
+                </a:solidFill>
+                <a:latin typeface="Arial Nova" panose="020B0504020202020204" pitchFamily="34" charset="0"/>
+              </a:rPr>
+              <a:t>Capteur de courant</a:t>
+            </a:r>
+          </a:p>
+        </p:txBody>
+      </p:sp>
+      <p:cxnSp>
+        <p:nvCxnSpPr>
+          <p:cNvPr id="82" name="Connecteur : en angle 81">
+            <a:extLst>
+              <a:ext uri="{FF2B5EF4-FFF2-40B4-BE49-F238E27FC236}">
+                <a16:creationId xmlns:a16="http://schemas.microsoft.com/office/drawing/2014/main" id="{9BF568A3-D61E-72AE-BEE7-60A24D7A4C81}"/>
+              </a:ext>
+            </a:extLst>
+          </p:cNvPr>
+          <p:cNvCxnSpPr>
+            <a:cxnSpLocks/>
+            <a:stCxn id="41" idx="3"/>
+          </p:cNvCxnSpPr>
+          <p:nvPr/>
+        </p:nvCxnSpPr>
+        <p:spPr>
+          <a:xfrm flipV="1">
+            <a:off x="2509319" y="2627112"/>
+            <a:ext cx="1079286" cy="683261"/>
+          </a:xfrm>
+          <a:prstGeom prst="bentConnector3">
+            <a:avLst>
+              <a:gd name="adj1" fmla="val 50000"/>
+            </a:avLst>
+          </a:prstGeom>
+          <a:ln w="25400" cap="rnd">
+            <a:solidFill>
+              <a:srgbClr val="004F77"/>
+            </a:solidFill>
+            <a:tailEnd type="triangle" w="med" len="lg"/>
+          </a:ln>
+        </p:spPr>
+        <p:style>
+          <a:lnRef idx="1">
+            <a:schemeClr val="accent1"/>
+          </a:lnRef>
+          <a:fillRef idx="0">
+            <a:schemeClr val="accent1"/>
+          </a:fillRef>
+          <a:effectRef idx="0">
+            <a:schemeClr val="accent1"/>
+          </a:effectRef>
+          <a:fontRef idx="minor">
+            <a:schemeClr val="tx1"/>
+          </a:fontRef>
+        </p:style>
+      </p:cxnSp>
+      <p:cxnSp>
+        <p:nvCxnSpPr>
+          <p:cNvPr id="116" name="Connecteur droit avec flèche 115">
+            <a:extLst>
+              <a:ext uri="{FF2B5EF4-FFF2-40B4-BE49-F238E27FC236}">
+                <a16:creationId xmlns:a16="http://schemas.microsoft.com/office/drawing/2014/main" id="{ED79F154-A15A-CECE-4111-0958E5784D39}"/>
+              </a:ext>
+            </a:extLst>
+          </p:cNvPr>
+          <p:cNvCxnSpPr>
+            <a:cxnSpLocks/>
+          </p:cNvCxnSpPr>
+          <p:nvPr/>
+        </p:nvCxnSpPr>
+        <p:spPr>
+          <a:xfrm flipV="1">
+            <a:off x="5018509" y="2525712"/>
+            <a:ext cx="499778" cy="0"/>
+          </a:xfrm>
+          <a:prstGeom prst="straightConnector1">
+            <a:avLst/>
+          </a:prstGeom>
+          <a:ln w="25400">
+            <a:solidFill>
+              <a:srgbClr val="002060"/>
+            </a:solidFill>
+            <a:headEnd type="none"/>
+            <a:tailEnd type="triangle"/>
+          </a:ln>
+        </p:spPr>
+        <p:style>
+          <a:lnRef idx="1">
+            <a:schemeClr val="accent1"/>
+          </a:lnRef>
+          <a:fillRef idx="0">
+            <a:schemeClr val="accent1"/>
+          </a:fillRef>
+          <a:effectRef idx="0">
+            <a:schemeClr val="accent1"/>
+          </a:effectRef>
+          <a:fontRef idx="minor">
+            <a:schemeClr val="tx1"/>
+          </a:fontRef>
+        </p:style>
+      </p:cxnSp>
+      <p:sp>
+        <p:nvSpPr>
+          <p:cNvPr id="120" name="ZoneTexte 119">
+            <a:extLst>
+              <a:ext uri="{FF2B5EF4-FFF2-40B4-BE49-F238E27FC236}">
+                <a16:creationId xmlns:a16="http://schemas.microsoft.com/office/drawing/2014/main" id="{0A10B38C-5622-1C22-B416-6792902491EA}"/>
+              </a:ext>
+            </a:extLst>
+          </p:cNvPr>
+          <p:cNvSpPr txBox="1"/>
+          <p:nvPr/>
+        </p:nvSpPr>
+        <p:spPr>
+          <a:xfrm>
+            <a:off x="3993350" y="3391823"/>
+            <a:ext cx="1219778" cy="276999"/>
+          </a:xfrm>
+          <a:prstGeom prst="rect">
+            <a:avLst/>
+          </a:prstGeom>
+          <a:noFill/>
+        </p:spPr>
+        <p:txBody>
+          <a:bodyPr wrap="square">
+            <a:spAutoFit/>
+          </a:bodyPr>
+          <a:lstStyle/>
+          <a:p>
+            <a:pPr algn="ctr"/>
+            <a:r>
+              <a:rPr lang="fr-FR" sz="1200" dirty="0">
+                <a:solidFill>
+                  <a:srgbClr val="002060"/>
+                </a:solidFill>
+                <a:latin typeface="Arial Nova" panose="020B0504020202020204" pitchFamily="34" charset="0"/>
+              </a:rPr>
+              <a:t>Ordres</a:t>
+            </a:r>
+          </a:p>
+        </p:txBody>
+      </p:sp>
+      <p:cxnSp>
+        <p:nvCxnSpPr>
+          <p:cNvPr id="121" name="Connecteur droit avec flèche 120">
+            <a:extLst>
+              <a:ext uri="{FF2B5EF4-FFF2-40B4-BE49-F238E27FC236}">
+                <a16:creationId xmlns:a16="http://schemas.microsoft.com/office/drawing/2014/main" id="{4F1448A2-74B3-CD08-E95E-7BA0F13E5E27}"/>
+              </a:ext>
+            </a:extLst>
+          </p:cNvPr>
+          <p:cNvCxnSpPr/>
+          <p:nvPr/>
+        </p:nvCxnSpPr>
+        <p:spPr>
+          <a:xfrm flipV="1">
+            <a:off x="343647" y="2510188"/>
+            <a:ext cx="720000" cy="1536"/>
+          </a:xfrm>
+          <a:prstGeom prst="straightConnector1">
+            <a:avLst/>
+          </a:prstGeom>
+          <a:ln w="25400" cap="rnd">
+            <a:solidFill>
+              <a:srgbClr val="004F77"/>
+            </a:solidFill>
+            <a:tailEnd type="triangle" w="med" len="lg"/>
+          </a:ln>
+        </p:spPr>
+        <p:style>
+          <a:lnRef idx="1">
+            <a:schemeClr val="accent1"/>
+          </a:lnRef>
+          <a:fillRef idx="0">
+            <a:schemeClr val="accent1"/>
+          </a:fillRef>
+          <a:effectRef idx="0">
+            <a:schemeClr val="accent1"/>
+          </a:effectRef>
+          <a:fontRef idx="minor">
+            <a:schemeClr val="tx1"/>
+          </a:fontRef>
+        </p:style>
+      </p:cxnSp>
+      <p:cxnSp>
+        <p:nvCxnSpPr>
+          <p:cNvPr id="122" name="Connecteur droit avec flèche 121">
+            <a:extLst>
+              <a:ext uri="{FF2B5EF4-FFF2-40B4-BE49-F238E27FC236}">
+                <a16:creationId xmlns:a16="http://schemas.microsoft.com/office/drawing/2014/main" id="{666B5AAB-EFCD-DF08-0751-665BC1A9589D}"/>
+              </a:ext>
+            </a:extLst>
+          </p:cNvPr>
+          <p:cNvCxnSpPr/>
+          <p:nvPr/>
+        </p:nvCxnSpPr>
+        <p:spPr>
+          <a:xfrm flipV="1">
+            <a:off x="337975" y="3314118"/>
+            <a:ext cx="720000" cy="1536"/>
+          </a:xfrm>
+          <a:prstGeom prst="straightConnector1">
+            <a:avLst/>
+          </a:prstGeom>
+          <a:ln w="25400" cap="rnd">
+            <a:solidFill>
+              <a:srgbClr val="004F77"/>
+            </a:solidFill>
+            <a:tailEnd type="triangle" w="med" len="lg"/>
+          </a:ln>
+        </p:spPr>
+        <p:style>
+          <a:lnRef idx="1">
+            <a:schemeClr val="accent1"/>
+          </a:lnRef>
+          <a:fillRef idx="0">
+            <a:schemeClr val="accent1"/>
+          </a:fillRef>
+          <a:effectRef idx="0">
+            <a:schemeClr val="accent1"/>
+          </a:effectRef>
+          <a:fontRef idx="minor">
+            <a:schemeClr val="tx1"/>
+          </a:fontRef>
+        </p:style>
+      </p:cxnSp>
+      <p:cxnSp>
+        <p:nvCxnSpPr>
+          <p:cNvPr id="123" name="Connecteur droit avec flèche 122">
+            <a:extLst>
+              <a:ext uri="{FF2B5EF4-FFF2-40B4-BE49-F238E27FC236}">
+                <a16:creationId xmlns:a16="http://schemas.microsoft.com/office/drawing/2014/main" id="{9F43978C-0A20-805A-8C24-70E6B42C9464}"/>
+              </a:ext>
+            </a:extLst>
+          </p:cNvPr>
+          <p:cNvCxnSpPr>
+            <a:cxnSpLocks/>
+          </p:cNvCxnSpPr>
+          <p:nvPr/>
+        </p:nvCxnSpPr>
+        <p:spPr>
+          <a:xfrm>
+            <a:off x="6958287" y="2517245"/>
+            <a:ext cx="1203580" cy="0"/>
+          </a:xfrm>
+          <a:prstGeom prst="straightConnector1">
+            <a:avLst/>
+          </a:prstGeom>
+          <a:ln w="25400">
+            <a:solidFill>
+              <a:srgbClr val="002060"/>
+            </a:solidFill>
+            <a:headEnd type="none"/>
+            <a:tailEnd type="triangle"/>
+          </a:ln>
+        </p:spPr>
+        <p:style>
+          <a:lnRef idx="1">
+            <a:schemeClr val="accent1"/>
+          </a:lnRef>
+          <a:fillRef idx="0">
+            <a:schemeClr val="accent1"/>
+          </a:fillRef>
+          <a:effectRef idx="0">
+            <a:schemeClr val="accent1"/>
+          </a:effectRef>
+          <a:fontRef idx="minor">
+            <a:schemeClr val="tx1"/>
+          </a:fontRef>
+        </p:style>
+      </p:cxnSp>
+      <p:sp>
+        <p:nvSpPr>
+          <p:cNvPr id="125" name="ZoneTexte 124">
+            <a:extLst>
+              <a:ext uri="{FF2B5EF4-FFF2-40B4-BE49-F238E27FC236}">
+                <a16:creationId xmlns:a16="http://schemas.microsoft.com/office/drawing/2014/main" id="{C33A4B97-345F-4733-8DCF-0E0435B80966}"/>
+              </a:ext>
+            </a:extLst>
+          </p:cNvPr>
+          <p:cNvSpPr txBox="1"/>
+          <p:nvPr/>
+        </p:nvSpPr>
+        <p:spPr>
+          <a:xfrm>
+            <a:off x="7161435" y="2074747"/>
+            <a:ext cx="1219778" cy="461665"/>
+          </a:xfrm>
+          <a:prstGeom prst="rect">
+            <a:avLst/>
+          </a:prstGeom>
+          <a:noFill/>
+        </p:spPr>
+        <p:txBody>
+          <a:bodyPr wrap="square">
+            <a:spAutoFit/>
+          </a:bodyPr>
+          <a:lstStyle/>
+          <a:p>
+            <a:pPr algn="ctr"/>
+            <a:r>
+              <a:rPr lang="fr-FR" sz="1200" dirty="0">
+                <a:solidFill>
+                  <a:srgbClr val="002060"/>
+                </a:solidFill>
+                <a:latin typeface="Arial Nova" panose="020B0504020202020204" pitchFamily="34" charset="0"/>
+              </a:rPr>
+              <a:t>Informations opérateur</a:t>
+            </a:r>
+          </a:p>
+        </p:txBody>
+      </p:sp>
+      <p:cxnSp>
+        <p:nvCxnSpPr>
+          <p:cNvPr id="128" name="Connecteur droit avec flèche 127">
+            <a:extLst>
+              <a:ext uri="{FF2B5EF4-FFF2-40B4-BE49-F238E27FC236}">
+                <a16:creationId xmlns:a16="http://schemas.microsoft.com/office/drawing/2014/main" id="{F35E4ACF-A3DA-F36F-AB28-5164DC8BF136}"/>
+              </a:ext>
+            </a:extLst>
+          </p:cNvPr>
+          <p:cNvCxnSpPr>
+            <a:cxnSpLocks/>
+          </p:cNvCxnSpPr>
+          <p:nvPr/>
+        </p:nvCxnSpPr>
+        <p:spPr>
+          <a:xfrm flipV="1">
+            <a:off x="88282" y="5206455"/>
+            <a:ext cx="720000" cy="1536"/>
+          </a:xfrm>
+          <a:prstGeom prst="straightConnector1">
+            <a:avLst/>
+          </a:prstGeom>
+          <a:ln w="25400" cap="rnd">
+            <a:solidFill>
+              <a:srgbClr val="FDAD57"/>
+            </a:solidFill>
+            <a:tailEnd type="triangle" w="med" len="lg"/>
+          </a:ln>
+        </p:spPr>
+        <p:style>
+          <a:lnRef idx="1">
+            <a:schemeClr val="accent1"/>
+          </a:lnRef>
+          <a:fillRef idx="0">
+            <a:schemeClr val="accent1"/>
+          </a:fillRef>
+          <a:effectRef idx="0">
+            <a:schemeClr val="accent1"/>
+          </a:effectRef>
+          <a:fontRef idx="minor">
+            <a:schemeClr val="tx1"/>
+          </a:fontRef>
+        </p:style>
+      </p:cxnSp>
+      <p:sp>
+        <p:nvSpPr>
+          <p:cNvPr id="129" name="ZoneTexte 128">
+            <a:extLst>
+              <a:ext uri="{FF2B5EF4-FFF2-40B4-BE49-F238E27FC236}">
+                <a16:creationId xmlns:a16="http://schemas.microsoft.com/office/drawing/2014/main" id="{A93CA1FB-3493-10EE-80E7-0AAAB9BC2AFD}"/>
+              </a:ext>
+            </a:extLst>
+          </p:cNvPr>
+          <p:cNvSpPr txBox="1"/>
+          <p:nvPr/>
+        </p:nvSpPr>
+        <p:spPr>
+          <a:xfrm>
+            <a:off x="-484189" y="4746488"/>
+            <a:ext cx="1219778" cy="461665"/>
+          </a:xfrm>
+          <a:prstGeom prst="rect">
+            <a:avLst/>
+          </a:prstGeom>
+          <a:noFill/>
+        </p:spPr>
+        <p:txBody>
+          <a:bodyPr wrap="square">
+            <a:spAutoFit/>
+          </a:bodyPr>
+          <a:lstStyle/>
+          <a:p>
+            <a:pPr algn="ctr"/>
+            <a:r>
+              <a:rPr lang="fr-FR" sz="1200" dirty="0">
+                <a:solidFill>
+                  <a:srgbClr val="002060"/>
+                </a:solidFill>
+                <a:latin typeface="Arial Nova" panose="020B0504020202020204" pitchFamily="34" charset="0"/>
+              </a:rPr>
+              <a:t>Puissance électrique</a:t>
+            </a:r>
+          </a:p>
+        </p:txBody>
+      </p:sp>
+      <p:cxnSp>
+        <p:nvCxnSpPr>
+          <p:cNvPr id="130" name="Connecteur droit avec flèche 129">
+            <a:extLst>
+              <a:ext uri="{FF2B5EF4-FFF2-40B4-BE49-F238E27FC236}">
+                <a16:creationId xmlns:a16="http://schemas.microsoft.com/office/drawing/2014/main" id="{C563877B-2D6F-217C-F840-DBDE59AE3504}"/>
+              </a:ext>
+            </a:extLst>
+          </p:cNvPr>
+          <p:cNvCxnSpPr>
+            <a:cxnSpLocks/>
+          </p:cNvCxnSpPr>
+          <p:nvPr/>
+        </p:nvCxnSpPr>
+        <p:spPr>
+          <a:xfrm>
+            <a:off x="6958287" y="5185757"/>
+            <a:ext cx="923148" cy="0"/>
+          </a:xfrm>
+          <a:prstGeom prst="straightConnector1">
+            <a:avLst/>
+          </a:prstGeom>
+          <a:ln w="25400" cap="rnd">
+            <a:solidFill>
+              <a:srgbClr val="FDAD57"/>
+            </a:solidFill>
+            <a:tailEnd type="triangle" w="med" len="lg"/>
+          </a:ln>
+        </p:spPr>
+        <p:style>
+          <a:lnRef idx="1">
+            <a:schemeClr val="accent1"/>
+          </a:lnRef>
+          <a:fillRef idx="0">
+            <a:schemeClr val="accent1"/>
+          </a:fillRef>
+          <a:effectRef idx="0">
+            <a:schemeClr val="accent1"/>
+          </a:effectRef>
+          <a:fontRef idx="minor">
+            <a:schemeClr val="tx1"/>
+          </a:fontRef>
+        </p:style>
+      </p:cxnSp>
+      <p:sp>
+        <p:nvSpPr>
+          <p:cNvPr id="131" name="ZoneTexte 130">
+            <a:extLst>
+              <a:ext uri="{FF2B5EF4-FFF2-40B4-BE49-F238E27FC236}">
+                <a16:creationId xmlns:a16="http://schemas.microsoft.com/office/drawing/2014/main" id="{BAB72FA5-2A67-776D-3937-3F95DB1D2A79}"/>
+              </a:ext>
+            </a:extLst>
+          </p:cNvPr>
+          <p:cNvSpPr txBox="1"/>
+          <p:nvPr/>
+        </p:nvSpPr>
+        <p:spPr>
+          <a:xfrm>
+            <a:off x="5213128" y="1855980"/>
+            <a:ext cx="1888898" cy="307777"/>
+          </a:xfrm>
+          <a:prstGeom prst="rect">
+            <a:avLst/>
+          </a:prstGeom>
+          <a:noFill/>
+        </p:spPr>
+        <p:txBody>
+          <a:bodyPr wrap="square">
+            <a:spAutoFit/>
+          </a:bodyPr>
+          <a:lstStyle/>
+          <a:p>
+            <a:pPr algn="ctr"/>
+            <a:r>
+              <a:rPr lang="fr-FR" sz="1400" dirty="0">
+                <a:solidFill>
+                  <a:srgbClr val="002060"/>
+                </a:solidFill>
+                <a:latin typeface="Arial Nova" panose="020B0504020202020204" pitchFamily="34" charset="0"/>
+              </a:rPr>
+              <a:t>Chaîne d’information</a:t>
+            </a:r>
+          </a:p>
+        </p:txBody>
+      </p:sp>
+      <p:sp>
+        <p:nvSpPr>
+          <p:cNvPr id="132" name="ZoneTexte 131">
+            <a:extLst>
+              <a:ext uri="{FF2B5EF4-FFF2-40B4-BE49-F238E27FC236}">
+                <a16:creationId xmlns:a16="http://schemas.microsoft.com/office/drawing/2014/main" id="{2AFEC7B1-711F-6DD0-D438-F85F23CE819D}"/>
+              </a:ext>
+            </a:extLst>
+          </p:cNvPr>
+          <p:cNvSpPr txBox="1"/>
+          <p:nvPr/>
+        </p:nvSpPr>
+        <p:spPr>
+          <a:xfrm>
+            <a:off x="5253568" y="4275145"/>
+            <a:ext cx="1888898" cy="307777"/>
+          </a:xfrm>
+          <a:prstGeom prst="rect">
+            <a:avLst/>
+          </a:prstGeom>
+          <a:noFill/>
+        </p:spPr>
+        <p:txBody>
+          <a:bodyPr wrap="square">
+            <a:spAutoFit/>
+          </a:bodyPr>
+          <a:lstStyle/>
+          <a:p>
+            <a:pPr algn="ctr"/>
+            <a:r>
+              <a:rPr lang="fr-FR" sz="1400" dirty="0">
+                <a:solidFill>
+                  <a:srgbClr val="D2A000"/>
+                </a:solidFill>
+                <a:latin typeface="Arial Nova" panose="020B0504020202020204" pitchFamily="34" charset="0"/>
+              </a:rPr>
+              <a:t>Chaîne de puissance</a:t>
+            </a:r>
+          </a:p>
+        </p:txBody>
+      </p:sp>
+    </p:spTree>
+    <p:extLst>
+      <p:ext uri="{BB962C8B-B14F-4D97-AF65-F5344CB8AC3E}">
+        <p14:creationId xmlns:p14="http://schemas.microsoft.com/office/powerpoint/2010/main" val="733564678"/>
+      </p:ext>
+    </p:extLst>
+  </p:cSld>
+  <p:clrMapOvr>
+    <a:masterClrMapping/>
+  </p:clrMapOvr>
+</p:sld>
+</file>
+
+<file path=ppt/slides/slide6.xml><?xml version="1.0" encoding="utf-8"?>
+<p:sld xmlns:a="http://schemas.openxmlformats.org/drawingml/2006/main" xmlns:r="http://schemas.openxmlformats.org/officeDocument/2006/relationships" xmlns:p="http://schemas.openxmlformats.org/presentationml/2006/main">
+  <p:cSld>
+    <p:spTree>
+      <p:nvGrpSpPr>
+        <p:cNvPr id="1" name="">
+          <a:extLst>
+            <a:ext uri="{FF2B5EF4-FFF2-40B4-BE49-F238E27FC236}">
+              <a16:creationId xmlns:a16="http://schemas.microsoft.com/office/drawing/2014/main" id="{09E22678-C64C-E0C7-9A1A-1A5F5E75E3E2}"/>
+            </a:ext>
+          </a:extLst>
+        </p:cNvPr>
+        <p:cNvGrpSpPr/>
+        <p:nvPr/>
+      </p:nvGrpSpPr>
+      <p:grpSpPr>
+        <a:xfrm>
+          <a:off x="0" y="0"/>
+          <a:ext cx="0" cy="0"/>
+          <a:chOff x="0" y="0"/>
+          <a:chExt cx="0" cy="0"/>
+        </a:xfrm>
+      </p:grpSpPr>
+      <p:sp>
+        <p:nvSpPr>
+          <p:cNvPr id="91" name="Rectangle : coins arrondis 90">
+            <a:extLst>
+              <a:ext uri="{FF2B5EF4-FFF2-40B4-BE49-F238E27FC236}">
+                <a16:creationId xmlns:a16="http://schemas.microsoft.com/office/drawing/2014/main" id="{D8EEE4F6-4C39-FBE4-F31C-3D571B59E085}"/>
+              </a:ext>
+            </a:extLst>
+          </p:cNvPr>
+          <p:cNvSpPr/>
+          <p:nvPr/>
+        </p:nvSpPr>
+        <p:spPr>
+          <a:xfrm>
+            <a:off x="9648386" y="4190096"/>
+            <a:ext cx="1365662" cy="652851"/>
+          </a:xfrm>
+          <a:prstGeom prst="roundRect">
+            <a:avLst>
+              <a:gd name="adj" fmla="val 11914"/>
+            </a:avLst>
+          </a:prstGeom>
+          <a:solidFill>
+            <a:srgbClr val="F7B8B3"/>
+          </a:solidFill>
+          <a:ln w="19050">
+            <a:solidFill>
+              <a:srgbClr val="F7B8B3"/>
+            </a:solidFill>
+          </a:ln>
+        </p:spPr>
+        <p:style>
+          <a:lnRef idx="2">
+            <a:schemeClr val="accent1">
+              <a:shade val="50000"/>
+            </a:schemeClr>
+          </a:lnRef>
+          <a:fillRef idx="1">
+            <a:schemeClr val="accent1"/>
+          </a:fillRef>
+          <a:effectRef idx="0">
+            <a:schemeClr val="accent1"/>
+          </a:effectRef>
+          <a:fontRef idx="minor">
+            <a:schemeClr val="lt1"/>
+          </a:fontRef>
+        </p:style>
+        <p:txBody>
+          <a:bodyPr rtlCol="0" anchor="ctr"/>
+          <a:lstStyle/>
+          <a:p>
+            <a:pPr algn="ctr"/>
+            <a:r>
+              <a:rPr lang="fr-FR" sz="900" dirty="0">
+                <a:solidFill>
+                  <a:srgbClr val="EE685D"/>
+                </a:solidFill>
+                <a:latin typeface="Arial Nova" panose="020B0504020202020204" pitchFamily="34" charset="0"/>
+              </a:rPr>
+              <a:t>Axe linéaire « Poulie courroie »</a:t>
+            </a:r>
+          </a:p>
+        </p:txBody>
+      </p:sp>
+      <p:sp>
+        <p:nvSpPr>
+          <p:cNvPr id="4" name="Titre 3">
+            <a:extLst>
+              <a:ext uri="{FF2B5EF4-FFF2-40B4-BE49-F238E27FC236}">
+                <a16:creationId xmlns:a16="http://schemas.microsoft.com/office/drawing/2014/main" id="{1BCA277F-F71A-E968-C655-58576C712779}"/>
+              </a:ext>
+            </a:extLst>
+          </p:cNvPr>
+          <p:cNvSpPr>
+            <a:spLocks noGrp="1"/>
+          </p:cNvSpPr>
+          <p:nvPr>
+            <p:ph type="title"/>
+          </p:nvPr>
+        </p:nvSpPr>
+        <p:spPr/>
+        <p:txBody>
+          <a:bodyPr/>
+          <a:lstStyle/>
+          <a:p>
+            <a:r>
+              <a:rPr lang="fr-FR" dirty="0"/>
+              <a:t>Chaine fonctionnelle du Comax</a:t>
+            </a:r>
+          </a:p>
+        </p:txBody>
+      </p:sp>
+      <p:sp>
+        <p:nvSpPr>
+          <p:cNvPr id="6" name="Rectangle : coins arrondis 5">
+            <a:extLst>
+              <a:ext uri="{FF2B5EF4-FFF2-40B4-BE49-F238E27FC236}">
+                <a16:creationId xmlns:a16="http://schemas.microsoft.com/office/drawing/2014/main" id="{4C967A3F-BC69-04CF-AB70-F16D96C09943}"/>
+              </a:ext>
+            </a:extLst>
+          </p:cNvPr>
+          <p:cNvSpPr/>
+          <p:nvPr/>
+        </p:nvSpPr>
+        <p:spPr>
+          <a:xfrm>
+            <a:off x="1056905" y="1549834"/>
+            <a:ext cx="1440000" cy="540000"/>
+          </a:xfrm>
+          <a:prstGeom prst="roundRect">
+            <a:avLst>
+              <a:gd name="adj" fmla="val 11914"/>
+            </a:avLst>
+          </a:prstGeom>
+          <a:noFill/>
+          <a:ln w="19050">
+            <a:solidFill>
+              <a:srgbClr val="004F77"/>
+            </a:solidFill>
+          </a:ln>
+        </p:spPr>
+        <p:style>
+          <a:lnRef idx="2">
+            <a:schemeClr val="accent1">
+              <a:shade val="50000"/>
+            </a:schemeClr>
+          </a:lnRef>
+          <a:fillRef idx="1">
+            <a:schemeClr val="accent1"/>
+          </a:fillRef>
+          <a:effectRef idx="0">
+            <a:schemeClr val="accent1"/>
+          </a:effectRef>
+          <a:fontRef idx="minor">
+            <a:schemeClr val="lt1"/>
+          </a:fontRef>
+        </p:style>
+        <p:txBody>
+          <a:bodyPr rtlCol="0" anchor="ctr"/>
+          <a:lstStyle/>
+          <a:p>
+            <a:pPr algn="ctr"/>
+            <a:r>
+              <a:rPr lang="fr-FR" sz="1400" dirty="0">
+                <a:solidFill>
+                  <a:srgbClr val="004F77"/>
+                </a:solidFill>
+                <a:latin typeface="Arial Nova" panose="020B0504020202020204" pitchFamily="34" charset="0"/>
+              </a:rPr>
+              <a:t>Acquérir</a:t>
+            </a:r>
+          </a:p>
+        </p:txBody>
+      </p:sp>
+      <p:sp>
+        <p:nvSpPr>
+          <p:cNvPr id="7" name="Rectangle : coins arrondis 6">
+            <a:extLst>
+              <a:ext uri="{FF2B5EF4-FFF2-40B4-BE49-F238E27FC236}">
+                <a16:creationId xmlns:a16="http://schemas.microsoft.com/office/drawing/2014/main" id="{F86A7601-6D7B-2E56-A1EF-29A098482F9F}"/>
+              </a:ext>
+            </a:extLst>
+          </p:cNvPr>
+          <p:cNvSpPr/>
+          <p:nvPr/>
+        </p:nvSpPr>
+        <p:spPr>
+          <a:xfrm>
+            <a:off x="1056905" y="2324979"/>
+            <a:ext cx="1440000" cy="946211"/>
+          </a:xfrm>
+          <a:prstGeom prst="roundRect">
+            <a:avLst>
+              <a:gd name="adj" fmla="val 11914"/>
+            </a:avLst>
+          </a:prstGeom>
+          <a:solidFill>
+            <a:srgbClr val="DFE3EB"/>
+          </a:solidFill>
+          <a:ln w="19050">
+            <a:solidFill>
+              <a:srgbClr val="DFE3EB"/>
+            </a:solidFill>
+          </a:ln>
+        </p:spPr>
+        <p:style>
+          <a:lnRef idx="2">
+            <a:schemeClr val="accent1">
+              <a:shade val="50000"/>
+            </a:schemeClr>
+          </a:lnRef>
+          <a:fillRef idx="1">
+            <a:schemeClr val="accent1"/>
+          </a:fillRef>
+          <a:effectRef idx="0">
+            <a:schemeClr val="accent1"/>
+          </a:effectRef>
+          <a:fontRef idx="minor">
+            <a:schemeClr val="lt1"/>
+          </a:fontRef>
+        </p:style>
+        <p:txBody>
+          <a:bodyPr lIns="0" tIns="0" rIns="0" bIns="0" rtlCol="0" anchor="ctr"/>
+          <a:lstStyle/>
+          <a:p>
+            <a:pPr algn="ctr"/>
+            <a:r>
+              <a:rPr lang="fr-FR" sz="800" dirty="0">
+                <a:solidFill>
+                  <a:srgbClr val="004F77"/>
+                </a:solidFill>
+                <a:latin typeface="Arial Nova" panose="020B0504020202020204" pitchFamily="34" charset="0"/>
+              </a:rPr>
+              <a:t>Codeur incrémental</a:t>
+            </a:r>
+          </a:p>
+          <a:p>
+            <a:pPr algn="ctr"/>
+            <a:r>
+              <a:rPr lang="fr-FR" sz="800" dirty="0">
+                <a:solidFill>
+                  <a:srgbClr val="004F77"/>
+                </a:solidFill>
+                <a:latin typeface="Arial Nova" panose="020B0504020202020204" pitchFamily="34" charset="0"/>
+              </a:rPr>
+              <a:t>Capteur de courant</a:t>
+            </a:r>
+          </a:p>
+          <a:p>
+            <a:pPr algn="ctr"/>
+            <a:r>
+              <a:rPr lang="fr-FR" sz="800" dirty="0">
+                <a:solidFill>
+                  <a:srgbClr val="004F77"/>
+                </a:solidFill>
+                <a:latin typeface="Arial Nova" panose="020B0504020202020204" pitchFamily="34" charset="0"/>
+              </a:rPr>
+              <a:t>Génératrice tachymétrique</a:t>
+            </a:r>
+          </a:p>
+          <a:p>
+            <a:pPr algn="ctr"/>
+            <a:r>
+              <a:rPr lang="fr-FR" sz="800" dirty="0">
+                <a:solidFill>
+                  <a:srgbClr val="004F77"/>
+                </a:solidFill>
+                <a:latin typeface="Arial Nova" panose="020B0504020202020204" pitchFamily="34" charset="0"/>
+              </a:rPr>
+              <a:t>Capteur d’effort</a:t>
+            </a:r>
+          </a:p>
+        </p:txBody>
+      </p:sp>
+      <p:sp>
+        <p:nvSpPr>
+          <p:cNvPr id="8" name="Rectangle : coins arrondis 7">
+            <a:extLst>
+              <a:ext uri="{FF2B5EF4-FFF2-40B4-BE49-F238E27FC236}">
+                <a16:creationId xmlns:a16="http://schemas.microsoft.com/office/drawing/2014/main" id="{5376F4DE-F3ED-5087-37CC-7495D4D9EA1F}"/>
+              </a:ext>
+            </a:extLst>
+          </p:cNvPr>
+          <p:cNvSpPr/>
+          <p:nvPr/>
+        </p:nvSpPr>
+        <p:spPr>
+          <a:xfrm>
+            <a:off x="3229319" y="1548298"/>
+            <a:ext cx="1440000" cy="540000"/>
+          </a:xfrm>
+          <a:prstGeom prst="roundRect">
+            <a:avLst>
+              <a:gd name="adj" fmla="val 11914"/>
+            </a:avLst>
+          </a:prstGeom>
+          <a:noFill/>
+          <a:ln w="19050">
+            <a:solidFill>
+              <a:srgbClr val="004F77"/>
+            </a:solidFill>
+          </a:ln>
+        </p:spPr>
+        <p:style>
+          <a:lnRef idx="2">
+            <a:schemeClr val="accent1">
+              <a:shade val="50000"/>
+            </a:schemeClr>
+          </a:lnRef>
+          <a:fillRef idx="1">
+            <a:schemeClr val="accent1"/>
+          </a:fillRef>
+          <a:effectRef idx="0">
+            <a:schemeClr val="accent1"/>
+          </a:effectRef>
+          <a:fontRef idx="minor">
+            <a:schemeClr val="lt1"/>
+          </a:fontRef>
+        </p:style>
+        <p:txBody>
+          <a:bodyPr rtlCol="0" anchor="ctr"/>
+          <a:lstStyle/>
+          <a:p>
+            <a:pPr algn="ctr"/>
+            <a:r>
+              <a:rPr lang="fr-FR" sz="1400" dirty="0">
+                <a:solidFill>
+                  <a:srgbClr val="0C7391"/>
+                </a:solidFill>
+                <a:latin typeface="Arial Nova" panose="020B0504020202020204" pitchFamily="34" charset="0"/>
+              </a:rPr>
+              <a:t>Traiter</a:t>
+            </a:r>
+          </a:p>
+        </p:txBody>
+      </p:sp>
+      <p:sp>
+        <p:nvSpPr>
+          <p:cNvPr id="9" name="Rectangle : coins arrondis 8">
+            <a:extLst>
+              <a:ext uri="{FF2B5EF4-FFF2-40B4-BE49-F238E27FC236}">
+                <a16:creationId xmlns:a16="http://schemas.microsoft.com/office/drawing/2014/main" id="{013E74F6-F8A0-B559-937E-C13A541EA555}"/>
+              </a:ext>
+            </a:extLst>
+          </p:cNvPr>
+          <p:cNvSpPr/>
+          <p:nvPr/>
+        </p:nvSpPr>
+        <p:spPr>
+          <a:xfrm>
+            <a:off x="3218894" y="2341159"/>
+            <a:ext cx="1440000" cy="540000"/>
+          </a:xfrm>
+          <a:prstGeom prst="roundRect">
+            <a:avLst>
+              <a:gd name="adj" fmla="val 11914"/>
+            </a:avLst>
+          </a:prstGeom>
+          <a:solidFill>
+            <a:srgbClr val="E4EBF0"/>
+          </a:solidFill>
+          <a:ln w="19050">
+            <a:solidFill>
+              <a:srgbClr val="E4EBF0"/>
+            </a:solidFill>
+          </a:ln>
+        </p:spPr>
+        <p:style>
+          <a:lnRef idx="2">
+            <a:schemeClr val="accent1">
+              <a:shade val="50000"/>
+            </a:schemeClr>
+          </a:lnRef>
+          <a:fillRef idx="1">
+            <a:schemeClr val="accent1"/>
+          </a:fillRef>
+          <a:effectRef idx="0">
+            <a:schemeClr val="accent1"/>
+          </a:effectRef>
+          <a:fontRef idx="minor">
+            <a:schemeClr val="lt1"/>
+          </a:fontRef>
+        </p:style>
+        <p:txBody>
+          <a:bodyPr rtlCol="0" anchor="ctr"/>
+          <a:lstStyle/>
+          <a:p>
+            <a:pPr algn="ctr"/>
+            <a:r>
+              <a:rPr lang="fr-FR" sz="1000" dirty="0">
+                <a:solidFill>
+                  <a:srgbClr val="0C7391"/>
+                </a:solidFill>
+                <a:latin typeface="Arial Nova" panose="020B0504020202020204" pitchFamily="34" charset="0"/>
+              </a:rPr>
+              <a:t>Carte EPOS</a:t>
+            </a:r>
+          </a:p>
+        </p:txBody>
+      </p:sp>
+      <p:sp>
+        <p:nvSpPr>
+          <p:cNvPr id="10" name="Rectangle : coins arrondis 9">
+            <a:extLst>
+              <a:ext uri="{FF2B5EF4-FFF2-40B4-BE49-F238E27FC236}">
+                <a16:creationId xmlns:a16="http://schemas.microsoft.com/office/drawing/2014/main" id="{F72D7ACA-7134-2B87-9038-4E9B28B2C78A}"/>
+              </a:ext>
+            </a:extLst>
+          </p:cNvPr>
+          <p:cNvSpPr/>
+          <p:nvPr/>
+        </p:nvSpPr>
+        <p:spPr>
+          <a:xfrm>
+            <a:off x="5389319" y="1525957"/>
+            <a:ext cx="1440000" cy="576000"/>
+          </a:xfrm>
+          <a:prstGeom prst="roundRect">
+            <a:avLst>
+              <a:gd name="adj" fmla="val 11914"/>
+            </a:avLst>
+          </a:prstGeom>
+          <a:noFill/>
+          <a:ln w="19050">
+            <a:solidFill>
+              <a:srgbClr val="08A559"/>
+            </a:solidFill>
+          </a:ln>
+        </p:spPr>
+        <p:style>
+          <a:lnRef idx="2">
+            <a:schemeClr val="accent1">
+              <a:shade val="50000"/>
+            </a:schemeClr>
+          </a:lnRef>
+          <a:fillRef idx="1">
+            <a:schemeClr val="accent1"/>
+          </a:fillRef>
+          <a:effectRef idx="0">
+            <a:schemeClr val="accent1"/>
+          </a:effectRef>
+          <a:fontRef idx="minor">
+            <a:schemeClr val="lt1"/>
+          </a:fontRef>
+        </p:style>
+        <p:txBody>
+          <a:bodyPr rtlCol="0" anchor="ctr"/>
+          <a:lstStyle/>
+          <a:p>
+            <a:pPr algn="ctr"/>
+            <a:r>
+              <a:rPr lang="fr-FR" sz="1400" dirty="0">
+                <a:solidFill>
+                  <a:srgbClr val="08A559"/>
+                </a:solidFill>
+                <a:latin typeface="Arial Nova" panose="020B0504020202020204" pitchFamily="34" charset="0"/>
+              </a:rPr>
+              <a:t>Communiquer</a:t>
+            </a:r>
+          </a:p>
+        </p:txBody>
+      </p:sp>
+      <p:sp>
+        <p:nvSpPr>
+          <p:cNvPr id="11" name="Rectangle : coins arrondis 10">
+            <a:extLst>
+              <a:ext uri="{FF2B5EF4-FFF2-40B4-BE49-F238E27FC236}">
+                <a16:creationId xmlns:a16="http://schemas.microsoft.com/office/drawing/2014/main" id="{6FDA2495-C72D-B163-5174-5045D4642313}"/>
+              </a:ext>
+            </a:extLst>
+          </p:cNvPr>
+          <p:cNvSpPr/>
+          <p:nvPr/>
+        </p:nvSpPr>
+        <p:spPr>
+          <a:xfrm>
+            <a:off x="5389319" y="2319926"/>
+            <a:ext cx="1406281" cy="534390"/>
+          </a:xfrm>
+          <a:prstGeom prst="roundRect">
+            <a:avLst>
+              <a:gd name="adj" fmla="val 11914"/>
+            </a:avLst>
+          </a:prstGeom>
+          <a:solidFill>
+            <a:srgbClr val="E8F3E8"/>
+          </a:solidFill>
+          <a:ln w="19050">
+            <a:solidFill>
+              <a:srgbClr val="E8F3E8"/>
+            </a:solidFill>
+          </a:ln>
+        </p:spPr>
+        <p:style>
+          <a:lnRef idx="2">
+            <a:schemeClr val="accent1">
+              <a:shade val="50000"/>
+            </a:schemeClr>
+          </a:lnRef>
+          <a:fillRef idx="1">
+            <a:schemeClr val="accent1"/>
+          </a:fillRef>
+          <a:effectRef idx="0">
+            <a:schemeClr val="accent1"/>
+          </a:effectRef>
+          <a:fontRef idx="minor">
+            <a:schemeClr val="lt1"/>
+          </a:fontRef>
+        </p:style>
+        <p:txBody>
+          <a:bodyPr rtlCol="0" anchor="ctr"/>
+          <a:lstStyle/>
+          <a:p>
+            <a:pPr algn="ctr"/>
+            <a:r>
+              <a:rPr lang="fr-FR" sz="1200" dirty="0">
+                <a:solidFill>
+                  <a:srgbClr val="08A559"/>
+                </a:solidFill>
+                <a:latin typeface="Arial Nova" panose="020B0504020202020204" pitchFamily="34" charset="0"/>
+              </a:rPr>
+              <a:t>Carte EPOS</a:t>
+            </a:r>
+          </a:p>
+          <a:p>
+            <a:pPr algn="ctr"/>
+            <a:r>
+              <a:rPr lang="fr-FR" sz="1200" dirty="0">
+                <a:solidFill>
+                  <a:srgbClr val="08A559"/>
+                </a:solidFill>
+                <a:latin typeface="Arial Nova" panose="020B0504020202020204" pitchFamily="34" charset="0"/>
+              </a:rPr>
+              <a:t>PC</a:t>
+            </a:r>
+          </a:p>
+        </p:txBody>
+      </p:sp>
+      <p:sp>
+        <p:nvSpPr>
+          <p:cNvPr id="12" name="Rectangle : coins arrondis 11">
+            <a:extLst>
+              <a:ext uri="{FF2B5EF4-FFF2-40B4-BE49-F238E27FC236}">
+                <a16:creationId xmlns:a16="http://schemas.microsoft.com/office/drawing/2014/main" id="{98715C4A-B79F-E4CF-4D9C-DEAF6E9C0834}"/>
+              </a:ext>
+            </a:extLst>
+          </p:cNvPr>
+          <p:cNvSpPr/>
+          <p:nvPr/>
+        </p:nvSpPr>
+        <p:spPr>
+          <a:xfrm>
+            <a:off x="1056905" y="3542688"/>
+            <a:ext cx="1440000" cy="540000"/>
+          </a:xfrm>
+          <a:prstGeom prst="roundRect">
+            <a:avLst>
+              <a:gd name="adj" fmla="val 11914"/>
+            </a:avLst>
+          </a:prstGeom>
+          <a:noFill/>
+          <a:ln w="19050">
+            <a:solidFill>
+              <a:srgbClr val="FDAD57"/>
+            </a:solidFill>
+          </a:ln>
+        </p:spPr>
+        <p:style>
+          <a:lnRef idx="2">
+            <a:schemeClr val="accent1">
+              <a:shade val="50000"/>
+            </a:schemeClr>
+          </a:lnRef>
+          <a:fillRef idx="1">
+            <a:schemeClr val="accent1"/>
+          </a:fillRef>
+          <a:effectRef idx="0">
+            <a:schemeClr val="accent1"/>
+          </a:effectRef>
+          <a:fontRef idx="minor">
+            <a:schemeClr val="lt1"/>
+          </a:fontRef>
+        </p:style>
+        <p:txBody>
+          <a:bodyPr rtlCol="0" anchor="ctr"/>
+          <a:lstStyle/>
+          <a:p>
+            <a:pPr algn="ctr"/>
+            <a:r>
+              <a:rPr lang="fr-FR" sz="1400" dirty="0">
+                <a:solidFill>
+                  <a:srgbClr val="FDAD57"/>
+                </a:solidFill>
+                <a:latin typeface="Arial Nova" panose="020B0504020202020204" pitchFamily="34" charset="0"/>
+              </a:rPr>
+              <a:t>Alimenter</a:t>
+            </a:r>
+          </a:p>
+        </p:txBody>
+      </p:sp>
+      <p:sp>
+        <p:nvSpPr>
+          <p:cNvPr id="13" name="Rectangle : coins arrondis 12">
+            <a:extLst>
+              <a:ext uri="{FF2B5EF4-FFF2-40B4-BE49-F238E27FC236}">
+                <a16:creationId xmlns:a16="http://schemas.microsoft.com/office/drawing/2014/main" id="{5AED7942-96AF-EB73-97BA-8DC3A37A5BCD}"/>
+              </a:ext>
+            </a:extLst>
+          </p:cNvPr>
+          <p:cNvSpPr/>
+          <p:nvPr/>
+        </p:nvSpPr>
+        <p:spPr>
+          <a:xfrm>
+            <a:off x="1056905" y="4237443"/>
+            <a:ext cx="1440000" cy="540000"/>
+          </a:xfrm>
+          <a:prstGeom prst="roundRect">
+            <a:avLst>
+              <a:gd name="adj" fmla="val 11914"/>
+            </a:avLst>
+          </a:prstGeom>
+          <a:solidFill>
+            <a:srgbClr val="FEE6CC"/>
+          </a:solidFill>
+          <a:ln w="19050">
+            <a:solidFill>
+              <a:srgbClr val="FEE6CC"/>
+            </a:solidFill>
+          </a:ln>
+        </p:spPr>
+        <p:style>
+          <a:lnRef idx="2">
+            <a:schemeClr val="accent1">
+              <a:shade val="50000"/>
+            </a:schemeClr>
+          </a:lnRef>
+          <a:fillRef idx="1">
+            <a:schemeClr val="accent1"/>
+          </a:fillRef>
+          <a:effectRef idx="0">
+            <a:schemeClr val="accent1"/>
+          </a:effectRef>
+          <a:fontRef idx="minor">
+            <a:schemeClr val="lt1"/>
+          </a:fontRef>
+        </p:style>
+        <p:txBody>
+          <a:bodyPr rtlCol="0" anchor="ctr"/>
+          <a:lstStyle/>
+          <a:p>
+            <a:pPr algn="ctr"/>
+            <a:r>
+              <a:rPr lang="fr-FR" sz="1200" dirty="0">
+                <a:solidFill>
+                  <a:srgbClr val="FDAD57"/>
+                </a:solidFill>
+                <a:latin typeface="Arial Nova" panose="020B0504020202020204" pitchFamily="34" charset="0"/>
+              </a:rPr>
+              <a:t>Alimentation</a:t>
+            </a:r>
+          </a:p>
+        </p:txBody>
+      </p:sp>
+      <p:sp>
+        <p:nvSpPr>
+          <p:cNvPr id="14" name="Rectangle : coins arrondis 13">
+            <a:extLst>
+              <a:ext uri="{FF2B5EF4-FFF2-40B4-BE49-F238E27FC236}">
+                <a16:creationId xmlns:a16="http://schemas.microsoft.com/office/drawing/2014/main" id="{356134D4-5CEA-A761-413C-A13C875D07C4}"/>
+              </a:ext>
+            </a:extLst>
+          </p:cNvPr>
+          <p:cNvSpPr/>
+          <p:nvPr/>
+        </p:nvSpPr>
+        <p:spPr>
+          <a:xfrm>
+            <a:off x="3218894" y="3537925"/>
+            <a:ext cx="1440000" cy="540000"/>
+          </a:xfrm>
+          <a:prstGeom prst="roundRect">
+            <a:avLst>
+              <a:gd name="adj" fmla="val 11914"/>
+            </a:avLst>
+          </a:prstGeom>
+          <a:noFill/>
+          <a:ln w="19050">
+            <a:solidFill>
+              <a:srgbClr val="0C7391"/>
+            </a:solidFill>
+          </a:ln>
+        </p:spPr>
+        <p:style>
+          <a:lnRef idx="2">
+            <a:schemeClr val="accent1">
+              <a:shade val="50000"/>
+            </a:schemeClr>
+          </a:lnRef>
+          <a:fillRef idx="1">
+            <a:schemeClr val="accent1"/>
+          </a:fillRef>
+          <a:effectRef idx="0">
+            <a:schemeClr val="accent1"/>
+          </a:effectRef>
+          <a:fontRef idx="minor">
+            <a:schemeClr val="lt1"/>
+          </a:fontRef>
+        </p:style>
+        <p:txBody>
+          <a:bodyPr rtlCol="0" anchor="ctr"/>
+          <a:lstStyle/>
+          <a:p>
+            <a:pPr algn="ctr"/>
+            <a:r>
+              <a:rPr lang="fr-FR" sz="1400" dirty="0">
+                <a:solidFill>
+                  <a:srgbClr val="0C7391"/>
+                </a:solidFill>
+                <a:latin typeface="Arial Nova" panose="020B0504020202020204" pitchFamily="34" charset="0"/>
+              </a:rPr>
+              <a:t>Distribuer</a:t>
+            </a:r>
+          </a:p>
+        </p:txBody>
+      </p:sp>
+      <p:sp>
+        <p:nvSpPr>
+          <p:cNvPr id="15" name="Rectangle : coins arrondis 14">
+            <a:extLst>
+              <a:ext uri="{FF2B5EF4-FFF2-40B4-BE49-F238E27FC236}">
+                <a16:creationId xmlns:a16="http://schemas.microsoft.com/office/drawing/2014/main" id="{A1E6F1ED-2FD4-60FA-7D29-418559881D17}"/>
+              </a:ext>
+            </a:extLst>
+          </p:cNvPr>
+          <p:cNvSpPr/>
+          <p:nvPr/>
+        </p:nvSpPr>
+        <p:spPr>
+          <a:xfrm>
+            <a:off x="3199256" y="4222480"/>
+            <a:ext cx="1440000" cy="572255"/>
+          </a:xfrm>
+          <a:prstGeom prst="roundRect">
+            <a:avLst>
+              <a:gd name="adj" fmla="val 11914"/>
+            </a:avLst>
+          </a:prstGeom>
+          <a:solidFill>
+            <a:srgbClr val="9EC7D3"/>
+          </a:solidFill>
+          <a:ln w="19050">
+            <a:solidFill>
+              <a:srgbClr val="9EC7D3"/>
+            </a:solidFill>
+          </a:ln>
+        </p:spPr>
+        <p:style>
+          <a:lnRef idx="2">
+            <a:schemeClr val="accent1">
+              <a:shade val="50000"/>
+            </a:schemeClr>
+          </a:lnRef>
+          <a:fillRef idx="1">
+            <a:schemeClr val="accent1"/>
+          </a:fillRef>
+          <a:effectRef idx="0">
+            <a:schemeClr val="accent1"/>
+          </a:effectRef>
+          <a:fontRef idx="minor">
+            <a:schemeClr val="lt1"/>
+          </a:fontRef>
+        </p:style>
+        <p:txBody>
+          <a:bodyPr rtlCol="0" anchor="ctr"/>
+          <a:lstStyle/>
+          <a:p>
+            <a:pPr algn="ctr"/>
+            <a:r>
+              <a:rPr lang="fr-FR" sz="1100" dirty="0">
+                <a:solidFill>
+                  <a:srgbClr val="0C7391"/>
+                </a:solidFill>
+                <a:latin typeface="Arial Nova" panose="020B0504020202020204" pitchFamily="34" charset="0"/>
+              </a:rPr>
+              <a:t>Hacheur</a:t>
+            </a:r>
+            <a:endParaRPr lang="fr-FR" dirty="0">
+              <a:solidFill>
+                <a:srgbClr val="0C7391"/>
+              </a:solidFill>
+              <a:latin typeface="Arial Nova" panose="020B0504020202020204" pitchFamily="34" charset="0"/>
+            </a:endParaRPr>
+          </a:p>
+        </p:txBody>
+      </p:sp>
+      <p:sp>
+        <p:nvSpPr>
+          <p:cNvPr id="16" name="Rectangle : coins arrondis 15">
+            <a:extLst>
+              <a:ext uri="{FF2B5EF4-FFF2-40B4-BE49-F238E27FC236}">
+                <a16:creationId xmlns:a16="http://schemas.microsoft.com/office/drawing/2014/main" id="{12A43A89-6979-6AB4-57AB-EA7E4D523E18}"/>
+              </a:ext>
+            </a:extLst>
+          </p:cNvPr>
+          <p:cNvSpPr/>
+          <p:nvPr/>
+        </p:nvSpPr>
+        <p:spPr>
+          <a:xfrm>
+            <a:off x="5380883" y="3542688"/>
+            <a:ext cx="1440000" cy="540000"/>
+          </a:xfrm>
+          <a:prstGeom prst="roundRect">
+            <a:avLst>
+              <a:gd name="adj" fmla="val 11914"/>
+            </a:avLst>
+          </a:prstGeom>
+          <a:noFill/>
+          <a:ln w="19050">
+            <a:solidFill>
+              <a:srgbClr val="68348B"/>
+            </a:solidFill>
+          </a:ln>
+        </p:spPr>
+        <p:style>
+          <a:lnRef idx="2">
+            <a:schemeClr val="accent1">
+              <a:shade val="50000"/>
+            </a:schemeClr>
+          </a:lnRef>
+          <a:fillRef idx="1">
+            <a:schemeClr val="accent1"/>
+          </a:fillRef>
+          <a:effectRef idx="0">
+            <a:schemeClr val="accent1"/>
+          </a:effectRef>
+          <a:fontRef idx="minor">
+            <a:schemeClr val="lt1"/>
+          </a:fontRef>
+        </p:style>
+        <p:txBody>
+          <a:bodyPr rtlCol="0" anchor="ctr"/>
+          <a:lstStyle/>
+          <a:p>
+            <a:pPr algn="ctr"/>
+            <a:r>
+              <a:rPr lang="fr-FR" sz="1400" dirty="0">
+                <a:solidFill>
+                  <a:srgbClr val="68348B"/>
+                </a:solidFill>
+                <a:latin typeface="Arial Nova" panose="020B0504020202020204" pitchFamily="34" charset="0"/>
+              </a:rPr>
+              <a:t>Convertir</a:t>
+            </a:r>
+          </a:p>
+        </p:txBody>
+      </p:sp>
+      <p:sp>
+        <p:nvSpPr>
+          <p:cNvPr id="17" name="Rectangle : coins arrondis 16">
+            <a:extLst>
+              <a:ext uri="{FF2B5EF4-FFF2-40B4-BE49-F238E27FC236}">
+                <a16:creationId xmlns:a16="http://schemas.microsoft.com/office/drawing/2014/main" id="{2F92B39D-E609-AB8B-5AB7-CC0C47030464}"/>
+              </a:ext>
+            </a:extLst>
+          </p:cNvPr>
+          <p:cNvSpPr/>
+          <p:nvPr/>
+        </p:nvSpPr>
+        <p:spPr>
+          <a:xfrm>
+            <a:off x="5389319" y="4223146"/>
+            <a:ext cx="1440000" cy="540000"/>
+          </a:xfrm>
+          <a:prstGeom prst="roundRect">
+            <a:avLst>
+              <a:gd name="adj" fmla="val 11914"/>
+            </a:avLst>
+          </a:prstGeom>
+          <a:solidFill>
+            <a:srgbClr val="C3AED1"/>
+          </a:solidFill>
+          <a:ln w="19050">
+            <a:solidFill>
+              <a:srgbClr val="C3AED1"/>
+            </a:solidFill>
+          </a:ln>
+        </p:spPr>
+        <p:style>
+          <a:lnRef idx="2">
+            <a:schemeClr val="accent1">
+              <a:shade val="50000"/>
+            </a:schemeClr>
+          </a:lnRef>
+          <a:fillRef idx="1">
+            <a:schemeClr val="accent1"/>
+          </a:fillRef>
+          <a:effectRef idx="0">
+            <a:schemeClr val="accent1"/>
+          </a:effectRef>
+          <a:fontRef idx="minor">
+            <a:schemeClr val="lt1"/>
+          </a:fontRef>
+        </p:style>
+        <p:txBody>
+          <a:bodyPr rtlCol="0" anchor="ctr"/>
+          <a:lstStyle/>
+          <a:p>
+            <a:pPr algn="ctr"/>
+            <a:r>
+              <a:rPr lang="fr-FR" sz="1200" dirty="0">
+                <a:solidFill>
+                  <a:srgbClr val="68348B"/>
+                </a:solidFill>
+                <a:latin typeface="Arial Nova" panose="020B0504020202020204" pitchFamily="34" charset="0"/>
+              </a:rPr>
+              <a:t>Moteur à courant continu</a:t>
+            </a:r>
+          </a:p>
+        </p:txBody>
+      </p:sp>
+      <p:sp>
+        <p:nvSpPr>
+          <p:cNvPr id="18" name="Rectangle : coins arrondis 17">
+            <a:extLst>
+              <a:ext uri="{FF2B5EF4-FFF2-40B4-BE49-F238E27FC236}">
+                <a16:creationId xmlns:a16="http://schemas.microsoft.com/office/drawing/2014/main" id="{BED875CC-A071-6E4E-31CA-3978772ADE38}"/>
+              </a:ext>
+            </a:extLst>
+          </p:cNvPr>
+          <p:cNvSpPr/>
+          <p:nvPr/>
+        </p:nvSpPr>
+        <p:spPr>
+          <a:xfrm>
+            <a:off x="7542872" y="3545795"/>
+            <a:ext cx="1365662" cy="534390"/>
+          </a:xfrm>
+          <a:prstGeom prst="roundRect">
+            <a:avLst>
+              <a:gd name="adj" fmla="val 11914"/>
+            </a:avLst>
+          </a:prstGeom>
+          <a:noFill/>
+          <a:ln w="19050">
+            <a:solidFill>
+              <a:srgbClr val="EE685D"/>
+            </a:solidFill>
+          </a:ln>
+        </p:spPr>
+        <p:style>
+          <a:lnRef idx="2">
+            <a:schemeClr val="accent1">
+              <a:shade val="50000"/>
+            </a:schemeClr>
+          </a:lnRef>
+          <a:fillRef idx="1">
+            <a:schemeClr val="accent1"/>
+          </a:fillRef>
+          <a:effectRef idx="0">
+            <a:schemeClr val="accent1"/>
+          </a:effectRef>
+          <a:fontRef idx="minor">
+            <a:schemeClr val="lt1"/>
+          </a:fontRef>
+        </p:style>
+        <p:txBody>
+          <a:bodyPr rtlCol="0" anchor="ctr"/>
+          <a:lstStyle/>
+          <a:p>
+            <a:pPr algn="ctr"/>
+            <a:r>
+              <a:rPr lang="fr-FR" sz="1400" dirty="0">
+                <a:solidFill>
+                  <a:srgbClr val="EE685D"/>
+                </a:solidFill>
+                <a:latin typeface="Arial Nova" panose="020B0504020202020204" pitchFamily="34" charset="0"/>
+              </a:rPr>
+              <a:t>Transmettre</a:t>
+            </a:r>
+          </a:p>
+        </p:txBody>
+      </p:sp>
+      <p:sp>
+        <p:nvSpPr>
+          <p:cNvPr id="19" name="Rectangle : coins arrondis 18">
+            <a:extLst>
+              <a:ext uri="{FF2B5EF4-FFF2-40B4-BE49-F238E27FC236}">
+                <a16:creationId xmlns:a16="http://schemas.microsoft.com/office/drawing/2014/main" id="{ED3F75AD-3ACF-7EE0-D073-8C62A6F468F1}"/>
+              </a:ext>
+            </a:extLst>
+          </p:cNvPr>
+          <p:cNvSpPr/>
+          <p:nvPr/>
+        </p:nvSpPr>
+        <p:spPr>
+          <a:xfrm>
+            <a:off x="7549319" y="4202642"/>
+            <a:ext cx="1365662" cy="652851"/>
+          </a:xfrm>
+          <a:prstGeom prst="roundRect">
+            <a:avLst>
+              <a:gd name="adj" fmla="val 11914"/>
+            </a:avLst>
+          </a:prstGeom>
+          <a:solidFill>
+            <a:srgbClr val="F7B8B3"/>
+          </a:solidFill>
+          <a:ln w="19050">
+            <a:solidFill>
+              <a:srgbClr val="F7B8B3"/>
+            </a:solidFill>
+          </a:ln>
+        </p:spPr>
+        <p:style>
+          <a:lnRef idx="2">
+            <a:schemeClr val="accent1">
+              <a:shade val="50000"/>
+            </a:schemeClr>
+          </a:lnRef>
+          <a:fillRef idx="1">
+            <a:schemeClr val="accent1"/>
+          </a:fillRef>
+          <a:effectRef idx="0">
+            <a:schemeClr val="accent1"/>
+          </a:effectRef>
+          <a:fontRef idx="minor">
+            <a:schemeClr val="lt1"/>
+          </a:fontRef>
+        </p:style>
+        <p:txBody>
+          <a:bodyPr rtlCol="0" anchor="ctr"/>
+          <a:lstStyle/>
+          <a:p>
+            <a:pPr algn="ctr"/>
+            <a:r>
+              <a:rPr lang="fr-FR" sz="900" dirty="0">
+                <a:solidFill>
+                  <a:srgbClr val="EE685D"/>
+                </a:solidFill>
+                <a:latin typeface="Arial Nova" panose="020B0504020202020204" pitchFamily="34" charset="0"/>
+              </a:rPr>
+              <a:t>Train épicycloïdal</a:t>
+            </a:r>
+          </a:p>
+        </p:txBody>
+      </p:sp>
+      <p:pic>
+        <p:nvPicPr>
+          <p:cNvPr id="20" name="Image 19">
+            <a:extLst>
+              <a:ext uri="{FF2B5EF4-FFF2-40B4-BE49-F238E27FC236}">
+                <a16:creationId xmlns:a16="http://schemas.microsoft.com/office/drawing/2014/main" id="{87D607A1-073A-F4BC-4761-19F9D22352D1}"/>
+              </a:ext>
+            </a:extLst>
+          </p:cNvPr>
+          <p:cNvPicPr>
+            <a:picLocks noChangeAspect="1"/>
+          </p:cNvPicPr>
+          <p:nvPr/>
+        </p:nvPicPr>
+        <p:blipFill>
+          <a:blip r:embed="rId2"/>
+          <a:stretch>
+            <a:fillRect/>
+          </a:stretch>
+        </p:blipFill>
+        <p:spPr>
+          <a:xfrm>
+            <a:off x="2624826" y="1603805"/>
+            <a:ext cx="434918" cy="152010"/>
+          </a:xfrm>
+          <a:prstGeom prst="rect">
+            <a:avLst/>
+          </a:prstGeom>
+        </p:spPr>
+      </p:pic>
+      <p:cxnSp>
+        <p:nvCxnSpPr>
+          <p:cNvPr id="21" name="Connecteur droit avec flèche 20">
+            <a:extLst>
+              <a:ext uri="{FF2B5EF4-FFF2-40B4-BE49-F238E27FC236}">
+                <a16:creationId xmlns:a16="http://schemas.microsoft.com/office/drawing/2014/main" id="{C260624A-FE4B-F48F-E232-C58D74E2736F}"/>
+              </a:ext>
+            </a:extLst>
+          </p:cNvPr>
+          <p:cNvCxnSpPr>
+            <a:cxnSpLocks/>
+          </p:cNvCxnSpPr>
+          <p:nvPr/>
+        </p:nvCxnSpPr>
+        <p:spPr>
+          <a:xfrm flipV="1">
+            <a:off x="2496905" y="1827907"/>
+            <a:ext cx="720000" cy="1536"/>
+          </a:xfrm>
+          <a:prstGeom prst="straightConnector1">
+            <a:avLst/>
+          </a:prstGeom>
+          <a:ln w="25400" cap="rnd">
+            <a:solidFill>
+              <a:srgbClr val="004F77"/>
+            </a:solidFill>
+            <a:tailEnd type="triangle" w="med" len="lg"/>
+          </a:ln>
+        </p:spPr>
+        <p:style>
+          <a:lnRef idx="1">
+            <a:schemeClr val="accent1"/>
+          </a:lnRef>
+          <a:fillRef idx="0">
+            <a:schemeClr val="accent1"/>
+          </a:fillRef>
+          <a:effectRef idx="0">
+            <a:schemeClr val="accent1"/>
+          </a:effectRef>
+          <a:fontRef idx="minor">
+            <a:schemeClr val="tx1"/>
+          </a:fontRef>
+        </p:style>
+      </p:cxnSp>
+      <p:cxnSp>
+        <p:nvCxnSpPr>
+          <p:cNvPr id="22" name="Connecteur droit avec flèche 21">
+            <a:extLst>
+              <a:ext uri="{FF2B5EF4-FFF2-40B4-BE49-F238E27FC236}">
+                <a16:creationId xmlns:a16="http://schemas.microsoft.com/office/drawing/2014/main" id="{58BA205A-1DC3-F0B8-DFD4-354010034934}"/>
+              </a:ext>
+            </a:extLst>
+          </p:cNvPr>
+          <p:cNvCxnSpPr/>
+          <p:nvPr/>
+        </p:nvCxnSpPr>
+        <p:spPr>
+          <a:xfrm flipV="1">
+            <a:off x="4669319" y="1813957"/>
+            <a:ext cx="720000" cy="1536"/>
+          </a:xfrm>
+          <a:prstGeom prst="straightConnector1">
+            <a:avLst/>
+          </a:prstGeom>
+          <a:ln w="25400" cap="rnd">
+            <a:solidFill>
+              <a:srgbClr val="004F77"/>
+            </a:solidFill>
+            <a:tailEnd type="triangle" w="med" len="lg"/>
+          </a:ln>
+        </p:spPr>
+        <p:style>
+          <a:lnRef idx="1">
+            <a:schemeClr val="accent1"/>
+          </a:lnRef>
+          <a:fillRef idx="0">
+            <a:schemeClr val="accent1"/>
+          </a:fillRef>
+          <a:effectRef idx="0">
+            <a:schemeClr val="accent1"/>
+          </a:effectRef>
+          <a:fontRef idx="minor">
+            <a:schemeClr val="tx1"/>
+          </a:fontRef>
+        </p:style>
+      </p:cxnSp>
+      <p:pic>
+        <p:nvPicPr>
+          <p:cNvPr id="23" name="Image 22">
+            <a:extLst>
+              <a:ext uri="{FF2B5EF4-FFF2-40B4-BE49-F238E27FC236}">
+                <a16:creationId xmlns:a16="http://schemas.microsoft.com/office/drawing/2014/main" id="{B7983F22-6B19-C7EB-886A-AB75A307527B}"/>
+              </a:ext>
+            </a:extLst>
+          </p:cNvPr>
+          <p:cNvPicPr>
+            <a:picLocks noChangeAspect="1"/>
+          </p:cNvPicPr>
+          <p:nvPr/>
+        </p:nvPicPr>
+        <p:blipFill>
+          <a:blip r:embed="rId3"/>
+          <a:stretch>
+            <a:fillRect/>
+          </a:stretch>
+        </p:blipFill>
+        <p:spPr>
+          <a:xfrm>
+            <a:off x="4838894" y="1418598"/>
+            <a:ext cx="360000" cy="360000"/>
+          </a:xfrm>
+          <a:prstGeom prst="rect">
+            <a:avLst/>
+          </a:prstGeom>
+        </p:spPr>
+      </p:pic>
+      <p:cxnSp>
+        <p:nvCxnSpPr>
+          <p:cNvPr id="24" name="Connecteur droit avec flèche 23">
+            <a:extLst>
+              <a:ext uri="{FF2B5EF4-FFF2-40B4-BE49-F238E27FC236}">
+                <a16:creationId xmlns:a16="http://schemas.microsoft.com/office/drawing/2014/main" id="{11A0CCC1-D9FD-AA21-5223-FD4E4C1E7CE0}"/>
+              </a:ext>
+            </a:extLst>
+          </p:cNvPr>
+          <p:cNvCxnSpPr>
+            <a:cxnSpLocks/>
+          </p:cNvCxnSpPr>
+          <p:nvPr/>
+        </p:nvCxnSpPr>
+        <p:spPr>
+          <a:xfrm flipV="1">
+            <a:off x="2509319" y="3811152"/>
+            <a:ext cx="720000" cy="1536"/>
+          </a:xfrm>
+          <a:prstGeom prst="straightConnector1">
+            <a:avLst/>
+          </a:prstGeom>
+          <a:ln w="25400" cap="rnd">
+            <a:solidFill>
+              <a:srgbClr val="FDAD57"/>
+            </a:solidFill>
+            <a:tailEnd type="triangle" w="med" len="lg"/>
+          </a:ln>
+        </p:spPr>
+        <p:style>
+          <a:lnRef idx="1">
+            <a:schemeClr val="accent1"/>
+          </a:lnRef>
+          <a:fillRef idx="0">
+            <a:schemeClr val="accent1"/>
+          </a:fillRef>
+          <a:effectRef idx="0">
+            <a:schemeClr val="accent1"/>
+          </a:effectRef>
+          <a:fontRef idx="minor">
+            <a:schemeClr val="tx1"/>
+          </a:fontRef>
+        </p:style>
+      </p:cxnSp>
+      <p:grpSp>
+        <p:nvGrpSpPr>
+          <p:cNvPr id="25" name="Groupe 24">
+            <a:extLst>
+              <a:ext uri="{FF2B5EF4-FFF2-40B4-BE49-F238E27FC236}">
+                <a16:creationId xmlns:a16="http://schemas.microsoft.com/office/drawing/2014/main" id="{6BA3BC20-CE2E-6BDE-EB86-E1F5BB913541}"/>
+              </a:ext>
+            </a:extLst>
+          </p:cNvPr>
+          <p:cNvGrpSpPr/>
+          <p:nvPr/>
+        </p:nvGrpSpPr>
+        <p:grpSpPr>
+          <a:xfrm>
+            <a:off x="1596905" y="3980066"/>
+            <a:ext cx="360000" cy="360000"/>
+            <a:chOff x="4197400" y="3547713"/>
+            <a:chExt cx="1800000" cy="1800000"/>
+          </a:xfrm>
+        </p:grpSpPr>
+        <p:sp>
+          <p:nvSpPr>
+            <p:cNvPr id="26" name="Ellipse 25">
+              <a:extLst>
+                <a:ext uri="{FF2B5EF4-FFF2-40B4-BE49-F238E27FC236}">
+                  <a16:creationId xmlns:a16="http://schemas.microsoft.com/office/drawing/2014/main" id="{BFD307BB-D67A-BEE4-A2EF-DF0035EDFB33}"/>
+                </a:ext>
+              </a:extLst>
+            </p:cNvPr>
+            <p:cNvSpPr/>
+            <p:nvPr/>
+          </p:nvSpPr>
+          <p:spPr>
+            <a:xfrm>
+              <a:off x="4197400" y="3547713"/>
+              <a:ext cx="1800000" cy="1800000"/>
+            </a:xfrm>
+            <a:prstGeom prst="ellipse">
+              <a:avLst/>
+            </a:prstGeom>
+            <a:solidFill>
+              <a:srgbClr val="FFB25A"/>
+            </a:solidFill>
+            <a:ln>
+              <a:noFill/>
+            </a:ln>
+          </p:spPr>
+          <p:style>
+            <a:lnRef idx="2">
+              <a:schemeClr val="accent1">
+                <a:shade val="50000"/>
+              </a:schemeClr>
+            </a:lnRef>
+            <a:fillRef idx="1">
+              <a:schemeClr val="accent1"/>
+            </a:fillRef>
+            <a:effectRef idx="0">
+              <a:schemeClr val="accent1"/>
+            </a:effectRef>
+            <a:fontRef idx="minor">
+              <a:schemeClr val="lt1"/>
+            </a:fontRef>
+          </p:style>
+          <p:txBody>
+            <a:bodyPr rtlCol="0" anchor="ctr"/>
+            <a:lstStyle/>
+            <a:p>
+              <a:pPr algn="ctr"/>
+              <a:endParaRPr lang="fr-FR"/>
+            </a:p>
+          </p:txBody>
+        </p:sp>
+        <p:pic>
+          <p:nvPicPr>
+            <p:cNvPr id="27" name="Image 26">
+              <a:extLst>
+                <a:ext uri="{FF2B5EF4-FFF2-40B4-BE49-F238E27FC236}">
+                  <a16:creationId xmlns:a16="http://schemas.microsoft.com/office/drawing/2014/main" id="{EC7DE96F-F9E4-6C05-3CCC-C49B710703E5}"/>
+                </a:ext>
+              </a:extLst>
+            </p:cNvPr>
+            <p:cNvPicPr>
+              <a:picLocks noChangeAspect="1"/>
+            </p:cNvPicPr>
+            <p:nvPr/>
+          </p:nvPicPr>
+          <p:blipFill>
+            <a:blip r:embed="rId4"/>
+            <a:stretch>
+              <a:fillRect/>
+            </a:stretch>
+          </p:blipFill>
+          <p:spPr>
+            <a:xfrm>
+              <a:off x="4526157" y="3876470"/>
+              <a:ext cx="1142486" cy="1142486"/>
+            </a:xfrm>
+            <a:prstGeom prst="rect">
+              <a:avLst/>
+            </a:prstGeom>
+          </p:spPr>
+        </p:pic>
+      </p:grpSp>
+      <p:pic>
+        <p:nvPicPr>
+          <p:cNvPr id="28" name="Image 27">
+            <a:extLst>
+              <a:ext uri="{FF2B5EF4-FFF2-40B4-BE49-F238E27FC236}">
+                <a16:creationId xmlns:a16="http://schemas.microsoft.com/office/drawing/2014/main" id="{5BBEDC5B-1020-4A64-5E67-2C922071625B}"/>
+              </a:ext>
+            </a:extLst>
+          </p:cNvPr>
+          <p:cNvPicPr>
+            <a:picLocks noChangeAspect="1"/>
+          </p:cNvPicPr>
+          <p:nvPr/>
+        </p:nvPicPr>
+        <p:blipFill>
+          <a:blip r:embed="rId5"/>
+          <a:stretch>
+            <a:fillRect/>
+          </a:stretch>
+        </p:blipFill>
+        <p:spPr>
+          <a:xfrm>
+            <a:off x="498044" y="3666221"/>
+            <a:ext cx="360000" cy="360000"/>
+          </a:xfrm>
+          <a:prstGeom prst="rect">
+            <a:avLst/>
+          </a:prstGeom>
+        </p:spPr>
+      </p:pic>
+      <p:pic>
+        <p:nvPicPr>
+          <p:cNvPr id="29" name="Image 28">
+            <a:extLst>
+              <a:ext uri="{FF2B5EF4-FFF2-40B4-BE49-F238E27FC236}">
+                <a16:creationId xmlns:a16="http://schemas.microsoft.com/office/drawing/2014/main" id="{B2A8900B-4D0F-CF48-7EDC-F4CABA3D9FF2}"/>
+              </a:ext>
+            </a:extLst>
+          </p:cNvPr>
+          <p:cNvPicPr>
+            <a:picLocks noChangeAspect="1"/>
+          </p:cNvPicPr>
+          <p:nvPr/>
+        </p:nvPicPr>
+        <p:blipFill>
+          <a:blip r:embed="rId5"/>
+          <a:stretch>
+            <a:fillRect/>
+          </a:stretch>
+        </p:blipFill>
+        <p:spPr>
+          <a:xfrm>
+            <a:off x="2676905" y="3393409"/>
+            <a:ext cx="360000" cy="360000"/>
+          </a:xfrm>
+          <a:prstGeom prst="rect">
+            <a:avLst/>
+          </a:prstGeom>
+        </p:spPr>
+      </p:pic>
+      <p:cxnSp>
+        <p:nvCxnSpPr>
+          <p:cNvPr id="34" name="Connecteur droit avec flèche 33">
+            <a:extLst>
+              <a:ext uri="{FF2B5EF4-FFF2-40B4-BE49-F238E27FC236}">
+                <a16:creationId xmlns:a16="http://schemas.microsoft.com/office/drawing/2014/main" id="{BD3C940B-1B77-936C-C0B1-45BA2D3FBAB1}"/>
+              </a:ext>
+            </a:extLst>
+          </p:cNvPr>
+          <p:cNvCxnSpPr>
+            <a:cxnSpLocks/>
+          </p:cNvCxnSpPr>
+          <p:nvPr/>
+        </p:nvCxnSpPr>
+        <p:spPr>
+          <a:xfrm flipV="1">
+            <a:off x="4669319" y="3798320"/>
+            <a:ext cx="720000" cy="1536"/>
+          </a:xfrm>
+          <a:prstGeom prst="straightConnector1">
+            <a:avLst/>
+          </a:prstGeom>
+          <a:ln w="25400" cap="rnd">
+            <a:solidFill>
+              <a:srgbClr val="0C7391"/>
+            </a:solidFill>
+            <a:tailEnd type="triangle" w="med" len="lg"/>
+          </a:ln>
+        </p:spPr>
+        <p:style>
+          <a:lnRef idx="1">
+            <a:schemeClr val="accent1"/>
+          </a:lnRef>
+          <a:fillRef idx="0">
+            <a:schemeClr val="accent1"/>
+          </a:fillRef>
+          <a:effectRef idx="0">
+            <a:schemeClr val="accent1"/>
+          </a:effectRef>
+          <a:fontRef idx="minor">
+            <a:schemeClr val="tx1"/>
+          </a:fontRef>
+        </p:style>
+      </p:cxnSp>
+      <p:pic>
+        <p:nvPicPr>
+          <p:cNvPr id="35" name="Image 34">
+            <a:extLst>
+              <a:ext uri="{FF2B5EF4-FFF2-40B4-BE49-F238E27FC236}">
+                <a16:creationId xmlns:a16="http://schemas.microsoft.com/office/drawing/2014/main" id="{E50112B0-9F6E-53E8-A4C7-E2DBA281B895}"/>
+              </a:ext>
+            </a:extLst>
+          </p:cNvPr>
+          <p:cNvPicPr>
+            <a:picLocks noChangeAspect="1"/>
+          </p:cNvPicPr>
+          <p:nvPr/>
+        </p:nvPicPr>
+        <p:blipFill>
+          <a:blip r:embed="rId5"/>
+          <a:stretch>
+            <a:fillRect/>
+          </a:stretch>
+        </p:blipFill>
+        <p:spPr>
+          <a:xfrm>
+            <a:off x="4838894" y="3393409"/>
+            <a:ext cx="360000" cy="360000"/>
+          </a:xfrm>
+          <a:prstGeom prst="rect">
+            <a:avLst/>
+          </a:prstGeom>
+        </p:spPr>
+      </p:pic>
+      <p:cxnSp>
+        <p:nvCxnSpPr>
+          <p:cNvPr id="39" name="Connecteur droit avec flèche 38">
+            <a:extLst>
+              <a:ext uri="{FF2B5EF4-FFF2-40B4-BE49-F238E27FC236}">
+                <a16:creationId xmlns:a16="http://schemas.microsoft.com/office/drawing/2014/main" id="{5A4351E2-7438-E025-4DF9-247FB3B7178C}"/>
+              </a:ext>
+            </a:extLst>
+          </p:cNvPr>
+          <p:cNvCxnSpPr>
+            <a:cxnSpLocks/>
+          </p:cNvCxnSpPr>
+          <p:nvPr/>
+        </p:nvCxnSpPr>
+        <p:spPr>
+          <a:xfrm flipV="1">
+            <a:off x="6829319" y="3807925"/>
+            <a:ext cx="720000" cy="1536"/>
+          </a:xfrm>
+          <a:prstGeom prst="straightConnector1">
+            <a:avLst/>
+          </a:prstGeom>
+          <a:ln w="25400" cap="rnd">
+            <a:solidFill>
+              <a:srgbClr val="68348B"/>
+            </a:solidFill>
+            <a:tailEnd type="triangle" w="med" len="lg"/>
+          </a:ln>
+        </p:spPr>
+        <p:style>
+          <a:lnRef idx="1">
+            <a:schemeClr val="accent1"/>
+          </a:lnRef>
+          <a:fillRef idx="0">
+            <a:schemeClr val="accent1"/>
+          </a:fillRef>
+          <a:effectRef idx="0">
+            <a:schemeClr val="accent1"/>
+          </a:effectRef>
+          <a:fontRef idx="minor">
+            <a:schemeClr val="tx1"/>
+          </a:fontRef>
+        </p:style>
+      </p:cxnSp>
+      <p:pic>
+        <p:nvPicPr>
+          <p:cNvPr id="43" name="Image 42">
+            <a:extLst>
+              <a:ext uri="{FF2B5EF4-FFF2-40B4-BE49-F238E27FC236}">
+                <a16:creationId xmlns:a16="http://schemas.microsoft.com/office/drawing/2014/main" id="{987AEF86-1824-6928-2205-50C945597614}"/>
+              </a:ext>
+            </a:extLst>
+          </p:cNvPr>
+          <p:cNvPicPr>
+            <a:picLocks noChangeAspect="1"/>
+          </p:cNvPicPr>
+          <p:nvPr/>
+        </p:nvPicPr>
+        <p:blipFill>
+          <a:blip r:embed="rId6"/>
+          <a:stretch>
+            <a:fillRect/>
+          </a:stretch>
+        </p:blipFill>
+        <p:spPr>
+          <a:xfrm>
+            <a:off x="6993108" y="3418676"/>
+            <a:ext cx="360000" cy="360000"/>
+          </a:xfrm>
+          <a:prstGeom prst="rect">
+            <a:avLst/>
+          </a:prstGeom>
+        </p:spPr>
+      </p:pic>
+      <p:cxnSp>
+        <p:nvCxnSpPr>
+          <p:cNvPr id="44" name="Connecteur : en angle 43">
+            <a:extLst>
+              <a:ext uri="{FF2B5EF4-FFF2-40B4-BE49-F238E27FC236}">
+                <a16:creationId xmlns:a16="http://schemas.microsoft.com/office/drawing/2014/main" id="{D819812E-1474-863D-0220-5F78A6608EBE}"/>
+              </a:ext>
+            </a:extLst>
+          </p:cNvPr>
+          <p:cNvCxnSpPr>
+            <a:cxnSpLocks/>
+            <a:stCxn id="8" idx="3"/>
+            <a:endCxn id="45" idx="0"/>
+          </p:cNvCxnSpPr>
+          <p:nvPr/>
+        </p:nvCxnSpPr>
+        <p:spPr>
+          <a:xfrm>
+            <a:off x="4669319" y="1818298"/>
+            <a:ext cx="131551" cy="1176476"/>
+          </a:xfrm>
+          <a:prstGeom prst="bentConnector2">
+            <a:avLst/>
+          </a:prstGeom>
+          <a:ln w="25400">
+            <a:solidFill>
+              <a:srgbClr val="08A559"/>
+            </a:solidFill>
+            <a:headEnd type="none"/>
+            <a:tailEnd type="triangle"/>
+          </a:ln>
+        </p:spPr>
+        <p:style>
+          <a:lnRef idx="1">
+            <a:schemeClr val="accent1"/>
+          </a:lnRef>
+          <a:fillRef idx="0">
+            <a:schemeClr val="accent1"/>
+          </a:fillRef>
+          <a:effectRef idx="0">
+            <a:schemeClr val="accent1"/>
+          </a:effectRef>
+          <a:fontRef idx="minor">
+            <a:schemeClr val="tx1"/>
+          </a:fontRef>
+        </p:style>
+      </p:cxnSp>
+      <p:sp>
+        <p:nvSpPr>
+          <p:cNvPr id="45" name="Rectangle : coins arrondis 44">
+            <a:extLst>
+              <a:ext uri="{FF2B5EF4-FFF2-40B4-BE49-F238E27FC236}">
+                <a16:creationId xmlns:a16="http://schemas.microsoft.com/office/drawing/2014/main" id="{0D4D2E52-DC04-EA11-E565-1EABA672F469}"/>
+              </a:ext>
+            </a:extLst>
+          </p:cNvPr>
+          <p:cNvSpPr/>
+          <p:nvPr/>
+        </p:nvSpPr>
+        <p:spPr>
+          <a:xfrm>
+            <a:off x="4097729" y="2994774"/>
+            <a:ext cx="1406281" cy="331358"/>
+          </a:xfrm>
+          <a:prstGeom prst="roundRect">
+            <a:avLst>
+              <a:gd name="adj" fmla="val 11914"/>
+            </a:avLst>
+          </a:prstGeom>
+          <a:solidFill>
+            <a:srgbClr val="08A559"/>
+          </a:solidFill>
+          <a:ln w="19050">
+            <a:noFill/>
+          </a:ln>
+        </p:spPr>
+        <p:style>
+          <a:lnRef idx="2">
+            <a:schemeClr val="accent1">
+              <a:shade val="50000"/>
+            </a:schemeClr>
+          </a:lnRef>
+          <a:fillRef idx="1">
+            <a:schemeClr val="accent1"/>
+          </a:fillRef>
+          <a:effectRef idx="0">
+            <a:schemeClr val="accent1"/>
+          </a:effectRef>
+          <a:fontRef idx="minor">
+            <a:schemeClr val="lt1"/>
+          </a:fontRef>
+        </p:style>
+        <p:txBody>
+          <a:bodyPr rtlCol="0" anchor="ctr"/>
+          <a:lstStyle/>
+          <a:p>
+            <a:pPr algn="ctr"/>
+            <a:r>
+              <a:rPr lang="fr-FR" sz="1200" dirty="0">
+                <a:solidFill>
+                  <a:schemeClr val="bg1"/>
+                </a:solidFill>
+                <a:latin typeface="Arial Nova" panose="020B0504020202020204" pitchFamily="34" charset="0"/>
+              </a:rPr>
+              <a:t>Ordres (PWM)</a:t>
+            </a:r>
+          </a:p>
+        </p:txBody>
+      </p:sp>
+      <p:cxnSp>
+        <p:nvCxnSpPr>
+          <p:cNvPr id="46" name="Connecteur : en angle 45">
+            <a:extLst>
+              <a:ext uri="{FF2B5EF4-FFF2-40B4-BE49-F238E27FC236}">
+                <a16:creationId xmlns:a16="http://schemas.microsoft.com/office/drawing/2014/main" id="{A9AD7C57-2473-E684-2EEF-90C050E38835}"/>
+              </a:ext>
+            </a:extLst>
+          </p:cNvPr>
+          <p:cNvCxnSpPr>
+            <a:cxnSpLocks/>
+            <a:stCxn id="45" idx="1"/>
+            <a:endCxn id="14" idx="0"/>
+          </p:cNvCxnSpPr>
+          <p:nvPr/>
+        </p:nvCxnSpPr>
+        <p:spPr>
+          <a:xfrm rot="10800000" flipV="1">
+            <a:off x="3938895" y="3160453"/>
+            <a:ext cx="158835" cy="377472"/>
+          </a:xfrm>
+          <a:prstGeom prst="bentConnector2">
+            <a:avLst/>
+          </a:prstGeom>
+          <a:ln w="25400">
+            <a:solidFill>
+              <a:srgbClr val="08A559"/>
+            </a:solidFill>
+            <a:headEnd type="none"/>
+            <a:tailEnd type="triangle"/>
+          </a:ln>
+        </p:spPr>
+        <p:style>
+          <a:lnRef idx="1">
+            <a:schemeClr val="accent1"/>
+          </a:lnRef>
+          <a:fillRef idx="0">
+            <a:schemeClr val="accent1"/>
+          </a:fillRef>
+          <a:effectRef idx="0">
+            <a:schemeClr val="accent1"/>
+          </a:effectRef>
+          <a:fontRef idx="minor">
+            <a:schemeClr val="tx1"/>
+          </a:fontRef>
+        </p:style>
+      </p:cxnSp>
+      <p:pic>
+        <p:nvPicPr>
+          <p:cNvPr id="47" name="Image 46">
+            <a:extLst>
+              <a:ext uri="{FF2B5EF4-FFF2-40B4-BE49-F238E27FC236}">
+                <a16:creationId xmlns:a16="http://schemas.microsoft.com/office/drawing/2014/main" id="{06F1BA3D-41D0-985A-DA49-B09F78C8D562}"/>
+              </a:ext>
+            </a:extLst>
+          </p:cNvPr>
+          <p:cNvPicPr>
+            <a:picLocks noChangeAspect="1"/>
+          </p:cNvPicPr>
+          <p:nvPr/>
+        </p:nvPicPr>
+        <p:blipFill>
+          <a:blip r:embed="rId3"/>
+          <a:stretch>
+            <a:fillRect/>
+          </a:stretch>
+        </p:blipFill>
+        <p:spPr>
+          <a:xfrm>
+            <a:off x="6903108" y="2942920"/>
+            <a:ext cx="180000" cy="180000"/>
+          </a:xfrm>
+          <a:prstGeom prst="rect">
+            <a:avLst/>
+          </a:prstGeom>
+        </p:spPr>
+      </p:pic>
+      <p:pic>
+        <p:nvPicPr>
+          <p:cNvPr id="48" name="Image 47">
+            <a:extLst>
+              <a:ext uri="{FF2B5EF4-FFF2-40B4-BE49-F238E27FC236}">
+                <a16:creationId xmlns:a16="http://schemas.microsoft.com/office/drawing/2014/main" id="{5504C27A-2D5F-2F85-E6CD-5CD670853813}"/>
+              </a:ext>
+            </a:extLst>
+          </p:cNvPr>
+          <p:cNvPicPr>
+            <a:picLocks noChangeAspect="1"/>
+          </p:cNvPicPr>
+          <p:nvPr/>
+        </p:nvPicPr>
+        <p:blipFill>
+          <a:blip r:embed="rId3"/>
+          <a:stretch>
+            <a:fillRect/>
+          </a:stretch>
+        </p:blipFill>
+        <p:spPr>
+          <a:xfrm>
+            <a:off x="3705152" y="3218549"/>
+            <a:ext cx="180000" cy="180000"/>
+          </a:xfrm>
+          <a:prstGeom prst="rect">
+            <a:avLst/>
+          </a:prstGeom>
+        </p:spPr>
+      </p:pic>
+      <p:sp>
+        <p:nvSpPr>
+          <p:cNvPr id="49" name="Rectangle : coins arrondis 48">
+            <a:extLst>
+              <a:ext uri="{FF2B5EF4-FFF2-40B4-BE49-F238E27FC236}">
+                <a16:creationId xmlns:a16="http://schemas.microsoft.com/office/drawing/2014/main" id="{4BCCE767-B1D5-CAC3-B5EB-C03F91485CF2}"/>
+              </a:ext>
+            </a:extLst>
+          </p:cNvPr>
+          <p:cNvSpPr/>
+          <p:nvPr/>
+        </p:nvSpPr>
+        <p:spPr>
+          <a:xfrm>
+            <a:off x="11719813" y="3534156"/>
+            <a:ext cx="1365662" cy="1194790"/>
+          </a:xfrm>
+          <a:prstGeom prst="roundRect">
+            <a:avLst>
+              <a:gd name="adj" fmla="val 11914"/>
+            </a:avLst>
+          </a:prstGeom>
+          <a:solidFill>
+            <a:srgbClr val="B2CAD6"/>
+          </a:solidFill>
+          <a:ln w="19050">
+            <a:solidFill>
+              <a:srgbClr val="B2CAD6"/>
+            </a:solidFill>
+          </a:ln>
+        </p:spPr>
+        <p:style>
+          <a:lnRef idx="2">
+            <a:schemeClr val="accent1">
+              <a:shade val="50000"/>
+            </a:schemeClr>
+          </a:lnRef>
+          <a:fillRef idx="1">
+            <a:schemeClr val="accent1"/>
+          </a:fillRef>
+          <a:effectRef idx="0">
+            <a:schemeClr val="accent1"/>
+          </a:effectRef>
+          <a:fontRef idx="minor">
+            <a:schemeClr val="lt1"/>
+          </a:fontRef>
+        </p:style>
+        <p:txBody>
+          <a:bodyPr rtlCol="0" anchor="ctr"/>
+          <a:lstStyle/>
+          <a:p>
+            <a:pPr algn="ctr"/>
+            <a:r>
+              <a:rPr lang="fr-FR" sz="1200" dirty="0">
+                <a:solidFill>
+                  <a:srgbClr val="0D587E"/>
+                </a:solidFill>
+                <a:latin typeface="Arial Nova" panose="020B0504020202020204" pitchFamily="34" charset="0"/>
+              </a:rPr>
+              <a:t>Apporte une aide au déplacement de le charge</a:t>
+            </a:r>
+          </a:p>
+        </p:txBody>
+      </p:sp>
+      <p:cxnSp>
+        <p:nvCxnSpPr>
+          <p:cNvPr id="50" name="Connecteur droit avec flèche 49">
+            <a:extLst>
+              <a:ext uri="{FF2B5EF4-FFF2-40B4-BE49-F238E27FC236}">
+                <a16:creationId xmlns:a16="http://schemas.microsoft.com/office/drawing/2014/main" id="{1674B347-EACB-B7B6-D153-D163C3CEBF4F}"/>
+              </a:ext>
+            </a:extLst>
+          </p:cNvPr>
+          <p:cNvCxnSpPr>
+            <a:cxnSpLocks/>
+          </p:cNvCxnSpPr>
+          <p:nvPr/>
+        </p:nvCxnSpPr>
+        <p:spPr>
+          <a:xfrm flipV="1">
+            <a:off x="10996452" y="3807925"/>
+            <a:ext cx="720000" cy="1536"/>
+          </a:xfrm>
+          <a:prstGeom prst="straightConnector1">
+            <a:avLst/>
+          </a:prstGeom>
+          <a:ln w="25400" cap="rnd">
+            <a:solidFill>
+              <a:srgbClr val="68348B"/>
+            </a:solidFill>
+            <a:tailEnd type="triangle" w="med" len="lg"/>
+          </a:ln>
+        </p:spPr>
+        <p:style>
+          <a:lnRef idx="1">
+            <a:schemeClr val="accent1"/>
+          </a:lnRef>
+          <a:fillRef idx="0">
+            <a:schemeClr val="accent1"/>
+          </a:fillRef>
+          <a:effectRef idx="0">
+            <a:schemeClr val="accent1"/>
+          </a:effectRef>
+          <a:fontRef idx="minor">
+            <a:schemeClr val="tx1"/>
+          </a:fontRef>
+        </p:style>
+      </p:cxnSp>
+      <p:grpSp>
+        <p:nvGrpSpPr>
+          <p:cNvPr id="52" name="Groupe 51">
+            <a:extLst>
+              <a:ext uri="{FF2B5EF4-FFF2-40B4-BE49-F238E27FC236}">
+                <a16:creationId xmlns:a16="http://schemas.microsoft.com/office/drawing/2014/main" id="{79AD3288-D071-7007-E1A3-F3289E6806D8}"/>
+              </a:ext>
+            </a:extLst>
+          </p:cNvPr>
+          <p:cNvGrpSpPr/>
+          <p:nvPr/>
+        </p:nvGrpSpPr>
+        <p:grpSpPr>
+          <a:xfrm>
+            <a:off x="3770117" y="2030387"/>
+            <a:ext cx="360000" cy="360000"/>
+            <a:chOff x="6138169" y="4069439"/>
+            <a:chExt cx="1800000" cy="1800000"/>
+          </a:xfrm>
+        </p:grpSpPr>
+        <p:sp>
+          <p:nvSpPr>
+            <p:cNvPr id="53" name="Ellipse 52">
+              <a:extLst>
+                <a:ext uri="{FF2B5EF4-FFF2-40B4-BE49-F238E27FC236}">
+                  <a16:creationId xmlns:a16="http://schemas.microsoft.com/office/drawing/2014/main" id="{EFE13F9D-4577-36E0-2788-8A9E9089A912}"/>
+                </a:ext>
+              </a:extLst>
+            </p:cNvPr>
+            <p:cNvSpPr/>
+            <p:nvPr/>
+          </p:nvSpPr>
+          <p:spPr>
+            <a:xfrm>
+              <a:off x="6138169" y="4069439"/>
+              <a:ext cx="1800000" cy="1800000"/>
+            </a:xfrm>
+            <a:prstGeom prst="ellipse">
+              <a:avLst/>
+            </a:prstGeom>
+            <a:solidFill>
+              <a:srgbClr val="00547F"/>
+            </a:solidFill>
+            <a:ln>
+              <a:noFill/>
+            </a:ln>
+          </p:spPr>
+          <p:style>
+            <a:lnRef idx="2">
+              <a:schemeClr val="accent1">
+                <a:shade val="50000"/>
+              </a:schemeClr>
+            </a:lnRef>
+            <a:fillRef idx="1">
+              <a:schemeClr val="accent1"/>
+            </a:fillRef>
+            <a:effectRef idx="0">
+              <a:schemeClr val="accent1"/>
+            </a:effectRef>
+            <a:fontRef idx="minor">
+              <a:schemeClr val="lt1"/>
+            </a:fontRef>
+          </p:style>
+          <p:txBody>
+            <a:bodyPr rtlCol="0" anchor="ctr"/>
+            <a:lstStyle/>
+            <a:p>
+              <a:pPr algn="ctr"/>
+              <a:endParaRPr lang="fr-FR"/>
+            </a:p>
+          </p:txBody>
+        </p:sp>
+        <p:pic>
+          <p:nvPicPr>
+            <p:cNvPr id="54" name="Image 53">
+              <a:extLst>
+                <a:ext uri="{FF2B5EF4-FFF2-40B4-BE49-F238E27FC236}">
+                  <a16:creationId xmlns:a16="http://schemas.microsoft.com/office/drawing/2014/main" id="{9905C8DD-4B8E-6615-AE6F-BE5E9CDAFD24}"/>
+                </a:ext>
+              </a:extLst>
+            </p:cNvPr>
+            <p:cNvPicPr>
+              <a:picLocks noChangeAspect="1"/>
+            </p:cNvPicPr>
+            <p:nvPr/>
+          </p:nvPicPr>
+          <p:blipFill>
+            <a:blip r:embed="rId7"/>
+            <a:stretch>
+              <a:fillRect/>
+            </a:stretch>
+          </p:blipFill>
+          <p:spPr>
+            <a:xfrm>
+              <a:off x="6243433" y="4174703"/>
+              <a:ext cx="1589472" cy="1589472"/>
+            </a:xfrm>
+            <a:prstGeom prst="rect">
+              <a:avLst/>
+            </a:prstGeom>
+          </p:spPr>
+        </p:pic>
+      </p:grpSp>
+      <p:cxnSp>
+        <p:nvCxnSpPr>
+          <p:cNvPr id="55" name="Connecteur droit avec flèche 54">
+            <a:extLst>
+              <a:ext uri="{FF2B5EF4-FFF2-40B4-BE49-F238E27FC236}">
+                <a16:creationId xmlns:a16="http://schemas.microsoft.com/office/drawing/2014/main" id="{96E53290-8FFB-E9B0-BBB1-80C1F52A3047}"/>
+              </a:ext>
+            </a:extLst>
+          </p:cNvPr>
+          <p:cNvCxnSpPr/>
+          <p:nvPr/>
+        </p:nvCxnSpPr>
+        <p:spPr>
+          <a:xfrm flipV="1">
+            <a:off x="6829319" y="1735886"/>
+            <a:ext cx="720000" cy="1536"/>
+          </a:xfrm>
+          <a:prstGeom prst="straightConnector1">
+            <a:avLst/>
+          </a:prstGeom>
+          <a:ln w="25400">
+            <a:solidFill>
+              <a:srgbClr val="08A559"/>
+            </a:solidFill>
+            <a:headEnd type="stealth" w="med" len="lg"/>
+            <a:tailEnd type="stealth" w="med" len="lg"/>
+          </a:ln>
+        </p:spPr>
+        <p:style>
+          <a:lnRef idx="1">
+            <a:schemeClr val="accent1"/>
+          </a:lnRef>
+          <a:fillRef idx="0">
+            <a:schemeClr val="accent1"/>
+          </a:fillRef>
+          <a:effectRef idx="0">
+            <a:schemeClr val="accent1"/>
+          </a:effectRef>
+          <a:fontRef idx="minor">
+            <a:schemeClr val="tx1"/>
+          </a:fontRef>
+        </p:style>
+      </p:cxnSp>
+      <p:grpSp>
+        <p:nvGrpSpPr>
+          <p:cNvPr id="57" name="Groupe 56">
+            <a:extLst>
+              <a:ext uri="{FF2B5EF4-FFF2-40B4-BE49-F238E27FC236}">
+                <a16:creationId xmlns:a16="http://schemas.microsoft.com/office/drawing/2014/main" id="{3D6E9834-C410-D472-E5AC-323A9F7268F9}"/>
+              </a:ext>
+            </a:extLst>
+          </p:cNvPr>
+          <p:cNvGrpSpPr/>
+          <p:nvPr/>
+        </p:nvGrpSpPr>
+        <p:grpSpPr>
+          <a:xfrm rot="5400000" flipV="1">
+            <a:off x="12248508" y="4154169"/>
+            <a:ext cx="835963" cy="1617775"/>
+            <a:chOff x="9150640" y="2423323"/>
+            <a:chExt cx="835963" cy="2135794"/>
+          </a:xfrm>
+        </p:grpSpPr>
+        <p:sp>
+          <p:nvSpPr>
+            <p:cNvPr id="58" name="Flèche : virage 57">
+              <a:extLst>
+                <a:ext uri="{FF2B5EF4-FFF2-40B4-BE49-F238E27FC236}">
+                  <a16:creationId xmlns:a16="http://schemas.microsoft.com/office/drawing/2014/main" id="{A4AA16BF-6FB7-CED7-891E-03D49FE78C9F}"/>
+                </a:ext>
+              </a:extLst>
+            </p:cNvPr>
+            <p:cNvSpPr/>
+            <p:nvPr/>
+          </p:nvSpPr>
+          <p:spPr>
+            <a:xfrm rot="5400000">
+              <a:off x="8500725" y="3073238"/>
+              <a:ext cx="2135794" cy="835963"/>
+            </a:xfrm>
+            <a:prstGeom prst="bentArrow">
+              <a:avLst>
+                <a:gd name="adj1" fmla="val 31434"/>
+                <a:gd name="adj2" fmla="val 25000"/>
+                <a:gd name="adj3" fmla="val 17852"/>
+                <a:gd name="adj4" fmla="val 20160"/>
+              </a:avLst>
+            </a:prstGeom>
+            <a:solidFill>
+              <a:srgbClr val="B2CAD6"/>
+            </a:solidFill>
+            <a:ln>
+              <a:noFill/>
+            </a:ln>
+          </p:spPr>
+          <p:style>
+            <a:lnRef idx="2">
+              <a:schemeClr val="accent1">
+                <a:shade val="50000"/>
+              </a:schemeClr>
+            </a:lnRef>
+            <a:fillRef idx="1">
+              <a:schemeClr val="accent1"/>
+            </a:fillRef>
+            <a:effectRef idx="0">
+              <a:schemeClr val="accent1"/>
+            </a:effectRef>
+            <a:fontRef idx="minor">
+              <a:schemeClr val="lt1"/>
+            </a:fontRef>
+          </p:style>
+          <p:txBody>
+            <a:bodyPr rtlCol="0" anchor="ctr"/>
+            <a:lstStyle/>
+            <a:p>
+              <a:pPr algn="ctr"/>
+              <a:endParaRPr lang="fr-FR" dirty="0">
+                <a:solidFill>
+                  <a:schemeClr val="tx1"/>
+                </a:solidFill>
+              </a:endParaRPr>
+            </a:p>
+          </p:txBody>
+        </p:sp>
+        <p:sp>
+          <p:nvSpPr>
+            <p:cNvPr id="59" name="ZoneTexte 58">
+              <a:extLst>
+                <a:ext uri="{FF2B5EF4-FFF2-40B4-BE49-F238E27FC236}">
+                  <a16:creationId xmlns:a16="http://schemas.microsoft.com/office/drawing/2014/main" id="{2CADB1EF-6032-F868-025A-5C347A786906}"/>
+                </a:ext>
+              </a:extLst>
+            </p:cNvPr>
+            <p:cNvSpPr txBox="1"/>
+            <p:nvPr/>
+          </p:nvSpPr>
+          <p:spPr>
+            <a:xfrm rot="16200000">
+              <a:off x="8815678" y="3317013"/>
+              <a:ext cx="1918043" cy="230832"/>
+            </a:xfrm>
+            <a:prstGeom prst="rect">
+              <a:avLst/>
+            </a:prstGeom>
+            <a:noFill/>
+            <a:ln>
+              <a:noFill/>
+            </a:ln>
+          </p:spPr>
+          <p:txBody>
+            <a:bodyPr wrap="square" rtlCol="0">
+              <a:spAutoFit/>
+            </a:bodyPr>
+            <a:lstStyle/>
+            <a:p>
+              <a:r>
+                <a:rPr lang="fr-FR" sz="900" dirty="0">
+                  <a:solidFill>
+                    <a:schemeClr val="bg1"/>
+                  </a:solidFill>
+                  <a:latin typeface="Arial Nova" panose="020B0504020202020204" pitchFamily="34" charset="0"/>
+                </a:rPr>
+                <a:t>charge en position finale</a:t>
+              </a:r>
+            </a:p>
+          </p:txBody>
+        </p:sp>
+      </p:grpSp>
+      <p:grpSp>
+        <p:nvGrpSpPr>
+          <p:cNvPr id="60" name="Groupe 59">
+            <a:extLst>
+              <a:ext uri="{FF2B5EF4-FFF2-40B4-BE49-F238E27FC236}">
+                <a16:creationId xmlns:a16="http://schemas.microsoft.com/office/drawing/2014/main" id="{A04C97A5-410C-6E2A-6E71-9B98DC05C07B}"/>
+              </a:ext>
+            </a:extLst>
+          </p:cNvPr>
+          <p:cNvGrpSpPr/>
+          <p:nvPr/>
+        </p:nvGrpSpPr>
+        <p:grpSpPr>
+          <a:xfrm>
+            <a:off x="10661488" y="2941725"/>
+            <a:ext cx="1566153" cy="577809"/>
+            <a:chOff x="9058474" y="2836569"/>
+            <a:chExt cx="1566153" cy="577809"/>
+          </a:xfrm>
+        </p:grpSpPr>
+        <p:sp>
+          <p:nvSpPr>
+            <p:cNvPr id="61" name="Flèche : virage 60">
+              <a:extLst>
+                <a:ext uri="{FF2B5EF4-FFF2-40B4-BE49-F238E27FC236}">
+                  <a16:creationId xmlns:a16="http://schemas.microsoft.com/office/drawing/2014/main" id="{996285AC-7318-212B-E9AF-B1094E2116A9}"/>
+                </a:ext>
+              </a:extLst>
+            </p:cNvPr>
+            <p:cNvSpPr/>
+            <p:nvPr/>
+          </p:nvSpPr>
+          <p:spPr>
+            <a:xfrm rot="5400000">
+              <a:off x="9563593" y="2353345"/>
+              <a:ext cx="572849" cy="1549218"/>
+            </a:xfrm>
+            <a:prstGeom prst="bentArrow">
+              <a:avLst>
+                <a:gd name="adj1" fmla="val 38639"/>
+                <a:gd name="adj2" fmla="val 38302"/>
+                <a:gd name="adj3" fmla="val 16744"/>
+                <a:gd name="adj4" fmla="val 20160"/>
+              </a:avLst>
+            </a:prstGeom>
+            <a:solidFill>
+              <a:srgbClr val="B2CAD6"/>
+            </a:solidFill>
+            <a:ln>
+              <a:noFill/>
+            </a:ln>
+          </p:spPr>
+          <p:style>
+            <a:lnRef idx="2">
+              <a:schemeClr val="accent1">
+                <a:shade val="50000"/>
+              </a:schemeClr>
+            </a:lnRef>
+            <a:fillRef idx="1">
+              <a:schemeClr val="accent1"/>
+            </a:fillRef>
+            <a:effectRef idx="0">
+              <a:schemeClr val="accent1"/>
+            </a:effectRef>
+            <a:fontRef idx="minor">
+              <a:schemeClr val="lt1"/>
+            </a:fontRef>
+          </p:style>
+          <p:txBody>
+            <a:bodyPr rtlCol="0" anchor="ctr"/>
+            <a:lstStyle/>
+            <a:p>
+              <a:pPr algn="ctr"/>
+              <a:endParaRPr lang="fr-FR" dirty="0">
+                <a:solidFill>
+                  <a:schemeClr val="tx1"/>
+                </a:solidFill>
+              </a:endParaRPr>
+            </a:p>
+          </p:txBody>
+        </p:sp>
+        <p:sp>
+          <p:nvSpPr>
+            <p:cNvPr id="62" name="ZoneTexte 61">
+              <a:extLst>
+                <a:ext uri="{FF2B5EF4-FFF2-40B4-BE49-F238E27FC236}">
+                  <a16:creationId xmlns:a16="http://schemas.microsoft.com/office/drawing/2014/main" id="{FF4A5B4F-D4F3-7025-CC4D-6C947298A069}"/>
+                </a:ext>
+              </a:extLst>
+            </p:cNvPr>
+            <p:cNvSpPr txBox="1"/>
+            <p:nvPr/>
+          </p:nvSpPr>
+          <p:spPr>
+            <a:xfrm>
+              <a:off x="9058474" y="2836569"/>
               <a:ext cx="1473718" cy="215444"/>
             </a:xfrm>
             <a:prstGeom prst="rect">
@@ -20949,7 +25522,7 @@
               <p:cNvPr id="64" name="ZoneTexte 63">
                 <a:extLst>
                   <a:ext uri="{FF2B5EF4-FFF2-40B4-BE49-F238E27FC236}">
-                    <a16:creationId xmlns:a16="http://schemas.microsoft.com/office/drawing/2014/main" id="{A29D106A-C634-EC49-818B-7FFD6B86043E}"/>
+                    <a16:creationId xmlns:a16="http://schemas.microsoft.com/office/drawing/2014/main" id="{CAE1AD84-6D91-74C5-A8CA-52FB05C1E78B}"/>
                   </a:ext>
                 </a:extLst>
               </p:cNvPr>
@@ -21059,7 +25632,7 @@
               <p:cNvPr id="65" name="ZoneTexte 64">
                 <a:extLst>
                   <a:ext uri="{FF2B5EF4-FFF2-40B4-BE49-F238E27FC236}">
-                    <a16:creationId xmlns:a16="http://schemas.microsoft.com/office/drawing/2014/main" id="{98529472-463C-B655-7D36-3F43A14EC5EF}"/>
+                    <a16:creationId xmlns:a16="http://schemas.microsoft.com/office/drawing/2014/main" id="{F6FF42FF-BB36-F6C4-36DC-5CC9F54D5753}"/>
                   </a:ext>
                 </a:extLst>
               </p:cNvPr>
@@ -21214,7 +25787,7 @@
           <p:cNvPr id="93" name="Groupe 92">
             <a:extLst>
               <a:ext uri="{FF2B5EF4-FFF2-40B4-BE49-F238E27FC236}">
-                <a16:creationId xmlns:a16="http://schemas.microsoft.com/office/drawing/2014/main" id="{633A414C-079F-72BC-C836-01640E3DA896}"/>
+                <a16:creationId xmlns:a16="http://schemas.microsoft.com/office/drawing/2014/main" id="{DF93F0C5-5308-FCC6-48A6-15385BA69924}"/>
               </a:ext>
             </a:extLst>
           </p:cNvPr>
@@ -21234,7 +25807,7 @@
             <p:cNvPr id="94" name="Ellipse 93">
               <a:extLst>
                 <a:ext uri="{FF2B5EF4-FFF2-40B4-BE49-F238E27FC236}">
-                  <a16:creationId xmlns:a16="http://schemas.microsoft.com/office/drawing/2014/main" id="{7DA91EB8-E9B2-6DC6-B932-B3F8200FCB4C}"/>
+                  <a16:creationId xmlns:a16="http://schemas.microsoft.com/office/drawing/2014/main" id="{09E0F3F2-E789-1A10-F0DE-58850AAC163E}"/>
                 </a:ext>
               </a:extLst>
             </p:cNvPr>
@@ -21286,7 +25859,7 @@
             <p:cNvPr id="95" name="Image 94">
               <a:extLst>
                 <a:ext uri="{FF2B5EF4-FFF2-40B4-BE49-F238E27FC236}">
-                  <a16:creationId xmlns:a16="http://schemas.microsoft.com/office/drawing/2014/main" id="{C57FF404-E034-F790-1839-6255F70696F2}"/>
+                  <a16:creationId xmlns:a16="http://schemas.microsoft.com/office/drawing/2014/main" id="{6E0E37F0-DCA8-855E-AF89-9DC44DAA0EE4}"/>
                 </a:ext>
               </a:extLst>
             </p:cNvPr>
@@ -21317,7 +25890,7 @@
           <p:cNvPr id="110" name="Image 109">
             <a:extLst>
               <a:ext uri="{FF2B5EF4-FFF2-40B4-BE49-F238E27FC236}">
-                <a16:creationId xmlns:a16="http://schemas.microsoft.com/office/drawing/2014/main" id="{85C6EE0C-C52A-6134-EB1B-6F3C57492332}"/>
+                <a16:creationId xmlns:a16="http://schemas.microsoft.com/office/drawing/2014/main" id="{EC75830D-3497-C8AE-97EE-86D9FE43F3C1}"/>
               </a:ext>
             </a:extLst>
           </p:cNvPr>
@@ -21347,7 +25920,7 @@
           <p:cNvPr id="72" name="Rectangle 71">
             <a:extLst>
               <a:ext uri="{FF2B5EF4-FFF2-40B4-BE49-F238E27FC236}">
-                <a16:creationId xmlns:a16="http://schemas.microsoft.com/office/drawing/2014/main" id="{22DFAA51-C6D3-9FCC-9035-87E9C9207526}"/>
+                <a16:creationId xmlns:a16="http://schemas.microsoft.com/office/drawing/2014/main" id="{741071C2-4C36-3EF6-65F4-213D18F1A0CA}"/>
               </a:ext>
             </a:extLst>
           </p:cNvPr>
@@ -21406,7 +25979,7 @@
           <p:cNvPr id="103" name="Groupe 102">
             <a:extLst>
               <a:ext uri="{FF2B5EF4-FFF2-40B4-BE49-F238E27FC236}">
-                <a16:creationId xmlns:a16="http://schemas.microsoft.com/office/drawing/2014/main" id="{58AD15BE-FF0B-AB8F-1B32-BB8FEEBA2DEA}"/>
+                <a16:creationId xmlns:a16="http://schemas.microsoft.com/office/drawing/2014/main" id="{729DD293-FE91-960A-A3B1-94B2961D2CA9}"/>
               </a:ext>
             </a:extLst>
           </p:cNvPr>
@@ -21426,7 +25999,7 @@
             <p:cNvPr id="104" name="Ellipse 103">
               <a:extLst>
                 <a:ext uri="{FF2B5EF4-FFF2-40B4-BE49-F238E27FC236}">
-                  <a16:creationId xmlns:a16="http://schemas.microsoft.com/office/drawing/2014/main" id="{617E9B91-42CB-D7A6-CB9D-2F41FFC4BB96}"/>
+                  <a16:creationId xmlns:a16="http://schemas.microsoft.com/office/drawing/2014/main" id="{1F4DE0FF-7E36-CE89-613B-9D3B2A67155A}"/>
                 </a:ext>
               </a:extLst>
             </p:cNvPr>
@@ -21478,7 +26051,7 @@
             <p:cNvPr id="105" name="Image 104">
               <a:extLst>
                 <a:ext uri="{FF2B5EF4-FFF2-40B4-BE49-F238E27FC236}">
-                  <a16:creationId xmlns:a16="http://schemas.microsoft.com/office/drawing/2014/main" id="{99E60331-B84D-5566-9183-29714B6CECF8}"/>
+                  <a16:creationId xmlns:a16="http://schemas.microsoft.com/office/drawing/2014/main" id="{DBD8CBEB-B1B1-DD7E-3F5D-8F5B62AF82BB}"/>
                 </a:ext>
               </a:extLst>
             </p:cNvPr>
@@ -21511,7 +26084,7 @@
               <p:cNvPr id="2" name="ZoneTexte 1">
                 <a:extLst>
                   <a:ext uri="{FF2B5EF4-FFF2-40B4-BE49-F238E27FC236}">
-                    <a16:creationId xmlns:a16="http://schemas.microsoft.com/office/drawing/2014/main" id="{B39CA18C-C050-2248-E6F6-D99BB87303C8}"/>
+                    <a16:creationId xmlns:a16="http://schemas.microsoft.com/office/drawing/2014/main" id="{CE5D7CEC-91EE-CAB7-A298-6BA57E43F7E6}"/>
                   </a:ext>
                 </a:extLst>
               </p:cNvPr>
@@ -21646,7 +26219,7 @@
           <p:cNvPr id="31" name="Groupe 30">
             <a:extLst>
               <a:ext uri="{FF2B5EF4-FFF2-40B4-BE49-F238E27FC236}">
-                <a16:creationId xmlns:a16="http://schemas.microsoft.com/office/drawing/2014/main" id="{89225F91-8C4A-4D28-806F-C285AA8AEAEF}"/>
+                <a16:creationId xmlns:a16="http://schemas.microsoft.com/office/drawing/2014/main" id="{B6886E26-37EF-6447-EAB6-F3B4453553B0}"/>
               </a:ext>
             </a:extLst>
           </p:cNvPr>
@@ -21666,7 +26239,7 @@
             <p:cNvPr id="32" name="Ellipse 31">
               <a:extLst>
                 <a:ext uri="{FF2B5EF4-FFF2-40B4-BE49-F238E27FC236}">
-                  <a16:creationId xmlns:a16="http://schemas.microsoft.com/office/drawing/2014/main" id="{002BBCC8-7149-2E70-FA08-89D364A2E7EE}"/>
+                  <a16:creationId xmlns:a16="http://schemas.microsoft.com/office/drawing/2014/main" id="{80A52FED-4A4E-0354-6678-CB5C070DD9F9}"/>
                 </a:ext>
               </a:extLst>
             </p:cNvPr>
@@ -21718,7 +26291,7 @@
             <p:cNvPr id="33" name="Image 32">
               <a:extLst>
                 <a:ext uri="{FF2B5EF4-FFF2-40B4-BE49-F238E27FC236}">
-                  <a16:creationId xmlns:a16="http://schemas.microsoft.com/office/drawing/2014/main" id="{6C676998-302E-BC6E-6F7D-BB576DC31682}"/>
+                  <a16:creationId xmlns:a16="http://schemas.microsoft.com/office/drawing/2014/main" id="{8097988E-3391-17F3-6178-2988BB65015B}"/>
                 </a:ext>
               </a:extLst>
             </p:cNvPr>
@@ -21749,7 +26322,7 @@
           <p:cNvPr id="68" name="Groupe 67">
             <a:extLst>
               <a:ext uri="{FF2B5EF4-FFF2-40B4-BE49-F238E27FC236}">
-                <a16:creationId xmlns:a16="http://schemas.microsoft.com/office/drawing/2014/main" id="{B841AA18-EE52-BF71-8A77-FCA95EC11591}"/>
+                <a16:creationId xmlns:a16="http://schemas.microsoft.com/office/drawing/2014/main" id="{55E28AC7-2262-C038-1FDB-912DE0D2D976}"/>
               </a:ext>
             </a:extLst>
           </p:cNvPr>
@@ -21769,7 +26342,7 @@
             <p:cNvPr id="69" name="Ellipse 68">
               <a:extLst>
                 <a:ext uri="{FF2B5EF4-FFF2-40B4-BE49-F238E27FC236}">
-                  <a16:creationId xmlns:a16="http://schemas.microsoft.com/office/drawing/2014/main" id="{65F49912-F500-977C-390A-F4CE59EA478C}"/>
+                  <a16:creationId xmlns:a16="http://schemas.microsoft.com/office/drawing/2014/main" id="{AEAD5C28-47EB-E591-7FB6-0BF2241671E1}"/>
                 </a:ext>
               </a:extLst>
             </p:cNvPr>
@@ -21821,7 +26394,7 @@
             <p:cNvPr id="70" name="Image 69">
               <a:extLst>
                 <a:ext uri="{FF2B5EF4-FFF2-40B4-BE49-F238E27FC236}">
-                  <a16:creationId xmlns:a16="http://schemas.microsoft.com/office/drawing/2014/main" id="{E46C5A9A-E0F4-935F-E346-29D344A63AA9}"/>
+                  <a16:creationId xmlns:a16="http://schemas.microsoft.com/office/drawing/2014/main" id="{8D4A9307-7267-40F5-4F28-AC3098DAB539}"/>
                 </a:ext>
               </a:extLst>
             </p:cNvPr>
@@ -21852,7 +26425,7 @@
           <p:cNvPr id="76" name="Groupe 75">
             <a:extLst>
               <a:ext uri="{FF2B5EF4-FFF2-40B4-BE49-F238E27FC236}">
-                <a16:creationId xmlns:a16="http://schemas.microsoft.com/office/drawing/2014/main" id="{19663B7E-D161-9EFA-9C0C-DD72CA7CD5F3}"/>
+                <a16:creationId xmlns:a16="http://schemas.microsoft.com/office/drawing/2014/main" id="{363D2F82-3C33-AC9F-CD0D-90B789F019B0}"/>
               </a:ext>
             </a:extLst>
           </p:cNvPr>
@@ -21872,7 +26445,7 @@
             <p:cNvPr id="83" name="Ellipse 82">
               <a:extLst>
                 <a:ext uri="{FF2B5EF4-FFF2-40B4-BE49-F238E27FC236}">
-                  <a16:creationId xmlns:a16="http://schemas.microsoft.com/office/drawing/2014/main" id="{16D5DB05-5A42-D1F5-377B-CDBD0872CC09}"/>
+                  <a16:creationId xmlns:a16="http://schemas.microsoft.com/office/drawing/2014/main" id="{9849DD50-9713-3ED5-3CC3-AB27EA43C55F}"/>
                 </a:ext>
               </a:extLst>
             </p:cNvPr>
@@ -21924,7 +26497,7 @@
             <p:cNvPr id="84" name="Image 83">
               <a:extLst>
                 <a:ext uri="{FF2B5EF4-FFF2-40B4-BE49-F238E27FC236}">
-                  <a16:creationId xmlns:a16="http://schemas.microsoft.com/office/drawing/2014/main" id="{7369074B-A1C6-2F25-51BF-F9B0973126E6}"/>
+                  <a16:creationId xmlns:a16="http://schemas.microsoft.com/office/drawing/2014/main" id="{16D11B4C-AB33-3A41-E646-FE83E15C2FDD}"/>
                 </a:ext>
               </a:extLst>
             </p:cNvPr>
@@ -21955,7 +26528,7 @@
           <p:cNvPr id="92" name="Groupe 91">
             <a:extLst>
               <a:ext uri="{FF2B5EF4-FFF2-40B4-BE49-F238E27FC236}">
-                <a16:creationId xmlns:a16="http://schemas.microsoft.com/office/drawing/2014/main" id="{9F95A1EA-9092-5D0B-B7AC-F7CE46698DF0}"/>
+                <a16:creationId xmlns:a16="http://schemas.microsoft.com/office/drawing/2014/main" id="{C80D4871-FA4E-18D6-1A60-233DAA019F19}"/>
               </a:ext>
             </a:extLst>
           </p:cNvPr>
@@ -21975,7 +26548,7 @@
             <p:cNvPr id="96" name="Ellipse 95">
               <a:extLst>
                 <a:ext uri="{FF2B5EF4-FFF2-40B4-BE49-F238E27FC236}">
-                  <a16:creationId xmlns:a16="http://schemas.microsoft.com/office/drawing/2014/main" id="{845FC769-0299-0B5A-BCD6-DE55695F83D2}"/>
+                  <a16:creationId xmlns:a16="http://schemas.microsoft.com/office/drawing/2014/main" id="{0F33939B-53FE-2C75-8A87-A01136C07097}"/>
                 </a:ext>
               </a:extLst>
             </p:cNvPr>
@@ -22027,7 +26600,7 @@
             <p:cNvPr id="97" name="Image 96">
               <a:extLst>
                 <a:ext uri="{FF2B5EF4-FFF2-40B4-BE49-F238E27FC236}">
-                  <a16:creationId xmlns:a16="http://schemas.microsoft.com/office/drawing/2014/main" id="{6A7943FD-8BE6-B490-32BF-D4F134197C5E}"/>
+                  <a16:creationId xmlns:a16="http://schemas.microsoft.com/office/drawing/2014/main" id="{61CEB68F-697B-6E35-5AEF-7A8241E1797B}"/>
                 </a:ext>
               </a:extLst>
             </p:cNvPr>
@@ -22058,7 +26631,7 @@
           <p:cNvPr id="98" name="Groupe 97">
             <a:extLst>
               <a:ext uri="{FF2B5EF4-FFF2-40B4-BE49-F238E27FC236}">
-                <a16:creationId xmlns:a16="http://schemas.microsoft.com/office/drawing/2014/main" id="{FDD7D3C5-7014-8F67-1947-2626275503E2}"/>
+                <a16:creationId xmlns:a16="http://schemas.microsoft.com/office/drawing/2014/main" id="{5FA7EAA2-F8DE-2E1A-DD1E-4543B7F57BDE}"/>
               </a:ext>
             </a:extLst>
           </p:cNvPr>
@@ -22078,7 +26651,7 @@
             <p:cNvPr id="99" name="Ellipse 98">
               <a:extLst>
                 <a:ext uri="{FF2B5EF4-FFF2-40B4-BE49-F238E27FC236}">
-                  <a16:creationId xmlns:a16="http://schemas.microsoft.com/office/drawing/2014/main" id="{B35256CE-9660-7734-0E5B-65E73BB68D56}"/>
+                  <a16:creationId xmlns:a16="http://schemas.microsoft.com/office/drawing/2014/main" id="{78C3D9FE-3CF9-9EA3-42B5-6E41CCE41DE5}"/>
                 </a:ext>
               </a:extLst>
             </p:cNvPr>
@@ -22130,7 +26703,7 @@
             <p:cNvPr id="100" name="Image 99">
               <a:extLst>
                 <a:ext uri="{FF2B5EF4-FFF2-40B4-BE49-F238E27FC236}">
-                  <a16:creationId xmlns:a16="http://schemas.microsoft.com/office/drawing/2014/main" id="{1B83FA9B-7FFD-974D-50C2-183E2ECB2E44}"/>
+                  <a16:creationId xmlns:a16="http://schemas.microsoft.com/office/drawing/2014/main" id="{3BB66860-77C4-1512-DCAE-6F6E4E3AA6AE}"/>
                 </a:ext>
               </a:extLst>
             </p:cNvPr>
@@ -22161,7 +26734,7 @@
           <p:cNvPr id="101" name="Groupe 100">
             <a:extLst>
               <a:ext uri="{FF2B5EF4-FFF2-40B4-BE49-F238E27FC236}">
-                <a16:creationId xmlns:a16="http://schemas.microsoft.com/office/drawing/2014/main" id="{3A416195-885D-B412-950E-1F349C5CC6AB}"/>
+                <a16:creationId xmlns:a16="http://schemas.microsoft.com/office/drawing/2014/main" id="{1990B9A0-1933-0A06-D09B-B23E5BA1790C}"/>
               </a:ext>
             </a:extLst>
           </p:cNvPr>
@@ -22181,7 +26754,7 @@
             <p:cNvPr id="108" name="Ellipse 107">
               <a:extLst>
                 <a:ext uri="{FF2B5EF4-FFF2-40B4-BE49-F238E27FC236}">
-                  <a16:creationId xmlns:a16="http://schemas.microsoft.com/office/drawing/2014/main" id="{689719FF-319E-F4C6-E150-B6C708728D00}"/>
+                  <a16:creationId xmlns:a16="http://schemas.microsoft.com/office/drawing/2014/main" id="{551EF22D-5AD9-2A2E-2A68-87D7657DD456}"/>
                 </a:ext>
               </a:extLst>
             </p:cNvPr>
@@ -22233,7 +26806,7 @@
             <p:cNvPr id="109" name="Image 108">
               <a:extLst>
                 <a:ext uri="{FF2B5EF4-FFF2-40B4-BE49-F238E27FC236}">
-                  <a16:creationId xmlns:a16="http://schemas.microsoft.com/office/drawing/2014/main" id="{1AC2262C-D76B-934A-5E65-99DB0E926C90}"/>
+                  <a16:creationId xmlns:a16="http://schemas.microsoft.com/office/drawing/2014/main" id="{91BE800A-65AE-15BE-A593-3C8ABEEC66B5}"/>
                 </a:ext>
               </a:extLst>
             </p:cNvPr>
@@ -22264,7 +26837,7 @@
           <p:cNvPr id="56" name="Groupe 55">
             <a:extLst>
               <a:ext uri="{FF2B5EF4-FFF2-40B4-BE49-F238E27FC236}">
-                <a16:creationId xmlns:a16="http://schemas.microsoft.com/office/drawing/2014/main" id="{DF68A625-AE5C-1A7C-F5F9-AC430D107D83}"/>
+                <a16:creationId xmlns:a16="http://schemas.microsoft.com/office/drawing/2014/main" id="{DB24B251-0230-0754-CB88-C8DA3C23165E}"/>
               </a:ext>
             </a:extLst>
           </p:cNvPr>
@@ -22284,7 +26857,7 @@
             <p:cNvPr id="75" name="Ellipse 74">
               <a:extLst>
                 <a:ext uri="{FF2B5EF4-FFF2-40B4-BE49-F238E27FC236}">
-                  <a16:creationId xmlns:a16="http://schemas.microsoft.com/office/drawing/2014/main" id="{9B8556EE-C14C-E3F8-ECFF-C9B72247AFEB}"/>
+                  <a16:creationId xmlns:a16="http://schemas.microsoft.com/office/drawing/2014/main" id="{6C816719-AE99-C372-A856-258EADB177CD}"/>
                 </a:ext>
               </a:extLst>
             </p:cNvPr>
@@ -22336,7 +26909,7 @@
             <p:cNvPr id="77" name="Image 76">
               <a:extLst>
                 <a:ext uri="{FF2B5EF4-FFF2-40B4-BE49-F238E27FC236}">
-                  <a16:creationId xmlns:a16="http://schemas.microsoft.com/office/drawing/2014/main" id="{34E96531-7B16-AC52-C1E6-052E6F7852E0}"/>
+                  <a16:creationId xmlns:a16="http://schemas.microsoft.com/office/drawing/2014/main" id="{497309DF-C441-EDCE-E002-EEEE036FCAD9}"/>
                 </a:ext>
               </a:extLst>
             </p:cNvPr>
@@ -22367,7 +26940,7 @@
           <p:cNvPr id="78" name="Groupe 77">
             <a:extLst>
               <a:ext uri="{FF2B5EF4-FFF2-40B4-BE49-F238E27FC236}">
-                <a16:creationId xmlns:a16="http://schemas.microsoft.com/office/drawing/2014/main" id="{62B9229E-5DD5-9728-B982-E481189F9BEC}"/>
+                <a16:creationId xmlns:a16="http://schemas.microsoft.com/office/drawing/2014/main" id="{B74FFDF1-FB0D-162A-503E-07DC7A8BC740}"/>
               </a:ext>
             </a:extLst>
           </p:cNvPr>
@@ -22387,7 +26960,7 @@
             <p:cNvPr id="79" name="Ellipse 78">
               <a:extLst>
                 <a:ext uri="{FF2B5EF4-FFF2-40B4-BE49-F238E27FC236}">
-                  <a16:creationId xmlns:a16="http://schemas.microsoft.com/office/drawing/2014/main" id="{45D1B4DF-7033-EB1C-DEC9-639AE2145414}"/>
+                  <a16:creationId xmlns:a16="http://schemas.microsoft.com/office/drawing/2014/main" id="{AAC6636A-B0FA-9858-8C2B-3445773351B9}"/>
                 </a:ext>
               </a:extLst>
             </p:cNvPr>
@@ -22439,7 +27012,7 @@
             <p:cNvPr id="80" name="Image 79">
               <a:extLst>
                 <a:ext uri="{FF2B5EF4-FFF2-40B4-BE49-F238E27FC236}">
-                  <a16:creationId xmlns:a16="http://schemas.microsoft.com/office/drawing/2014/main" id="{E313AA97-25C8-7CFE-4F0E-0B1EFC00D5AF}"/>
+                  <a16:creationId xmlns:a16="http://schemas.microsoft.com/office/drawing/2014/main" id="{553B8472-12AF-B0E3-332E-34409B71D394}"/>
                 </a:ext>
               </a:extLst>
             </p:cNvPr>
@@ -22470,7 +27043,7 @@
           <p:cNvPr id="36" name="Connecteur : en angle 35">
             <a:extLst>
               <a:ext uri="{FF2B5EF4-FFF2-40B4-BE49-F238E27FC236}">
-                <a16:creationId xmlns:a16="http://schemas.microsoft.com/office/drawing/2014/main" id="{C2AEE372-FD76-ECD7-B5E0-FBDBBD520A65}"/>
+                <a16:creationId xmlns:a16="http://schemas.microsoft.com/office/drawing/2014/main" id="{55952E74-82B3-009E-D69D-A68A122CE591}"/>
               </a:ext>
             </a:extLst>
           </p:cNvPr>
@@ -22519,7 +27092,7 @@
           <p:cNvPr id="42" name="Connecteur : en angle 41">
             <a:extLst>
               <a:ext uri="{FF2B5EF4-FFF2-40B4-BE49-F238E27FC236}">
-                <a16:creationId xmlns:a16="http://schemas.microsoft.com/office/drawing/2014/main" id="{2AE03594-D3AE-333C-8170-CA27A08C2D8C}"/>
+                <a16:creationId xmlns:a16="http://schemas.microsoft.com/office/drawing/2014/main" id="{B04118F4-0C31-6F5C-C31E-B5A759F4788C}"/>
               </a:ext>
             </a:extLst>
           </p:cNvPr>
@@ -22568,7 +27141,7 @@
           <p:cNvPr id="89" name="Connecteur : en angle 88">
             <a:extLst>
               <a:ext uri="{FF2B5EF4-FFF2-40B4-BE49-F238E27FC236}">
-                <a16:creationId xmlns:a16="http://schemas.microsoft.com/office/drawing/2014/main" id="{B5CD6745-802D-4E58-D331-F439AC7E3358}"/>
+                <a16:creationId xmlns:a16="http://schemas.microsoft.com/office/drawing/2014/main" id="{91AB386C-EAF6-2B88-7F0F-A3A5EF834A87}"/>
               </a:ext>
             </a:extLst>
           </p:cNvPr>
@@ -22618,7 +27191,7 @@
               <p:cNvPr id="111" name="ZoneTexte 110">
                 <a:extLst>
                   <a:ext uri="{FF2B5EF4-FFF2-40B4-BE49-F238E27FC236}">
-                    <a16:creationId xmlns:a16="http://schemas.microsoft.com/office/drawing/2014/main" id="{4BE6685B-714A-2936-1BA2-2CA1122FD234}"/>
+                    <a16:creationId xmlns:a16="http://schemas.microsoft.com/office/drawing/2014/main" id="{4A2277E2-4B93-2249-8CBE-B98189BFBFFC}"/>
                   </a:ext>
                 </a:extLst>
               </p:cNvPr>
@@ -22807,7 +27380,7 @@
               <p:cNvPr id="112" name="ZoneTexte 111">
                 <a:extLst>
                   <a:ext uri="{FF2B5EF4-FFF2-40B4-BE49-F238E27FC236}">
-                    <a16:creationId xmlns:a16="http://schemas.microsoft.com/office/drawing/2014/main" id="{F72A4F02-81F2-12CD-42EB-688314B6AAB2}"/>
+                    <a16:creationId xmlns:a16="http://schemas.microsoft.com/office/drawing/2014/main" id="{25FEBE3F-9D3B-6E76-7106-25E39FEDD6FD}"/>
                   </a:ext>
                 </a:extLst>
               </p:cNvPr>
@@ -22967,7 +27540,7 @@
           <p:cNvPr id="66" name="Rectangle : coins arrondis 65">
             <a:extLst>
               <a:ext uri="{FF2B5EF4-FFF2-40B4-BE49-F238E27FC236}">
-                <a16:creationId xmlns:a16="http://schemas.microsoft.com/office/drawing/2014/main" id="{DEFEC9DC-D44C-BD4C-C7C7-8E5A976EE82E}"/>
+                <a16:creationId xmlns:a16="http://schemas.microsoft.com/office/drawing/2014/main" id="{304E8581-3B6A-FE2A-2FA1-5E438DFEBEDF}"/>
               </a:ext>
             </a:extLst>
           </p:cNvPr>
@@ -23029,7 +27602,7 @@
           <p:cNvPr id="67" name="Connecteur droit avec flèche 66">
             <a:extLst>
               <a:ext uri="{FF2B5EF4-FFF2-40B4-BE49-F238E27FC236}">
-                <a16:creationId xmlns:a16="http://schemas.microsoft.com/office/drawing/2014/main" id="{FA030DA2-3C3A-C8FA-45E8-D976D05C940D}"/>
+                <a16:creationId xmlns:a16="http://schemas.microsoft.com/office/drawing/2014/main" id="{EA271E54-320D-77B7-1971-5FB1BCD9AEDF}"/>
               </a:ext>
             </a:extLst>
           </p:cNvPr>
@@ -23073,7 +27646,7 @@
           <p:cNvPr id="71" name="Image 70">
             <a:extLst>
               <a:ext uri="{FF2B5EF4-FFF2-40B4-BE49-F238E27FC236}">
-                <a16:creationId xmlns:a16="http://schemas.microsoft.com/office/drawing/2014/main" id="{7CFF18D7-B440-5F98-0242-64155E193C50}"/>
+                <a16:creationId xmlns:a16="http://schemas.microsoft.com/office/drawing/2014/main" id="{B450FF61-74F9-CAAA-37BB-4353FFDE54B6}"/>
               </a:ext>
             </a:extLst>
           </p:cNvPr>
@@ -23103,7 +27676,7 @@
           <p:cNvPr id="86" name="Groupe 85">
             <a:extLst>
               <a:ext uri="{FF2B5EF4-FFF2-40B4-BE49-F238E27FC236}">
-                <a16:creationId xmlns:a16="http://schemas.microsoft.com/office/drawing/2014/main" id="{F7FD68FD-39E8-E3FC-751F-6F8E7EFC5E05}"/>
+                <a16:creationId xmlns:a16="http://schemas.microsoft.com/office/drawing/2014/main" id="{54B433E9-8E17-D998-1186-1C38FF325B5A}"/>
               </a:ext>
             </a:extLst>
           </p:cNvPr>
@@ -23123,7 +27696,7 @@
             <p:cNvPr id="87" name="Ellipse 86">
               <a:extLst>
                 <a:ext uri="{FF2B5EF4-FFF2-40B4-BE49-F238E27FC236}">
-                  <a16:creationId xmlns:a16="http://schemas.microsoft.com/office/drawing/2014/main" id="{1E8A1773-049E-3FE0-3A55-46B324B5F72D}"/>
+                  <a16:creationId xmlns:a16="http://schemas.microsoft.com/office/drawing/2014/main" id="{2973FA07-6C82-DEBE-ED26-536ECA348107}"/>
                 </a:ext>
               </a:extLst>
             </p:cNvPr>
@@ -23175,7 +27748,7 @@
             <p:cNvPr id="88" name="Image 87">
               <a:extLst>
                 <a:ext uri="{FF2B5EF4-FFF2-40B4-BE49-F238E27FC236}">
-                  <a16:creationId xmlns:a16="http://schemas.microsoft.com/office/drawing/2014/main" id="{CB10C83E-CD60-27F3-C1B3-1546FCE2839E}"/>
+                  <a16:creationId xmlns:a16="http://schemas.microsoft.com/office/drawing/2014/main" id="{4A669D92-3EE5-8760-04D5-C6139525A6E0}"/>
                 </a:ext>
               </a:extLst>
             </p:cNvPr>
@@ -23208,7 +27781,7 @@
               <p:cNvPr id="107" name="ZoneTexte 106">
                 <a:extLst>
                   <a:ext uri="{FF2B5EF4-FFF2-40B4-BE49-F238E27FC236}">
-                    <a16:creationId xmlns:a16="http://schemas.microsoft.com/office/drawing/2014/main" id="{D4448485-1542-9D3B-17C1-604149E67AE1}"/>
+                    <a16:creationId xmlns:a16="http://schemas.microsoft.com/office/drawing/2014/main" id="{89A61E98-2375-5325-156D-6E4C309189B5}"/>
                   </a:ext>
                 </a:extLst>
               </p:cNvPr>
@@ -23393,7 +27966,7 @@
     </p:spTree>
     <p:extLst>
       <p:ext uri="{BB962C8B-B14F-4D97-AF65-F5344CB8AC3E}">
-        <p14:creationId xmlns:p14="http://schemas.microsoft.com/office/powerpoint/2010/main" val="284060875"/>
+        <p14:creationId xmlns:p14="http://schemas.microsoft.com/office/powerpoint/2010/main" val="2842116551"/>
       </p:ext>
     </p:extLst>
   </p:cSld>
@@ -23403,7 +27976,7 @@
 </p:sld>
 </file>
 
-<file path=ppt/slides/slide5.xml><?xml version="1.0" encoding="utf-8"?>
+<file path=ppt/slides/slide7.xml><?xml version="1.0" encoding="utf-8"?>
 <p:sld xmlns:a="http://schemas.openxmlformats.org/drawingml/2006/main" xmlns:r="http://schemas.openxmlformats.org/officeDocument/2006/relationships" xmlns:p="http://schemas.openxmlformats.org/presentationml/2006/main">
   <p:cSld>
     <p:spTree>
@@ -23497,7 +28070,7 @@
 </p:sld>
 </file>
 
-<file path=ppt/slides/slide6.xml><?xml version="1.0" encoding="utf-8"?>
+<file path=ppt/slides/slide8.xml><?xml version="1.0" encoding="utf-8"?>
 <p:sld xmlns:a="http://schemas.openxmlformats.org/drawingml/2006/main" xmlns:r="http://schemas.openxmlformats.org/officeDocument/2006/relationships" xmlns:p="http://schemas.openxmlformats.org/presentationml/2006/main">
   <p:cSld>
     <p:spTree>
@@ -23590,7 +28163,7 @@
 </p:sld>
 </file>
 
-<file path=ppt/slides/slide7.xml><?xml version="1.0" encoding="utf-8"?>
+<file path=ppt/slides/slide9.xml><?xml version="1.0" encoding="utf-8"?>
 <p:sld xmlns:a="http://schemas.openxmlformats.org/drawingml/2006/main" xmlns:r="http://schemas.openxmlformats.org/officeDocument/2006/relationships" xmlns:p="http://schemas.openxmlformats.org/presentationml/2006/main">
   <p:cSld>
     <p:spTree>
@@ -23816,737 +28389,6 @@
     <p:extLst>
       <p:ext uri="{BB962C8B-B14F-4D97-AF65-F5344CB8AC3E}">
         <p14:creationId xmlns:p14="http://schemas.microsoft.com/office/powerpoint/2010/main" val="1484772777"/>
-      </p:ext>
-    </p:extLst>
-  </p:cSld>
-  <p:clrMapOvr>
-    <a:masterClrMapping/>
-  </p:clrMapOvr>
-</p:sld>
-</file>
-
-<file path=ppt/slides/slide8.xml><?xml version="1.0" encoding="utf-8"?>
-<p:sld xmlns:a="http://schemas.openxmlformats.org/drawingml/2006/main" xmlns:r="http://schemas.openxmlformats.org/officeDocument/2006/relationships" xmlns:p="http://schemas.openxmlformats.org/presentationml/2006/main">
-  <p:cSld>
-    <p:spTree>
-      <p:nvGrpSpPr>
-        <p:cNvPr id="1" name="">
-          <a:extLst>
-            <a:ext uri="{FF2B5EF4-FFF2-40B4-BE49-F238E27FC236}">
-              <a16:creationId xmlns:a16="http://schemas.microsoft.com/office/drawing/2014/main" id="{7495F8D0-37ED-5538-AD49-135051531F6B}"/>
-            </a:ext>
-          </a:extLst>
-        </p:cNvPr>
-        <p:cNvGrpSpPr/>
-        <p:nvPr/>
-      </p:nvGrpSpPr>
-      <p:grpSpPr>
-        <a:xfrm>
-          <a:off x="0" y="0"/>
-          <a:ext cx="0" cy="0"/>
-          <a:chOff x="0" y="0"/>
-          <a:chExt cx="0" cy="0"/>
-        </a:xfrm>
-      </p:grpSpPr>
-      <p:sp>
-        <p:nvSpPr>
-          <p:cNvPr id="2" name="Titre 1">
-            <a:extLst>
-              <a:ext uri="{FF2B5EF4-FFF2-40B4-BE49-F238E27FC236}">
-                <a16:creationId xmlns:a16="http://schemas.microsoft.com/office/drawing/2014/main" id="{0526232B-877C-6F62-135A-9F5B3A4D1056}"/>
-              </a:ext>
-            </a:extLst>
-          </p:cNvPr>
-          <p:cNvSpPr>
-            <a:spLocks noGrp="1"/>
-          </p:cNvSpPr>
-          <p:nvPr>
-            <p:ph type="title"/>
-          </p:nvPr>
-        </p:nvSpPr>
-        <p:spPr/>
-        <p:txBody>
-          <a:bodyPr/>
-          <a:lstStyle/>
-          <a:p>
-            <a:r>
-              <a:rPr lang="fr-FR" dirty="0"/>
-              <a:t>Loi entrée sortie en effort</a:t>
-            </a:r>
-          </a:p>
-        </p:txBody>
-      </p:sp>
-      <mc:AlternateContent xmlns:mc="http://schemas.openxmlformats.org/markup-compatibility/2006" xmlns:a14="http://schemas.microsoft.com/office/drawing/2010/main">
-        <mc:Choice Requires="a14">
-          <p:sp>
-            <p:nvSpPr>
-              <p:cNvPr id="3" name="Espace réservé du contenu 2">
-                <a:extLst>
-                  <a:ext uri="{FF2B5EF4-FFF2-40B4-BE49-F238E27FC236}">
-                    <a16:creationId xmlns:a16="http://schemas.microsoft.com/office/drawing/2014/main" id="{1D19B2D4-77DE-6731-B46A-F7DF203E51CF}"/>
-                  </a:ext>
-                </a:extLst>
-              </p:cNvPr>
-              <p:cNvSpPr>
-                <a:spLocks noGrp="1"/>
-              </p:cNvSpPr>
-              <p:nvPr>
-                <p:ph idx="1"/>
-              </p:nvPr>
-            </p:nvSpPr>
-            <p:spPr/>
-            <p:txBody>
-              <a:bodyPr/>
-              <a:lstStyle/>
-              <a:p>
-                <a:r>
-                  <a:rPr lang="fr-FR" dirty="0"/>
-                  <a:t> Rapport de réduction du réducteur : 15,88</a:t>
-                </a:r>
-              </a:p>
-              <a:p>
-                <a:r>
-                  <a:rPr lang="fr-FR" dirty="0"/>
-                  <a:t> Transmetteur : 108,2 mm/tr soit 17,22 mm/rad</a:t>
-                </a:r>
-              </a:p>
-              <a:p>
-                <a:r>
-                  <a:rPr lang="fr-FR" dirty="0"/>
-                  <a:t>On a donc </a:t>
-                </a:r>
-                <a14:m>
-                  <m:oMath xmlns:m="http://schemas.openxmlformats.org/officeDocument/2006/math">
-                    <m:r>
-                      <a:rPr lang="fr-FR" b="0" i="1" smtClean="0">
-                        <a:latin typeface="Cambria Math" panose="02040503050406030204" pitchFamily="18" charset="0"/>
-                      </a:rPr>
-                      <m:t>𝑋</m:t>
-                    </m:r>
-                    <m:r>
-                      <a:rPr lang="fr-FR" b="0" i="1" smtClean="0">
-                        <a:latin typeface="Cambria Math" panose="02040503050406030204" pitchFamily="18" charset="0"/>
-                      </a:rPr>
-                      <m:t>=</m:t>
-                    </m:r>
-                    <m:sSub>
-                      <m:sSubPr>
-                        <m:ctrlPr>
-                          <a:rPr lang="fr-FR" b="0" i="1" smtClean="0">
-                            <a:latin typeface="Cambria Math" panose="02040503050406030204" pitchFamily="18" charset="0"/>
-                          </a:rPr>
-                        </m:ctrlPr>
-                      </m:sSubPr>
-                      <m:e>
-                        <m:r>
-                          <a:rPr lang="fr-FR" b="0" i="1" smtClean="0">
-                            <a:latin typeface="Cambria Math" panose="02040503050406030204" pitchFamily="18" charset="0"/>
-                          </a:rPr>
-                          <m:t>𝜃</m:t>
-                        </m:r>
-                      </m:e>
-                      <m:sub>
-                        <m:r>
-                          <a:rPr lang="fr-FR" b="0" i="1" smtClean="0">
-                            <a:latin typeface="Cambria Math" panose="02040503050406030204" pitchFamily="18" charset="0"/>
-                          </a:rPr>
-                          <m:t>𝑚</m:t>
-                        </m:r>
-                      </m:sub>
-                    </m:sSub>
-                    <m:r>
-                      <a:rPr lang="fr-FR" b="0" i="1" smtClean="0">
-                        <a:latin typeface="Cambria Math" panose="02040503050406030204" pitchFamily="18" charset="0"/>
-                      </a:rPr>
-                      <m:t>×</m:t>
-                    </m:r>
-                    <m:f>
-                      <m:fPr>
-                        <m:ctrlPr>
-                          <a:rPr lang="fr-FR" b="0" i="1" smtClean="0">
-                            <a:latin typeface="Cambria Math" panose="02040503050406030204" pitchFamily="18" charset="0"/>
-                          </a:rPr>
-                        </m:ctrlPr>
-                      </m:fPr>
-                      <m:num>
-                        <m:r>
-                          <a:rPr lang="fr-FR" b="0" i="1" smtClean="0">
-                            <a:latin typeface="Cambria Math" panose="02040503050406030204" pitchFamily="18" charset="0"/>
-                          </a:rPr>
-                          <m:t>1</m:t>
-                        </m:r>
-                      </m:num>
-                      <m:den>
-                        <m:r>
-                          <a:rPr lang="fr-FR" b="0" i="1" smtClean="0">
-                            <a:latin typeface="Cambria Math" panose="02040503050406030204" pitchFamily="18" charset="0"/>
-                          </a:rPr>
-                          <m:t>15</m:t>
-                        </m:r>
-                        <m:r>
-                          <a:rPr lang="fr-FR" b="0" i="1" smtClean="0">
-                            <a:latin typeface="Cambria Math" panose="02040503050406030204" pitchFamily="18" charset="0"/>
-                          </a:rPr>
-                          <m:t>,</m:t>
-                        </m:r>
-                        <m:r>
-                          <a:rPr lang="fr-FR" b="0" i="1" smtClean="0">
-                            <a:latin typeface="Cambria Math" panose="02040503050406030204" pitchFamily="18" charset="0"/>
-                          </a:rPr>
-                          <m:t>88</m:t>
-                        </m:r>
-                      </m:den>
-                    </m:f>
-                    <m:r>
-                      <a:rPr lang="fr-FR" b="0" i="1" smtClean="0">
-                        <a:latin typeface="Cambria Math" panose="02040503050406030204" pitchFamily="18" charset="0"/>
-                      </a:rPr>
-                      <m:t>×</m:t>
-                    </m:r>
-                    <m:r>
-                      <a:rPr lang="fr-FR" b="0" i="1" smtClean="0">
-                        <a:latin typeface="Cambria Math" panose="02040503050406030204" pitchFamily="18" charset="0"/>
-                      </a:rPr>
-                      <m:t>17</m:t>
-                    </m:r>
-                    <m:r>
-                      <a:rPr lang="fr-FR" b="0" i="1" smtClean="0">
-                        <a:latin typeface="Cambria Math" panose="02040503050406030204" pitchFamily="18" charset="0"/>
-                      </a:rPr>
-                      <m:t>,</m:t>
-                    </m:r>
-                    <m:r>
-                      <a:rPr lang="fr-FR" b="0" i="1" smtClean="0">
-                        <a:latin typeface="Cambria Math" panose="02040503050406030204" pitchFamily="18" charset="0"/>
-                      </a:rPr>
-                      <m:t>2</m:t>
-                    </m:r>
-                    <m:r>
-                      <a:rPr lang="fr-FR" b="0" i="1" smtClean="0">
-                        <a:latin typeface="Cambria Math" panose="02040503050406030204" pitchFamily="18" charset="0"/>
-                      </a:rPr>
-                      <m:t> </m:t>
-                    </m:r>
-                  </m:oMath>
-                </a14:m>
-                <a:endParaRPr lang="fr-FR" dirty="0"/>
-              </a:p>
-              <a:p>
-                <a:endParaRPr lang="fr-FR" dirty="0"/>
-              </a:p>
-              <a:p>
-                <a:r>
-                  <a:rPr lang="fr-FR" dirty="0"/>
-                  <a:t>Sous l’hypothèse que le rendement est unitaire : </a:t>
-                </a:r>
-              </a:p>
-              <a:p>
-                <a14:m>
-                  <m:oMath xmlns:m="http://schemas.openxmlformats.org/officeDocument/2006/math">
-                    <m:sSub>
-                      <m:sSubPr>
-                        <m:ctrlPr>
-                          <a:rPr lang="fr-FR" b="0" i="1" smtClean="0">
-                            <a:latin typeface="Cambria Math" panose="02040503050406030204" pitchFamily="18" charset="0"/>
-                          </a:rPr>
-                        </m:ctrlPr>
-                      </m:sSubPr>
-                      <m:e>
-                        <m:r>
-                          <a:rPr lang="fr-FR" b="0" i="1" smtClean="0">
-                            <a:latin typeface="Cambria Math" panose="02040503050406030204" pitchFamily="18" charset="0"/>
-                          </a:rPr>
-                          <m:t>𝐶</m:t>
-                        </m:r>
-                      </m:e>
-                      <m:sub>
-                        <m:r>
-                          <a:rPr lang="fr-FR" b="0" i="1" smtClean="0">
-                            <a:latin typeface="Cambria Math" panose="02040503050406030204" pitchFamily="18" charset="0"/>
-                          </a:rPr>
-                          <m:t>𝑚</m:t>
-                        </m:r>
-                      </m:sub>
-                    </m:sSub>
-                    <m:sSub>
-                      <m:sSubPr>
-                        <m:ctrlPr>
-                          <a:rPr lang="fr-FR" b="0" i="1" smtClean="0">
-                            <a:latin typeface="Cambria Math" panose="02040503050406030204" pitchFamily="18" charset="0"/>
-                          </a:rPr>
-                        </m:ctrlPr>
-                      </m:sSubPr>
-                      <m:e>
-                        <m:r>
-                          <a:rPr lang="fr-FR" b="0" i="1" smtClean="0">
-                            <a:latin typeface="Cambria Math" panose="02040503050406030204" pitchFamily="18" charset="0"/>
-                          </a:rPr>
-                          <m:t>𝜔</m:t>
-                        </m:r>
-                      </m:e>
-                      <m:sub>
-                        <m:r>
-                          <a:rPr lang="fr-FR" b="0" i="1" smtClean="0">
-                            <a:latin typeface="Cambria Math" panose="02040503050406030204" pitchFamily="18" charset="0"/>
-                          </a:rPr>
-                          <m:t>𝑚</m:t>
-                        </m:r>
-                      </m:sub>
-                    </m:sSub>
-                    <m:r>
-                      <a:rPr lang="fr-FR" b="0" i="1" smtClean="0">
-                        <a:latin typeface="Cambria Math" panose="02040503050406030204" pitchFamily="18" charset="0"/>
-                      </a:rPr>
-                      <m:t>=</m:t>
-                    </m:r>
-                    <m:sSub>
-                      <m:sSubPr>
-                        <m:ctrlPr>
-                          <a:rPr lang="fr-FR" b="0" i="1" smtClean="0">
-                            <a:latin typeface="Cambria Math" panose="02040503050406030204" pitchFamily="18" charset="0"/>
-                          </a:rPr>
-                        </m:ctrlPr>
-                      </m:sSubPr>
-                      <m:e>
-                        <m:r>
-                          <a:rPr lang="fr-FR" b="0" i="1" smtClean="0">
-                            <a:latin typeface="Cambria Math" panose="02040503050406030204" pitchFamily="18" charset="0"/>
-                          </a:rPr>
-                          <m:t>𝐹</m:t>
-                        </m:r>
-                      </m:e>
-                      <m:sub>
-                        <m:r>
-                          <a:rPr lang="fr-FR" b="0" i="1" smtClean="0">
-                            <a:latin typeface="Cambria Math" panose="02040503050406030204" pitchFamily="18" charset="0"/>
-                          </a:rPr>
-                          <m:t>𝑚</m:t>
-                        </m:r>
-                      </m:sub>
-                    </m:sSub>
-                    <m:acc>
-                      <m:accPr>
-                        <m:chr m:val="̇"/>
-                        <m:ctrlPr>
-                          <a:rPr lang="fr-FR" b="0" i="1" smtClean="0">
-                            <a:latin typeface="Cambria Math" panose="02040503050406030204" pitchFamily="18" charset="0"/>
-                          </a:rPr>
-                        </m:ctrlPr>
-                      </m:accPr>
-                      <m:e>
-                        <m:r>
-                          <a:rPr lang="fr-FR" i="1">
-                            <a:latin typeface="Cambria Math" panose="02040503050406030204" pitchFamily="18" charset="0"/>
-                          </a:rPr>
-                          <m:t>𝑋</m:t>
-                        </m:r>
-                      </m:e>
-                    </m:acc>
-                    <m:r>
-                      <a:rPr lang="fr-FR" b="0" i="1" smtClean="0">
-                        <a:latin typeface="Cambria Math" panose="02040503050406030204" pitchFamily="18" charset="0"/>
-                      </a:rPr>
-                      <m:t>⇒</m:t>
-                    </m:r>
-                    <m:sSub>
-                      <m:sSubPr>
-                        <m:ctrlPr>
-                          <a:rPr lang="fr-FR" i="1">
-                            <a:latin typeface="Cambria Math" panose="02040503050406030204" pitchFamily="18" charset="0"/>
-                          </a:rPr>
-                        </m:ctrlPr>
-                      </m:sSubPr>
-                      <m:e>
-                        <m:r>
-                          <a:rPr lang="fr-FR" i="1">
-                            <a:latin typeface="Cambria Math" panose="02040503050406030204" pitchFamily="18" charset="0"/>
-                          </a:rPr>
-                          <m:t>𝐹</m:t>
-                        </m:r>
-                      </m:e>
-                      <m:sub>
-                        <m:r>
-                          <a:rPr lang="fr-FR" i="1">
-                            <a:latin typeface="Cambria Math" panose="02040503050406030204" pitchFamily="18" charset="0"/>
-                          </a:rPr>
-                          <m:t>𝑚</m:t>
-                        </m:r>
-                      </m:sub>
-                    </m:sSub>
-                    <m:r>
-                      <a:rPr lang="fr-FR" b="0" i="1" smtClean="0">
-                        <a:latin typeface="Cambria Math" panose="02040503050406030204" pitchFamily="18" charset="0"/>
-                      </a:rPr>
-                      <m:t>=</m:t>
-                    </m:r>
-                    <m:f>
-                      <m:fPr>
-                        <m:ctrlPr>
-                          <a:rPr lang="fr-FR" b="0" i="1" smtClean="0">
-                            <a:latin typeface="Cambria Math" panose="02040503050406030204" pitchFamily="18" charset="0"/>
-                          </a:rPr>
-                        </m:ctrlPr>
-                      </m:fPr>
-                      <m:num>
-                        <m:sSub>
-                          <m:sSubPr>
-                            <m:ctrlPr>
-                              <a:rPr lang="fr-FR" i="1">
-                                <a:latin typeface="Cambria Math" panose="02040503050406030204" pitchFamily="18" charset="0"/>
-                              </a:rPr>
-                            </m:ctrlPr>
-                          </m:sSubPr>
-                          <m:e>
-                            <m:r>
-                              <a:rPr lang="fr-FR" i="1">
-                                <a:latin typeface="Cambria Math" panose="02040503050406030204" pitchFamily="18" charset="0"/>
-                              </a:rPr>
-                              <m:t>𝐶</m:t>
-                            </m:r>
-                          </m:e>
-                          <m:sub>
-                            <m:r>
-                              <a:rPr lang="fr-FR" i="1">
-                                <a:latin typeface="Cambria Math" panose="02040503050406030204" pitchFamily="18" charset="0"/>
-                              </a:rPr>
-                              <m:t>𝑚</m:t>
-                            </m:r>
-                          </m:sub>
-                        </m:sSub>
-                        <m:sSub>
-                          <m:sSubPr>
-                            <m:ctrlPr>
-                              <a:rPr lang="fr-FR" i="1">
-                                <a:latin typeface="Cambria Math" panose="02040503050406030204" pitchFamily="18" charset="0"/>
-                              </a:rPr>
-                            </m:ctrlPr>
-                          </m:sSubPr>
-                          <m:e>
-                            <m:r>
-                              <a:rPr lang="fr-FR" i="1">
-                                <a:latin typeface="Cambria Math" panose="02040503050406030204" pitchFamily="18" charset="0"/>
-                              </a:rPr>
-                              <m:t>𝜔</m:t>
-                            </m:r>
-                          </m:e>
-                          <m:sub>
-                            <m:r>
-                              <a:rPr lang="fr-FR" i="1">
-                                <a:latin typeface="Cambria Math" panose="02040503050406030204" pitchFamily="18" charset="0"/>
-                              </a:rPr>
-                              <m:t>𝑚</m:t>
-                            </m:r>
-                          </m:sub>
-                        </m:sSub>
-                      </m:num>
-                      <m:den>
-                        <m:acc>
-                          <m:accPr>
-                            <m:chr m:val="̇"/>
-                            <m:ctrlPr>
-                              <a:rPr lang="fr-FR" i="1">
-                                <a:latin typeface="Cambria Math" panose="02040503050406030204" pitchFamily="18" charset="0"/>
-                              </a:rPr>
-                            </m:ctrlPr>
-                          </m:accPr>
-                          <m:e>
-                            <m:r>
-                              <a:rPr lang="fr-FR" i="1">
-                                <a:latin typeface="Cambria Math" panose="02040503050406030204" pitchFamily="18" charset="0"/>
-                              </a:rPr>
-                              <m:t>𝑋</m:t>
-                            </m:r>
-                          </m:e>
-                        </m:acc>
-                      </m:den>
-                    </m:f>
-                    <m:r>
-                      <a:rPr lang="fr-FR" b="0" i="0" smtClean="0">
-                        <a:latin typeface="Cambria Math" panose="02040503050406030204" pitchFamily="18" charset="0"/>
-                      </a:rPr>
-                      <m:t>=</m:t>
-                    </m:r>
-                    <m:sSub>
-                      <m:sSubPr>
-                        <m:ctrlPr>
-                          <a:rPr lang="fr-FR" b="0" i="1" smtClean="0">
-                            <a:latin typeface="Cambria Math" panose="02040503050406030204" pitchFamily="18" charset="0"/>
-                          </a:rPr>
-                        </m:ctrlPr>
-                      </m:sSubPr>
-                      <m:e>
-                        <m:r>
-                          <m:rPr>
-                            <m:sty m:val="p"/>
-                          </m:rPr>
-                          <a:rPr lang="fr-FR" b="0" i="0" smtClean="0">
-                            <a:latin typeface="Cambria Math" panose="02040503050406030204" pitchFamily="18" charset="0"/>
-                          </a:rPr>
-                          <m:t>C</m:t>
-                        </m:r>
-                      </m:e>
-                      <m:sub>
-                        <m:r>
-                          <m:rPr>
-                            <m:sty m:val="p"/>
-                          </m:rPr>
-                          <a:rPr lang="fr-FR" b="0" i="0" smtClean="0">
-                            <a:latin typeface="Cambria Math" panose="02040503050406030204" pitchFamily="18" charset="0"/>
-                          </a:rPr>
-                          <m:t>m</m:t>
-                        </m:r>
-                      </m:sub>
-                    </m:sSub>
-                    <m:r>
-                      <a:rPr lang="fr-FR" b="0" i="1" smtClean="0">
-                        <a:latin typeface="Cambria Math" panose="02040503050406030204" pitchFamily="18" charset="0"/>
-                      </a:rPr>
-                      <m:t>×</m:t>
-                    </m:r>
-                    <m:f>
-                      <m:fPr>
-                        <m:ctrlPr>
-                          <a:rPr lang="fr-FR" b="0" i="1" smtClean="0">
-                            <a:latin typeface="Cambria Math" panose="02040503050406030204" pitchFamily="18" charset="0"/>
-                          </a:rPr>
-                        </m:ctrlPr>
-                      </m:fPr>
-                      <m:num>
-                        <m:r>
-                          <a:rPr lang="fr-FR" b="0" i="1" smtClean="0">
-                            <a:latin typeface="Cambria Math" panose="02040503050406030204" pitchFamily="18" charset="0"/>
-                          </a:rPr>
-                          <m:t>15</m:t>
-                        </m:r>
-                        <m:r>
-                          <a:rPr lang="fr-FR" b="0" i="1" smtClean="0">
-                            <a:latin typeface="Cambria Math" panose="02040503050406030204" pitchFamily="18" charset="0"/>
-                          </a:rPr>
-                          <m:t>,</m:t>
-                        </m:r>
-                        <m:r>
-                          <a:rPr lang="fr-FR" b="0" i="1" smtClean="0">
-                            <a:latin typeface="Cambria Math" panose="02040503050406030204" pitchFamily="18" charset="0"/>
-                          </a:rPr>
-                          <m:t>88</m:t>
-                        </m:r>
-                      </m:num>
-                      <m:den>
-                        <m:r>
-                          <a:rPr lang="fr-FR" b="0" i="1" smtClean="0">
-                            <a:latin typeface="Cambria Math" panose="02040503050406030204" pitchFamily="18" charset="0"/>
-                          </a:rPr>
-                          <m:t>17</m:t>
-                        </m:r>
-                        <m:r>
-                          <a:rPr lang="fr-FR" b="0" i="1" smtClean="0">
-                            <a:latin typeface="Cambria Math" panose="02040503050406030204" pitchFamily="18" charset="0"/>
-                          </a:rPr>
-                          <m:t>,</m:t>
-                        </m:r>
-                        <m:r>
-                          <a:rPr lang="fr-FR" b="0" i="1" smtClean="0">
-                            <a:latin typeface="Cambria Math" panose="02040503050406030204" pitchFamily="18" charset="0"/>
-                          </a:rPr>
-                          <m:t>2</m:t>
-                        </m:r>
-                        <m:r>
-                          <a:rPr lang="fr-FR" b="0" i="1" smtClean="0">
-                            <a:latin typeface="Cambria Math" panose="02040503050406030204" pitchFamily="18" charset="0"/>
-                          </a:rPr>
-                          <m:t>×</m:t>
-                        </m:r>
-                        <m:sSup>
-                          <m:sSupPr>
-                            <m:ctrlPr>
-                              <a:rPr lang="fr-FR" b="0" i="1" smtClean="0">
-                                <a:latin typeface="Cambria Math" panose="02040503050406030204" pitchFamily="18" charset="0"/>
-                              </a:rPr>
-                            </m:ctrlPr>
-                          </m:sSupPr>
-                          <m:e>
-                            <m:r>
-                              <a:rPr lang="fr-FR" b="0" i="1" smtClean="0">
-                                <a:latin typeface="Cambria Math" panose="02040503050406030204" pitchFamily="18" charset="0"/>
-                              </a:rPr>
-                              <m:t>10</m:t>
-                            </m:r>
-                          </m:e>
-                          <m:sup>
-                            <m:r>
-                              <a:rPr lang="fr-FR" b="0" i="1" smtClean="0">
-                                <a:latin typeface="Cambria Math" panose="02040503050406030204" pitchFamily="18" charset="0"/>
-                              </a:rPr>
-                              <m:t>−</m:t>
-                            </m:r>
-                            <m:r>
-                              <a:rPr lang="fr-FR" b="0" i="1" smtClean="0">
-                                <a:latin typeface="Cambria Math" panose="02040503050406030204" pitchFamily="18" charset="0"/>
-                              </a:rPr>
-                              <m:t>3</m:t>
-                            </m:r>
-                          </m:sup>
-                        </m:sSup>
-                      </m:den>
-                    </m:f>
-                  </m:oMath>
-                </a14:m>
-                <a:endParaRPr lang="fr-FR" dirty="0"/>
-              </a:p>
-              <a:p>
-                <a:pPr marL="1588" indent="0">
-                  <a:buNone/>
-                </a:pPr>
-                <a:endParaRPr lang="fr-FR" dirty="0"/>
-              </a:p>
-              <a:p>
-                <a:endParaRPr lang="fr-FR" dirty="0"/>
-              </a:p>
-            </p:txBody>
-          </p:sp>
-        </mc:Choice>
-        <mc:Fallback xmlns="">
-          <p:sp>
-            <p:nvSpPr>
-              <p:cNvPr id="3" name="Espace réservé du contenu 2">
-                <a:extLst>
-                  <a:ext uri="{FF2B5EF4-FFF2-40B4-BE49-F238E27FC236}">
-                    <a16:creationId xmlns:a16="http://schemas.microsoft.com/office/drawing/2014/main" id="{1D19B2D4-77DE-6731-B46A-F7DF203E51CF}"/>
-                  </a:ext>
-                </a:extLst>
-              </p:cNvPr>
-              <p:cNvSpPr>
-                <a:spLocks noGrp="1" noRot="1" noChangeAspect="1" noMove="1" noResize="1" noEditPoints="1" noAdjustHandles="1" noChangeArrowheads="1" noChangeShapeType="1" noTextEdit="1"/>
-              </p:cNvSpPr>
-              <p:nvPr>
-                <p:ph idx="1"/>
-              </p:nvPr>
-            </p:nvSpPr>
-            <p:spPr>
-              <a:blipFill>
-                <a:blip r:embed="rId2"/>
-                <a:stretch>
-                  <a:fillRect l="-1325" t="-1856"/>
-                </a:stretch>
-              </a:blipFill>
-            </p:spPr>
-            <p:txBody>
-              <a:bodyPr/>
-              <a:lstStyle/>
-              <a:p>
-                <a:r>
-                  <a:rPr lang="fr-FR">
-                    <a:noFill/>
-                  </a:rPr>
-                  <a:t> </a:t>
-                </a:r>
-              </a:p>
-            </p:txBody>
-          </p:sp>
-        </mc:Fallback>
-      </mc:AlternateContent>
-    </p:spTree>
-    <p:extLst>
-      <p:ext uri="{BB962C8B-B14F-4D97-AF65-F5344CB8AC3E}">
-        <p14:creationId xmlns:p14="http://schemas.microsoft.com/office/powerpoint/2010/main" val="311243995"/>
-      </p:ext>
-    </p:extLst>
-  </p:cSld>
-  <p:clrMapOvr>
-    <a:masterClrMapping/>
-  </p:clrMapOvr>
-</p:sld>
-</file>
-
-<file path=ppt/slides/slide9.xml><?xml version="1.0" encoding="utf-8"?>
-<p:sld xmlns:a="http://schemas.openxmlformats.org/drawingml/2006/main" xmlns:r="http://schemas.openxmlformats.org/officeDocument/2006/relationships" xmlns:p="http://schemas.openxmlformats.org/presentationml/2006/main">
-  <p:cSld>
-    <p:spTree>
-      <p:nvGrpSpPr>
-        <p:cNvPr id="1" name="">
-          <a:extLst>
-            <a:ext uri="{FF2B5EF4-FFF2-40B4-BE49-F238E27FC236}">
-              <a16:creationId xmlns:a16="http://schemas.microsoft.com/office/drawing/2014/main" id="{C40DD68A-E16C-6412-0693-26A3D0F08689}"/>
-            </a:ext>
-          </a:extLst>
-        </p:cNvPr>
-        <p:cNvGrpSpPr/>
-        <p:nvPr/>
-      </p:nvGrpSpPr>
-      <p:grpSpPr>
-        <a:xfrm>
-          <a:off x="0" y="0"/>
-          <a:ext cx="0" cy="0"/>
-          <a:chOff x="0" y="0"/>
-          <a:chExt cx="0" cy="0"/>
-        </a:xfrm>
-      </p:grpSpPr>
-      <p:sp>
-        <p:nvSpPr>
-          <p:cNvPr id="4" name="Titre 3">
-            <a:extLst>
-              <a:ext uri="{FF2B5EF4-FFF2-40B4-BE49-F238E27FC236}">
-                <a16:creationId xmlns:a16="http://schemas.microsoft.com/office/drawing/2014/main" id="{98820592-B42F-86C6-2B84-6D0830A7F392}"/>
-              </a:ext>
-            </a:extLst>
-          </p:cNvPr>
-          <p:cNvSpPr>
-            <a:spLocks noGrp="1"/>
-          </p:cNvSpPr>
-          <p:nvPr>
-            <p:ph type="title"/>
-          </p:nvPr>
-        </p:nvSpPr>
-        <p:spPr/>
-        <p:txBody>
-          <a:bodyPr>
-            <a:normAutofit fontScale="90000"/>
-          </a:bodyPr>
-          <a:lstStyle/>
-          <a:p>
-            <a:r>
-              <a:rPr lang="fr-FR" dirty="0"/>
-              <a:t>07</a:t>
-            </a:r>
-            <a:br>
-              <a:rPr lang="fr-FR" dirty="0"/>
-            </a:br>
-            <a:r>
-              <a:rPr lang="fr-FR" dirty="0"/>
-              <a:t>Modélisation composants ou phénomènes</a:t>
-            </a:r>
-          </a:p>
-        </p:txBody>
-      </p:sp>
-      <p:sp>
-        <p:nvSpPr>
-          <p:cNvPr id="5" name="Espace réservé du texte 4">
-            <a:extLst>
-              <a:ext uri="{FF2B5EF4-FFF2-40B4-BE49-F238E27FC236}">
-                <a16:creationId xmlns:a16="http://schemas.microsoft.com/office/drawing/2014/main" id="{98F96706-D0AC-35B1-9E61-ADB22B4A76AA}"/>
-              </a:ext>
-            </a:extLst>
-          </p:cNvPr>
-          <p:cNvSpPr>
-            <a:spLocks noGrp="1"/>
-          </p:cNvSpPr>
-          <p:nvPr>
-            <p:ph type="body" idx="1"/>
-          </p:nvPr>
-        </p:nvSpPr>
-        <p:spPr/>
-        <p:txBody>
-          <a:bodyPr/>
-          <a:lstStyle/>
-          <a:p>
-            <a:endParaRPr lang="fr-FR"/>
-          </a:p>
-        </p:txBody>
-      </p:sp>
-    </p:spTree>
-    <p:extLst>
-      <p:ext uri="{BB962C8B-B14F-4D97-AF65-F5344CB8AC3E}">
-        <p14:creationId xmlns:p14="http://schemas.microsoft.com/office/powerpoint/2010/main" val="3211213506"/>
       </p:ext>
     </p:extLst>
   </p:cSld>
